--- a/Projeto_Final_Artefatos/InsurMinds_Projeto_Final.pptx
+++ b/Projeto_Final_Artefatos/InsurMinds_Projeto_Final.pptx
@@ -2509,7 +2509,7 @@
                 <a:ea typeface="Calibri" pitchFamily="34" charset="-122"/>
                 <a:cs typeface="Calibri" pitchFamily="34" charset="-120"/>
               </a:rPr>
-              <a:t>Grupo Gp_Protetor: Ricardo Croce (representante), José Carlos dos Passos, Renato Sant Anna, Tiago Del Rio, Juliano Silva Ignacio</a:t>
+              <a:t>Grupo Gp_Protetor: Ricardo Croce (Chefe), José Carlos dos Passos, Renato Sant Anna, Tiago Del Rio, Juliano Silva Ignacio</a:t>
             </a:r>
             <a:endParaRPr lang="en-US" sz="1400" dirty="0"/>
           </a:p>

--- a/Projeto_Final_Artefatos/InsurMinds_Projeto_Final.pptx
+++ b/Projeto_Final_Artefatos/InsurMinds_Projeto_Final.pptx
@@ -4,6 +4,9 @@
   <p:sldMasterIdLst>
     <p:sldMasterId id="2147483648" r:id="rId1"/>
   </p:sldMasterIdLst>
+  <p:notesMasterIdLst>
+    <p:notesMasterId r:id="rId16"/>
+  </p:notesMasterIdLst>
   <p:sldIdLst>
     <p:sldId id="256" r:id="rId2"/>
     <p:sldId id="257" r:id="rId3"/>
@@ -17,11 +20,9 @@
     <p:sldId id="265" r:id="rId11"/>
     <p:sldId id="266" r:id="rId12"/>
     <p:sldId id="267" r:id="rId13"/>
-    <p:sldId id="268" r:id="rId14"/>
+    <p:sldId id="269" r:id="rId14"/>
+    <p:sldId id="268" r:id="rId15"/>
   </p:sldIdLst>
-  <p:notesMasterIdLst>
-    <p:notesMasterId r:id="rId15"/>
-  </p:notesMasterIdLst>
   <p:sldSz cx="12192000" cy="6858000"/>
   <p:notesSz cx="6858000" cy="12192000"/>
   <p:defaultTextStyle>
@@ -116,13 +117,20 @@
       </a:defRPr>
     </a:lvl9pPr>
   </p:defaultTextStyle>
+  <p:extLst>
+    <p:ext uri="{EFAFB233-063F-42B5-8137-9DF3F51BA10A}">
+      <p15:sldGuideLst xmlns:p15="http://schemas.microsoft.com/office/powerpoint/2012/main"/>
+    </p:ext>
+  </p:extLst>
 </p:presentation>
 </file>
 
 <file path=ppt/charts/chart1.xml><?xml version="1.0" encoding="utf-8"?>
-<c:chartSpace xmlns:c="http://schemas.openxmlformats.org/drawingml/2006/chart" xmlns:a="http://schemas.openxmlformats.org/drawingml/2006/main" xmlns:r="http://schemas.openxmlformats.org/officeDocument/2006/relationships">
+<c:chartSpace xmlns:c="http://schemas.openxmlformats.org/drawingml/2006/chart" xmlns:a="http://schemas.openxmlformats.org/drawingml/2006/main" xmlns:r="http://schemas.openxmlformats.org/officeDocument/2006/relationships" xmlns:c16r2="http://schemas.microsoft.com/office/drawing/2015/06/chart">
   <c:date1904 val="0"/>
+  <c:lang val="en-US"/>
   <c:roundedCorners val="1"/>
+  <c:style val="2"/>
   <c:chart>
     <c:title>
       <c:tx>
@@ -139,7 +147,7 @@
               </a:defRPr>
             </a:pPr>
             <a:r>
-              <a:rPr sz="1400" b="0" i="0" u="none" strike="noStrike">
+              <a:rPr lang="en-US" sz="1400" b="0" i="0" u="none" strike="noStrike">
                 <a:solidFill>
                   <a:srgbClr val="14213D"/>
                 </a:solidFill>
@@ -150,7 +158,6 @@
           </a:p>
         </c:rich>
       </c:tx>
-      <c:layout/>
       <c:overlay val="0"/>
     </c:title>
     <c:autoTitleDeleted val="0"/>
@@ -181,62 +188,35 @@
             <a:effectLst/>
           </c:spPr>
           <c:invertIfNegative val="0"/>
-          <c:dLbls>
-            <c:numFmt formatCode="0.00" sourceLinked="0"/>
-            <c:txPr>
-              <a:bodyPr/>
-              <a:lstStyle/>
-              <a:p>
-                <a:pPr>
-                  <a:defRPr b="0" i="0" strike="noStrike" sz="1200" u="none">
-                    <a:solidFill>
-                      <a:srgbClr val="1F2328"/>
-                    </a:solidFill>
-                    <a:latin typeface="Arial"/>
-                  </a:defRPr>
-                </a:pPr>
-              </a:p>
-            </c:txPr>
-            <c:showLegendKey val="0"/>
-            <c:showVal val="1"/>
-            <c:showCatName val="0"/>
-            <c:showSerName val="0"/>
-            <c:showPercent val="0"/>
-            <c:showBubbleSize val="0"/>
-            <c:showLeaderLines val="0"/>
-          </c:dLbls>
           <c:dPt>
             <c:idx val="0"/>
             <c:invertIfNegative val="0"/>
             <c:bubble3D val="0"/>
-            <c:spPr>
-              <a:solidFill>
-                <a:srgbClr val="14213D"/>
-              </a:solidFill>
-              <a:effectLst/>
-            </c:spPr>
+            <c:extLst>
+              <c:ext xmlns:c16="http://schemas.microsoft.com/office/drawing/2014/chart" uri="{C3380CC4-5D6E-409C-BE32-E72D297353CC}">
+                <c16:uniqueId val="{00000001-592F-0447-8699-001AF5E371AC}"/>
+              </c:ext>
+            </c:extLst>
           </c:dPt>
           <c:dPt>
             <c:idx val="1"/>
             <c:invertIfNegative val="0"/>
             <c:bubble3D val="0"/>
-            <c:spPr>
-              <a:solidFill>
-                <a:srgbClr val="14213D"/>
-              </a:solidFill>
-              <a:effectLst/>
-            </c:spPr>
+            <c:extLst>
+              <c:ext xmlns:c16="http://schemas.microsoft.com/office/drawing/2014/chart" uri="{C3380CC4-5D6E-409C-BE32-E72D297353CC}">
+                <c16:uniqueId val="{00000003-592F-0447-8699-001AF5E371AC}"/>
+              </c:ext>
+            </c:extLst>
           </c:dPt>
           <c:dPt>
             <c:idx val="2"/>
             <c:invertIfNegative val="0"/>
             <c:bubble3D val="0"/>
-            <c:spPr>
-              <a:solidFill>
-                <a:srgbClr val="14213D"/>
-              </a:solidFill>
-              <a:effectLst/>
-            </c:spPr>
+            <c:extLst>
+              <c:ext xmlns:c16="http://schemas.microsoft.com/office/drawing/2014/chart" uri="{C3380CC4-5D6E-409C-BE32-E72D297353CC}">
+                <c16:uniqueId val="{00000005-592F-0447-8699-001AF5E371AC}"/>
+              </c:ext>
+            </c:extLst>
           </c:dPt>
           <c:dPt>
             <c:idx val="3"/>
@@ -248,56 +228,94 @@
               </a:solidFill>
               <a:effectLst/>
             </c:spPr>
+            <c:extLst>
+              <c:ext xmlns:c16="http://schemas.microsoft.com/office/drawing/2014/chart" uri="{C3380CC4-5D6E-409C-BE32-E72D297353CC}">
+                <c16:uniqueId val="{00000007-592F-0447-8699-001AF5E371AC}"/>
+              </c:ext>
+            </c:extLst>
           </c:dPt>
           <c:dPt>
             <c:idx val="4"/>
             <c:invertIfNegative val="0"/>
             <c:bubble3D val="0"/>
-            <c:spPr>
-              <a:solidFill>
-                <a:srgbClr val="14213D"/>
-              </a:solidFill>
-              <a:effectLst/>
-            </c:spPr>
+            <c:extLst>
+              <c:ext xmlns:c16="http://schemas.microsoft.com/office/drawing/2014/chart" uri="{C3380CC4-5D6E-409C-BE32-E72D297353CC}">
+                <c16:uniqueId val="{00000009-592F-0447-8699-001AF5E371AC}"/>
+              </c:ext>
+            </c:extLst>
           </c:dPt>
           <c:dPt>
             <c:idx val="5"/>
             <c:invertIfNegative val="0"/>
             <c:bubble3D val="0"/>
+            <c:extLst>
+              <c:ext xmlns:c16="http://schemas.microsoft.com/office/drawing/2014/chart" uri="{C3380CC4-5D6E-409C-BE32-E72D297353CC}">
+                <c16:uniqueId val="{0000000B-592F-0447-8699-001AF5E371AC}"/>
+              </c:ext>
+            </c:extLst>
+          </c:dPt>
+          <c:dLbls>
+            <c:numFmt formatCode="0.00" sourceLinked="0"/>
             <c:spPr>
-              <a:solidFill>
-                <a:srgbClr val="14213D"/>
-              </a:solidFill>
+              <a:noFill/>
+              <a:ln>
+                <a:noFill/>
+              </a:ln>
               <a:effectLst/>
             </c:spPr>
-          </c:dPt>
+            <c:txPr>
+              <a:bodyPr/>
+              <a:lstStyle/>
+              <a:p>
+                <a:pPr>
+                  <a:defRPr sz="1200" b="0" i="0" u="none" strike="noStrike">
+                    <a:solidFill>
+                      <a:srgbClr val="1F2328"/>
+                    </a:solidFill>
+                    <a:latin typeface="Arial"/>
+                  </a:defRPr>
+                </a:pPr>
+                <a:endParaRPr lang="en-BR"/>
+              </a:p>
+            </c:txPr>
+            <c:showLegendKey val="0"/>
+            <c:showVal val="1"/>
+            <c:showCatName val="0"/>
+            <c:showSerName val="0"/>
+            <c:showPercent val="0"/>
+            <c:showBubbleSize val="0"/>
+            <c:showLeaderLines val="0"/>
+            <c:extLst>
+              <c:ext xmlns:c15="http://schemas.microsoft.com/office/drawing/2012/chart" uri="{CE6537A1-D6FC-4f65-9D91-7224C49458BB}">
+                <c15:showLeaderLines val="0"/>
+              </c:ext>
+            </c:extLst>
+          </c:dLbls>
           <c:cat>
-            <c:multiLvlStrRef>
+            <c:strRef>
               <c:f>Sheet1!$A$2:$A$7</c:f>
-              <c:multiLvlStrCache>
+              <c:strCache>
                 <c:ptCount val="6"/>
-                <c:lvl>
-                  <c:pt idx="0">
-                    <c:v>Schema válido</c:v>
-                  </c:pt>
-                  <c:pt idx="1">
-                    <c:v>Campos corretos</c:v>
-                  </c:pt>
-                  <c:pt idx="2">
-                    <c:v>Evidência na página</c:v>
-                  </c:pt>
-                  <c:pt idx="3">
-                    <c:v>Comparação (gab. v1.0)</c:v>
-                  </c:pt>
-                  <c:pt idx="4">
-                    <c:v>Comparação (gab. v1.1)</c:v>
-                  </c:pt>
-                  <c:pt idx="5">
-                    <c:v>Proxy de alucinação</c:v>
-                  </c:pt>
-                </c:lvl>
-              </c:multiLvlStrCache>
-            </c:multiLvlStrRef>
+                <c:pt idx="0">
+                  <c:v>Schema válido</c:v>
+                </c:pt>
+                <c:pt idx="1">
+                  <c:v>Campos corretos</c:v>
+                </c:pt>
+                <c:pt idx="2">
+                  <c:v>Evidência na página</c:v>
+                </c:pt>
+                <c:pt idx="3">
+                  <c:v>Comparação (gab. v1.0)</c:v>
+                </c:pt>
+                <c:pt idx="4">
+                  <c:v>Comparação (gab. v1.1)</c:v>
+                </c:pt>
+                <c:pt idx="5">
+                  <c:v>Proxy de alucinação</c:v>
+                </c:pt>
+              </c:strCache>
+            </c:strRef>
           </c:cat>
           <c:val>
             <c:numRef>
@@ -326,36 +344,23 @@
               </c:numCache>
             </c:numRef>
           </c:val>
+          <c:extLst>
+            <c:ext xmlns:c16="http://schemas.microsoft.com/office/drawing/2014/chart" uri="{C3380CC4-5D6E-409C-BE32-E72D297353CC}">
+              <c16:uniqueId val="{0000000C-592F-0447-8699-001AF5E371AC}"/>
+            </c:ext>
+          </c:extLst>
         </c:ser>
         <c:dLbls>
-          <c:numFmt formatCode="0.00" sourceLinked="0"/>
-          <c:txPr>
-            <a:bodyPr/>
-            <a:lstStyle/>
-            <a:p>
-              <a:pPr>
-                <a:defRPr b="0" i="0" strike="noStrike" sz="1200" u="none">
-                  <a:solidFill>
-                    <a:srgbClr val="1F2328"/>
-                  </a:solidFill>
-                  <a:latin typeface="Arial"/>
-                </a:defRPr>
-              </a:pPr>
-            </a:p>
-          </c:txPr>
           <c:showLegendKey val="0"/>
           <c:showVal val="1"/>
           <c:showCatName val="0"/>
           <c:showSerName val="0"/>
           <c:showPercent val="0"/>
           <c:showBubbleSize val="0"/>
-          <c:showLeaderLines val="0"/>
         </c:dLbls>
         <c:gapWidth val="60"/>
-        <c:overlap val="0"/>
         <c:axId val="2094734554"/>
         <c:axId val="2094734552"/>
-        <c:axId val="2094734556"/>
       </c:barChart>
       <c:catAx>
         <c:axId val="2094734554"/>
@@ -396,45 +401,22 @@
         <c:crosses val="autoZero"/>
         <c:auto val="1"/>
         <c:lblAlgn val="ctr"/>
+        <c:lblOffset val="100"/>
         <c:noMultiLvlLbl val="1"/>
       </c:catAx>
       <c:valAx>
         <c:axId val="2094734552"/>
         <c:scaling>
           <c:orientation val="minMax"/>
-          <c:max val="1.15"/>
+          <c:max val="1.1499999999999999"/>
           <c:min val="0"/>
         </c:scaling>
         <c:delete val="1"/>
-        <c:axPos val="b"/>
+        <c:axPos val="t"/>
         <c:numFmt formatCode="General" sourceLinked="0"/>
         <c:majorTickMark val="out"/>
         <c:minorTickMark val="none"/>
         <c:tickLblPos val="low"/>
-        <c:spPr>
-          <a:ln w="12700" cap="flat">
-            <a:solidFill>
-              <a:srgbClr val="888888"/>
-            </a:solidFill>
-            <a:prstDash val="solid"/>
-            <a:round/>
-          </a:ln>
-        </c:spPr>
-        <c:txPr>
-          <a:bodyPr/>
-          <a:lstStyle/>
-          <a:p>
-            <a:pPr>
-              <a:defRPr sz="1200" b="0" i="0" u="none" strike="noStrike">
-                <a:solidFill>
-                  <a:srgbClr val="000000"/>
-                </a:solidFill>
-                <a:latin typeface="Arial"/>
-              </a:defRPr>
-            </a:pPr>
-            <a:endParaRPr lang="en-US"/>
-          </a:p>
-        </c:txPr>
         <c:crossAx val="2094734554"/>
         <c:crosses val="autoZero"/>
         <c:crossBetween val="between"/>
@@ -449,6 +431,7 @@
     </c:plotArea>
     <c:plotVisOnly val="1"/>
     <c:dispBlanksAs val="span"/>
+    <c:showDLblsOverMax val="1"/>
   </c:chart>
   <c:spPr>
     <a:noFill/>
@@ -485,234 +468,10 @@
           <a:chExt cx="0" cy="0"/>
         </a:xfrm>
       </p:grpSpPr>
-      <p:sp>
-        <p:nvSpPr>
-          <p:cNvPr id="2" name="Header Placeholder 1"/>
-          <p:cNvSpPr>
-            <a:spLocks noGrp="1"/>
-          </p:cNvSpPr>
-          <p:nvPr>
-            <p:ph type="hdr" sz="quarter"/>
-          </p:nvPr>
-        </p:nvSpPr>
-        <p:spPr>
-          <a:xfrm>
-            <a:off x="0" y="0"/>
-            <a:ext cx="2971800" cy="458788"/>
-          </a:xfrm>
-          <a:prstGeom prst="rect">
-            <a:avLst/>
-          </a:prstGeom>
-        </p:spPr>
-        <p:txBody>
-          <a:bodyPr vert="horz" lIns="91440" tIns="45720" rIns="91440" bIns="45720" rtlCol="0"/>
-          <a:lstStyle>
-            <a:lvl1pPr algn="l">
-              <a:defRPr sz="1200"/>
-            </a:lvl1pPr>
-          </a:lstStyle>
-          <a:p>
-            <a:endParaRPr lang="en-US"/>
-          </a:p>
-        </p:txBody>
-      </p:sp>
-      <p:sp>
-        <p:nvSpPr>
-          <p:cNvPr id="3" name="Date Placeholder 2"/>
-          <p:cNvSpPr>
-            <a:spLocks noGrp="1"/>
-          </p:cNvSpPr>
-          <p:nvPr>
-            <p:ph type="dt" idx="1"/>
-          </p:nvPr>
-        </p:nvSpPr>
-        <p:spPr>
-          <a:xfrm>
-            <a:off x="3884613" y="0"/>
-            <a:ext cx="2971800" cy="458788"/>
-          </a:xfrm>
-          <a:prstGeom prst="rect">
-            <a:avLst/>
-          </a:prstGeom>
-        </p:spPr>
-        <p:txBody>
-          <a:bodyPr vert="horz" lIns="91440" tIns="45720" rIns="91440" bIns="45720" rtlCol="0"/>
-          <a:lstStyle>
-            <a:lvl1pPr algn="r">
-              <a:defRPr sz="1200"/>
-            </a:lvl1pPr>
-          </a:lstStyle>
-          <a:p>
-            <a:fld id="{5282F153-3F37-0F45-9E97-73ACFA13230C}" type="datetimeFigureOut">
-              <a:rPr lang="en-US"/>
-              <a:t>7/23/19</a:t>
-            </a:fld>
-            <a:endParaRPr lang="en-US"/>
-          </a:p>
-        </p:txBody>
-      </p:sp>
-      <p:sp>
-        <p:nvSpPr>
-          <p:cNvPr id="4" name="Slide Image Placeholder 3"/>
-          <p:cNvSpPr>
-            <a:spLocks noGrp="1" noRot="1" noChangeAspect="1"/>
-          </p:cNvSpPr>
-          <p:nvPr>
-            <p:ph type="sldImg" idx="2"/>
-          </p:nvPr>
-        </p:nvSpPr>
-        <p:spPr>
-          <a:xfrm>
-            <a:off x="685800" y="1143000"/>
-            <a:ext cx="5486400" cy="3086100"/>
-          </a:xfrm>
-          <a:prstGeom prst="rect">
-            <a:avLst/>
-          </a:prstGeom>
-          <a:noFill/>
-          <a:ln w="12700">
-            <a:solidFill>
-              <a:prstClr val="black"/>
-            </a:solidFill>
-          </a:ln>
-        </p:spPr>
-        <p:txBody>
-          <a:bodyPr vert="horz" lIns="91440" tIns="45720" rIns="91440" bIns="45720" rtlCol="0" anchor="ctr"/>
-          <a:lstStyle/>
-          <a:p>
-            <a:endParaRPr lang="en-US"/>
-          </a:p>
-        </p:txBody>
-      </p:sp>
-      <p:sp>
-        <p:nvSpPr>
-          <p:cNvPr id="5" name="Notes Placeholder 4"/>
-          <p:cNvSpPr>
-            <a:spLocks noGrp="1"/>
-          </p:cNvSpPr>
-          <p:nvPr>
-            <p:ph type="body" sz="quarter" idx="3"/>
-          </p:nvPr>
-        </p:nvSpPr>
-        <p:spPr>
-          <a:xfrm>
-            <a:off x="685800" y="4400550"/>
-            <a:ext cx="5486400" cy="3600450"/>
-          </a:xfrm>
-          <a:prstGeom prst="rect">
-            <a:avLst/>
-          </a:prstGeom>
-        </p:spPr>
-        <p:txBody>
-          <a:bodyPr vert="horz" lIns="91440" tIns="45720" rIns="91440" bIns="45720" rtlCol="0"/>
-          <a:lstStyle/>
-          <a:p>
-            <a:pPr lvl="0"/>
-            <a:r>
-              <a:rPr lang="en-US"/>
-              <a:t>Click to edit Master text styles</a:t>
-            </a:r>
-          </a:p>
-          <a:p>
-            <a:pPr lvl="1"/>
-            <a:r>
-              <a:rPr lang="en-US"/>
-              <a:t>Second level</a:t>
-            </a:r>
-          </a:p>
-          <a:p>
-            <a:pPr lvl="2"/>
-            <a:r>
-              <a:rPr lang="en-US"/>
-              <a:t>Third level</a:t>
-            </a:r>
-          </a:p>
-          <a:p>
-            <a:pPr lvl="3"/>
-            <a:r>
-              <a:rPr lang="en-US"/>
-              <a:t>Fourth level</a:t>
-            </a:r>
-          </a:p>
-          <a:p>
-            <a:pPr lvl="4"/>
-            <a:r>
-              <a:rPr lang="en-US"/>
-              <a:t>Fifth level</a:t>
-            </a:r>
-          </a:p>
-        </p:txBody>
-      </p:sp>
-      <p:sp>
-        <p:nvSpPr>
-          <p:cNvPr id="6" name="Footer Placeholder 5"/>
-          <p:cNvSpPr>
-            <a:spLocks noGrp="1"/>
-          </p:cNvSpPr>
-          <p:nvPr>
-            <p:ph type="ftr" sz="quarter" idx="4"/>
-          </p:nvPr>
-        </p:nvSpPr>
-        <p:spPr>
-          <a:xfrm>
-            <a:off x="0" y="8685213"/>
-            <a:ext cx="2971800" cy="458787"/>
-          </a:xfrm>
-          <a:prstGeom prst="rect">
-            <a:avLst/>
-          </a:prstGeom>
-        </p:spPr>
-        <p:txBody>
-          <a:bodyPr vert="horz" lIns="91440" tIns="45720" rIns="91440" bIns="45720" rtlCol="0" anchor="b"/>
-          <a:lstStyle>
-            <a:lvl1pPr algn="l">
-              <a:defRPr sz="1200"/>
-            </a:lvl1pPr>
-          </a:lstStyle>
-          <a:p>
-            <a:endParaRPr lang="en-US"/>
-          </a:p>
-        </p:txBody>
-      </p:sp>
-      <p:sp>
-        <p:nvSpPr>
-          <p:cNvPr id="7" name="Slide Number Placeholder 6"/>
-          <p:cNvSpPr>
-            <a:spLocks noGrp="1"/>
-          </p:cNvSpPr>
-          <p:nvPr>
-            <p:ph type="sldNum" sz="quarter" idx="5"/>
-          </p:nvPr>
-        </p:nvSpPr>
-        <p:spPr>
-          <a:xfrm>
-            <a:off x="3884613" y="8685213"/>
-            <a:ext cx="2971800" cy="458787"/>
-          </a:xfrm>
-          <a:prstGeom prst="rect">
-            <a:avLst/>
-          </a:prstGeom>
-        </p:spPr>
-        <p:txBody>
-          <a:bodyPr vert="horz" lIns="91440" tIns="45720" rIns="91440" bIns="45720" rtlCol="0" anchor="b"/>
-          <a:lstStyle>
-            <a:lvl1pPr algn="r">
-              <a:defRPr sz="1200"/>
-            </a:lvl1pPr>
-          </a:lstStyle>
-          <a:p>
-            <a:fld id="{CE5E9CC1-C706-0F49-92D6-E571CC5EEA8F}" type="slidenum">
-              <a:rPr lang="en-US"/>
-              <a:t>‹#›</a:t>
-            </a:fld>
-            <a:endParaRPr lang="en-US"/>
-          </a:p>
-        </p:txBody>
-      </p:sp>
     </p:spTree>
     <p:extLst>
       <p:ext uri="{BB962C8B-B14F-4D97-AF65-F5344CB8AC3E}">
-        <p14:creationId xmlns:p14="http://schemas.microsoft.com/office/powerpoint/2010/main" val="1024086991"/>
+        <p14:creationId xmlns:p14="http://schemas.microsoft.com/office/powerpoint/2010/main" val="2363341225"/>
       </p:ext>
     </p:extLst>
   </p:cSld>
@@ -860,7 +619,6 @@
               <a:rPr lang="en-US" dirty="0"/>
               <a:t>Apresentação do InsurMinds_PROTETOR, plataforma que lê, compara e explica apólices D&amp;O com IA generativa. Mensagem central: o sistema automatiza a leitura e a comparação, mostra a página de cada evidência e deixa a decisão ao especialista.</a:t>
             </a:r>
-            <a:endParaRPr lang="en-US" dirty="0"/>
           </a:p>
         </p:txBody>
       </p:sp>
@@ -948,7 +706,6 @@
               <a:rPr lang="en-US" dirty="0"/>
               <a:t>Os testes de robustez usam documentos de outros ramos e uma apólice sintética com gabarito de valores, porque as condições gerais D&amp;O não têm limites em reais. O OCR foi testado gerando uma versão só imagem da mesma apólice: identificação, vigência, limites e franquias bateram com a versão nativa.</a:t>
             </a:r>
-            <a:endParaRPr lang="en-US" dirty="0"/>
           </a:p>
         </p:txBody>
       </p:sp>
@@ -1036,7 +793,6 @@
               <a:rPr lang="en-US" dirty="0"/>
               <a:t>Na PRODEMGE, o sistema leu um contrato de 2020 que era só imagem e identificou a troca de seguradora, o aumento do limite e a mudança de valor. Na Invepar, captou a troca Allianz → Berkley nas demonstrações e expôs uma divergência entre a tabela e a nota de rodapé da própria DFP 2024 — e também as limitações do schema com documentos que listam várias apólices.</a:t>
             </a:r>
-            <a:endParaRPr lang="en-US" dirty="0"/>
           </a:p>
         </p:txBody>
       </p:sp>
@@ -1124,7 +880,6 @@
               <a:rPr lang="en-US" dirty="0"/>
               <a:t>Transparência sobre limites é parte da proposta: cada limitação aparece em aviso na própria interface. Os próximos passos atacam diretamente essas limitações.</a:t>
             </a:r>
-            <a:endParaRPr lang="en-US" dirty="0"/>
           </a:p>
         </p:txBody>
       </p:sp>
@@ -1212,7 +967,6 @@
               <a:rPr lang="en-US" dirty="0"/>
               <a:t>Fechamento: reforçar a mensagem central e o link do repositório, que tem README, relatório técnico, testes e os datasets com fontes.</a:t>
             </a:r>
-            <a:endParaRPr lang="en-US" dirty="0"/>
           </a:p>
         </p:txBody>
       </p:sp>
@@ -1233,7 +987,7 @@
           <a:p>
             <a:fld id="{F7021451-1387-4CA6-816F-3879F97B5CBC}" type="slidenum">
               <a:rPr lang="en-US"/>
-              <a:t>13</a:t>
+              <a:t>14</a:t>
             </a:fld>
             <a:endParaRPr lang="en-US"/>
           </a:p>
@@ -1300,7 +1054,6 @@
               <a:rPr lang="en-US" dirty="0"/>
               <a:t>O desafio não é só ler: é alinhar conceitos entre seguradoras que usam nomes e estruturas diferentes, e manter cada conclusão rastreável. Os números vêm dos documentos usados no projeto: Chubb com 70 páginas, Sompo com 49 e Chubb PME com 254; no run de referência, o sistema extraiu 94 itens da Chubb e 66 da Sompo.</a:t>
             </a:r>
-            <a:endParaRPr lang="en-US" dirty="0"/>
           </a:p>
         </p:txBody>
       </p:sp>
@@ -1388,7 +1141,6 @@
               <a:rPr lang="en-US" dirty="0"/>
               <a:t>Três verbos resumem o produto. Ler: inclusive documentos digitalizados. Comparar: por conceito, não por nome. Explicar: síntese com evidência por página. O tempo de cerca de 3 minutos foi medido nos runs LIVE com Chubb × Sompo.</a:t>
             </a:r>
-            <a:endParaRPr lang="en-US" dirty="0"/>
           </a:p>
         </p:txBody>
       </p:sp>
@@ -1476,7 +1228,6 @@
               <a:rPr lang="en-US" dirty="0"/>
               <a:t>O princípio central: o Harness controla estados, retries, escopo e persistência; os agentes só executam a sua função. Isso torna o sistema previsível e testável sem API: são 98 testes automatizados. Os blocos em lilás usam IA generativa.</a:t>
             </a:r>
-            <a:endParaRPr lang="en-US" dirty="0"/>
           </a:p>
         </p:txBody>
       </p:sp>
@@ -1564,7 +1315,6 @@
               <a:rPr lang="en-US" dirty="0"/>
               <a:t>Cada agente tem entrada e saída tipadas. Quatro etapas do fluxo usam IA generativa (A2 no OCR, A3, A5 e A6), além da Consulta. Todas passam por contratos Pydantic e guardrails no código.</a:t>
             </a:r>
-            <a:endParaRPr lang="en-US" dirty="0"/>
           </a:p>
         </p:txBody>
       </p:sp>
@@ -1652,7 +1402,6 @@
               <a:rPr lang="en-US" dirty="0"/>
               <a:t>A confiança vem do código, não só do prompt. O exemplo à direita aconteceu num run LIVE com a Chubb PME: o ciclo de validação e nova tentativa corrigiu o valor sozinho.</a:t>
             </a:r>
-            <a:endParaRPr lang="en-US" dirty="0"/>
           </a:p>
         </p:txBody>
       </p:sp>
@@ -1740,7 +1489,6 @@
               <a:rPr lang="en-US" dirty="0"/>
               <a:t>Aqui entra a demonstração ao vivo ou o vídeo. Sugestão de roteiro: abrir o run Chubb × Sompo pelo modo apresentação, mostrar a síntese, abrir uma evidência e fazer uma pergunta na Consulta.</a:t>
             </a:r>
-            <a:endParaRPr lang="en-US" dirty="0"/>
           </a:p>
         </p:txBody>
       </p:sp>
@@ -1828,7 +1576,6 @@
               <a:rPr lang="en-US" dirty="0"/>
               <a:t>Os campos que as condições gerais delegam à Especificação ficaram vazios, como no gabarito: o modelo não inventou valores. Na comparação, a v1.0 anotava exclusões pela presença do tema; o sistema apontou diferenças de alcance (ambiental e cibernética), que o grupo conferiu nas páginas 42, 51–55, 65 e 17. O gabarito v1.1 registra isso, e mostramos as duas versões.</a:t>
             </a:r>
-            <a:endParaRPr lang="en-US" dirty="0"/>
           </a:p>
         </p:txBody>
       </p:sp>
@@ -1916,7 +1663,6 @@
               <a:rPr lang="en-US" dirty="0"/>
               <a:t>Cada decisão arquitetural foi motivada por um problema medido. O schema estrito eliminou os erros de formato; a taxonomia resolveu o fato de a Chubb vir em inglês e a Sompo em português; a síntese generativa, limitada aos itens do A5, ficou curta e verificável.</a:t>
             </a:r>
-            <a:endParaRPr lang="en-US" dirty="0"/>
           </a:p>
         </p:txBody>
       </p:sp>
@@ -1989,6 +1735,11 @@
 <file path=ppt/slideMasters/slideMaster1.xml><?xml version="1.0" encoding="utf-8"?>
 <p:sldMaster xmlns:a="http://schemas.openxmlformats.org/drawingml/2006/main" xmlns:r="http://schemas.openxmlformats.org/officeDocument/2006/relationships" xmlns:p="http://schemas.openxmlformats.org/presentationml/2006/main">
   <p:cSld>
+    <p:bg>
+      <p:bgRef idx="1001">
+        <a:schemeClr val="bg1"/>
+      </p:bgRef>
+    </p:bg>
     <p:spTree>
       <p:nvGrpSpPr>
         <p:cNvPr id="1" name=""/>
@@ -2271,6 +2022,7 @@
         <a:solidFill>
           <a:srgbClr val="14213D"/>
         </a:solidFill>
+        <a:effectLst/>
       </p:bgPr>
     </p:bg>
     <p:spTree>
@@ -2311,17 +2063,24 @@
             <a:prstDash val="solid"/>
           </a:ln>
         </p:spPr>
+        <p:txBody>
+          <a:bodyPr/>
+          <a:lstStyle/>
+          <a:p>
+            <a:endParaRPr lang="en-BR"/>
+          </a:p>
+        </p:txBody>
       </p:sp>
       <p:pic>
         <p:nvPicPr>
-          <p:cNvPr id="3" name="Image 0" descr="preencoded.png">    </p:cNvPr>
+          <p:cNvPr id="3" name="Image 0" descr="preencoded.png"/>
           <p:cNvPicPr>
             <a:picLocks noChangeAspect="1"/>
           </p:cNvPicPr>
           <p:nvPr/>
         </p:nvPicPr>
         <p:blipFill>
-          <a:blip r:embed="rId1"/>
+          <a:blip r:embed="rId3"/>
           <a:stretch>
             <a:fillRect/>
           </a:stretch>
@@ -2357,7 +2116,7 @@
           <a:bodyPr wrap="square" lIns="0" tIns="0" rIns="0" bIns="0" rtlCol="0" anchor="ctr"/>
           <a:lstStyle/>
           <a:p>
-            <a:pPr indent="0" marL="0">
+            <a:pPr marL="0" indent="0">
               <a:buNone/>
             </a:pPr>
             <a:r>
@@ -2396,7 +2155,7 @@
           <a:bodyPr wrap="square" lIns="0" tIns="0" rIns="0" bIns="0" rtlCol="0" anchor="ctr"/>
           <a:lstStyle/>
           <a:p>
-            <a:pPr indent="0" marL="0">
+            <a:pPr marL="0" indent="0">
               <a:buNone/>
             </a:pPr>
             <a:r>
@@ -2435,7 +2194,7 @@
           <a:bodyPr wrap="square" lIns="0" tIns="0" rIns="0" bIns="0" rtlCol="0" anchor="ctr"/>
           <a:lstStyle/>
           <a:p>
-            <a:pPr indent="0" marL="0">
+            <a:pPr marL="0" indent="0">
               <a:buNone/>
             </a:pPr>
             <a:r>
@@ -2474,7 +2233,7 @@
           <a:bodyPr wrap="square" lIns="0" tIns="0" rIns="0" bIns="0" rtlCol="0" anchor="ctr"/>
           <a:lstStyle/>
           <a:p>
-            <a:pPr indent="0" marL="0">
+            <a:pPr marL="0" indent="0">
               <a:spcAft>
                 <a:spcPts val="400"/>
               </a:spcAft>
@@ -2494,7 +2253,7 @@
             <a:endParaRPr lang="en-US" sz="1400" dirty="0"/>
           </a:p>
           <a:p>
-            <a:pPr indent="0" marL="0">
+            <a:pPr marL="0" indent="0">
               <a:spcAft>
                 <a:spcPts val="400"/>
               </a:spcAft>
@@ -2561,7 +2320,7 @@
           <a:bodyPr wrap="square" lIns="0" tIns="0" rIns="0" bIns="0" rtlCol="0" anchor="t"/>
           <a:lstStyle/>
           <a:p>
-            <a:pPr indent="0" marL="0">
+            <a:pPr marL="0" indent="0">
               <a:buNone/>
             </a:pPr>
             <a:r>
@@ -2595,16 +2354,34 @@
         </p:nvGraphicFramePr>
         <p:xfrm>
           <a:off x="548640" y="1417320"/>
-          <a:ext cx="11094415" cy="914400"/>
+          <a:ext cx="11091672" cy="3401568"/>
         </p:xfrm>
         <a:graphic>
           <a:graphicData uri="http://schemas.openxmlformats.org/drawingml/2006/table">
             <a:tbl>
               <a:tblPr/>
               <a:tblGrid>
-                <a:gridCol w="7635240"/>
-                <a:gridCol w="1737360"/>
-                <a:gridCol w="1719072"/>
+                <a:gridCol w="7635240">
+                  <a:extLst>
+                    <a:ext uri="{9D8B030D-6E8A-4147-A177-3AD203B41FA5}">
+                      <a16:colId xmlns:a16="http://schemas.microsoft.com/office/drawing/2014/main" val="20000"/>
+                    </a:ext>
+                  </a:extLst>
+                </a:gridCol>
+                <a:gridCol w="1737360">
+                  <a:extLst>
+                    <a:ext uri="{9D8B030D-6E8A-4147-A177-3AD203B41FA5}">
+                      <a16:colId xmlns:a16="http://schemas.microsoft.com/office/drawing/2014/main" val="20001"/>
+                    </a:ext>
+                  </a:extLst>
+                </a:gridCol>
+                <a:gridCol w="1719072">
+                  <a:extLst>
+                    <a:ext uri="{9D8B030D-6E8A-4147-A177-3AD203B41FA5}">
+                      <a16:colId xmlns:a16="http://schemas.microsoft.com/office/drawing/2014/main" val="20002"/>
+                    </a:ext>
+                  </a:extLst>
+                </a:gridCol>
               </a:tblGrid>
               <a:tr h="566928">
                 <a:tc>
@@ -2612,7 +2389,7 @@
                     <a:bodyPr/>
                     <a:lstStyle/>
                     <a:p>
-                      <a:pPr indent="0" marL="0">
+                      <a:pPr marL="0" indent="0">
                         <a:buNone/>
                       </a:pPr>
                       <a:r>
@@ -2633,7 +2410,7 @@
                       </a:endParaRPr>
                     </a:p>
                   </a:txBody>
-                  <a:tcPr marL="91440" marR="91440" marT="91440" marB="91440" anchor="ctr">
+                  <a:tcPr marT="91440" marB="91440" anchor="ctr">
                     <a:lnL w="9525" cap="flat" cmpd="sng" algn="ctr">
                       <a:solidFill>
                         <a:srgbClr val="D0D7DE"/>
@@ -2680,7 +2457,7 @@
                     <a:bodyPr/>
                     <a:lstStyle/>
                     <a:p>
-                      <a:pPr indent="0" marL="0">
+                      <a:pPr marL="0" indent="0">
                         <a:buNone/>
                       </a:pPr>
                       <a:r>
@@ -2701,7 +2478,7 @@
                       </a:endParaRPr>
                     </a:p>
                   </a:txBody>
-                  <a:tcPr marL="91440" marR="91440" marT="91440" marB="91440" anchor="ctr">
+                  <a:tcPr marT="91440" marB="91440" anchor="ctr">
                     <a:lnL w="9525" cap="flat" cmpd="sng" algn="ctr">
                       <a:solidFill>
                         <a:srgbClr val="D0D7DE"/>
@@ -2748,7 +2525,7 @@
                     <a:bodyPr/>
                     <a:lstStyle/>
                     <a:p>
-                      <a:pPr indent="0" marL="0">
+                      <a:pPr marL="0" indent="0">
                         <a:buNone/>
                       </a:pPr>
                       <a:r>
@@ -2769,7 +2546,7 @@
                       </a:endParaRPr>
                     </a:p>
                   </a:txBody>
-                  <a:tcPr marL="91440" marR="91440" marT="91440" marB="91440" anchor="ctr">
+                  <a:tcPr marT="91440" marB="91440" anchor="ctr">
                     <a:lnL w="9525" cap="flat" cmpd="sng" algn="ctr">
                       <a:solidFill>
                         <a:srgbClr val="D0D7DE"/>
@@ -2811,6 +2588,11 @@
                     </a:solidFill>
                   </a:tcPr>
                 </a:tc>
+                <a:extLst>
+                  <a:ext uri="{0D108BD9-81ED-4DB2-BD59-A6C34878D82A}">
+                    <a16:rowId xmlns:a16="http://schemas.microsoft.com/office/drawing/2014/main" val="10000"/>
+                  </a:ext>
+                </a:extLst>
               </a:tr>
               <a:tr h="566928">
                 <a:tc>
@@ -2818,7 +2600,7 @@
                     <a:bodyPr/>
                     <a:lstStyle/>
                     <a:p>
-                      <a:pPr indent="0" marL="0">
+                      <a:pPr marL="0" indent="0">
                         <a:buNone/>
                       </a:pPr>
                       <a:r>
@@ -2839,7 +2621,7 @@
                       </a:endParaRPr>
                     </a:p>
                   </a:txBody>
-                  <a:tcPr marL="91440" marR="91440" marT="91440" marB="91440" anchor="ctr">
+                  <a:tcPr marT="91440" marB="91440" anchor="ctr">
                     <a:lnL w="9525" cap="flat" cmpd="sng" algn="ctr">
                       <a:solidFill>
                         <a:srgbClr val="D0D7DE"/>
@@ -2886,7 +2668,7 @@
                     <a:bodyPr/>
                     <a:lstStyle/>
                     <a:p>
-                      <a:pPr indent="0" marL="0">
+                      <a:pPr marL="0" indent="0">
                         <a:buNone/>
                       </a:pPr>
                       <a:r>
@@ -2907,7 +2689,7 @@
                       </a:endParaRPr>
                     </a:p>
                   </a:txBody>
-                  <a:tcPr marL="91440" marR="91440" marT="91440" marB="91440" anchor="ctr">
+                  <a:tcPr marT="91440" marB="91440" anchor="ctr">
                     <a:lnL w="9525" cap="flat" cmpd="sng" algn="ctr">
                       <a:solidFill>
                         <a:srgbClr val="D0D7DE"/>
@@ -2954,7 +2736,7 @@
                     <a:bodyPr/>
                     <a:lstStyle/>
                     <a:p>
-                      <a:pPr indent="0" marL="0">
+                      <a:pPr marL="0" indent="0">
                         <a:buNone/>
                       </a:pPr>
                       <a:r>
@@ -2975,7 +2757,7 @@
                       </a:endParaRPr>
                     </a:p>
                   </a:txBody>
-                  <a:tcPr marL="91440" marR="91440" marT="91440" marB="91440" anchor="ctr">
+                  <a:tcPr marT="91440" marB="91440" anchor="ctr">
                     <a:lnL w="9525" cap="flat" cmpd="sng" algn="ctr">
                       <a:solidFill>
                         <a:srgbClr val="D0D7DE"/>
@@ -3017,6 +2799,11 @@
                     </a:solidFill>
                   </a:tcPr>
                 </a:tc>
+                <a:extLst>
+                  <a:ext uri="{0D108BD9-81ED-4DB2-BD59-A6C34878D82A}">
+                    <a16:rowId xmlns:a16="http://schemas.microsoft.com/office/drawing/2014/main" val="10001"/>
+                  </a:ext>
+                </a:extLst>
               </a:tr>
               <a:tr h="566928">
                 <a:tc>
@@ -3024,7 +2811,7 @@
                     <a:bodyPr/>
                     <a:lstStyle/>
                     <a:p>
-                      <a:pPr indent="0" marL="0">
+                      <a:pPr marL="0" indent="0">
                         <a:buNone/>
                       </a:pPr>
                       <a:r>
@@ -3045,7 +2832,7 @@
                       </a:endParaRPr>
                     </a:p>
                   </a:txBody>
-                  <a:tcPr marL="91440" marR="91440" marT="91440" marB="91440" anchor="ctr">
+                  <a:tcPr marT="91440" marB="91440" anchor="ctr">
                     <a:lnL w="9525" cap="flat" cmpd="sng" algn="ctr">
                       <a:solidFill>
                         <a:srgbClr val="D0D7DE"/>
@@ -3092,7 +2879,7 @@
                     <a:bodyPr/>
                     <a:lstStyle/>
                     <a:p>
-                      <a:pPr indent="0" marL="0">
+                      <a:pPr marL="0" indent="0">
                         <a:buNone/>
                       </a:pPr>
                       <a:r>
@@ -3113,7 +2900,7 @@
                       </a:endParaRPr>
                     </a:p>
                   </a:txBody>
-                  <a:tcPr marL="91440" marR="91440" marT="91440" marB="91440" anchor="ctr">
+                  <a:tcPr marT="91440" marB="91440" anchor="ctr">
                     <a:lnL w="9525" cap="flat" cmpd="sng" algn="ctr">
                       <a:solidFill>
                         <a:srgbClr val="D0D7DE"/>
@@ -3160,7 +2947,7 @@
                     <a:bodyPr/>
                     <a:lstStyle/>
                     <a:p>
-                      <a:pPr indent="0" marL="0">
+                      <a:pPr marL="0" indent="0">
                         <a:buNone/>
                       </a:pPr>
                       <a:r>
@@ -3181,7 +2968,7 @@
                       </a:endParaRPr>
                     </a:p>
                   </a:txBody>
-                  <a:tcPr marL="91440" marR="91440" marT="91440" marB="91440" anchor="ctr">
+                  <a:tcPr marT="91440" marB="91440" anchor="ctr">
                     <a:lnL w="9525" cap="flat" cmpd="sng" algn="ctr">
                       <a:solidFill>
                         <a:srgbClr val="D0D7DE"/>
@@ -3223,6 +3010,11 @@
                     </a:solidFill>
                   </a:tcPr>
                 </a:tc>
+                <a:extLst>
+                  <a:ext uri="{0D108BD9-81ED-4DB2-BD59-A6C34878D82A}">
+                    <a16:rowId xmlns:a16="http://schemas.microsoft.com/office/drawing/2014/main" val="10002"/>
+                  </a:ext>
+                </a:extLst>
               </a:tr>
               <a:tr h="566928">
                 <a:tc>
@@ -3230,7 +3022,7 @@
                     <a:bodyPr/>
                     <a:lstStyle/>
                     <a:p>
-                      <a:pPr indent="0" marL="0">
+                      <a:pPr marL="0" indent="0">
                         <a:buNone/>
                       </a:pPr>
                       <a:r>
@@ -3251,7 +3043,7 @@
                       </a:endParaRPr>
                     </a:p>
                   </a:txBody>
-                  <a:tcPr marL="91440" marR="91440" marT="91440" marB="91440" anchor="ctr">
+                  <a:tcPr marT="91440" marB="91440" anchor="ctr">
                     <a:lnL w="9525" cap="flat" cmpd="sng" algn="ctr">
                       <a:solidFill>
                         <a:srgbClr val="D0D7DE"/>
@@ -3298,7 +3090,7 @@
                     <a:bodyPr/>
                     <a:lstStyle/>
                     <a:p>
-                      <a:pPr indent="0" marL="0">
+                      <a:pPr marL="0" indent="0">
                         <a:buNone/>
                       </a:pPr>
                       <a:r>
@@ -3319,7 +3111,7 @@
                       </a:endParaRPr>
                     </a:p>
                   </a:txBody>
-                  <a:tcPr marL="91440" marR="91440" marT="91440" marB="91440" anchor="ctr">
+                  <a:tcPr marT="91440" marB="91440" anchor="ctr">
                     <a:lnL w="9525" cap="flat" cmpd="sng" algn="ctr">
                       <a:solidFill>
                         <a:srgbClr val="D0D7DE"/>
@@ -3366,7 +3158,7 @@
                     <a:bodyPr/>
                     <a:lstStyle/>
                     <a:p>
-                      <a:pPr indent="0" marL="0">
+                      <a:pPr marL="0" indent="0">
                         <a:buNone/>
                       </a:pPr>
                       <a:r>
@@ -3387,7 +3179,7 @@
                       </a:endParaRPr>
                     </a:p>
                   </a:txBody>
-                  <a:tcPr marL="91440" marR="91440" marT="91440" marB="91440" anchor="ctr">
+                  <a:tcPr marT="91440" marB="91440" anchor="ctr">
                     <a:lnL w="9525" cap="flat" cmpd="sng" algn="ctr">
                       <a:solidFill>
                         <a:srgbClr val="D0D7DE"/>
@@ -3429,6 +3221,11 @@
                     </a:solidFill>
                   </a:tcPr>
                 </a:tc>
+                <a:extLst>
+                  <a:ext uri="{0D108BD9-81ED-4DB2-BD59-A6C34878D82A}">
+                    <a16:rowId xmlns:a16="http://schemas.microsoft.com/office/drawing/2014/main" val="10003"/>
+                  </a:ext>
+                </a:extLst>
               </a:tr>
               <a:tr h="566928">
                 <a:tc>
@@ -3436,7 +3233,7 @@
                     <a:bodyPr/>
                     <a:lstStyle/>
                     <a:p>
-                      <a:pPr indent="0" marL="0">
+                      <a:pPr marL="0" indent="0">
                         <a:buNone/>
                       </a:pPr>
                       <a:r>
@@ -3457,7 +3254,7 @@
                       </a:endParaRPr>
                     </a:p>
                   </a:txBody>
-                  <a:tcPr marL="91440" marR="91440" marT="91440" marB="91440" anchor="ctr">
+                  <a:tcPr marT="91440" marB="91440" anchor="ctr">
                     <a:lnL w="9525" cap="flat" cmpd="sng" algn="ctr">
                       <a:solidFill>
                         <a:srgbClr val="D0D7DE"/>
@@ -3504,7 +3301,7 @@
                     <a:bodyPr/>
                     <a:lstStyle/>
                     <a:p>
-                      <a:pPr indent="0" marL="0">
+                      <a:pPr marL="0" indent="0">
                         <a:buNone/>
                       </a:pPr>
                       <a:r>
@@ -3525,7 +3322,7 @@
                       </a:endParaRPr>
                     </a:p>
                   </a:txBody>
-                  <a:tcPr marL="91440" marR="91440" marT="91440" marB="91440" anchor="ctr">
+                  <a:tcPr marT="91440" marB="91440" anchor="ctr">
                     <a:lnL w="9525" cap="flat" cmpd="sng" algn="ctr">
                       <a:solidFill>
                         <a:srgbClr val="D0D7DE"/>
@@ -3572,7 +3369,7 @@
                     <a:bodyPr/>
                     <a:lstStyle/>
                     <a:p>
-                      <a:pPr indent="0" marL="0">
+                      <a:pPr marL="0" indent="0">
                         <a:buNone/>
                       </a:pPr>
                       <a:r>
@@ -3593,7 +3390,7 @@
                       </a:endParaRPr>
                     </a:p>
                   </a:txBody>
-                  <a:tcPr marL="91440" marR="91440" marT="91440" marB="91440" anchor="ctr">
+                  <a:tcPr marT="91440" marB="91440" anchor="ctr">
                     <a:lnL w="9525" cap="flat" cmpd="sng" algn="ctr">
                       <a:solidFill>
                         <a:srgbClr val="D0D7DE"/>
@@ -3635,6 +3432,11 @@
                     </a:solidFill>
                   </a:tcPr>
                 </a:tc>
+                <a:extLst>
+                  <a:ext uri="{0D108BD9-81ED-4DB2-BD59-A6C34878D82A}">
+                    <a16:rowId xmlns:a16="http://schemas.microsoft.com/office/drawing/2014/main" val="10004"/>
+                  </a:ext>
+                </a:extLst>
               </a:tr>
               <a:tr h="566928">
                 <a:tc>
@@ -3642,7 +3444,7 @@
                     <a:bodyPr/>
                     <a:lstStyle/>
                     <a:p>
-                      <a:pPr indent="0" marL="0">
+                      <a:pPr marL="0" indent="0">
                         <a:buNone/>
                       </a:pPr>
                       <a:r>
@@ -3663,7 +3465,7 @@
                       </a:endParaRPr>
                     </a:p>
                   </a:txBody>
-                  <a:tcPr marL="91440" marR="91440" marT="91440" marB="91440" anchor="ctr">
+                  <a:tcPr marT="91440" marB="91440" anchor="ctr">
                     <a:lnL w="9525" cap="flat" cmpd="sng" algn="ctr">
                       <a:solidFill>
                         <a:srgbClr val="D0D7DE"/>
@@ -3710,7 +3512,7 @@
                     <a:bodyPr/>
                     <a:lstStyle/>
                     <a:p>
-                      <a:pPr indent="0" marL="0">
+                      <a:pPr marL="0" indent="0">
                         <a:buNone/>
                       </a:pPr>
                       <a:r>
@@ -3731,7 +3533,7 @@
                       </a:endParaRPr>
                     </a:p>
                   </a:txBody>
-                  <a:tcPr marL="91440" marR="91440" marT="91440" marB="91440" anchor="ctr">
+                  <a:tcPr marT="91440" marB="91440" anchor="ctr">
                     <a:lnL w="9525" cap="flat" cmpd="sng" algn="ctr">
                       <a:solidFill>
                         <a:srgbClr val="D0D7DE"/>
@@ -3778,7 +3580,7 @@
                     <a:bodyPr/>
                     <a:lstStyle/>
                     <a:p>
-                      <a:pPr indent="0" marL="0">
+                      <a:pPr marL="0" indent="0">
                         <a:buNone/>
                       </a:pPr>
                       <a:r>
@@ -3799,7 +3601,7 @@
                       </a:endParaRPr>
                     </a:p>
                   </a:txBody>
-                  <a:tcPr marL="91440" marR="91440" marT="91440" marB="91440" anchor="ctr">
+                  <a:tcPr marT="91440" marB="91440" anchor="ctr">
                     <a:lnL w="9525" cap="flat" cmpd="sng" algn="ctr">
                       <a:solidFill>
                         <a:srgbClr val="D0D7DE"/>
@@ -3841,6 +3643,11 @@
                     </a:solidFill>
                   </a:tcPr>
                 </a:tc>
+                <a:extLst>
+                  <a:ext uri="{0D108BD9-81ED-4DB2-BD59-A6C34878D82A}">
+                    <a16:rowId xmlns:a16="http://schemas.microsoft.com/office/drawing/2014/main" val="10005"/>
+                  </a:ext>
+                </a:extLst>
               </a:tr>
             </a:tbl>
           </a:graphicData>
@@ -3870,17 +3677,24 @@
             <a:prstDash val="solid"/>
           </a:ln>
         </p:spPr>
+        <p:txBody>
+          <a:bodyPr/>
+          <a:lstStyle/>
+          <a:p>
+            <a:endParaRPr lang="en-BR"/>
+          </a:p>
+        </p:txBody>
       </p:sp>
       <p:pic>
         <p:nvPicPr>
-          <p:cNvPr id="5" name="Image 0" descr="preencoded.png">    </p:cNvPr>
+          <p:cNvPr id="5" name="Image 0" descr="preencoded.png"/>
           <p:cNvPicPr>
             <a:picLocks noChangeAspect="1"/>
           </p:cNvPicPr>
           <p:nvPr/>
         </p:nvPicPr>
         <p:blipFill>
-          <a:blip r:embed="rId1"/>
+          <a:blip r:embed="rId3"/>
           <a:stretch>
             <a:fillRect/>
           </a:stretch>
@@ -3916,7 +3730,7 @@
           <a:bodyPr wrap="square" lIns="0" tIns="0" rIns="0" bIns="0" rtlCol="0" anchor="ctr"/>
           <a:lstStyle/>
           <a:p>
-            <a:pPr indent="0" marL="0">
+            <a:pPr marL="0" indent="0">
               <a:buNone/>
             </a:pPr>
             <a:r>
@@ -3955,7 +3769,7 @@
           <a:bodyPr wrap="square" lIns="0" tIns="0" rIns="0" bIns="0" rtlCol="0" anchor="ctr"/>
           <a:lstStyle/>
           <a:p>
-            <a:pPr indent="0" marL="0">
+            <a:pPr marL="0" indent="0">
               <a:buNone/>
             </a:pPr>
             <a:r>
@@ -3994,7 +3808,7 @@
           <a:bodyPr wrap="square" lIns="0" tIns="0" rIns="0" bIns="0" rtlCol="0" anchor="ctr"/>
           <a:lstStyle/>
           <a:p>
-            <a:pPr algn="r" indent="0" marL="0">
+            <a:pPr marL="0" indent="0" algn="r">
               <a:buNone/>
             </a:pPr>
             <a:r>
@@ -4058,7 +3872,7 @@
           <a:bodyPr wrap="square" lIns="0" tIns="0" rIns="0" bIns="0" rtlCol="0" anchor="t"/>
           <a:lstStyle/>
           <a:p>
-            <a:pPr indent="0" marL="0">
+            <a:pPr marL="0" indent="0">
               <a:buNone/>
             </a:pPr>
             <a:r>
@@ -4102,13 +3916,20 @@
             <a:prstDash val="solid"/>
           </a:ln>
           <a:effectLst>
-            <a:outerShdw sx="100000" sy="100000" kx="0" ky="0" algn="bl" rotWithShape="0" blurRad="76200" dist="25400" dir="5400000">
+            <a:outerShdw blurRad="76200" dist="25400" dir="5400000" algn="bl" rotWithShape="0">
               <a:srgbClr val="000000">
                 <a:alpha val="12000"/>
               </a:srgbClr>
             </a:outerShdw>
           </a:effectLst>
         </p:spPr>
+        <p:txBody>
+          <a:bodyPr/>
+          <a:lstStyle/>
+          <a:p>
+            <a:endParaRPr lang="en-BR"/>
+          </a:p>
+        </p:txBody>
       </p:sp>
       <p:sp>
         <p:nvSpPr>
@@ -4134,17 +3955,24 @@
             <a:prstDash val="solid"/>
           </a:ln>
         </p:spPr>
+        <p:txBody>
+          <a:bodyPr/>
+          <a:lstStyle/>
+          <a:p>
+            <a:endParaRPr lang="en-BR"/>
+          </a:p>
+        </p:txBody>
       </p:sp>
       <p:pic>
         <p:nvPicPr>
-          <p:cNvPr id="5" name="Image 0" descr="preencoded.png">    </p:cNvPr>
+          <p:cNvPr id="5" name="Image 0" descr="preencoded.png"/>
           <p:cNvPicPr>
             <a:picLocks noChangeAspect="1"/>
           </p:cNvPicPr>
           <p:nvPr/>
         </p:nvPicPr>
         <p:blipFill>
-          <a:blip r:embed="rId1"/>
+          <a:blip r:embed="rId3"/>
           <a:stretch>
             <a:fillRect/>
           </a:stretch>
@@ -4180,7 +4008,7 @@
           <a:bodyPr wrap="square" lIns="0" tIns="0" rIns="0" bIns="0" rtlCol="0" anchor="ctr"/>
           <a:lstStyle/>
           <a:p>
-            <a:pPr indent="0" marL="0">
+            <a:pPr marL="0" indent="0">
               <a:buNone/>
             </a:pPr>
             <a:r>
@@ -4197,7 +4025,7 @@
             <a:endParaRPr lang="en-US" sz="1800" dirty="0"/>
           </a:p>
           <a:p>
-            <a:pPr indent="0" marL="0">
+            <a:pPr marL="0" indent="0">
               <a:buNone/>
             </a:pPr>
             <a:r>
@@ -4236,7 +4064,7 @@
           <a:bodyPr wrap="square" lIns="0" tIns="0" rIns="0" bIns="0" rtlCol="0" anchor="ctr"/>
           <a:lstStyle/>
           <a:p>
-            <a:pPr indent="0" marL="0">
+            <a:pPr marL="0" indent="0">
               <a:buNone/>
             </a:pPr>
             <a:r>
@@ -4275,7 +4103,7 @@
           <a:bodyPr wrap="square" lIns="0" tIns="0" rIns="0" bIns="0" rtlCol="0" anchor="ctr"/>
           <a:lstStyle/>
           <a:p>
-            <a:pPr indent="0" marL="0">
+            <a:pPr marL="0" indent="0">
               <a:buNone/>
             </a:pPr>
             <a:r>
@@ -4314,7 +4142,7 @@
           <a:bodyPr wrap="square" lIns="0" tIns="0" rIns="0" bIns="0" rtlCol="0" anchor="ctr"/>
           <a:lstStyle/>
           <a:p>
-            <a:pPr indent="0" marL="0">
+            <a:pPr marL="0" indent="0">
               <a:buNone/>
             </a:pPr>
             <a:r>
@@ -4353,7 +4181,7 @@
           <a:bodyPr wrap="square" lIns="0" tIns="0" rIns="0" bIns="0" rtlCol="0" anchor="ctr"/>
           <a:lstStyle/>
           <a:p>
-            <a:pPr indent="0" marL="0">
+            <a:pPr marL="0" indent="0">
               <a:buNone/>
             </a:pPr>
             <a:r>
@@ -4392,7 +4220,7 @@
           <a:bodyPr wrap="square" lIns="0" tIns="0" rIns="0" bIns="0" rtlCol="0" anchor="ctr"/>
           <a:lstStyle/>
           <a:p>
-            <a:pPr indent="0" marL="0">
+            <a:pPr marL="0" indent="0">
               <a:buNone/>
             </a:pPr>
             <a:r>
@@ -4431,7 +4259,7 @@
           <a:bodyPr wrap="square" lIns="0" tIns="0" rIns="0" bIns="0" rtlCol="0" anchor="ctr"/>
           <a:lstStyle/>
           <a:p>
-            <a:pPr indent="0" marL="0">
+            <a:pPr marL="0" indent="0">
               <a:buNone/>
             </a:pPr>
             <a:r>
@@ -4470,7 +4298,7 @@
           <a:bodyPr wrap="square" lIns="0" tIns="0" rIns="0" bIns="0" rtlCol="0" anchor="ctr"/>
           <a:lstStyle/>
           <a:p>
-            <a:pPr indent="0" marL="0">
+            <a:pPr marL="0" indent="0">
               <a:buNone/>
             </a:pPr>
             <a:r>
@@ -4509,7 +4337,7 @@
           <a:bodyPr wrap="square" lIns="0" tIns="0" rIns="0" bIns="0" rtlCol="0" anchor="ctr"/>
           <a:lstStyle/>
           <a:p>
-            <a:pPr indent="0" marL="0">
+            <a:pPr marL="0" indent="0">
               <a:buNone/>
             </a:pPr>
             <a:r>
@@ -4548,7 +4376,7 @@
           <a:bodyPr wrap="square" lIns="0" tIns="0" rIns="0" bIns="0" rtlCol="0" anchor="ctr"/>
           <a:lstStyle/>
           <a:p>
-            <a:pPr indent="0" marL="0">
+            <a:pPr marL="0" indent="0">
               <a:buNone/>
             </a:pPr>
             <a:r>
@@ -4592,13 +4420,20 @@
             <a:prstDash val="solid"/>
           </a:ln>
           <a:effectLst>
-            <a:outerShdw sx="100000" sy="100000" kx="0" ky="0" algn="bl" rotWithShape="0" blurRad="76200" dist="25400" dir="5400000">
+            <a:outerShdw blurRad="76200" dist="25400" dir="5400000" algn="bl" rotWithShape="0">
               <a:srgbClr val="000000">
                 <a:alpha val="12000"/>
               </a:srgbClr>
             </a:outerShdw>
           </a:effectLst>
         </p:spPr>
+        <p:txBody>
+          <a:bodyPr/>
+          <a:lstStyle/>
+          <a:p>
+            <a:endParaRPr lang="en-BR"/>
+          </a:p>
+        </p:txBody>
       </p:sp>
       <p:sp>
         <p:nvSpPr>
@@ -4624,17 +4459,24 @@
             <a:prstDash val="solid"/>
           </a:ln>
         </p:spPr>
+        <p:txBody>
+          <a:bodyPr/>
+          <a:lstStyle/>
+          <a:p>
+            <a:endParaRPr lang="en-BR"/>
+          </a:p>
+        </p:txBody>
       </p:sp>
       <p:pic>
         <p:nvPicPr>
-          <p:cNvPr id="18" name="Image 1" descr="preencoded.png">    </p:cNvPr>
+          <p:cNvPr id="18" name="Image 1" descr="preencoded.png"/>
           <p:cNvPicPr>
             <a:picLocks noChangeAspect="1"/>
           </p:cNvPicPr>
           <p:nvPr/>
         </p:nvPicPr>
         <p:blipFill>
-          <a:blip r:embed="rId2"/>
+          <a:blip r:embed="rId4"/>
           <a:stretch>
             <a:fillRect/>
           </a:stretch>
@@ -4670,7 +4512,7 @@
           <a:bodyPr wrap="square" lIns="0" tIns="0" rIns="0" bIns="0" rtlCol="0" anchor="ctr"/>
           <a:lstStyle/>
           <a:p>
-            <a:pPr indent="0" marL="0">
+            <a:pPr marL="0" indent="0">
               <a:buNone/>
             </a:pPr>
             <a:r>
@@ -4687,7 +4529,7 @@
             <a:endParaRPr lang="en-US" sz="1800" dirty="0"/>
           </a:p>
           <a:p>
-            <a:pPr indent="0" marL="0">
+            <a:pPr marL="0" indent="0">
               <a:buNone/>
             </a:pPr>
             <a:r>
@@ -4726,7 +4568,7 @@
           <a:bodyPr wrap="square" lIns="0" tIns="0" rIns="0" bIns="0" rtlCol="0" anchor="ctr"/>
           <a:lstStyle/>
           <a:p>
-            <a:pPr indent="0" marL="0">
+            <a:pPr marL="0" indent="0">
               <a:buNone/>
             </a:pPr>
             <a:r>
@@ -4765,7 +4607,7 @@
           <a:bodyPr wrap="square" lIns="0" tIns="0" rIns="0" bIns="0" rtlCol="0" anchor="ctr"/>
           <a:lstStyle/>
           <a:p>
-            <a:pPr indent="0" marL="0">
+            <a:pPr marL="0" indent="0">
               <a:buNone/>
             </a:pPr>
             <a:r>
@@ -4804,7 +4646,7 @@
           <a:bodyPr wrap="square" lIns="0" tIns="0" rIns="0" bIns="0" rtlCol="0" anchor="ctr"/>
           <a:lstStyle/>
           <a:p>
-            <a:pPr indent="0" marL="0">
+            <a:pPr marL="0" indent="0">
               <a:buNone/>
             </a:pPr>
             <a:r>
@@ -4843,7 +4685,7 @@
           <a:bodyPr wrap="square" lIns="0" tIns="0" rIns="0" bIns="0" rtlCol="0" anchor="ctr"/>
           <a:lstStyle/>
           <a:p>
-            <a:pPr indent="0" marL="0">
+            <a:pPr marL="0" indent="0">
               <a:buNone/>
             </a:pPr>
             <a:r>
@@ -4882,7 +4724,7 @@
           <a:bodyPr wrap="square" lIns="0" tIns="0" rIns="0" bIns="0" rtlCol="0" anchor="ctr"/>
           <a:lstStyle/>
           <a:p>
-            <a:pPr indent="0" marL="0">
+            <a:pPr marL="0" indent="0">
               <a:buNone/>
             </a:pPr>
             <a:r>
@@ -4921,7 +4763,7 @@
           <a:bodyPr wrap="square" lIns="0" tIns="0" rIns="0" bIns="0" rtlCol="0" anchor="ctr"/>
           <a:lstStyle/>
           <a:p>
-            <a:pPr indent="0" marL="0">
+            <a:pPr marL="0" indent="0">
               <a:buNone/>
             </a:pPr>
             <a:r>
@@ -4960,7 +4802,7 @@
           <a:bodyPr wrap="square" lIns="0" tIns="0" rIns="0" bIns="0" rtlCol="0" anchor="ctr"/>
           <a:lstStyle/>
           <a:p>
-            <a:pPr indent="0" marL="0">
+            <a:pPr marL="0" indent="0">
               <a:buNone/>
             </a:pPr>
             <a:r>
@@ -4999,7 +4841,7 @@
           <a:bodyPr wrap="square" lIns="0" tIns="0" rIns="0" bIns="0" rtlCol="0" anchor="ctr"/>
           <a:lstStyle/>
           <a:p>
-            <a:pPr indent="0" marL="0">
+            <a:pPr marL="0" indent="0">
               <a:buNone/>
             </a:pPr>
             <a:r>
@@ -5038,7 +4880,7 @@
           <a:bodyPr wrap="square" lIns="0" tIns="0" rIns="0" bIns="0" rtlCol="0" anchor="ctr"/>
           <a:lstStyle/>
           <a:p>
-            <a:pPr indent="0" marL="0">
+            <a:pPr marL="0" indent="0">
               <a:buNone/>
             </a:pPr>
             <a:r>
@@ -5077,7 +4919,7 @@
           <a:bodyPr wrap="square" lIns="0" tIns="0" rIns="0" bIns="0" rtlCol="0" anchor="ctr"/>
           <a:lstStyle/>
           <a:p>
-            <a:pPr indent="0" marL="0">
+            <a:pPr marL="0" indent="0">
               <a:buNone/>
             </a:pPr>
             <a:r>
@@ -5116,7 +4958,7 @@
           <a:bodyPr wrap="square" lIns="0" tIns="0" rIns="0" bIns="0" rtlCol="0" anchor="ctr"/>
           <a:lstStyle/>
           <a:p>
-            <a:pPr algn="r" indent="0" marL="0">
+            <a:pPr marL="0" indent="0" algn="r">
               <a:buNone/>
             </a:pPr>
             <a:r>
@@ -5180,7 +5022,7 @@
           <a:bodyPr wrap="square" lIns="0" tIns="0" rIns="0" bIns="0" rtlCol="0" anchor="t"/>
           <a:lstStyle/>
           <a:p>
-            <a:pPr indent="0" marL="0">
+            <a:pPr marL="0" indent="0">
               <a:buNone/>
             </a:pPr>
             <a:r>
@@ -5224,13 +5066,20 @@
             <a:prstDash val="solid"/>
           </a:ln>
           <a:effectLst>
-            <a:outerShdw sx="100000" sy="100000" kx="0" ky="0" algn="bl" rotWithShape="0" blurRad="76200" dist="25400" dir="5400000">
+            <a:outerShdw blurRad="76200" dist="25400" dir="5400000" algn="bl" rotWithShape="0">
               <a:srgbClr val="000000">
                 <a:alpha val="12000"/>
               </a:srgbClr>
             </a:outerShdw>
           </a:effectLst>
         </p:spPr>
+        <p:txBody>
+          <a:bodyPr/>
+          <a:lstStyle/>
+          <a:p>
+            <a:endParaRPr lang="en-BR"/>
+          </a:p>
+        </p:txBody>
       </p:sp>
       <p:sp>
         <p:nvSpPr>
@@ -5256,17 +5105,24 @@
             <a:prstDash val="solid"/>
           </a:ln>
         </p:spPr>
+        <p:txBody>
+          <a:bodyPr/>
+          <a:lstStyle/>
+          <a:p>
+            <a:endParaRPr lang="en-BR"/>
+          </a:p>
+        </p:txBody>
       </p:sp>
       <p:pic>
         <p:nvPicPr>
-          <p:cNvPr id="5" name="Image 0" descr="preencoded.png">    </p:cNvPr>
+          <p:cNvPr id="5" name="Image 0" descr="preencoded.png"/>
           <p:cNvPicPr>
             <a:picLocks noChangeAspect="1"/>
           </p:cNvPicPr>
           <p:nvPr/>
         </p:nvPicPr>
         <p:blipFill>
-          <a:blip r:embed="rId1"/>
+          <a:blip r:embed="rId3"/>
           <a:stretch>
             <a:fillRect/>
           </a:stretch>
@@ -5302,7 +5158,7 @@
           <a:bodyPr wrap="square" lIns="0" tIns="0" rIns="0" bIns="0" rtlCol="0" anchor="ctr"/>
           <a:lstStyle/>
           <a:p>
-            <a:pPr indent="0" marL="0">
+            <a:pPr marL="0" indent="0">
               <a:buNone/>
             </a:pPr>
             <a:r>
@@ -5473,13 +5329,20 @@
             <a:prstDash val="solid"/>
           </a:ln>
           <a:effectLst>
-            <a:outerShdw sx="100000" sy="100000" kx="0" ky="0" algn="bl" rotWithShape="0" blurRad="76200" dist="25400" dir="5400000">
+            <a:outerShdw blurRad="76200" dist="25400" dir="5400000" algn="bl" rotWithShape="0">
               <a:srgbClr val="000000">
                 <a:alpha val="12000"/>
               </a:srgbClr>
             </a:outerShdw>
           </a:effectLst>
         </p:spPr>
+        <p:txBody>
+          <a:bodyPr/>
+          <a:lstStyle/>
+          <a:p>
+            <a:endParaRPr lang="en-BR"/>
+          </a:p>
+        </p:txBody>
       </p:sp>
       <p:sp>
         <p:nvSpPr>
@@ -5505,17 +5368,24 @@
             <a:prstDash val="solid"/>
           </a:ln>
         </p:spPr>
+        <p:txBody>
+          <a:bodyPr/>
+          <a:lstStyle/>
+          <a:p>
+            <a:endParaRPr lang="en-BR"/>
+          </a:p>
+        </p:txBody>
       </p:sp>
       <p:pic>
         <p:nvPicPr>
-          <p:cNvPr id="10" name="Image 1" descr="preencoded.png">    </p:cNvPr>
+          <p:cNvPr id="10" name="Image 1" descr="preencoded.png"/>
           <p:cNvPicPr>
             <a:picLocks noChangeAspect="1"/>
           </p:cNvPicPr>
           <p:nvPr/>
         </p:nvPicPr>
         <p:blipFill>
-          <a:blip r:embed="rId2"/>
+          <a:blip r:embed="rId4"/>
           <a:stretch>
             <a:fillRect/>
           </a:stretch>
@@ -5551,7 +5421,7 @@
           <a:bodyPr wrap="square" lIns="0" tIns="0" rIns="0" bIns="0" rtlCol="0" anchor="ctr"/>
           <a:lstStyle/>
           <a:p>
-            <a:pPr indent="0" marL="0">
+            <a:pPr marL="0" indent="0">
               <a:buNone/>
             </a:pPr>
             <a:r>
@@ -5717,7 +5587,7 @@
           <a:bodyPr wrap="square" lIns="0" tIns="0" rIns="0" bIns="0" rtlCol="0" anchor="ctr"/>
           <a:lstStyle/>
           <a:p>
-            <a:pPr indent="0" marL="0">
+            <a:pPr marL="0" indent="0">
               <a:buNone/>
             </a:pPr>
             <a:r>
@@ -5756,7 +5626,7 @@
           <a:bodyPr wrap="square" lIns="0" tIns="0" rIns="0" bIns="0" rtlCol="0" anchor="ctr"/>
           <a:lstStyle/>
           <a:p>
-            <a:pPr algn="r" indent="0" marL="0">
+            <a:pPr marL="0" indent="0" algn="r">
               <a:buNone/>
             </a:pPr>
             <a:r>
@@ -5784,12 +5654,13 @@
 
 <file path=ppt/slides/slide13.xml><?xml version="1.0" encoding="utf-8"?>
 <p:sld xmlns:a="http://schemas.openxmlformats.org/drawingml/2006/main" xmlns:r="http://schemas.openxmlformats.org/officeDocument/2006/relationships" xmlns:p="http://schemas.openxmlformats.org/presentationml/2006/main">
-  <p:cSld name="Slide 13">
+  <p:cSld>
     <p:bg>
       <p:bgPr>
         <a:solidFill>
-          <a:srgbClr val="14213D"/>
+          <a:schemeClr val="bg1"/>
         </a:solidFill>
+        <a:effectLst/>
       </p:bgPr>
     </p:bg>
     <p:spTree>
@@ -5808,6 +5679,653 @@
       </p:grpSpPr>
       <p:sp>
         <p:nvSpPr>
+          <p:cNvPr id="8" name="Rectangle 7">
+            <a:extLst>
+              <a:ext uri="{FF2B5EF4-FFF2-40B4-BE49-F238E27FC236}">
+                <a16:creationId xmlns:a16="http://schemas.microsoft.com/office/drawing/2014/main" id="{F3060C83-F051-4F0E-ABAD-AA0DFC48B218}"/>
+              </a:ext>
+              <a:ext uri="{C183D7F6-B498-43B3-948B-1728B52AA6E4}">
+                <adec:decorative xmlns:adec="http://schemas.microsoft.com/office/drawing/2017/decorative" val="1"/>
+              </a:ext>
+            </a:extLst>
+          </p:cNvPr>
+          <p:cNvSpPr>
+            <a:spLocks noGrp="1" noRot="1" noChangeAspect="1" noMove="1" noResize="1" noEditPoints="1" noAdjustHandles="1" noChangeArrowheads="1" noChangeShapeType="1" noTextEdit="1"/>
+          </p:cNvSpPr>
+          <p:nvPr>
+            <p:extLst>
+              <p:ext uri="{386F3935-93C4-4BCD-93E2-E3B085C9AB24}">
+                <p16:designElem xmlns:p16="http://schemas.microsoft.com/office/powerpoint/2015/main" val="1"/>
+              </p:ext>
+            </p:extLst>
+          </p:nvPr>
+        </p:nvSpPr>
+        <p:spPr>
+          <a:xfrm>
+            <a:off x="0" y="0"/>
+            <a:ext cx="12192000" cy="6858000"/>
+          </a:xfrm>
+          <a:prstGeom prst="rect">
+            <a:avLst/>
+          </a:prstGeom>
+          <a:solidFill>
+            <a:schemeClr val="bg1"/>
+          </a:solidFill>
+          <a:ln>
+            <a:noFill/>
+          </a:ln>
+        </p:spPr>
+        <p:style>
+          <a:lnRef idx="2">
+            <a:schemeClr val="accent1">
+              <a:shade val="50000"/>
+            </a:schemeClr>
+          </a:lnRef>
+          <a:fillRef idx="1">
+            <a:schemeClr val="accent1"/>
+          </a:fillRef>
+          <a:effectRef idx="0">
+            <a:schemeClr val="accent1"/>
+          </a:effectRef>
+          <a:fontRef idx="minor">
+            <a:schemeClr val="lt1"/>
+          </a:fontRef>
+        </p:style>
+        <p:txBody>
+          <a:bodyPr rtlCol="0" anchor="ctr"/>
+          <a:lstStyle/>
+          <a:p>
+            <a:pPr algn="ctr"/>
+            <a:endParaRPr lang="en-US" dirty="0"/>
+          </a:p>
+        </p:txBody>
+      </p:sp>
+      <p:sp>
+        <p:nvSpPr>
+          <p:cNvPr id="10" name="Freeform: Shape 9">
+            <a:extLst>
+              <a:ext uri="{FF2B5EF4-FFF2-40B4-BE49-F238E27FC236}">
+                <a16:creationId xmlns:a16="http://schemas.microsoft.com/office/drawing/2014/main" id="{83C98ABE-055B-441F-B07E-44F97F083C39}"/>
+              </a:ext>
+              <a:ext uri="{C183D7F6-B498-43B3-948B-1728B52AA6E4}">
+                <adec:decorative xmlns:adec="http://schemas.microsoft.com/office/drawing/2017/decorative" val="1"/>
+              </a:ext>
+            </a:extLst>
+          </p:cNvPr>
+          <p:cNvSpPr>
+            <a:spLocks noGrp="1" noRot="1" noChangeAspect="1" noMove="1" noResize="1" noEditPoints="1" noAdjustHandles="1" noChangeArrowheads="1" noChangeShapeType="1" noTextEdit="1"/>
+          </p:cNvSpPr>
+          <p:nvPr>
+            <p:extLst>
+              <p:ext uri="{386F3935-93C4-4BCD-93E2-E3B085C9AB24}">
+                <p16:designElem xmlns:p16="http://schemas.microsoft.com/office/powerpoint/2015/main" val="1"/>
+              </p:ext>
+            </p:extLst>
+          </p:nvPr>
+        </p:nvSpPr>
+        <p:spPr>
+          <a:xfrm rot="18900000" flipH="1">
+            <a:off x="-376156" y="-253670"/>
+            <a:ext cx="1827638" cy="1376989"/>
+          </a:xfrm>
+          <a:custGeom>
+            <a:avLst/>
+            <a:gdLst>
+              <a:gd name="connsiteX0" fmla="*/ 0 w 1827638"/>
+              <a:gd name="connsiteY0" fmla="*/ 987379 h 1376989"/>
+              <a:gd name="connsiteX1" fmla="*/ 987379 w 1827638"/>
+              <a:gd name="connsiteY1" fmla="*/ 0 h 1376989"/>
+              <a:gd name="connsiteX2" fmla="*/ 1827638 w 1827638"/>
+              <a:gd name="connsiteY2" fmla="*/ 840260 h 1376989"/>
+              <a:gd name="connsiteX3" fmla="*/ 1827638 w 1827638"/>
+              <a:gd name="connsiteY3" fmla="*/ 1376989 h 1376989"/>
+              <a:gd name="connsiteX4" fmla="*/ 0 w 1827638"/>
+              <a:gd name="connsiteY4" fmla="*/ 1376989 h 1376989"/>
+            </a:gdLst>
+            <a:ahLst/>
+            <a:cxnLst>
+              <a:cxn ang="0">
+                <a:pos x="connsiteX0" y="connsiteY0"/>
+              </a:cxn>
+              <a:cxn ang="0">
+                <a:pos x="connsiteX1" y="connsiteY1"/>
+              </a:cxn>
+              <a:cxn ang="0">
+                <a:pos x="connsiteX2" y="connsiteY2"/>
+              </a:cxn>
+              <a:cxn ang="0">
+                <a:pos x="connsiteX3" y="connsiteY3"/>
+              </a:cxn>
+              <a:cxn ang="0">
+                <a:pos x="connsiteX4" y="connsiteY4"/>
+              </a:cxn>
+            </a:cxnLst>
+            <a:rect l="l" t="t" r="r" b="b"/>
+            <a:pathLst>
+              <a:path w="1827638" h="1376989">
+                <a:moveTo>
+                  <a:pt x="0" y="987379"/>
+                </a:moveTo>
+                <a:lnTo>
+                  <a:pt x="987379" y="0"/>
+                </a:lnTo>
+                <a:lnTo>
+                  <a:pt x="1827638" y="840260"/>
+                </a:lnTo>
+                <a:lnTo>
+                  <a:pt x="1827638" y="1376989"/>
+                </a:lnTo>
+                <a:lnTo>
+                  <a:pt x="0" y="1376989"/>
+                </a:lnTo>
+                <a:close/>
+              </a:path>
+            </a:pathLst>
+          </a:custGeom>
+          <a:solidFill>
+            <a:schemeClr val="accent1">
+              <a:alpha val="30000"/>
+            </a:schemeClr>
+          </a:solidFill>
+          <a:ln>
+            <a:noFill/>
+          </a:ln>
+        </p:spPr>
+        <p:style>
+          <a:lnRef idx="2">
+            <a:schemeClr val="accent1">
+              <a:shade val="50000"/>
+            </a:schemeClr>
+          </a:lnRef>
+          <a:fillRef idx="1">
+            <a:schemeClr val="accent1"/>
+          </a:fillRef>
+          <a:effectRef idx="0">
+            <a:schemeClr val="accent1"/>
+          </a:effectRef>
+          <a:fontRef idx="minor">
+            <a:schemeClr val="lt1"/>
+          </a:fontRef>
+        </p:style>
+        <p:txBody>
+          <a:bodyPr rtlCol="0" anchor="ctr"/>
+          <a:lstStyle/>
+          <a:p>
+            <a:pPr algn="ctr"/>
+            <a:endParaRPr lang="en-US" dirty="0"/>
+          </a:p>
+        </p:txBody>
+      </p:sp>
+      <p:sp>
+        <p:nvSpPr>
+          <p:cNvPr id="12" name="Rectangle 11">
+            <a:extLst>
+              <a:ext uri="{FF2B5EF4-FFF2-40B4-BE49-F238E27FC236}">
+                <a16:creationId xmlns:a16="http://schemas.microsoft.com/office/drawing/2014/main" id="{29FDB030-9B49-4CED-8CCD-4D99382388AC}"/>
+              </a:ext>
+              <a:ext uri="{C183D7F6-B498-43B3-948B-1728B52AA6E4}">
+                <adec:decorative xmlns:adec="http://schemas.microsoft.com/office/drawing/2017/decorative" val="1"/>
+              </a:ext>
+            </a:extLst>
+          </p:cNvPr>
+          <p:cNvSpPr>
+            <a:spLocks noGrp="1" noRot="1" noChangeAspect="1" noMove="1" noResize="1" noEditPoints="1" noAdjustHandles="1" noChangeArrowheads="1" noChangeShapeType="1" noTextEdit="1"/>
+          </p:cNvSpPr>
+          <p:nvPr>
+            <p:extLst>
+              <p:ext uri="{386F3935-93C4-4BCD-93E2-E3B085C9AB24}">
+                <p16:designElem xmlns:p16="http://schemas.microsoft.com/office/powerpoint/2015/main" val="1"/>
+              </p:ext>
+            </p:extLst>
+          </p:nvPr>
+        </p:nvSpPr>
+        <p:spPr>
+          <a:xfrm rot="18900000" flipH="1">
+            <a:off x="891641" y="422146"/>
+            <a:ext cx="645368" cy="645368"/>
+          </a:xfrm>
+          <a:prstGeom prst="rect">
+            <a:avLst/>
+          </a:prstGeom>
+          <a:solidFill>
+            <a:schemeClr val="accent1">
+              <a:alpha val="30000"/>
+            </a:schemeClr>
+          </a:solidFill>
+          <a:ln>
+            <a:noFill/>
+          </a:ln>
+        </p:spPr>
+        <p:style>
+          <a:lnRef idx="2">
+            <a:schemeClr val="accent1">
+              <a:shade val="50000"/>
+            </a:schemeClr>
+          </a:lnRef>
+          <a:fillRef idx="1">
+            <a:schemeClr val="accent1"/>
+          </a:fillRef>
+          <a:effectRef idx="0">
+            <a:schemeClr val="accent1"/>
+          </a:effectRef>
+          <a:fontRef idx="minor">
+            <a:schemeClr val="lt1"/>
+          </a:fontRef>
+        </p:style>
+        <p:txBody>
+          <a:bodyPr rtlCol="0" anchor="ctr"/>
+          <a:lstStyle/>
+          <a:p>
+            <a:pPr algn="ctr"/>
+            <a:endParaRPr lang="en-US"/>
+          </a:p>
+        </p:txBody>
+      </p:sp>
+      <p:sp>
+        <p:nvSpPr>
+          <p:cNvPr id="14" name="Rectangle 13">
+            <a:extLst>
+              <a:ext uri="{FF2B5EF4-FFF2-40B4-BE49-F238E27FC236}">
+                <a16:creationId xmlns:a16="http://schemas.microsoft.com/office/drawing/2014/main" id="{3783CA14-24A1-485C-8B30-D6A5D87987AD}"/>
+              </a:ext>
+              <a:ext uri="{C183D7F6-B498-43B3-948B-1728B52AA6E4}">
+                <adec:decorative xmlns:adec="http://schemas.microsoft.com/office/drawing/2017/decorative" val="1"/>
+              </a:ext>
+            </a:extLst>
+          </p:cNvPr>
+          <p:cNvSpPr>
+            <a:spLocks noGrp="1" noRot="1" noChangeAspect="1" noMove="1" noResize="1" noEditPoints="1" noAdjustHandles="1" noChangeArrowheads="1" noChangeShapeType="1" noTextEdit="1"/>
+          </p:cNvSpPr>
+          <p:nvPr>
+            <p:extLst>
+              <p:ext uri="{386F3935-93C4-4BCD-93E2-E3B085C9AB24}">
+                <p16:designElem xmlns:p16="http://schemas.microsoft.com/office/powerpoint/2015/main" val="1"/>
+              </p:ext>
+            </p:extLst>
+          </p:nvPr>
+        </p:nvSpPr>
+        <p:spPr>
+          <a:xfrm rot="18900000" flipH="1">
+            <a:off x="10043482" y="655140"/>
+            <a:ext cx="687472" cy="687472"/>
+          </a:xfrm>
+          <a:prstGeom prst="rect">
+            <a:avLst/>
+          </a:prstGeom>
+          <a:solidFill>
+            <a:schemeClr val="accent4">
+              <a:alpha val="30000"/>
+            </a:schemeClr>
+          </a:solidFill>
+          <a:ln>
+            <a:noFill/>
+          </a:ln>
+        </p:spPr>
+        <p:style>
+          <a:lnRef idx="2">
+            <a:schemeClr val="accent1">
+              <a:shade val="50000"/>
+            </a:schemeClr>
+          </a:lnRef>
+          <a:fillRef idx="1">
+            <a:schemeClr val="accent1"/>
+          </a:fillRef>
+          <a:effectRef idx="0">
+            <a:schemeClr val="accent1"/>
+          </a:effectRef>
+          <a:fontRef idx="minor">
+            <a:schemeClr val="lt1"/>
+          </a:fontRef>
+        </p:style>
+        <p:txBody>
+          <a:bodyPr rtlCol="0" anchor="ctr"/>
+          <a:lstStyle/>
+          <a:p>
+            <a:pPr algn="ctr"/>
+            <a:endParaRPr lang="en-US"/>
+          </a:p>
+        </p:txBody>
+      </p:sp>
+      <p:sp>
+        <p:nvSpPr>
+          <p:cNvPr id="16" name="Freeform: Shape 15">
+            <a:extLst>
+              <a:ext uri="{FF2B5EF4-FFF2-40B4-BE49-F238E27FC236}">
+                <a16:creationId xmlns:a16="http://schemas.microsoft.com/office/drawing/2014/main" id="{9A97C86A-04D6-40F7-AE84-31AB43E6A846}"/>
+              </a:ext>
+              <a:ext uri="{C183D7F6-B498-43B3-948B-1728B52AA6E4}">
+                <adec:decorative xmlns:adec="http://schemas.microsoft.com/office/drawing/2017/decorative" val="1"/>
+              </a:ext>
+            </a:extLst>
+          </p:cNvPr>
+          <p:cNvSpPr>
+            <a:spLocks noGrp="1" noRot="1" noChangeAspect="1" noMove="1" noResize="1" noEditPoints="1" noAdjustHandles="1" noChangeArrowheads="1" noChangeShapeType="1" noTextEdit="1"/>
+          </p:cNvSpPr>
+          <p:nvPr>
+            <p:extLst>
+              <p:ext uri="{386F3935-93C4-4BCD-93E2-E3B085C9AB24}">
+                <p16:designElem xmlns:p16="http://schemas.microsoft.com/office/powerpoint/2015/main" val="1"/>
+              </p:ext>
+            </p:extLst>
+          </p:nvPr>
+        </p:nvSpPr>
+        <p:spPr>
+          <a:xfrm rot="10800000" flipH="1">
+            <a:off x="9356643" y="0"/>
+            <a:ext cx="2835357" cy="1480837"/>
+          </a:xfrm>
+          <a:custGeom>
+            <a:avLst/>
+            <a:gdLst>
+              <a:gd name="connsiteX0" fmla="*/ 2835357 w 2835357"/>
+              <a:gd name="connsiteY0" fmla="*/ 1480837 h 1480837"/>
+              <a:gd name="connsiteX1" fmla="*/ 0 w 2835357"/>
+              <a:gd name="connsiteY1" fmla="*/ 1480837 h 1480837"/>
+              <a:gd name="connsiteX2" fmla="*/ 1552727 w 2835357"/>
+              <a:gd name="connsiteY2" fmla="*/ 0 h 1480837"/>
+              <a:gd name="connsiteX3" fmla="*/ 2835357 w 2835357"/>
+              <a:gd name="connsiteY3" fmla="*/ 1223245 h 1480837"/>
+            </a:gdLst>
+            <a:ahLst/>
+            <a:cxnLst>
+              <a:cxn ang="0">
+                <a:pos x="connsiteX0" y="connsiteY0"/>
+              </a:cxn>
+              <a:cxn ang="0">
+                <a:pos x="connsiteX1" y="connsiteY1"/>
+              </a:cxn>
+              <a:cxn ang="0">
+                <a:pos x="connsiteX2" y="connsiteY2"/>
+              </a:cxn>
+              <a:cxn ang="0">
+                <a:pos x="connsiteX3" y="connsiteY3"/>
+              </a:cxn>
+            </a:cxnLst>
+            <a:rect l="l" t="t" r="r" b="b"/>
+            <a:pathLst>
+              <a:path w="2835357" h="1480837">
+                <a:moveTo>
+                  <a:pt x="2835357" y="1480837"/>
+                </a:moveTo>
+                <a:lnTo>
+                  <a:pt x="0" y="1480837"/>
+                </a:lnTo>
+                <a:lnTo>
+                  <a:pt x="1552727" y="0"/>
+                </a:lnTo>
+                <a:lnTo>
+                  <a:pt x="2835357" y="1223245"/>
+                </a:lnTo>
+                <a:close/>
+              </a:path>
+            </a:pathLst>
+          </a:custGeom>
+          <a:solidFill>
+            <a:schemeClr val="accent4">
+              <a:alpha val="30000"/>
+            </a:schemeClr>
+          </a:solidFill>
+          <a:ln>
+            <a:noFill/>
+          </a:ln>
+        </p:spPr>
+        <p:style>
+          <a:lnRef idx="2">
+            <a:schemeClr val="accent1">
+              <a:shade val="50000"/>
+            </a:schemeClr>
+          </a:lnRef>
+          <a:fillRef idx="1">
+            <a:schemeClr val="accent1"/>
+          </a:fillRef>
+          <a:effectRef idx="0">
+            <a:schemeClr val="accent1"/>
+          </a:effectRef>
+          <a:fontRef idx="minor">
+            <a:schemeClr val="lt1"/>
+          </a:fontRef>
+        </p:style>
+        <p:txBody>
+          <a:bodyPr wrap="square" rtlCol="0" anchor="ctr">
+            <a:noAutofit/>
+          </a:bodyPr>
+          <a:lstStyle/>
+          <a:p>
+            <a:pPr algn="ctr"/>
+            <a:endParaRPr lang="en-US" dirty="0"/>
+          </a:p>
+        </p:txBody>
+      </p:sp>
+      <p:sp>
+        <p:nvSpPr>
+          <p:cNvPr id="18" name="Isosceles Triangle 17">
+            <a:extLst>
+              <a:ext uri="{FF2B5EF4-FFF2-40B4-BE49-F238E27FC236}">
+                <a16:creationId xmlns:a16="http://schemas.microsoft.com/office/drawing/2014/main" id="{FF9F2414-84E8-453E-B1F3-389FDE8192D9}"/>
+              </a:ext>
+              <a:ext uri="{C183D7F6-B498-43B3-948B-1728B52AA6E4}">
+                <adec:decorative xmlns:adec="http://schemas.microsoft.com/office/drawing/2017/decorative" val="1"/>
+              </a:ext>
+            </a:extLst>
+          </p:cNvPr>
+          <p:cNvSpPr>
+            <a:spLocks noGrp="1" noRot="1" noChangeAspect="1" noMove="1" noResize="1" noEditPoints="1" noAdjustHandles="1" noChangeArrowheads="1" noChangeShapeType="1" noTextEdit="1"/>
+          </p:cNvSpPr>
+          <p:nvPr>
+            <p:extLst>
+              <p:ext uri="{386F3935-93C4-4BCD-93E2-E3B085C9AB24}">
+                <p16:designElem xmlns:p16="http://schemas.microsoft.com/office/powerpoint/2015/main" val="1"/>
+              </p:ext>
+            </p:extLst>
+          </p:nvPr>
+        </p:nvSpPr>
+        <p:spPr>
+          <a:xfrm flipH="1">
+            <a:off x="7976344" y="6115501"/>
+            <a:ext cx="1494513" cy="742499"/>
+          </a:xfrm>
+          <a:prstGeom prst="triangle">
+            <a:avLst/>
+          </a:prstGeom>
+          <a:solidFill>
+            <a:schemeClr val="accent1">
+              <a:alpha val="30000"/>
+            </a:schemeClr>
+          </a:solidFill>
+          <a:ln>
+            <a:noFill/>
+          </a:ln>
+        </p:spPr>
+        <p:style>
+          <a:lnRef idx="2">
+            <a:schemeClr val="accent1">
+              <a:shade val="50000"/>
+            </a:schemeClr>
+          </a:lnRef>
+          <a:fillRef idx="1">
+            <a:schemeClr val="accent1"/>
+          </a:fillRef>
+          <a:effectRef idx="0">
+            <a:schemeClr val="accent1"/>
+          </a:effectRef>
+          <a:fontRef idx="minor">
+            <a:schemeClr val="lt1"/>
+          </a:fontRef>
+        </p:style>
+        <p:txBody>
+          <a:bodyPr rtlCol="0" anchor="ctr"/>
+          <a:lstStyle/>
+          <a:p>
+            <a:pPr algn="ctr"/>
+            <a:endParaRPr lang="en-US"/>
+          </a:p>
+        </p:txBody>
+      </p:sp>
+      <p:pic>
+        <p:nvPicPr>
+          <p:cNvPr id="3" name="Picture 2">
+            <a:extLst>
+              <a:ext uri="{FF2B5EF4-FFF2-40B4-BE49-F238E27FC236}">
+                <a16:creationId xmlns:a16="http://schemas.microsoft.com/office/drawing/2014/main" id="{47535E0C-94AE-7600-ED31-C3D238643087}"/>
+              </a:ext>
+            </a:extLst>
+          </p:cNvPr>
+          <p:cNvPicPr>
+            <a:picLocks noChangeAspect="1"/>
+          </p:cNvPicPr>
+          <p:nvPr/>
+        </p:nvPicPr>
+        <p:blipFill>
+          <a:blip r:embed="rId2"/>
+          <a:stretch>
+            <a:fillRect/>
+          </a:stretch>
+        </p:blipFill>
+        <p:spPr>
+          <a:xfrm>
+            <a:off x="1760540" y="643467"/>
+            <a:ext cx="8670919" cy="5571065"/>
+          </a:xfrm>
+          <a:prstGeom prst="rect">
+            <a:avLst/>
+          </a:prstGeom>
+          <a:solidFill>
+            <a:srgbClr val="FFFFFF">
+              <a:shade val="85000"/>
+            </a:srgbClr>
+          </a:solidFill>
+          <a:ln w="88900" cap="sq">
+            <a:solidFill>
+              <a:srgbClr val="FFFFFF"/>
+            </a:solidFill>
+            <a:miter lim="800000"/>
+          </a:ln>
+          <a:effectLst>
+            <a:outerShdw blurRad="55000" dist="18000" dir="5400000" algn="tl" rotWithShape="0">
+              <a:srgbClr val="000000">
+                <a:alpha val="40000"/>
+              </a:srgbClr>
+            </a:outerShdw>
+          </a:effectLst>
+          <a:scene3d>
+            <a:camera prst="orthographicFront"/>
+            <a:lightRig rig="twoPt" dir="t">
+              <a:rot lat="0" lon="0" rev="7200000"/>
+            </a:lightRig>
+          </a:scene3d>
+          <a:sp3d>
+            <a:bevelT w="25400" h="19050"/>
+            <a:contourClr>
+              <a:srgbClr val="FFFFFF"/>
+            </a:contourClr>
+          </a:sp3d>
+        </p:spPr>
+      </p:pic>
+      <p:sp>
+        <p:nvSpPr>
+          <p:cNvPr id="20" name="Isosceles Triangle 19">
+            <a:extLst>
+              <a:ext uri="{FF2B5EF4-FFF2-40B4-BE49-F238E27FC236}">
+                <a16:creationId xmlns:a16="http://schemas.microsoft.com/office/drawing/2014/main" id="{3ECA69A1-7536-43AC-85EF-C7106179F5ED}"/>
+              </a:ext>
+              <a:ext uri="{C183D7F6-B498-43B3-948B-1728B52AA6E4}">
+                <adec:decorative xmlns:adec="http://schemas.microsoft.com/office/drawing/2017/decorative" val="1"/>
+              </a:ext>
+            </a:extLst>
+          </p:cNvPr>
+          <p:cNvSpPr>
+            <a:spLocks noGrp="1" noRot="1" noChangeAspect="1" noMove="1" noResize="1" noEditPoints="1" noAdjustHandles="1" noChangeArrowheads="1" noChangeShapeType="1" noTextEdit="1"/>
+          </p:cNvSpPr>
+          <p:nvPr>
+            <p:extLst>
+              <p:ext uri="{386F3935-93C4-4BCD-93E2-E3B085C9AB24}">
+                <p16:designElem xmlns:p16="http://schemas.microsoft.com/office/powerpoint/2015/main" val="1"/>
+              </p:ext>
+            </p:extLst>
+          </p:nvPr>
+        </p:nvSpPr>
+        <p:spPr>
+          <a:xfrm flipH="1">
+            <a:off x="7604080" y="6453143"/>
+            <a:ext cx="814903" cy="404857"/>
+          </a:xfrm>
+          <a:prstGeom prst="triangle">
+            <a:avLst/>
+          </a:prstGeom>
+          <a:solidFill>
+            <a:schemeClr val="accent1">
+              <a:alpha val="30000"/>
+            </a:schemeClr>
+          </a:solidFill>
+          <a:ln>
+            <a:noFill/>
+          </a:ln>
+        </p:spPr>
+        <p:style>
+          <a:lnRef idx="2">
+            <a:schemeClr val="accent1">
+              <a:shade val="50000"/>
+            </a:schemeClr>
+          </a:lnRef>
+          <a:fillRef idx="1">
+            <a:schemeClr val="accent1"/>
+          </a:fillRef>
+          <a:effectRef idx="0">
+            <a:schemeClr val="accent1"/>
+          </a:effectRef>
+          <a:fontRef idx="minor">
+            <a:schemeClr val="lt1"/>
+          </a:fontRef>
+        </p:style>
+        <p:txBody>
+          <a:bodyPr rtlCol="0" anchor="ctr"/>
+          <a:lstStyle/>
+          <a:p>
+            <a:pPr algn="ctr"/>
+            <a:endParaRPr lang="en-US"/>
+          </a:p>
+        </p:txBody>
+      </p:sp>
+    </p:spTree>
+    <p:extLst>
+      <p:ext uri="{BB962C8B-B14F-4D97-AF65-F5344CB8AC3E}">
+        <p14:creationId xmlns:p14="http://schemas.microsoft.com/office/powerpoint/2010/main" val="2079532090"/>
+      </p:ext>
+    </p:extLst>
+  </p:cSld>
+  <p:clrMapOvr>
+    <a:masterClrMapping/>
+  </p:clrMapOvr>
+</p:sld>
+</file>
+
+<file path=ppt/slides/slide14.xml><?xml version="1.0" encoding="utf-8"?>
+<p:sld xmlns:a="http://schemas.openxmlformats.org/drawingml/2006/main" xmlns:r="http://schemas.openxmlformats.org/officeDocument/2006/relationships" xmlns:p="http://schemas.openxmlformats.org/presentationml/2006/main">
+  <p:cSld name="Slide 13">
+    <p:bg>
+      <p:bgPr>
+        <a:solidFill>
+          <a:srgbClr val="14213D"/>
+        </a:solidFill>
+        <a:effectLst/>
+      </p:bgPr>
+    </p:bg>
+    <p:spTree>
+      <p:nvGrpSpPr>
+        <p:cNvPr id="1" name=""/>
+        <p:cNvGrpSpPr/>
+        <p:nvPr/>
+      </p:nvGrpSpPr>
+      <p:grpSpPr>
+        <a:xfrm>
+          <a:off x="0" y="0"/>
+          <a:ext cx="0" cy="0"/>
+          <a:chOff x="0" y="0"/>
+          <a:chExt cx="0" cy="0"/>
+        </a:xfrm>
+      </p:grpSpPr>
+      <p:sp>
+        <p:nvSpPr>
           <p:cNvPr id="2" name="Shape 0"/>
           <p:cNvSpPr/>
           <p:nvPr/>
@@ -5830,17 +6348,24 @@
             <a:prstDash val="solid"/>
           </a:ln>
         </p:spPr>
+        <p:txBody>
+          <a:bodyPr/>
+          <a:lstStyle/>
+          <a:p>
+            <a:endParaRPr lang="en-BR"/>
+          </a:p>
+        </p:txBody>
       </p:sp>
       <p:pic>
         <p:nvPicPr>
-          <p:cNvPr id="3" name="Image 0" descr="preencoded.png">    </p:cNvPr>
+          <p:cNvPr id="3" name="Image 0" descr="preencoded.png"/>
           <p:cNvPicPr>
             <a:picLocks noChangeAspect="1"/>
           </p:cNvPicPr>
           <p:nvPr/>
         </p:nvPicPr>
         <p:blipFill>
-          <a:blip r:embed="rId1"/>
+          <a:blip r:embed="rId3"/>
           <a:stretch>
             <a:fillRect/>
           </a:stretch>
@@ -5876,7 +6401,7 @@
           <a:bodyPr wrap="square" lIns="0" tIns="0" rIns="0" bIns="0" rtlCol="0" anchor="ctr"/>
           <a:lstStyle/>
           <a:p>
-            <a:pPr indent="0" marL="0">
+            <a:pPr marL="0" indent="0">
               <a:buNone/>
             </a:pPr>
             <a:r>
@@ -5915,7 +6440,7 @@
           <a:bodyPr wrap="square" lIns="0" tIns="0" rIns="0" bIns="0" rtlCol="0" anchor="ctr"/>
           <a:lstStyle/>
           <a:p>
-            <a:pPr indent="0" marL="0">
+            <a:pPr marL="0" indent="0">
               <a:buNone/>
             </a:pPr>
             <a:r>
@@ -5935,14 +6460,14 @@
       </p:sp>
       <p:pic>
         <p:nvPicPr>
-          <p:cNvPr id="6" name="Image 1" descr="preencoded.png">    </p:cNvPr>
+          <p:cNvPr id="6" name="Image 1" descr="preencoded.png"/>
           <p:cNvPicPr>
             <a:picLocks noChangeAspect="1"/>
           </p:cNvPicPr>
           <p:nvPr/>
         </p:nvPicPr>
         <p:blipFill>
-          <a:blip r:embed="rId2"/>
+          <a:blip r:embed="rId4"/>
           <a:stretch>
             <a:fillRect/>
           </a:stretch>
@@ -5960,7 +6485,7 @@
       <p:sp>
         <p:nvSpPr>
           <p:cNvPr id="7" name="Text 3">
-            <a:hlinkClick r:id="rId3" tooltip=""/>
+            <a:hlinkClick r:id="rId5"/>
           </p:cNvPr>
           <p:cNvSpPr txBox="1"/>
           <p:nvPr/>
@@ -5980,7 +6505,7 @@
           <a:bodyPr wrap="square" lIns="0" tIns="0" rIns="0" bIns="0" rtlCol="0" anchor="ctr"/>
           <a:lstStyle/>
           <a:p>
-            <a:pPr indent="0" marL="0">
+            <a:pPr marL="0" indent="0">
               <a:buNone/>
             </a:pPr>
             <a:r>
@@ -5991,7 +6516,7 @@
                 <a:latin typeface="Calibri" pitchFamily="34" charset="0"/>
                 <a:ea typeface="Calibri" pitchFamily="34" charset="-122"/>
                 <a:cs typeface="Calibri" pitchFamily="34" charset="-120"/>
-                <a:hlinkClick r:id="rId3" invalidUrl="" action="" tgtFrame="" tooltip="" history="1" highlightClick="0" endSnd="0">
+                <a:hlinkClick r:id="rId5">
                   <a:extLst>
                     <a:ext uri="{A12FA001-AC4F-418D-AE19-62706E023703}">
                       <ahyp:hlinkClr xmlns:ahyp="http://schemas.microsoft.com/office/drawing/2018/hyperlinkcolor" val="tx"/>
@@ -6026,7 +6551,7 @@
           <a:bodyPr wrap="square" lIns="0" tIns="0" rIns="0" bIns="0" rtlCol="0" anchor="ctr"/>
           <a:lstStyle/>
           <a:p>
-            <a:pPr indent="0" marL="0">
+            <a:pPr marL="0" indent="0">
               <a:buNone/>
             </a:pPr>
             <a:r>
@@ -6043,7 +6568,7 @@
             <a:endParaRPr lang="en-US" sz="1500" dirty="0"/>
           </a:p>
           <a:p>
-            <a:pPr indent="0" marL="0">
+            <a:pPr marL="0" indent="0">
               <a:buNone/>
             </a:pPr>
             <a:r>
@@ -6082,7 +6607,7 @@
           <a:bodyPr wrap="square" lIns="0" tIns="0" rIns="0" bIns="0" rtlCol="0" anchor="ctr"/>
           <a:lstStyle/>
           <a:p>
-            <a:pPr algn="r" indent="0" marL="0">
+            <a:pPr marL="0" indent="0" algn="r">
               <a:buNone/>
             </a:pPr>
             <a:r>
@@ -6146,7 +6671,7 @@
           <a:bodyPr wrap="square" lIns="0" tIns="0" rIns="0" bIns="0" rtlCol="0" anchor="t"/>
           <a:lstStyle/>
           <a:p>
-            <a:pPr indent="0" marL="0">
+            <a:pPr marL="0" indent="0">
               <a:buNone/>
             </a:pPr>
             <a:r>
@@ -6296,13 +6821,20 @@
             <a:prstDash val="solid"/>
           </a:ln>
           <a:effectLst>
-            <a:outerShdw sx="100000" sy="100000" kx="0" ky="0" algn="bl" rotWithShape="0" blurRad="76200" dist="25400" dir="5400000">
+            <a:outerShdw blurRad="76200" dist="25400" dir="5400000" algn="bl" rotWithShape="0">
               <a:srgbClr val="000000">
                 <a:alpha val="12000"/>
               </a:srgbClr>
             </a:outerShdw>
           </a:effectLst>
         </p:spPr>
+        <p:txBody>
+          <a:bodyPr/>
+          <a:lstStyle/>
+          <a:p>
+            <a:endParaRPr lang="en-BR"/>
+          </a:p>
+        </p:txBody>
       </p:sp>
       <p:sp>
         <p:nvSpPr>
@@ -6325,7 +6857,7 @@
           <a:bodyPr wrap="square" lIns="0" tIns="0" rIns="0" bIns="0" rtlCol="0" anchor="ctr"/>
           <a:lstStyle/>
           <a:p>
-            <a:pPr indent="0" marL="0">
+            <a:pPr marL="0" indent="0">
               <a:buNone/>
             </a:pPr>
             <a:r>
@@ -6364,7 +6896,7 @@
           <a:bodyPr wrap="square" lIns="0" tIns="0" rIns="0" bIns="0" rtlCol="0" anchor="ctr"/>
           <a:lstStyle/>
           <a:p>
-            <a:pPr indent="0" marL="0">
+            <a:pPr marL="0" indent="0">
               <a:buNone/>
             </a:pPr>
             <a:r>
@@ -6408,13 +6940,20 @@
             <a:prstDash val="solid"/>
           </a:ln>
           <a:effectLst>
-            <a:outerShdw sx="100000" sy="100000" kx="0" ky="0" algn="bl" rotWithShape="0" blurRad="76200" dist="25400" dir="5400000">
+            <a:outerShdw blurRad="76200" dist="25400" dir="5400000" algn="bl" rotWithShape="0">
               <a:srgbClr val="000000">
                 <a:alpha val="12000"/>
               </a:srgbClr>
             </a:outerShdw>
           </a:effectLst>
         </p:spPr>
+        <p:txBody>
+          <a:bodyPr/>
+          <a:lstStyle/>
+          <a:p>
+            <a:endParaRPr lang="en-BR"/>
+          </a:p>
+        </p:txBody>
       </p:sp>
       <p:sp>
         <p:nvSpPr>
@@ -6437,7 +6976,7 @@
           <a:bodyPr wrap="square" lIns="0" tIns="0" rIns="0" bIns="0" rtlCol="0" anchor="ctr"/>
           <a:lstStyle/>
           <a:p>
-            <a:pPr indent="0" marL="0">
+            <a:pPr marL="0" indent="0">
               <a:buNone/>
             </a:pPr>
             <a:r>
@@ -6476,7 +7015,7 @@
           <a:bodyPr wrap="square" lIns="0" tIns="0" rIns="0" bIns="0" rtlCol="0" anchor="ctr"/>
           <a:lstStyle/>
           <a:p>
-            <a:pPr indent="0" marL="0">
+            <a:pPr marL="0" indent="0">
               <a:buNone/>
             </a:pPr>
             <a:r>
@@ -6520,13 +7059,20 @@
             <a:prstDash val="solid"/>
           </a:ln>
           <a:effectLst>
-            <a:outerShdw sx="100000" sy="100000" kx="0" ky="0" algn="bl" rotWithShape="0" blurRad="76200" dist="25400" dir="5400000">
+            <a:outerShdw blurRad="76200" dist="25400" dir="5400000" algn="bl" rotWithShape="0">
               <a:srgbClr val="000000">
                 <a:alpha val="12000"/>
               </a:srgbClr>
             </a:outerShdw>
           </a:effectLst>
         </p:spPr>
+        <p:txBody>
+          <a:bodyPr/>
+          <a:lstStyle/>
+          <a:p>
+            <a:endParaRPr lang="en-BR"/>
+          </a:p>
+        </p:txBody>
       </p:sp>
       <p:sp>
         <p:nvSpPr>
@@ -6549,7 +7095,7 @@
           <a:bodyPr wrap="square" lIns="0" tIns="0" rIns="0" bIns="0" rtlCol="0" anchor="ctr"/>
           <a:lstStyle/>
           <a:p>
-            <a:pPr indent="0" marL="0">
+            <a:pPr marL="0" indent="0">
               <a:buNone/>
             </a:pPr>
             <a:r>
@@ -6588,7 +7134,7 @@
           <a:bodyPr wrap="square" lIns="0" tIns="0" rIns="0" bIns="0" rtlCol="0" anchor="ctr"/>
           <a:lstStyle/>
           <a:p>
-            <a:pPr indent="0" marL="0">
+            <a:pPr marL="0" indent="0">
               <a:buNone/>
             </a:pPr>
             <a:r>
@@ -6627,7 +7173,7 @@
           <a:bodyPr wrap="square" lIns="0" tIns="0" rIns="0" bIns="0" rtlCol="0" anchor="ctr"/>
           <a:lstStyle/>
           <a:p>
-            <a:pPr indent="0" marL="0">
+            <a:pPr marL="0" indent="0">
               <a:buNone/>
             </a:pPr>
             <a:r>
@@ -6666,7 +7212,7 @@
           <a:bodyPr wrap="square" lIns="0" tIns="0" rIns="0" bIns="0" rtlCol="0" anchor="ctr"/>
           <a:lstStyle/>
           <a:p>
-            <a:pPr algn="r" indent="0" marL="0">
+            <a:pPr marL="0" indent="0" algn="r">
               <a:buNone/>
             </a:pPr>
             <a:r>
@@ -6730,7 +7276,7 @@
           <a:bodyPr wrap="square" lIns="0" tIns="0" rIns="0" bIns="0" rtlCol="0" anchor="t"/>
           <a:lstStyle/>
           <a:p>
-            <a:pPr indent="0" marL="0">
+            <a:pPr marL="0" indent="0">
               <a:buNone/>
             </a:pPr>
             <a:r>
@@ -6774,13 +7320,20 @@
             <a:prstDash val="solid"/>
           </a:ln>
           <a:effectLst>
-            <a:outerShdw sx="100000" sy="100000" kx="0" ky="0" algn="bl" rotWithShape="0" blurRad="76200" dist="25400" dir="5400000">
+            <a:outerShdw blurRad="76200" dist="25400" dir="5400000" algn="bl" rotWithShape="0">
               <a:srgbClr val="000000">
                 <a:alpha val="12000"/>
               </a:srgbClr>
             </a:outerShdw>
           </a:effectLst>
         </p:spPr>
+        <p:txBody>
+          <a:bodyPr/>
+          <a:lstStyle/>
+          <a:p>
+            <a:endParaRPr lang="en-BR"/>
+          </a:p>
+        </p:txBody>
       </p:sp>
       <p:sp>
         <p:nvSpPr>
@@ -6806,17 +7359,24 @@
             <a:prstDash val="solid"/>
           </a:ln>
         </p:spPr>
+        <p:txBody>
+          <a:bodyPr/>
+          <a:lstStyle/>
+          <a:p>
+            <a:endParaRPr lang="en-BR"/>
+          </a:p>
+        </p:txBody>
       </p:sp>
       <p:pic>
         <p:nvPicPr>
-          <p:cNvPr id="5" name="Image 0" descr="preencoded.png">    </p:cNvPr>
+          <p:cNvPr id="5" name="Image 0" descr="preencoded.png"/>
           <p:cNvPicPr>
             <a:picLocks noChangeAspect="1"/>
           </p:cNvPicPr>
           <p:nvPr/>
         </p:nvPicPr>
         <p:blipFill>
-          <a:blip r:embed="rId1"/>
+          <a:blip r:embed="rId3"/>
           <a:stretch>
             <a:fillRect/>
           </a:stretch>
@@ -6852,7 +7412,7 @@
           <a:bodyPr wrap="square" lIns="0" tIns="0" rIns="0" bIns="0" rtlCol="0" anchor="ctr"/>
           <a:lstStyle/>
           <a:p>
-            <a:pPr indent="0" marL="0">
+            <a:pPr marL="0" indent="0">
               <a:buNone/>
             </a:pPr>
             <a:r>
@@ -6891,7 +7451,7 @@
           <a:bodyPr wrap="square" lIns="0" tIns="0" rIns="0" bIns="0" rtlCol="0" anchor="t"/>
           <a:lstStyle/>
           <a:p>
-            <a:pPr indent="0" marL="0">
+            <a:pPr marL="0" indent="0">
               <a:buNone/>
             </a:pPr>
             <a:r>
@@ -6935,13 +7495,20 @@
             <a:prstDash val="solid"/>
           </a:ln>
           <a:effectLst>
-            <a:outerShdw sx="100000" sy="100000" kx="0" ky="0" algn="bl" rotWithShape="0" blurRad="76200" dist="25400" dir="5400000">
+            <a:outerShdw blurRad="76200" dist="25400" dir="5400000" algn="bl" rotWithShape="0">
               <a:srgbClr val="000000">
                 <a:alpha val="12000"/>
               </a:srgbClr>
             </a:outerShdw>
           </a:effectLst>
         </p:spPr>
+        <p:txBody>
+          <a:bodyPr/>
+          <a:lstStyle/>
+          <a:p>
+            <a:endParaRPr lang="en-BR"/>
+          </a:p>
+        </p:txBody>
       </p:sp>
       <p:sp>
         <p:nvSpPr>
@@ -6967,17 +7534,24 @@
             <a:prstDash val="solid"/>
           </a:ln>
         </p:spPr>
+        <p:txBody>
+          <a:bodyPr/>
+          <a:lstStyle/>
+          <a:p>
+            <a:endParaRPr lang="en-BR"/>
+          </a:p>
+        </p:txBody>
       </p:sp>
       <p:pic>
         <p:nvPicPr>
-          <p:cNvPr id="10" name="Image 1" descr="preencoded.png">    </p:cNvPr>
+          <p:cNvPr id="10" name="Image 1" descr="preencoded.png"/>
           <p:cNvPicPr>
             <a:picLocks noChangeAspect="1"/>
           </p:cNvPicPr>
           <p:nvPr/>
         </p:nvPicPr>
         <p:blipFill>
-          <a:blip r:embed="rId2"/>
+          <a:blip r:embed="rId4"/>
           <a:stretch>
             <a:fillRect/>
           </a:stretch>
@@ -7013,7 +7587,7 @@
           <a:bodyPr wrap="square" lIns="0" tIns="0" rIns="0" bIns="0" rtlCol="0" anchor="ctr"/>
           <a:lstStyle/>
           <a:p>
-            <a:pPr indent="0" marL="0">
+            <a:pPr marL="0" indent="0">
               <a:buNone/>
             </a:pPr>
             <a:r>
@@ -7052,7 +7626,7 @@
           <a:bodyPr wrap="square" lIns="0" tIns="0" rIns="0" bIns="0" rtlCol="0" anchor="t"/>
           <a:lstStyle/>
           <a:p>
-            <a:pPr indent="0" marL="0">
+            <a:pPr marL="0" indent="0">
               <a:buNone/>
             </a:pPr>
             <a:r>
@@ -7096,13 +7670,20 @@
             <a:prstDash val="solid"/>
           </a:ln>
           <a:effectLst>
-            <a:outerShdw sx="100000" sy="100000" kx="0" ky="0" algn="bl" rotWithShape="0" blurRad="76200" dist="25400" dir="5400000">
+            <a:outerShdw blurRad="76200" dist="25400" dir="5400000" algn="bl" rotWithShape="0">
               <a:srgbClr val="000000">
                 <a:alpha val="12000"/>
               </a:srgbClr>
             </a:outerShdw>
           </a:effectLst>
         </p:spPr>
+        <p:txBody>
+          <a:bodyPr/>
+          <a:lstStyle/>
+          <a:p>
+            <a:endParaRPr lang="en-BR"/>
+          </a:p>
+        </p:txBody>
       </p:sp>
       <p:sp>
         <p:nvSpPr>
@@ -7128,17 +7709,24 @@
             <a:prstDash val="solid"/>
           </a:ln>
         </p:spPr>
+        <p:txBody>
+          <a:bodyPr/>
+          <a:lstStyle/>
+          <a:p>
+            <a:endParaRPr lang="en-BR"/>
+          </a:p>
+        </p:txBody>
       </p:sp>
       <p:pic>
         <p:nvPicPr>
-          <p:cNvPr id="15" name="Image 2" descr="preencoded.png">    </p:cNvPr>
+          <p:cNvPr id="15" name="Image 2" descr="preencoded.png"/>
           <p:cNvPicPr>
             <a:picLocks noChangeAspect="1"/>
           </p:cNvPicPr>
           <p:nvPr/>
         </p:nvPicPr>
         <p:blipFill>
-          <a:blip r:embed="rId3"/>
+          <a:blip r:embed="rId5"/>
           <a:stretch>
             <a:fillRect/>
           </a:stretch>
@@ -7174,7 +7762,7 @@
           <a:bodyPr wrap="square" lIns="0" tIns="0" rIns="0" bIns="0" rtlCol="0" anchor="ctr"/>
           <a:lstStyle/>
           <a:p>
-            <a:pPr indent="0" marL="0">
+            <a:pPr marL="0" indent="0">
               <a:buNone/>
             </a:pPr>
             <a:r>
@@ -7213,7 +7801,7 @@
           <a:bodyPr wrap="square" lIns="0" tIns="0" rIns="0" bIns="0" rtlCol="0" anchor="t"/>
           <a:lstStyle/>
           <a:p>
-            <a:pPr indent="0" marL="0">
+            <a:pPr marL="0" indent="0">
               <a:buNone/>
             </a:pPr>
             <a:r>
@@ -7257,13 +7845,20 @@
             <a:prstDash val="solid"/>
           </a:ln>
           <a:effectLst>
-            <a:outerShdw sx="100000" sy="100000" kx="0" ky="0" algn="bl" rotWithShape="0" blurRad="76200" dist="25400" dir="5400000">
+            <a:outerShdw blurRad="76200" dist="25400" dir="5400000" algn="bl" rotWithShape="0">
               <a:srgbClr val="000000">
                 <a:alpha val="12000"/>
               </a:srgbClr>
             </a:outerShdw>
           </a:effectLst>
         </p:spPr>
+        <p:txBody>
+          <a:bodyPr/>
+          <a:lstStyle/>
+          <a:p>
+            <a:endParaRPr lang="en-BR"/>
+          </a:p>
+        </p:txBody>
       </p:sp>
       <p:sp>
         <p:nvSpPr>
@@ -7286,7 +7881,7 @@
           <a:bodyPr wrap="square" lIns="0" tIns="0" rIns="0" bIns="0" rtlCol="0" anchor="ctr"/>
           <a:lstStyle/>
           <a:p>
-            <a:pPr indent="0" marL="0">
+            <a:pPr marL="0" indent="0">
               <a:buNone/>
             </a:pPr>
             <a:r>
@@ -7300,9 +7895,6 @@
               </a:rPr>
               <a:t>~3 min </a:t>
             </a:r>
-            <a:pPr indent="0" marL="0">
-              <a:buNone/>
-            </a:pPr>
             <a:r>
               <a:rPr lang="en-US" sz="1600" dirty="0">
                 <a:solidFill>
@@ -7339,7 +7931,7 @@
           <a:bodyPr wrap="square" lIns="0" tIns="0" rIns="0" bIns="0" rtlCol="0" anchor="ctr"/>
           <a:lstStyle/>
           <a:p>
-            <a:pPr indent="0" marL="0">
+            <a:pPr marL="0" indent="0">
               <a:buNone/>
             </a:pPr>
             <a:r>
@@ -7378,7 +7970,7 @@
           <a:bodyPr wrap="square" lIns="0" tIns="0" rIns="0" bIns="0" rtlCol="0" anchor="ctr"/>
           <a:lstStyle/>
           <a:p>
-            <a:pPr algn="r" indent="0" marL="0">
+            <a:pPr marL="0" indent="0" algn="r">
               <a:buNone/>
             </a:pPr>
             <a:r>
@@ -7442,7 +8034,7 @@
           <a:bodyPr wrap="square" lIns="0" tIns="0" rIns="0" bIns="0" rtlCol="0" anchor="t"/>
           <a:lstStyle/>
           <a:p>
-            <a:pPr indent="0" marL="0">
+            <a:pPr marL="0" indent="0">
               <a:buNone/>
             </a:pPr>
             <a:r>
@@ -7462,14 +8054,14 @@
       </p:sp>
       <p:pic>
         <p:nvPicPr>
-          <p:cNvPr id="3" name="Image 0" descr="Diagrama: upload, Harness com agentes A1 a A6, SQLite, OpenAI API e interface Streamlit">    </p:cNvPr>
+          <p:cNvPr id="3" name="Image 0" descr="Diagrama: upload, Harness com agentes A1 a A6, SQLite, OpenAI API e interface Streamlit"/>
           <p:cNvPicPr>
             <a:picLocks noChangeAspect="1"/>
           </p:cNvPicPr>
           <p:nvPr/>
         </p:nvPicPr>
         <p:blipFill>
-          <a:blip r:embed="rId1"/>
+          <a:blip r:embed="rId3"/>
           <a:stretch>
             <a:fillRect/>
           </a:stretch>
@@ -7505,7 +8097,7 @@
           <a:bodyPr wrap="square" lIns="0" tIns="0" rIns="0" bIns="0" rtlCol="0" anchor="t"/>
           <a:lstStyle/>
           <a:p>
-            <a:pPr indent="0" marL="0">
+            <a:pPr marL="0" indent="0">
               <a:buNone/>
             </a:pPr>
             <a:r>
@@ -7522,7 +8114,7 @@
             <a:endParaRPr lang="en-US" sz="1600" dirty="0"/>
           </a:p>
           <a:p>
-            <a:pPr indent="0" marL="0">
+            <a:pPr marL="0" indent="0">
               <a:buNone/>
             </a:pPr>
             <a:r>
@@ -7561,7 +8153,7 @@
           <a:bodyPr wrap="square" lIns="0" tIns="0" rIns="0" bIns="0" rtlCol="0" anchor="t"/>
           <a:lstStyle/>
           <a:p>
-            <a:pPr indent="0" marL="0">
+            <a:pPr marL="0" indent="0">
               <a:buNone/>
             </a:pPr>
             <a:r>
@@ -7578,7 +8170,7 @@
             <a:endParaRPr lang="en-US" sz="1600" dirty="0"/>
           </a:p>
           <a:p>
-            <a:pPr indent="0" marL="0">
+            <a:pPr marL="0" indent="0">
               <a:buNone/>
             </a:pPr>
             <a:r>
@@ -7617,7 +8209,7 @@
           <a:bodyPr wrap="square" lIns="0" tIns="0" rIns="0" bIns="0" rtlCol="0" anchor="t"/>
           <a:lstStyle/>
           <a:p>
-            <a:pPr indent="0" marL="0">
+            <a:pPr marL="0" indent="0">
               <a:buNone/>
             </a:pPr>
             <a:r>
@@ -7634,7 +8226,7 @@
             <a:endParaRPr lang="en-US" sz="1600" dirty="0"/>
           </a:p>
           <a:p>
-            <a:pPr indent="0" marL="0">
+            <a:pPr marL="0" indent="0">
               <a:buNone/>
             </a:pPr>
             <a:r>
@@ -7673,7 +8265,7 @@
           <a:bodyPr wrap="square" lIns="0" tIns="0" rIns="0" bIns="0" rtlCol="0" anchor="t"/>
           <a:lstStyle/>
           <a:p>
-            <a:pPr indent="0" marL="0">
+            <a:pPr marL="0" indent="0">
               <a:buNone/>
             </a:pPr>
             <a:r>
@@ -7690,7 +8282,7 @@
             <a:endParaRPr lang="en-US" sz="1600" dirty="0"/>
           </a:p>
           <a:p>
-            <a:pPr indent="0" marL="0">
+            <a:pPr marL="0" indent="0">
               <a:buNone/>
             </a:pPr>
             <a:r>
@@ -7729,7 +8321,7 @@
           <a:bodyPr wrap="square" lIns="0" tIns="0" rIns="0" bIns="0" rtlCol="0" anchor="ctr"/>
           <a:lstStyle/>
           <a:p>
-            <a:pPr indent="0" marL="0">
+            <a:pPr marL="0" indent="0">
               <a:buNone/>
             </a:pPr>
             <a:r>
@@ -7768,7 +8360,7 @@
           <a:bodyPr wrap="square" lIns="0" tIns="0" rIns="0" bIns="0" rtlCol="0" anchor="ctr"/>
           <a:lstStyle/>
           <a:p>
-            <a:pPr algn="r" indent="0" marL="0">
+            <a:pPr marL="0" indent="0" algn="r">
               <a:buNone/>
             </a:pPr>
             <a:r>
@@ -7832,7 +8424,7 @@
           <a:bodyPr wrap="square" lIns="0" tIns="0" rIns="0" bIns="0" rtlCol="0" anchor="t"/>
           <a:lstStyle/>
           <a:p>
-            <a:pPr indent="0" marL="0">
+            <a:pPr marL="0" indent="0">
               <a:buNone/>
             </a:pPr>
             <a:r>
@@ -7876,13 +8468,20 @@
             <a:prstDash val="solid"/>
           </a:ln>
           <a:effectLst>
-            <a:outerShdw sx="100000" sy="100000" kx="0" ky="0" algn="bl" rotWithShape="0" blurRad="76200" dist="25400" dir="5400000">
+            <a:outerShdw blurRad="76200" dist="25400" dir="5400000" algn="bl" rotWithShape="0">
               <a:srgbClr val="000000">
                 <a:alpha val="12000"/>
               </a:srgbClr>
             </a:outerShdw>
           </a:effectLst>
         </p:spPr>
+        <p:txBody>
+          <a:bodyPr/>
+          <a:lstStyle/>
+          <a:p>
+            <a:endParaRPr lang="en-BR"/>
+          </a:p>
+        </p:txBody>
       </p:sp>
       <p:sp>
         <p:nvSpPr>
@@ -7908,17 +8507,24 @@
             <a:prstDash val="solid"/>
           </a:ln>
         </p:spPr>
+        <p:txBody>
+          <a:bodyPr/>
+          <a:lstStyle/>
+          <a:p>
+            <a:endParaRPr lang="en-BR"/>
+          </a:p>
+        </p:txBody>
       </p:sp>
       <p:pic>
         <p:nvPicPr>
-          <p:cNvPr id="5" name="Image 0" descr="preencoded.png">    </p:cNvPr>
+          <p:cNvPr id="5" name="Image 0" descr="preencoded.png"/>
           <p:cNvPicPr>
             <a:picLocks noChangeAspect="1"/>
           </p:cNvPicPr>
           <p:nvPr/>
         </p:nvPicPr>
         <p:blipFill>
-          <a:blip r:embed="rId1"/>
+          <a:blip r:embed="rId3"/>
           <a:stretch>
             <a:fillRect/>
           </a:stretch>
@@ -7954,7 +8560,7 @@
           <a:bodyPr wrap="square" lIns="0" tIns="0" rIns="0" bIns="0" rtlCol="0" anchor="ctr"/>
           <a:lstStyle/>
           <a:p>
-            <a:pPr indent="0" marL="0">
+            <a:pPr marL="0" indent="0">
               <a:buNone/>
             </a:pPr>
             <a:r>
@@ -7993,7 +8599,7 @@
           <a:bodyPr wrap="square" lIns="0" tIns="0" rIns="0" bIns="0" rtlCol="0" anchor="t"/>
           <a:lstStyle/>
           <a:p>
-            <a:pPr indent="0" marL="0">
+            <a:pPr marL="0" indent="0">
               <a:buNone/>
             </a:pPr>
             <a:r>
@@ -8037,13 +8643,20 @@
             <a:prstDash val="solid"/>
           </a:ln>
           <a:effectLst>
-            <a:outerShdw sx="100000" sy="100000" kx="0" ky="0" algn="bl" rotWithShape="0" blurRad="76200" dist="25400" dir="5400000">
+            <a:outerShdw blurRad="76200" dist="25400" dir="5400000" algn="bl" rotWithShape="0">
               <a:srgbClr val="000000">
                 <a:alpha val="12000"/>
               </a:srgbClr>
             </a:outerShdw>
           </a:effectLst>
         </p:spPr>
+        <p:txBody>
+          <a:bodyPr/>
+          <a:lstStyle/>
+          <a:p>
+            <a:endParaRPr lang="en-BR"/>
+          </a:p>
+        </p:txBody>
       </p:sp>
       <p:sp>
         <p:nvSpPr>
@@ -8069,17 +8682,24 @@
             <a:prstDash val="solid"/>
           </a:ln>
         </p:spPr>
+        <p:txBody>
+          <a:bodyPr/>
+          <a:lstStyle/>
+          <a:p>
+            <a:endParaRPr lang="en-BR"/>
+          </a:p>
+        </p:txBody>
       </p:sp>
       <p:pic>
         <p:nvPicPr>
-          <p:cNvPr id="10" name="Image 1" descr="preencoded.png">    </p:cNvPr>
+          <p:cNvPr id="10" name="Image 1" descr="preencoded.png"/>
           <p:cNvPicPr>
             <a:picLocks noChangeAspect="1"/>
           </p:cNvPicPr>
           <p:nvPr/>
         </p:nvPicPr>
         <p:blipFill>
-          <a:blip r:embed="rId2"/>
+          <a:blip r:embed="rId4"/>
           <a:stretch>
             <a:fillRect/>
           </a:stretch>
@@ -8115,7 +8735,7 @@
           <a:bodyPr wrap="square" lIns="0" tIns="0" rIns="0" bIns="0" rtlCol="0" anchor="ctr"/>
           <a:lstStyle/>
           <a:p>
-            <a:pPr indent="0" marL="0">
+            <a:pPr marL="0" indent="0">
               <a:buNone/>
             </a:pPr>
             <a:r>
@@ -8154,7 +8774,7 @@
           <a:bodyPr wrap="square" lIns="0" tIns="0" rIns="0" bIns="0" rtlCol="0" anchor="ctr"/>
           <a:lstStyle/>
           <a:p>
-            <a:pPr indent="0" marL="0">
+            <a:pPr marL="0" indent="0">
               <a:buNone/>
             </a:pPr>
             <a:r>
@@ -8193,7 +8813,7 @@
           <a:bodyPr wrap="square" lIns="0" tIns="0" rIns="0" bIns="0" rtlCol="0" anchor="t"/>
           <a:lstStyle/>
           <a:p>
-            <a:pPr indent="0" marL="0">
+            <a:pPr marL="0" indent="0">
               <a:buNone/>
             </a:pPr>
             <a:r>
@@ -8237,13 +8857,20 @@
             <a:prstDash val="solid"/>
           </a:ln>
           <a:effectLst>
-            <a:outerShdw sx="100000" sy="100000" kx="0" ky="0" algn="bl" rotWithShape="0" blurRad="76200" dist="25400" dir="5400000">
+            <a:outerShdw blurRad="76200" dist="25400" dir="5400000" algn="bl" rotWithShape="0">
               <a:srgbClr val="000000">
                 <a:alpha val="12000"/>
               </a:srgbClr>
             </a:outerShdw>
           </a:effectLst>
         </p:spPr>
+        <p:txBody>
+          <a:bodyPr/>
+          <a:lstStyle/>
+          <a:p>
+            <a:endParaRPr lang="en-BR"/>
+          </a:p>
+        </p:txBody>
       </p:sp>
       <p:sp>
         <p:nvSpPr>
@@ -8269,17 +8896,24 @@
             <a:prstDash val="solid"/>
           </a:ln>
         </p:spPr>
+        <p:txBody>
+          <a:bodyPr/>
+          <a:lstStyle/>
+          <a:p>
+            <a:endParaRPr lang="en-BR"/>
+          </a:p>
+        </p:txBody>
       </p:sp>
       <p:pic>
         <p:nvPicPr>
-          <p:cNvPr id="16" name="Image 2" descr="preencoded.png">    </p:cNvPr>
+          <p:cNvPr id="16" name="Image 2" descr="preencoded.png"/>
           <p:cNvPicPr>
             <a:picLocks noChangeAspect="1"/>
           </p:cNvPicPr>
           <p:nvPr/>
         </p:nvPicPr>
         <p:blipFill>
-          <a:blip r:embed="rId3"/>
+          <a:blip r:embed="rId5"/>
           <a:stretch>
             <a:fillRect/>
           </a:stretch>
@@ -8315,7 +8949,7 @@
           <a:bodyPr wrap="square" lIns="0" tIns="0" rIns="0" bIns="0" rtlCol="0" anchor="ctr"/>
           <a:lstStyle/>
           <a:p>
-            <a:pPr indent="0" marL="0">
+            <a:pPr marL="0" indent="0">
               <a:buNone/>
             </a:pPr>
             <a:r>
@@ -8354,7 +8988,7 @@
           <a:bodyPr wrap="square" lIns="0" tIns="0" rIns="0" bIns="0" rtlCol="0" anchor="ctr"/>
           <a:lstStyle/>
           <a:p>
-            <a:pPr indent="0" marL="0">
+            <a:pPr marL="0" indent="0">
               <a:buNone/>
             </a:pPr>
             <a:r>
@@ -8393,7 +9027,7 @@
           <a:bodyPr wrap="square" lIns="0" tIns="0" rIns="0" bIns="0" rtlCol="0" anchor="t"/>
           <a:lstStyle/>
           <a:p>
-            <a:pPr indent="0" marL="0">
+            <a:pPr marL="0" indent="0">
               <a:buNone/>
             </a:pPr>
             <a:r>
@@ -8437,13 +9071,20 @@
             <a:prstDash val="solid"/>
           </a:ln>
           <a:effectLst>
-            <a:outerShdw sx="100000" sy="100000" kx="0" ky="0" algn="bl" rotWithShape="0" blurRad="76200" dist="25400" dir="5400000">
+            <a:outerShdw blurRad="76200" dist="25400" dir="5400000" algn="bl" rotWithShape="0">
               <a:srgbClr val="000000">
                 <a:alpha val="12000"/>
               </a:srgbClr>
             </a:outerShdw>
           </a:effectLst>
         </p:spPr>
+        <p:txBody>
+          <a:bodyPr/>
+          <a:lstStyle/>
+          <a:p>
+            <a:endParaRPr lang="en-BR"/>
+          </a:p>
+        </p:txBody>
       </p:sp>
       <p:sp>
         <p:nvSpPr>
@@ -8469,17 +9110,24 @@
             <a:prstDash val="solid"/>
           </a:ln>
         </p:spPr>
+        <p:txBody>
+          <a:bodyPr/>
+          <a:lstStyle/>
+          <a:p>
+            <a:endParaRPr lang="en-BR"/>
+          </a:p>
+        </p:txBody>
       </p:sp>
       <p:pic>
         <p:nvPicPr>
-          <p:cNvPr id="22" name="Image 3" descr="preencoded.png">    </p:cNvPr>
+          <p:cNvPr id="22" name="Image 3" descr="preencoded.png"/>
           <p:cNvPicPr>
             <a:picLocks noChangeAspect="1"/>
           </p:cNvPicPr>
           <p:nvPr/>
         </p:nvPicPr>
         <p:blipFill>
-          <a:blip r:embed="rId4"/>
+          <a:blip r:embed="rId6"/>
           <a:stretch>
             <a:fillRect/>
           </a:stretch>
@@ -8515,7 +9163,7 @@
           <a:bodyPr wrap="square" lIns="0" tIns="0" rIns="0" bIns="0" rtlCol="0" anchor="ctr"/>
           <a:lstStyle/>
           <a:p>
-            <a:pPr indent="0" marL="0">
+            <a:pPr marL="0" indent="0">
               <a:buNone/>
             </a:pPr>
             <a:r>
@@ -8554,7 +9202,7 @@
           <a:bodyPr wrap="square" lIns="0" tIns="0" rIns="0" bIns="0" rtlCol="0" anchor="t"/>
           <a:lstStyle/>
           <a:p>
-            <a:pPr indent="0" marL="0">
+            <a:pPr marL="0" indent="0">
               <a:buNone/>
             </a:pPr>
             <a:r>
@@ -8598,13 +9246,20 @@
             <a:prstDash val="solid"/>
           </a:ln>
           <a:effectLst>
-            <a:outerShdw sx="100000" sy="100000" kx="0" ky="0" algn="bl" rotWithShape="0" blurRad="76200" dist="25400" dir="5400000">
+            <a:outerShdw blurRad="76200" dist="25400" dir="5400000" algn="bl" rotWithShape="0">
               <a:srgbClr val="000000">
                 <a:alpha val="12000"/>
               </a:srgbClr>
             </a:outerShdw>
           </a:effectLst>
         </p:spPr>
+        <p:txBody>
+          <a:bodyPr/>
+          <a:lstStyle/>
+          <a:p>
+            <a:endParaRPr lang="en-BR"/>
+          </a:p>
+        </p:txBody>
       </p:sp>
       <p:sp>
         <p:nvSpPr>
@@ -8630,17 +9285,24 @@
             <a:prstDash val="solid"/>
           </a:ln>
         </p:spPr>
+        <p:txBody>
+          <a:bodyPr/>
+          <a:lstStyle/>
+          <a:p>
+            <a:endParaRPr lang="en-BR"/>
+          </a:p>
+        </p:txBody>
       </p:sp>
       <p:pic>
         <p:nvPicPr>
-          <p:cNvPr id="27" name="Image 4" descr="preencoded.png">    </p:cNvPr>
+          <p:cNvPr id="27" name="Image 4" descr="preencoded.png"/>
           <p:cNvPicPr>
             <a:picLocks noChangeAspect="1"/>
           </p:cNvPicPr>
           <p:nvPr/>
         </p:nvPicPr>
         <p:blipFill>
-          <a:blip r:embed="rId5"/>
+          <a:blip r:embed="rId7"/>
           <a:stretch>
             <a:fillRect/>
           </a:stretch>
@@ -8676,7 +9338,7 @@
           <a:bodyPr wrap="square" lIns="0" tIns="0" rIns="0" bIns="0" rtlCol="0" anchor="ctr"/>
           <a:lstStyle/>
           <a:p>
-            <a:pPr indent="0" marL="0">
+            <a:pPr marL="0" indent="0">
               <a:buNone/>
             </a:pPr>
             <a:r>
@@ -8715,7 +9377,7 @@
           <a:bodyPr wrap="square" lIns="0" tIns="0" rIns="0" bIns="0" rtlCol="0" anchor="ctr"/>
           <a:lstStyle/>
           <a:p>
-            <a:pPr indent="0" marL="0">
+            <a:pPr marL="0" indent="0">
               <a:buNone/>
             </a:pPr>
             <a:r>
@@ -8754,7 +9416,7 @@
           <a:bodyPr wrap="square" lIns="0" tIns="0" rIns="0" bIns="0" rtlCol="0" anchor="t"/>
           <a:lstStyle/>
           <a:p>
-            <a:pPr indent="0" marL="0">
+            <a:pPr marL="0" indent="0">
               <a:buNone/>
             </a:pPr>
             <a:r>
@@ -8798,13 +9460,20 @@
             <a:prstDash val="solid"/>
           </a:ln>
           <a:effectLst>
-            <a:outerShdw sx="100000" sy="100000" kx="0" ky="0" algn="bl" rotWithShape="0" blurRad="76200" dist="25400" dir="5400000">
+            <a:outerShdw blurRad="76200" dist="25400" dir="5400000" algn="bl" rotWithShape="0">
               <a:srgbClr val="000000">
                 <a:alpha val="12000"/>
               </a:srgbClr>
             </a:outerShdw>
           </a:effectLst>
         </p:spPr>
+        <p:txBody>
+          <a:bodyPr/>
+          <a:lstStyle/>
+          <a:p>
+            <a:endParaRPr lang="en-BR"/>
+          </a:p>
+        </p:txBody>
       </p:sp>
       <p:sp>
         <p:nvSpPr>
@@ -8830,17 +9499,24 @@
             <a:prstDash val="solid"/>
           </a:ln>
         </p:spPr>
+        <p:txBody>
+          <a:bodyPr/>
+          <a:lstStyle/>
+          <a:p>
+            <a:endParaRPr lang="en-BR"/>
+          </a:p>
+        </p:txBody>
       </p:sp>
       <p:pic>
         <p:nvPicPr>
-          <p:cNvPr id="33" name="Image 5" descr="preencoded.png">    </p:cNvPr>
+          <p:cNvPr id="33" name="Image 5" descr="preencoded.png"/>
           <p:cNvPicPr>
             <a:picLocks noChangeAspect="1"/>
           </p:cNvPicPr>
           <p:nvPr/>
         </p:nvPicPr>
         <p:blipFill>
-          <a:blip r:embed="rId6"/>
+          <a:blip r:embed="rId8"/>
           <a:stretch>
             <a:fillRect/>
           </a:stretch>
@@ -8876,7 +9552,7 @@
           <a:bodyPr wrap="square" lIns="0" tIns="0" rIns="0" bIns="0" rtlCol="0" anchor="ctr"/>
           <a:lstStyle/>
           <a:p>
-            <a:pPr indent="0" marL="0">
+            <a:pPr marL="0" indent="0">
               <a:buNone/>
             </a:pPr>
             <a:r>
@@ -8915,7 +9591,7 @@
           <a:bodyPr wrap="square" lIns="0" tIns="0" rIns="0" bIns="0" rtlCol="0" anchor="ctr"/>
           <a:lstStyle/>
           <a:p>
-            <a:pPr indent="0" marL="0">
+            <a:pPr marL="0" indent="0">
               <a:buNone/>
             </a:pPr>
             <a:r>
@@ -8954,7 +9630,7 @@
           <a:bodyPr wrap="square" lIns="0" tIns="0" rIns="0" bIns="0" rtlCol="0" anchor="t"/>
           <a:lstStyle/>
           <a:p>
-            <a:pPr indent="0" marL="0">
+            <a:pPr marL="0" indent="0">
               <a:buNone/>
             </a:pPr>
             <a:r>
@@ -8998,13 +9674,20 @@
             <a:prstDash val="solid"/>
           </a:ln>
           <a:effectLst>
-            <a:outerShdw sx="100000" sy="100000" kx="0" ky="0" algn="bl" rotWithShape="0" blurRad="76200" dist="25400" dir="5400000">
+            <a:outerShdw blurRad="76200" dist="25400" dir="5400000" algn="bl" rotWithShape="0">
               <a:srgbClr val="000000">
                 <a:alpha val="12000"/>
               </a:srgbClr>
             </a:outerShdw>
           </a:effectLst>
         </p:spPr>
+        <p:txBody>
+          <a:bodyPr/>
+          <a:lstStyle/>
+          <a:p>
+            <a:endParaRPr lang="en-BR"/>
+          </a:p>
+        </p:txBody>
       </p:sp>
       <p:sp>
         <p:nvSpPr>
@@ -9030,17 +9713,24 @@
             <a:prstDash val="solid"/>
           </a:ln>
         </p:spPr>
+        <p:txBody>
+          <a:bodyPr/>
+          <a:lstStyle/>
+          <a:p>
+            <a:endParaRPr lang="en-BR"/>
+          </a:p>
+        </p:txBody>
       </p:sp>
       <p:pic>
         <p:nvPicPr>
-          <p:cNvPr id="39" name="Image 6" descr="preencoded.png">    </p:cNvPr>
+          <p:cNvPr id="39" name="Image 6" descr="preencoded.png"/>
           <p:cNvPicPr>
             <a:picLocks noChangeAspect="1"/>
           </p:cNvPicPr>
           <p:nvPr/>
         </p:nvPicPr>
         <p:blipFill>
-          <a:blip r:embed="rId7"/>
+          <a:blip r:embed="rId9"/>
           <a:stretch>
             <a:fillRect/>
           </a:stretch>
@@ -9076,7 +9766,7 @@
           <a:bodyPr wrap="square" lIns="0" tIns="0" rIns="0" bIns="0" rtlCol="0" anchor="ctr"/>
           <a:lstStyle/>
           <a:p>
-            <a:pPr indent="0" marL="0">
+            <a:pPr marL="0" indent="0">
               <a:buNone/>
             </a:pPr>
             <a:r>
@@ -9115,7 +9805,7 @@
           <a:bodyPr wrap="square" lIns="0" tIns="0" rIns="0" bIns="0" rtlCol="0" anchor="ctr"/>
           <a:lstStyle/>
           <a:p>
-            <a:pPr indent="0" marL="0">
+            <a:pPr marL="0" indent="0">
               <a:buNone/>
             </a:pPr>
             <a:r>
@@ -9154,7 +9844,7 @@
           <a:bodyPr wrap="square" lIns="0" tIns="0" rIns="0" bIns="0" rtlCol="0" anchor="t"/>
           <a:lstStyle/>
           <a:p>
-            <a:pPr indent="0" marL="0">
+            <a:pPr marL="0" indent="0">
               <a:buNone/>
             </a:pPr>
             <a:r>
@@ -9198,13 +9888,20 @@
             <a:prstDash val="solid"/>
           </a:ln>
           <a:effectLst>
-            <a:outerShdw sx="100000" sy="100000" kx="0" ky="0" algn="bl" rotWithShape="0" blurRad="76200" dist="25400" dir="5400000">
+            <a:outerShdw blurRad="76200" dist="25400" dir="5400000" algn="bl" rotWithShape="0">
               <a:srgbClr val="000000">
                 <a:alpha val="12000"/>
               </a:srgbClr>
             </a:outerShdw>
           </a:effectLst>
         </p:spPr>
+        <p:txBody>
+          <a:bodyPr/>
+          <a:lstStyle/>
+          <a:p>
+            <a:endParaRPr lang="en-BR"/>
+          </a:p>
+        </p:txBody>
       </p:sp>
       <p:sp>
         <p:nvSpPr>
@@ -9230,17 +9927,24 @@
             <a:prstDash val="solid"/>
           </a:ln>
         </p:spPr>
+        <p:txBody>
+          <a:bodyPr/>
+          <a:lstStyle/>
+          <a:p>
+            <a:endParaRPr lang="en-BR"/>
+          </a:p>
+        </p:txBody>
       </p:sp>
       <p:pic>
         <p:nvPicPr>
-          <p:cNvPr id="45" name="Image 7" descr="preencoded.png">    </p:cNvPr>
+          <p:cNvPr id="45" name="Image 7" descr="preencoded.png"/>
           <p:cNvPicPr>
             <a:picLocks noChangeAspect="1"/>
           </p:cNvPicPr>
           <p:nvPr/>
         </p:nvPicPr>
         <p:blipFill>
-          <a:blip r:embed="rId8"/>
+          <a:blip r:embed="rId10"/>
           <a:stretch>
             <a:fillRect/>
           </a:stretch>
@@ -9276,7 +9980,7 @@
           <a:bodyPr wrap="square" lIns="0" tIns="0" rIns="0" bIns="0" rtlCol="0" anchor="ctr"/>
           <a:lstStyle/>
           <a:p>
-            <a:pPr indent="0" marL="0">
+            <a:pPr marL="0" indent="0">
               <a:buNone/>
             </a:pPr>
             <a:r>
@@ -9315,7 +10019,7 @@
           <a:bodyPr wrap="square" lIns="0" tIns="0" rIns="0" bIns="0" rtlCol="0" anchor="t"/>
           <a:lstStyle/>
           <a:p>
-            <a:pPr indent="0" marL="0">
+            <a:pPr marL="0" indent="0">
               <a:buNone/>
             </a:pPr>
             <a:r>
@@ -9354,7 +10058,7 @@
           <a:bodyPr wrap="square" lIns="0" tIns="0" rIns="0" bIns="0" rtlCol="0" anchor="ctr"/>
           <a:lstStyle/>
           <a:p>
-            <a:pPr indent="0" marL="0">
+            <a:pPr marL="0" indent="0">
               <a:buNone/>
             </a:pPr>
             <a:r>
@@ -9393,7 +10097,7 @@
           <a:bodyPr wrap="square" lIns="0" tIns="0" rIns="0" bIns="0" rtlCol="0" anchor="ctr"/>
           <a:lstStyle/>
           <a:p>
-            <a:pPr algn="r" indent="0" marL="0">
+            <a:pPr marL="0" indent="0" algn="r">
               <a:buNone/>
             </a:pPr>
             <a:r>
@@ -9457,7 +10161,7 @@
           <a:bodyPr wrap="square" lIns="0" tIns="0" rIns="0" bIns="0" rtlCol="0" anchor="t"/>
           <a:lstStyle/>
           <a:p>
-            <a:pPr indent="0" marL="0">
+            <a:pPr marL="0" indent="0">
               <a:buNone/>
             </a:pPr>
             <a:r>
@@ -9499,17 +10203,24 @@
             <a:prstDash val="solid"/>
           </a:ln>
         </p:spPr>
+        <p:txBody>
+          <a:bodyPr/>
+          <a:lstStyle/>
+          <a:p>
+            <a:endParaRPr lang="en-BR"/>
+          </a:p>
+        </p:txBody>
       </p:sp>
       <p:pic>
         <p:nvPicPr>
-          <p:cNvPr id="4" name="Image 0" descr="preencoded.png">    </p:cNvPr>
+          <p:cNvPr id="4" name="Image 0" descr="preencoded.png"/>
           <p:cNvPicPr>
             <a:picLocks noChangeAspect="1"/>
           </p:cNvPicPr>
           <p:nvPr/>
         </p:nvPicPr>
         <p:blipFill>
-          <a:blip r:embed="rId1"/>
+          <a:blip r:embed="rId3"/>
           <a:stretch>
             <a:fillRect/>
           </a:stretch>
@@ -9545,7 +10256,7 @@
           <a:bodyPr wrap="square" lIns="0" tIns="0" rIns="0" bIns="0" rtlCol="0" anchor="ctr"/>
           <a:lstStyle/>
           <a:p>
-            <a:pPr indent="0" marL="0">
+            <a:pPr marL="0" indent="0">
               <a:buNone/>
             </a:pPr>
             <a:r>
@@ -9562,7 +10273,7 @@
             <a:endParaRPr lang="en-US" sz="1700" dirty="0"/>
           </a:p>
           <a:p>
-            <a:pPr indent="0" marL="0">
+            <a:pPr marL="0" indent="0">
               <a:buNone/>
             </a:pPr>
             <a:r>
@@ -9604,17 +10315,24 @@
             <a:prstDash val="solid"/>
           </a:ln>
         </p:spPr>
+        <p:txBody>
+          <a:bodyPr/>
+          <a:lstStyle/>
+          <a:p>
+            <a:endParaRPr lang="en-BR"/>
+          </a:p>
+        </p:txBody>
       </p:sp>
       <p:pic>
         <p:nvPicPr>
-          <p:cNvPr id="7" name="Image 1" descr="preencoded.png">    </p:cNvPr>
+          <p:cNvPr id="7" name="Image 1" descr="preencoded.png"/>
           <p:cNvPicPr>
             <a:picLocks noChangeAspect="1"/>
           </p:cNvPicPr>
           <p:nvPr/>
         </p:nvPicPr>
         <p:blipFill>
-          <a:blip r:embed="rId2"/>
+          <a:blip r:embed="rId4"/>
           <a:stretch>
             <a:fillRect/>
           </a:stretch>
@@ -9650,7 +10368,7 @@
           <a:bodyPr wrap="square" lIns="0" tIns="0" rIns="0" bIns="0" rtlCol="0" anchor="ctr"/>
           <a:lstStyle/>
           <a:p>
-            <a:pPr indent="0" marL="0">
+            <a:pPr marL="0" indent="0">
               <a:buNone/>
             </a:pPr>
             <a:r>
@@ -9667,7 +10385,7 @@
             <a:endParaRPr lang="en-US" sz="1700" dirty="0"/>
           </a:p>
           <a:p>
-            <a:pPr indent="0" marL="0">
+            <a:pPr marL="0" indent="0">
               <a:buNone/>
             </a:pPr>
             <a:r>
@@ -9709,17 +10427,24 @@
             <a:prstDash val="solid"/>
           </a:ln>
         </p:spPr>
+        <p:txBody>
+          <a:bodyPr/>
+          <a:lstStyle/>
+          <a:p>
+            <a:endParaRPr lang="en-BR"/>
+          </a:p>
+        </p:txBody>
       </p:sp>
       <p:pic>
         <p:nvPicPr>
-          <p:cNvPr id="10" name="Image 2" descr="preencoded.png">    </p:cNvPr>
+          <p:cNvPr id="10" name="Image 2" descr="preencoded.png"/>
           <p:cNvPicPr>
             <a:picLocks noChangeAspect="1"/>
           </p:cNvPicPr>
           <p:nvPr/>
         </p:nvPicPr>
         <p:blipFill>
-          <a:blip r:embed="rId3"/>
+          <a:blip r:embed="rId5"/>
           <a:stretch>
             <a:fillRect/>
           </a:stretch>
@@ -9755,7 +10480,7 @@
           <a:bodyPr wrap="square" lIns="0" tIns="0" rIns="0" bIns="0" rtlCol="0" anchor="ctr"/>
           <a:lstStyle/>
           <a:p>
-            <a:pPr indent="0" marL="0">
+            <a:pPr marL="0" indent="0">
               <a:buNone/>
             </a:pPr>
             <a:r>
@@ -9772,7 +10497,7 @@
             <a:endParaRPr lang="en-US" sz="1700" dirty="0"/>
           </a:p>
           <a:p>
-            <a:pPr indent="0" marL="0">
+            <a:pPr marL="0" indent="0">
               <a:buNone/>
             </a:pPr>
             <a:r>
@@ -9814,17 +10539,24 @@
             <a:prstDash val="solid"/>
           </a:ln>
         </p:spPr>
+        <p:txBody>
+          <a:bodyPr/>
+          <a:lstStyle/>
+          <a:p>
+            <a:endParaRPr lang="en-BR"/>
+          </a:p>
+        </p:txBody>
       </p:sp>
       <p:pic>
         <p:nvPicPr>
-          <p:cNvPr id="13" name="Image 3" descr="preencoded.png">    </p:cNvPr>
+          <p:cNvPr id="13" name="Image 3" descr="preencoded.png"/>
           <p:cNvPicPr>
             <a:picLocks noChangeAspect="1"/>
           </p:cNvPicPr>
           <p:nvPr/>
         </p:nvPicPr>
         <p:blipFill>
-          <a:blip r:embed="rId4"/>
+          <a:blip r:embed="rId6"/>
           <a:stretch>
             <a:fillRect/>
           </a:stretch>
@@ -9860,7 +10592,7 @@
           <a:bodyPr wrap="square" lIns="0" tIns="0" rIns="0" bIns="0" rtlCol="0" anchor="ctr"/>
           <a:lstStyle/>
           <a:p>
-            <a:pPr indent="0" marL="0">
+            <a:pPr marL="0" indent="0">
               <a:buNone/>
             </a:pPr>
             <a:r>
@@ -9877,7 +10609,7 @@
             <a:endParaRPr lang="en-US" sz="1700" dirty="0"/>
           </a:p>
           <a:p>
-            <a:pPr indent="0" marL="0">
+            <a:pPr marL="0" indent="0">
               <a:buNone/>
             </a:pPr>
             <a:r>
@@ -9919,17 +10651,24 @@
             <a:prstDash val="solid"/>
           </a:ln>
         </p:spPr>
+        <p:txBody>
+          <a:bodyPr/>
+          <a:lstStyle/>
+          <a:p>
+            <a:endParaRPr lang="en-BR"/>
+          </a:p>
+        </p:txBody>
       </p:sp>
       <p:pic>
         <p:nvPicPr>
-          <p:cNvPr id="16" name="Image 4" descr="preencoded.png">    </p:cNvPr>
+          <p:cNvPr id="16" name="Image 4" descr="preencoded.png"/>
           <p:cNvPicPr>
             <a:picLocks noChangeAspect="1"/>
           </p:cNvPicPr>
           <p:nvPr/>
         </p:nvPicPr>
         <p:blipFill>
-          <a:blip r:embed="rId5"/>
+          <a:blip r:embed="rId7"/>
           <a:stretch>
             <a:fillRect/>
           </a:stretch>
@@ -9965,7 +10704,7 @@
           <a:bodyPr wrap="square" lIns="0" tIns="0" rIns="0" bIns="0" rtlCol="0" anchor="ctr"/>
           <a:lstStyle/>
           <a:p>
-            <a:pPr indent="0" marL="0">
+            <a:pPr marL="0" indent="0">
               <a:buNone/>
             </a:pPr>
             <a:r>
@@ -9982,7 +10721,7 @@
             <a:endParaRPr lang="en-US" sz="1700" dirty="0"/>
           </a:p>
           <a:p>
-            <a:pPr indent="0" marL="0">
+            <a:pPr marL="0" indent="0">
               <a:buNone/>
             </a:pPr>
             <a:r>
@@ -10026,13 +10765,20 @@
             <a:prstDash val="solid"/>
           </a:ln>
           <a:effectLst>
-            <a:outerShdw sx="100000" sy="100000" kx="0" ky="0" algn="bl" rotWithShape="0" blurRad="76200" dist="25400" dir="5400000">
+            <a:outerShdw blurRad="76200" dist="25400" dir="5400000" algn="bl" rotWithShape="0">
               <a:srgbClr val="000000">
                 <a:alpha val="12000"/>
               </a:srgbClr>
             </a:outerShdw>
           </a:effectLst>
         </p:spPr>
+        <p:txBody>
+          <a:bodyPr/>
+          <a:lstStyle/>
+          <a:p>
+            <a:endParaRPr lang="en-BR"/>
+          </a:p>
+        </p:txBody>
       </p:sp>
       <p:sp>
         <p:nvSpPr>
@@ -10055,7 +10801,7 @@
           <a:bodyPr wrap="square" lIns="0" tIns="0" rIns="0" bIns="0" rtlCol="0" anchor="t"/>
           <a:lstStyle/>
           <a:p>
-            <a:pPr indent="0" marL="0">
+            <a:pPr marL="0" indent="0">
               <a:buNone/>
             </a:pPr>
             <a:r>
@@ -10072,7 +10818,7 @@
             <a:endParaRPr lang="en-US" sz="1400" dirty="0"/>
           </a:p>
           <a:p>
-            <a:pPr indent="0" marL="0">
+            <a:pPr marL="0" indent="0">
               <a:buNone/>
             </a:pPr>
             <a:r>
@@ -10089,7 +10835,7 @@
             <a:endParaRPr lang="en-US" sz="1400" dirty="0"/>
           </a:p>
           <a:p>
-            <a:pPr indent="0" marL="0">
+            <a:pPr marL="0" indent="0">
               <a:buNone/>
             </a:pPr>
             <a:r>
@@ -10106,7 +10852,7 @@
             <a:endParaRPr lang="en-US" sz="1400" dirty="0"/>
           </a:p>
           <a:p>
-            <a:pPr indent="0" marL="0">
+            <a:pPr marL="0" indent="0">
               <a:buNone/>
             </a:pPr>
             <a:r>
@@ -10145,7 +10891,7 @@
           <a:bodyPr wrap="square" lIns="0" tIns="0" rIns="0" bIns="0" rtlCol="0" anchor="ctr"/>
           <a:lstStyle/>
           <a:p>
-            <a:pPr indent="0" marL="0">
+            <a:pPr marL="0" indent="0">
               <a:buNone/>
             </a:pPr>
             <a:r>
@@ -10184,7 +10930,7 @@
           <a:bodyPr wrap="square" lIns="0" tIns="0" rIns="0" bIns="0" rtlCol="0" anchor="ctr"/>
           <a:lstStyle/>
           <a:p>
-            <a:pPr algn="r" indent="0" marL="0">
+            <a:pPr marL="0" indent="0" algn="r">
               <a:buNone/>
             </a:pPr>
             <a:r>
@@ -10248,7 +10994,7 @@
           <a:bodyPr wrap="square" lIns="0" tIns="0" rIns="0" bIns="0" rtlCol="0" anchor="t"/>
           <a:lstStyle/>
           <a:p>
-            <a:pPr indent="0" marL="0">
+            <a:pPr marL="0" indent="0">
               <a:buNone/>
             </a:pPr>
             <a:r>
@@ -10290,6 +11036,13 @@
             <a:prstDash val="solid"/>
           </a:ln>
         </p:spPr>
+        <p:txBody>
+          <a:bodyPr/>
+          <a:lstStyle/>
+          <a:p>
+            <a:endParaRPr lang="en-BR"/>
+          </a:p>
+        </p:txBody>
       </p:sp>
       <p:sp>
         <p:nvSpPr>
@@ -10312,7 +11065,7 @@
           <a:bodyPr wrap="square" lIns="0" tIns="0" rIns="0" bIns="0" rtlCol="0" anchor="ctr"/>
           <a:lstStyle/>
           <a:p>
-            <a:pPr algn="ctr" indent="0" marL="0">
+            <a:pPr marL="0" indent="0" algn="ctr">
               <a:buNone/>
             </a:pPr>
             <a:r>
@@ -10353,6 +11106,13 @@
             <a:tailEnd type="triangle"/>
           </a:ln>
         </p:spPr>
+        <p:txBody>
+          <a:bodyPr/>
+          <a:lstStyle/>
+          <a:p>
+            <a:endParaRPr lang="en-BR"/>
+          </a:p>
+        </p:txBody>
       </p:sp>
       <p:sp>
         <p:nvSpPr>
@@ -10375,7 +11135,7 @@
           <a:bodyPr wrap="square" lIns="0" tIns="0" rIns="0" bIns="0" rtlCol="0" anchor="ctr"/>
           <a:lstStyle/>
           <a:p>
-            <a:pPr algn="ctr" indent="0" marL="0">
+            <a:pPr marL="0" indent="0" algn="ctr">
               <a:buNone/>
             </a:pPr>
             <a:r>
@@ -10414,7 +11174,7 @@
           <a:bodyPr wrap="square" lIns="0" tIns="0" rIns="0" bIns="0" rtlCol="0" anchor="t"/>
           <a:lstStyle/>
           <a:p>
-            <a:pPr algn="ctr" indent="0" marL="0">
+            <a:pPr marL="0" indent="0" algn="ctr">
               <a:buNone/>
             </a:pPr>
             <a:r>
@@ -10456,6 +11216,13 @@
             <a:prstDash val="solid"/>
           </a:ln>
         </p:spPr>
+        <p:txBody>
+          <a:bodyPr/>
+          <a:lstStyle/>
+          <a:p>
+            <a:endParaRPr lang="en-BR"/>
+          </a:p>
+        </p:txBody>
       </p:sp>
       <p:sp>
         <p:nvSpPr>
@@ -10478,7 +11245,7 @@
           <a:bodyPr wrap="square" lIns="0" tIns="0" rIns="0" bIns="0" rtlCol="0" anchor="ctr"/>
           <a:lstStyle/>
           <a:p>
-            <a:pPr algn="ctr" indent="0" marL="0">
+            <a:pPr marL="0" indent="0" algn="ctr">
               <a:buNone/>
             </a:pPr>
             <a:r>
@@ -10519,6 +11286,13 @@
             <a:tailEnd type="triangle"/>
           </a:ln>
         </p:spPr>
+        <p:txBody>
+          <a:bodyPr/>
+          <a:lstStyle/>
+          <a:p>
+            <a:endParaRPr lang="en-BR"/>
+          </a:p>
+        </p:txBody>
       </p:sp>
       <p:sp>
         <p:nvSpPr>
@@ -10541,7 +11315,7 @@
           <a:bodyPr wrap="square" lIns="0" tIns="0" rIns="0" bIns="0" rtlCol="0" anchor="ctr"/>
           <a:lstStyle/>
           <a:p>
-            <a:pPr algn="ctr" indent="0" marL="0">
+            <a:pPr marL="0" indent="0" algn="ctr">
               <a:buNone/>
             </a:pPr>
             <a:r>
@@ -10580,7 +11354,7 @@
           <a:bodyPr wrap="square" lIns="0" tIns="0" rIns="0" bIns="0" rtlCol="0" anchor="t"/>
           <a:lstStyle/>
           <a:p>
-            <a:pPr algn="ctr" indent="0" marL="0">
+            <a:pPr marL="0" indent="0" algn="ctr">
               <a:buNone/>
             </a:pPr>
             <a:r>
@@ -10622,6 +11396,13 @@
             <a:prstDash val="solid"/>
           </a:ln>
         </p:spPr>
+        <p:txBody>
+          <a:bodyPr/>
+          <a:lstStyle/>
+          <a:p>
+            <a:endParaRPr lang="en-BR"/>
+          </a:p>
+        </p:txBody>
       </p:sp>
       <p:sp>
         <p:nvSpPr>
@@ -10644,7 +11425,7 @@
           <a:bodyPr wrap="square" lIns="0" tIns="0" rIns="0" bIns="0" rtlCol="0" anchor="ctr"/>
           <a:lstStyle/>
           <a:p>
-            <a:pPr algn="ctr" indent="0" marL="0">
+            <a:pPr marL="0" indent="0" algn="ctr">
               <a:buNone/>
             </a:pPr>
             <a:r>
@@ -10685,6 +11466,13 @@
             <a:tailEnd type="triangle"/>
           </a:ln>
         </p:spPr>
+        <p:txBody>
+          <a:bodyPr/>
+          <a:lstStyle/>
+          <a:p>
+            <a:endParaRPr lang="en-BR"/>
+          </a:p>
+        </p:txBody>
       </p:sp>
       <p:sp>
         <p:nvSpPr>
@@ -10707,7 +11495,7 @@
           <a:bodyPr wrap="square" lIns="0" tIns="0" rIns="0" bIns="0" rtlCol="0" anchor="ctr"/>
           <a:lstStyle/>
           <a:p>
-            <a:pPr algn="ctr" indent="0" marL="0">
+            <a:pPr marL="0" indent="0" algn="ctr">
               <a:buNone/>
             </a:pPr>
             <a:r>
@@ -10746,7 +11534,7 @@
           <a:bodyPr wrap="square" lIns="0" tIns="0" rIns="0" bIns="0" rtlCol="0" anchor="t"/>
           <a:lstStyle/>
           <a:p>
-            <a:pPr algn="ctr" indent="0" marL="0">
+            <a:pPr marL="0" indent="0" algn="ctr">
               <a:buNone/>
             </a:pPr>
             <a:r>
@@ -10788,6 +11576,13 @@
             <a:prstDash val="solid"/>
           </a:ln>
         </p:spPr>
+        <p:txBody>
+          <a:bodyPr/>
+          <a:lstStyle/>
+          <a:p>
+            <a:endParaRPr lang="en-BR"/>
+          </a:p>
+        </p:txBody>
       </p:sp>
       <p:sp>
         <p:nvSpPr>
@@ -10810,7 +11605,7 @@
           <a:bodyPr wrap="square" lIns="0" tIns="0" rIns="0" bIns="0" rtlCol="0" anchor="ctr"/>
           <a:lstStyle/>
           <a:p>
-            <a:pPr algn="ctr" indent="0" marL="0">
+            <a:pPr marL="0" indent="0" algn="ctr">
               <a:buNone/>
             </a:pPr>
             <a:r>
@@ -10851,6 +11646,13 @@
             <a:tailEnd type="triangle"/>
           </a:ln>
         </p:spPr>
+        <p:txBody>
+          <a:bodyPr/>
+          <a:lstStyle/>
+          <a:p>
+            <a:endParaRPr lang="en-BR"/>
+          </a:p>
+        </p:txBody>
       </p:sp>
       <p:sp>
         <p:nvSpPr>
@@ -10873,7 +11675,7 @@
           <a:bodyPr wrap="square" lIns="0" tIns="0" rIns="0" bIns="0" rtlCol="0" anchor="ctr"/>
           <a:lstStyle/>
           <a:p>
-            <a:pPr algn="ctr" indent="0" marL="0">
+            <a:pPr marL="0" indent="0" algn="ctr">
               <a:buNone/>
             </a:pPr>
             <a:r>
@@ -10912,7 +11714,7 @@
           <a:bodyPr wrap="square" lIns="0" tIns="0" rIns="0" bIns="0" rtlCol="0" anchor="t"/>
           <a:lstStyle/>
           <a:p>
-            <a:pPr algn="ctr" indent="0" marL="0">
+            <a:pPr marL="0" indent="0" algn="ctr">
               <a:buNone/>
             </a:pPr>
             <a:r>
@@ -10954,6 +11756,13 @@
             <a:prstDash val="solid"/>
           </a:ln>
         </p:spPr>
+        <p:txBody>
+          <a:bodyPr/>
+          <a:lstStyle/>
+          <a:p>
+            <a:endParaRPr lang="en-BR"/>
+          </a:p>
+        </p:txBody>
       </p:sp>
       <p:sp>
         <p:nvSpPr>
@@ -10976,7 +11785,7 @@
           <a:bodyPr wrap="square" lIns="0" tIns="0" rIns="0" bIns="0" rtlCol="0" anchor="ctr"/>
           <a:lstStyle/>
           <a:p>
-            <a:pPr algn="ctr" indent="0" marL="0">
+            <a:pPr marL="0" indent="0" algn="ctr">
               <a:buNone/>
             </a:pPr>
             <a:r>
@@ -11015,7 +11824,7 @@
           <a:bodyPr wrap="square" lIns="0" tIns="0" rIns="0" bIns="0" rtlCol="0" anchor="ctr"/>
           <a:lstStyle/>
           <a:p>
-            <a:pPr algn="ctr" indent="0" marL="0">
+            <a:pPr marL="0" indent="0" algn="ctr">
               <a:buNone/>
             </a:pPr>
             <a:r>
@@ -11054,7 +11863,7 @@
           <a:bodyPr wrap="square" lIns="0" tIns="0" rIns="0" bIns="0" rtlCol="0" anchor="t"/>
           <a:lstStyle/>
           <a:p>
-            <a:pPr algn="ctr" indent="0" marL="0">
+            <a:pPr marL="0" indent="0" algn="ctr">
               <a:buNone/>
             </a:pPr>
             <a:r>
@@ -11098,13 +11907,20 @@
             <a:prstDash val="solid"/>
           </a:ln>
           <a:effectLst>
-            <a:outerShdw sx="100000" sy="100000" kx="0" ky="0" algn="bl" rotWithShape="0" blurRad="76200" dist="25400" dir="5400000">
+            <a:outerShdw blurRad="76200" dist="25400" dir="5400000" algn="bl" rotWithShape="0">
               <a:srgbClr val="000000">
                 <a:alpha val="12000"/>
               </a:srgbClr>
             </a:outerShdw>
           </a:effectLst>
         </p:spPr>
+        <p:txBody>
+          <a:bodyPr/>
+          <a:lstStyle/>
+          <a:p>
+            <a:endParaRPr lang="en-BR"/>
+          </a:p>
+        </p:txBody>
       </p:sp>
       <p:sp>
         <p:nvSpPr>
@@ -11130,17 +11946,24 @@
             <a:prstDash val="solid"/>
           </a:ln>
         </p:spPr>
+        <p:txBody>
+          <a:bodyPr/>
+          <a:lstStyle/>
+          <a:p>
+            <a:endParaRPr lang="en-BR"/>
+          </a:p>
+        </p:txBody>
       </p:sp>
       <p:pic>
         <p:nvPicPr>
-          <p:cNvPr id="29" name="Image 0" descr="preencoded.png">    </p:cNvPr>
+          <p:cNvPr id="29" name="Image 0" descr="preencoded.png"/>
           <p:cNvPicPr>
             <a:picLocks noChangeAspect="1"/>
           </p:cNvPicPr>
           <p:nvPr/>
         </p:nvPicPr>
         <p:blipFill>
-          <a:blip r:embed="rId1"/>
+          <a:blip r:embed="rId3"/>
           <a:stretch>
             <a:fillRect/>
           </a:stretch>
@@ -11176,7 +11999,7 @@
           <a:bodyPr wrap="square" lIns="0" tIns="0" rIns="0" bIns="0" rtlCol="0" anchor="ctr"/>
           <a:lstStyle/>
           <a:p>
-            <a:pPr indent="0" marL="0">
+            <a:pPr marL="0" indent="0">
               <a:buNone/>
             </a:pPr>
             <a:r>
@@ -11190,9 +12013,6 @@
               </a:rPr>
               <a:t>Modo apresentação: </a:t>
             </a:r>
-            <a:pPr indent="0" marL="0">
-              <a:buNone/>
-            </a:pPr>
             <a:r>
               <a:rPr lang="en-US" sz="1500" dirty="0">
                 <a:solidFill>
@@ -11229,7 +12049,7 @@
           <a:bodyPr wrap="square" lIns="0" tIns="0" rIns="0" bIns="0" rtlCol="0" anchor="ctr"/>
           <a:lstStyle/>
           <a:p>
-            <a:pPr indent="0" marL="0">
+            <a:pPr marL="0" indent="0">
               <a:buNone/>
             </a:pPr>
             <a:r>
@@ -11268,7 +12088,7 @@
           <a:bodyPr wrap="square" lIns="0" tIns="0" rIns="0" bIns="0" rtlCol="0" anchor="ctr"/>
           <a:lstStyle/>
           <a:p>
-            <a:pPr algn="r" indent="0" marL="0">
+            <a:pPr marL="0" indent="0" algn="r">
               <a:buNone/>
             </a:pPr>
             <a:r>
@@ -11332,7 +12152,7 @@
           <a:bodyPr wrap="square" lIns="0" tIns="0" rIns="0" bIns="0" rtlCol="0" anchor="t"/>
           <a:lstStyle/>
           <a:p>
-            <a:pPr indent="0" marL="0">
+            <a:pPr marL="0" indent="0">
               <a:buNone/>
             </a:pPr>
             <a:r>
@@ -11352,7 +12172,7 @@
       </p:sp>
       <p:graphicFrame>
         <p:nvGraphicFramePr>
-          <p:cNvPr id="3" name="Chart 0" descr=""/>
+          <p:cNvPr id="3" name="Chart 0"/>
           <p:cNvGraphicFramePr/>
           <p:nvPr/>
         </p:nvGraphicFramePr>
@@ -11360,9 +12180,9 @@
           <a:off x="548640" y="1325880"/>
           <a:ext cx="6949440" cy="4663440"/>
         </p:xfrm>
-        <a:graphic xmlns:a="http://schemas.openxmlformats.org/drawingml/2006/main">
+        <a:graphic>
           <a:graphicData uri="http://schemas.openxmlformats.org/drawingml/2006/chart">
-            <c:chart xmlns:c="http://schemas.openxmlformats.org/drawingml/2006/chart" r:id="rId1"/>
+            <c:chart xmlns:c="http://schemas.openxmlformats.org/drawingml/2006/chart" xmlns:r="http://schemas.openxmlformats.org/officeDocument/2006/relationships" r:id="rId3"/>
           </a:graphicData>
         </a:graphic>
       </p:graphicFrame>
@@ -11392,13 +12212,20 @@
             <a:prstDash val="solid"/>
           </a:ln>
           <a:effectLst>
-            <a:outerShdw sx="100000" sy="100000" kx="0" ky="0" algn="bl" rotWithShape="0" blurRad="76200" dist="25400" dir="5400000">
+            <a:outerShdw blurRad="76200" dist="25400" dir="5400000" algn="bl" rotWithShape="0">
               <a:srgbClr val="000000">
                 <a:alpha val="12000"/>
               </a:srgbClr>
             </a:outerShdw>
           </a:effectLst>
         </p:spPr>
+        <p:txBody>
+          <a:bodyPr/>
+          <a:lstStyle/>
+          <a:p>
+            <a:endParaRPr lang="en-BR"/>
+          </a:p>
+        </p:txBody>
       </p:sp>
       <p:sp>
         <p:nvSpPr>
@@ -11421,7 +12248,7 @@
           <a:bodyPr wrap="square" lIns="0" tIns="0" rIns="0" bIns="0" rtlCol="0" anchor="ctr"/>
           <a:lstStyle/>
           <a:p>
-            <a:pPr indent="0" marL="0">
+            <a:pPr marL="0" indent="0">
               <a:buNone/>
             </a:pPr>
             <a:r>
@@ -11438,7 +12265,7 @@
             <a:endParaRPr lang="en-US" sz="2600" dirty="0"/>
           </a:p>
           <a:p>
-            <a:pPr indent="0" marL="0">
+            <a:pPr marL="0" indent="0">
               <a:buNone/>
             </a:pPr>
             <a:r>
@@ -11482,13 +12309,20 @@
             <a:prstDash val="solid"/>
           </a:ln>
           <a:effectLst>
-            <a:outerShdw sx="100000" sy="100000" kx="0" ky="0" algn="bl" rotWithShape="0" blurRad="76200" dist="25400" dir="5400000">
+            <a:outerShdw blurRad="76200" dist="25400" dir="5400000" algn="bl" rotWithShape="0">
               <a:srgbClr val="000000">
                 <a:alpha val="12000"/>
               </a:srgbClr>
             </a:outerShdw>
           </a:effectLst>
         </p:spPr>
+        <p:txBody>
+          <a:bodyPr/>
+          <a:lstStyle/>
+          <a:p>
+            <a:endParaRPr lang="en-BR"/>
+          </a:p>
+        </p:txBody>
       </p:sp>
       <p:sp>
         <p:nvSpPr>
@@ -11511,7 +12345,7 @@
           <a:bodyPr wrap="square" lIns="0" tIns="0" rIns="0" bIns="0" rtlCol="0" anchor="ctr"/>
           <a:lstStyle/>
           <a:p>
-            <a:pPr indent="0" marL="0">
+            <a:pPr marL="0" indent="0">
               <a:buNone/>
             </a:pPr>
             <a:r>
@@ -11528,7 +12362,7 @@
             <a:endParaRPr lang="en-US" sz="2600" dirty="0"/>
           </a:p>
           <a:p>
-            <a:pPr indent="0" marL="0">
+            <a:pPr marL="0" indent="0">
               <a:buNone/>
             </a:pPr>
             <a:r>
@@ -11572,13 +12406,20 @@
             <a:prstDash val="solid"/>
           </a:ln>
           <a:effectLst>
-            <a:outerShdw sx="100000" sy="100000" kx="0" ky="0" algn="bl" rotWithShape="0" blurRad="76200" dist="25400" dir="5400000">
+            <a:outerShdw blurRad="76200" dist="25400" dir="5400000" algn="bl" rotWithShape="0">
               <a:srgbClr val="000000">
                 <a:alpha val="12000"/>
               </a:srgbClr>
             </a:outerShdw>
           </a:effectLst>
         </p:spPr>
+        <p:txBody>
+          <a:bodyPr/>
+          <a:lstStyle/>
+          <a:p>
+            <a:endParaRPr lang="en-BR"/>
+          </a:p>
+        </p:txBody>
       </p:sp>
       <p:sp>
         <p:nvSpPr>
@@ -11601,7 +12442,7 @@
           <a:bodyPr wrap="square" lIns="0" tIns="0" rIns="0" bIns="0" rtlCol="0" anchor="ctr"/>
           <a:lstStyle/>
           <a:p>
-            <a:pPr indent="0" marL="0">
+            <a:pPr marL="0" indent="0">
               <a:buNone/>
             </a:pPr>
             <a:r>
@@ -11618,7 +12459,7 @@
             <a:endParaRPr lang="en-US" sz="2600" dirty="0"/>
           </a:p>
           <a:p>
-            <a:pPr indent="0" marL="0">
+            <a:pPr marL="0" indent="0">
               <a:buNone/>
             </a:pPr>
             <a:r>
@@ -11657,7 +12498,7 @@
           <a:bodyPr wrap="square" lIns="0" tIns="0" rIns="0" bIns="0" rtlCol="0" anchor="ctr"/>
           <a:lstStyle/>
           <a:p>
-            <a:pPr indent="0" marL="0">
+            <a:pPr marL="0" indent="0">
               <a:buNone/>
             </a:pPr>
             <a:r>
@@ -11696,7 +12537,7 @@
           <a:bodyPr wrap="square" lIns="0" tIns="0" rIns="0" bIns="0" rtlCol="0" anchor="ctr"/>
           <a:lstStyle/>
           <a:p>
-            <a:pPr indent="0" marL="0">
+            <a:pPr marL="0" indent="0">
               <a:buNone/>
             </a:pPr>
             <a:r>
@@ -11735,7 +12576,7 @@
           <a:bodyPr wrap="square" lIns="0" tIns="0" rIns="0" bIns="0" rtlCol="0" anchor="ctr"/>
           <a:lstStyle/>
           <a:p>
-            <a:pPr algn="r" indent="0" marL="0">
+            <a:pPr marL="0" indent="0" algn="r">
               <a:buNone/>
             </a:pPr>
             <a:r>
@@ -11799,7 +12640,7 @@
           <a:bodyPr wrap="square" lIns="0" tIns="0" rIns="0" bIns="0" rtlCol="0" anchor="t"/>
           <a:lstStyle/>
           <a:p>
-            <a:pPr indent="0" marL="0">
+            <a:pPr marL="0" indent="0">
               <a:buNone/>
             </a:pPr>
             <a:r>
@@ -11838,7 +12679,7 @@
           <a:bodyPr wrap="square" lIns="0" tIns="0" rIns="0" bIns="0" rtlCol="0" anchor="ctr"/>
           <a:lstStyle/>
           <a:p>
-            <a:pPr indent="0" marL="0">
+            <a:pPr marL="0" indent="0">
               <a:buNone/>
             </a:pPr>
             <a:r>
@@ -11882,13 +12723,20 @@
             <a:prstDash val="solid"/>
           </a:ln>
           <a:effectLst>
-            <a:outerShdw sx="100000" sy="100000" kx="0" ky="0" algn="bl" rotWithShape="0" blurRad="76200" dist="25400" dir="5400000">
+            <a:outerShdw blurRad="76200" dist="25400" dir="5400000" algn="bl" rotWithShape="0">
               <a:srgbClr val="000000">
                 <a:alpha val="12000"/>
               </a:srgbClr>
             </a:outerShdw>
           </a:effectLst>
         </p:spPr>
+        <p:txBody>
+          <a:bodyPr/>
+          <a:lstStyle/>
+          <a:p>
+            <a:endParaRPr lang="en-BR"/>
+          </a:p>
+        </p:txBody>
       </p:sp>
       <p:sp>
         <p:nvSpPr>
@@ -11911,7 +12759,7 @@
           <a:bodyPr wrap="square" lIns="0" tIns="0" rIns="0" bIns="0" rtlCol="0" anchor="ctr"/>
           <a:lstStyle/>
           <a:p>
-            <a:pPr indent="0" marL="0">
+            <a:pPr marL="0" indent="0">
               <a:buNone/>
             </a:pPr>
             <a:r>
@@ -11928,7 +12776,7 @@
             <a:endParaRPr lang="en-US" sz="3000" dirty="0"/>
           </a:p>
           <a:p>
-            <a:pPr indent="0" marL="0">
+            <a:pPr marL="0" indent="0">
               <a:buNone/>
             </a:pPr>
             <a:r>
@@ -11948,14 +12796,14 @@
       </p:sp>
       <p:pic>
         <p:nvPicPr>
-          <p:cNvPr id="6" name="Image 0" descr="preencoded.png">    </p:cNvPr>
+          <p:cNvPr id="6" name="Image 0" descr="preencoded.png"/>
           <p:cNvPicPr>
             <a:picLocks noChangeAspect="1"/>
           </p:cNvPicPr>
           <p:nvPr/>
         </p:nvPicPr>
         <p:blipFill>
-          <a:blip r:embed="rId1"/>
+          <a:blip r:embed="rId3"/>
           <a:stretch>
             <a:fillRect/>
           </a:stretch>
@@ -11996,13 +12844,20 @@
             <a:prstDash val="solid"/>
           </a:ln>
           <a:effectLst>
-            <a:outerShdw sx="100000" sy="100000" kx="0" ky="0" algn="bl" rotWithShape="0" blurRad="76200" dist="25400" dir="5400000">
+            <a:outerShdw blurRad="76200" dist="25400" dir="5400000" algn="bl" rotWithShape="0">
               <a:srgbClr val="000000">
                 <a:alpha val="12000"/>
               </a:srgbClr>
             </a:outerShdw>
           </a:effectLst>
         </p:spPr>
+        <p:txBody>
+          <a:bodyPr/>
+          <a:lstStyle/>
+          <a:p>
+            <a:endParaRPr lang="en-BR"/>
+          </a:p>
+        </p:txBody>
       </p:sp>
       <p:sp>
         <p:nvSpPr>
@@ -12025,7 +12880,7 @@
           <a:bodyPr wrap="square" lIns="0" tIns="0" rIns="0" bIns="0" rtlCol="0" anchor="ctr"/>
           <a:lstStyle/>
           <a:p>
-            <a:pPr indent="0" marL="0">
+            <a:pPr marL="0" indent="0">
               <a:buNone/>
             </a:pPr>
             <a:r>
@@ -12042,7 +12897,7 @@
             <a:endParaRPr lang="en-US" sz="3000" dirty="0"/>
           </a:p>
           <a:p>
-            <a:pPr indent="0" marL="0">
+            <a:pPr marL="0" indent="0">
               <a:buNone/>
             </a:pPr>
             <a:r>
@@ -12081,7 +12936,7 @@
           <a:bodyPr wrap="square" lIns="0" tIns="0" rIns="0" bIns="0" rtlCol="0" anchor="ctr"/>
           <a:lstStyle/>
           <a:p>
-            <a:pPr indent="0" marL="0">
+            <a:pPr marL="0" indent="0">
               <a:buNone/>
             </a:pPr>
             <a:r>
@@ -12125,13 +12980,20 @@
             <a:prstDash val="solid"/>
           </a:ln>
           <a:effectLst>
-            <a:outerShdw sx="100000" sy="100000" kx="0" ky="0" algn="bl" rotWithShape="0" blurRad="76200" dist="25400" dir="5400000">
+            <a:outerShdw blurRad="76200" dist="25400" dir="5400000" algn="bl" rotWithShape="0">
               <a:srgbClr val="000000">
                 <a:alpha val="12000"/>
               </a:srgbClr>
             </a:outerShdw>
           </a:effectLst>
         </p:spPr>
+        <p:txBody>
+          <a:bodyPr/>
+          <a:lstStyle/>
+          <a:p>
+            <a:endParaRPr lang="en-BR"/>
+          </a:p>
+        </p:txBody>
       </p:sp>
       <p:sp>
         <p:nvSpPr>
@@ -12154,7 +13016,7 @@
           <a:bodyPr wrap="square" lIns="0" tIns="0" rIns="0" bIns="0" rtlCol="0" anchor="ctr"/>
           <a:lstStyle/>
           <a:p>
-            <a:pPr indent="0" marL="0">
+            <a:pPr marL="0" indent="0">
               <a:buNone/>
             </a:pPr>
             <a:r>
@@ -12171,7 +13033,7 @@
             <a:endParaRPr lang="en-US" sz="3000" dirty="0"/>
           </a:p>
           <a:p>
-            <a:pPr indent="0" marL="0">
+            <a:pPr marL="0" indent="0">
               <a:buNone/>
             </a:pPr>
             <a:r>
@@ -12191,14 +13053,14 @@
       </p:sp>
       <p:pic>
         <p:nvPicPr>
-          <p:cNvPr id="12" name="Image 1" descr="preencoded.png">    </p:cNvPr>
+          <p:cNvPr id="12" name="Image 1" descr="preencoded.png"/>
           <p:cNvPicPr>
             <a:picLocks noChangeAspect="1"/>
           </p:cNvPicPr>
           <p:nvPr/>
         </p:nvPicPr>
         <p:blipFill>
-          <a:blip r:embed="rId2"/>
+          <a:blip r:embed="rId3"/>
           <a:stretch>
             <a:fillRect/>
           </a:stretch>
@@ -12239,13 +13101,20 @@
             <a:prstDash val="solid"/>
           </a:ln>
           <a:effectLst>
-            <a:outerShdw sx="100000" sy="100000" kx="0" ky="0" algn="bl" rotWithShape="0" blurRad="76200" dist="25400" dir="5400000">
+            <a:outerShdw blurRad="76200" dist="25400" dir="5400000" algn="bl" rotWithShape="0">
               <a:srgbClr val="000000">
                 <a:alpha val="12000"/>
               </a:srgbClr>
             </a:outerShdw>
           </a:effectLst>
         </p:spPr>
+        <p:txBody>
+          <a:bodyPr/>
+          <a:lstStyle/>
+          <a:p>
+            <a:endParaRPr lang="en-BR"/>
+          </a:p>
+        </p:txBody>
       </p:sp>
       <p:sp>
         <p:nvSpPr>
@@ -12268,7 +13137,7 @@
           <a:bodyPr wrap="square" lIns="0" tIns="0" rIns="0" bIns="0" rtlCol="0" anchor="ctr"/>
           <a:lstStyle/>
           <a:p>
-            <a:pPr indent="0" marL="0">
+            <a:pPr marL="0" indent="0">
               <a:buNone/>
             </a:pPr>
             <a:r>
@@ -12285,7 +13154,7 @@
             <a:endParaRPr lang="en-US" sz="3000" dirty="0"/>
           </a:p>
           <a:p>
-            <a:pPr indent="0" marL="0">
+            <a:pPr marL="0" indent="0">
               <a:buNone/>
             </a:pPr>
             <a:r>
@@ -12324,7 +13193,7 @@
           <a:bodyPr wrap="square" lIns="0" tIns="0" rIns="0" bIns="0" rtlCol="0" anchor="ctr"/>
           <a:lstStyle/>
           <a:p>
-            <a:pPr indent="0" marL="0">
+            <a:pPr marL="0" indent="0">
               <a:buNone/>
             </a:pPr>
             <a:r>
@@ -12368,13 +13237,20 @@
             <a:prstDash val="solid"/>
           </a:ln>
           <a:effectLst>
-            <a:outerShdw sx="100000" sy="100000" kx="0" ky="0" algn="bl" rotWithShape="0" blurRad="76200" dist="25400" dir="5400000">
+            <a:outerShdw blurRad="76200" dist="25400" dir="5400000" algn="bl" rotWithShape="0">
               <a:srgbClr val="000000">
                 <a:alpha val="12000"/>
               </a:srgbClr>
             </a:outerShdw>
           </a:effectLst>
         </p:spPr>
+        <p:txBody>
+          <a:bodyPr/>
+          <a:lstStyle/>
+          <a:p>
+            <a:endParaRPr lang="en-BR"/>
+          </a:p>
+        </p:txBody>
       </p:sp>
       <p:sp>
         <p:nvSpPr>
@@ -12397,7 +13273,7 @@
           <a:bodyPr wrap="square" lIns="0" tIns="0" rIns="0" bIns="0" rtlCol="0" anchor="ctr"/>
           <a:lstStyle/>
           <a:p>
-            <a:pPr indent="0" marL="0">
+            <a:pPr marL="0" indent="0">
               <a:buNone/>
             </a:pPr>
             <a:r>
@@ -12414,7 +13290,7 @@
             <a:endParaRPr lang="en-US" sz="3000" dirty="0"/>
           </a:p>
           <a:p>
-            <a:pPr indent="0" marL="0">
+            <a:pPr marL="0" indent="0">
               <a:buNone/>
             </a:pPr>
             <a:r>
@@ -12434,7 +13310,7 @@
       </p:sp>
       <p:pic>
         <p:nvPicPr>
-          <p:cNvPr id="18" name="Image 2" descr="preencoded.png">    </p:cNvPr>
+          <p:cNvPr id="18" name="Image 2" descr="preencoded.png"/>
           <p:cNvPicPr>
             <a:picLocks noChangeAspect="1"/>
           </p:cNvPicPr>
@@ -12482,13 +13358,20 @@
             <a:prstDash val="solid"/>
           </a:ln>
           <a:effectLst>
-            <a:outerShdw sx="100000" sy="100000" kx="0" ky="0" algn="bl" rotWithShape="0" blurRad="76200" dist="25400" dir="5400000">
+            <a:outerShdw blurRad="76200" dist="25400" dir="5400000" algn="bl" rotWithShape="0">
               <a:srgbClr val="000000">
                 <a:alpha val="12000"/>
               </a:srgbClr>
             </a:outerShdw>
           </a:effectLst>
         </p:spPr>
+        <p:txBody>
+          <a:bodyPr/>
+          <a:lstStyle/>
+          <a:p>
+            <a:endParaRPr lang="en-BR"/>
+          </a:p>
+        </p:txBody>
       </p:sp>
       <p:sp>
         <p:nvSpPr>
@@ -12511,7 +13394,7 @@
           <a:bodyPr wrap="square" lIns="0" tIns="0" rIns="0" bIns="0" rtlCol="0" anchor="ctr"/>
           <a:lstStyle/>
           <a:p>
-            <a:pPr indent="0" marL="0">
+            <a:pPr marL="0" indent="0">
               <a:buNone/>
             </a:pPr>
             <a:r>
@@ -12528,7 +13411,7 @@
             <a:endParaRPr lang="en-US" sz="3000" dirty="0"/>
           </a:p>
           <a:p>
-            <a:pPr indent="0" marL="0">
+            <a:pPr marL="0" indent="0">
               <a:buNone/>
             </a:pPr>
             <a:r>
@@ -12567,7 +13450,7 @@
           <a:bodyPr wrap="square" lIns="0" tIns="0" rIns="0" bIns="0" rtlCol="0" anchor="ctr"/>
           <a:lstStyle/>
           <a:p>
-            <a:pPr indent="0" marL="0">
+            <a:pPr marL="0" indent="0">
               <a:buNone/>
             </a:pPr>
             <a:r>
@@ -12606,7 +13489,7 @@
           <a:bodyPr wrap="square" lIns="0" tIns="0" rIns="0" bIns="0" rtlCol="0" anchor="ctr"/>
           <a:lstStyle/>
           <a:p>
-            <a:pPr algn="r" indent="0" marL="0">
+            <a:pPr marL="0" indent="0" algn="r">
               <a:buNone/>
             </a:pPr>
             <a:r>
@@ -12925,4 +13808,319 @@
     </a:ext>
   </a:extLst>
 </a:theme>
+</file>
+
+<file path=ppt/theme/theme2.xml><?xml version="1.0" encoding="utf-8"?>
+<a:theme xmlns:a="http://schemas.openxmlformats.org/drawingml/2006/main" name="Office Theme">
+  <a:themeElements>
+    <a:clrScheme name="Office">
+      <a:dk1>
+        <a:sysClr val="windowText" lastClr="000000"/>
+      </a:dk1>
+      <a:lt1>
+        <a:sysClr val="window" lastClr="FFFFFF"/>
+      </a:lt1>
+      <a:dk2>
+        <a:srgbClr val="0E2841"/>
+      </a:dk2>
+      <a:lt2>
+        <a:srgbClr val="E8E8E8"/>
+      </a:lt2>
+      <a:accent1>
+        <a:srgbClr val="156082"/>
+      </a:accent1>
+      <a:accent2>
+        <a:srgbClr val="E97132"/>
+      </a:accent2>
+      <a:accent3>
+        <a:srgbClr val="196B24"/>
+      </a:accent3>
+      <a:accent4>
+        <a:srgbClr val="0F9ED5"/>
+      </a:accent4>
+      <a:accent5>
+        <a:srgbClr val="A02B93"/>
+      </a:accent5>
+      <a:accent6>
+        <a:srgbClr val="4EA72E"/>
+      </a:accent6>
+      <a:hlink>
+        <a:srgbClr val="467886"/>
+      </a:hlink>
+      <a:folHlink>
+        <a:srgbClr val="96607D"/>
+      </a:folHlink>
+    </a:clrScheme>
+    <a:fontScheme name="Office">
+      <a:majorFont>
+        <a:latin typeface="Aptos Display" panose="02110004020202020204"/>
+        <a:ea typeface=""/>
+        <a:cs typeface=""/>
+        <a:font script="Jpan" typeface="游ゴシック Light"/>
+        <a:font script="Hang" typeface="맑은 고딕"/>
+        <a:font script="Hans" typeface="等线 Light"/>
+        <a:font script="Hant" typeface="新細明體"/>
+        <a:font script="Arab" typeface="Times New Roman"/>
+        <a:font script="Hebr" typeface="Times New Roman"/>
+        <a:font script="Thai" typeface="Angsana New"/>
+        <a:font script="Ethi" typeface="Nyala"/>
+        <a:font script="Beng" typeface="Vrinda"/>
+        <a:font script="Gujr" typeface="Shruti"/>
+        <a:font script="Khmr" typeface="MoolBoran"/>
+        <a:font script="Knda" typeface="Tunga"/>
+        <a:font script="Guru" typeface="Raavi"/>
+        <a:font script="Cans" typeface="Euphemia"/>
+        <a:font script="Cher" typeface="Plantagenet Cherokee"/>
+        <a:font script="Yiii" typeface="Microsoft Yi Baiti"/>
+        <a:font script="Tibt" typeface="Microsoft Himalaya"/>
+        <a:font script="Thaa" typeface="MV Boli"/>
+        <a:font script="Deva" typeface="Mangal"/>
+        <a:font script="Telu" typeface="Gautami"/>
+        <a:font script="Taml" typeface="Latha"/>
+        <a:font script="Syrc" typeface="Estrangelo Edessa"/>
+        <a:font script="Orya" typeface="Kalinga"/>
+        <a:font script="Mlym" typeface="Kartika"/>
+        <a:font script="Laoo" typeface="DokChampa"/>
+        <a:font script="Sinh" typeface="Iskoola Pota"/>
+        <a:font script="Mong" typeface="Mongolian Baiti"/>
+        <a:font script="Viet" typeface="Times New Roman"/>
+        <a:font script="Uigh" typeface="Microsoft Uighur"/>
+        <a:font script="Geor" typeface="Sylfaen"/>
+        <a:font script="Armn" typeface="Arial"/>
+        <a:font script="Bugi" typeface="Leelawadee UI"/>
+        <a:font script="Bopo" typeface="Microsoft JhengHei"/>
+        <a:font script="Java" typeface="Javanese Text"/>
+        <a:font script="Lisu" typeface="Segoe UI"/>
+        <a:font script="Mymr" typeface="Myanmar Text"/>
+        <a:font script="Nkoo" typeface="Ebrima"/>
+        <a:font script="Olck" typeface="Nirmala UI"/>
+        <a:font script="Osma" typeface="Ebrima"/>
+        <a:font script="Phag" typeface="Phagspa"/>
+        <a:font script="Syrn" typeface="Estrangelo Edessa"/>
+        <a:font script="Syrj" typeface="Estrangelo Edessa"/>
+        <a:font script="Syre" typeface="Estrangelo Edessa"/>
+        <a:font script="Sora" typeface="Nirmala UI"/>
+        <a:font script="Tale" typeface="Microsoft Tai Le"/>
+        <a:font script="Talu" typeface="Microsoft New Tai Lue"/>
+        <a:font script="Tfng" typeface="Ebrima"/>
+      </a:majorFont>
+      <a:minorFont>
+        <a:latin typeface="Aptos" panose="02110004020202020204"/>
+        <a:ea typeface=""/>
+        <a:cs typeface=""/>
+        <a:font script="Jpan" typeface="游ゴシック"/>
+        <a:font script="Hang" typeface="맑은 고딕"/>
+        <a:font script="Hans" typeface="等线"/>
+        <a:font script="Hant" typeface="新細明體"/>
+        <a:font script="Arab" typeface="Arial"/>
+        <a:font script="Hebr" typeface="Arial"/>
+        <a:font script="Thai" typeface="Cordia New"/>
+        <a:font script="Ethi" typeface="Nyala"/>
+        <a:font script="Beng" typeface="Vrinda"/>
+        <a:font script="Gujr" typeface="Shruti"/>
+        <a:font script="Khmr" typeface="DaunPenh"/>
+        <a:font script="Knda" typeface="Tunga"/>
+        <a:font script="Guru" typeface="Raavi"/>
+        <a:font script="Cans" typeface="Euphemia"/>
+        <a:font script="Cher" typeface="Plantagenet Cherokee"/>
+        <a:font script="Yiii" typeface="Microsoft Yi Baiti"/>
+        <a:font script="Tibt" typeface="Microsoft Himalaya"/>
+        <a:font script="Thaa" typeface="MV Boli"/>
+        <a:font script="Deva" typeface="Mangal"/>
+        <a:font script="Telu" typeface="Gautami"/>
+        <a:font script="Taml" typeface="Latha"/>
+        <a:font script="Syrc" typeface="Estrangelo Edessa"/>
+        <a:font script="Orya" typeface="Kalinga"/>
+        <a:font script="Mlym" typeface="Kartika"/>
+        <a:font script="Laoo" typeface="DokChampa"/>
+        <a:font script="Sinh" typeface="Iskoola Pota"/>
+        <a:font script="Mong" typeface="Mongolian Baiti"/>
+        <a:font script="Viet" typeface="Arial"/>
+        <a:font script="Uigh" typeface="Microsoft Uighur"/>
+        <a:font script="Geor" typeface="Sylfaen"/>
+        <a:font script="Armn" typeface="Arial"/>
+        <a:font script="Bugi" typeface="Leelawadee UI"/>
+        <a:font script="Bopo" typeface="Microsoft JhengHei"/>
+        <a:font script="Java" typeface="Javanese Text"/>
+        <a:font script="Lisu" typeface="Segoe UI"/>
+        <a:font script="Mymr" typeface="Myanmar Text"/>
+        <a:font script="Nkoo" typeface="Ebrima"/>
+        <a:font script="Olck" typeface="Nirmala UI"/>
+        <a:font script="Osma" typeface="Ebrima"/>
+        <a:font script="Phag" typeface="Phagspa"/>
+        <a:font script="Syrn" typeface="Estrangelo Edessa"/>
+        <a:font script="Syrj" typeface="Estrangelo Edessa"/>
+        <a:font script="Syre" typeface="Estrangelo Edessa"/>
+        <a:font script="Sora" typeface="Nirmala UI"/>
+        <a:font script="Tale" typeface="Microsoft Tai Le"/>
+        <a:font script="Talu" typeface="Microsoft New Tai Lue"/>
+        <a:font script="Tfng" typeface="Ebrima"/>
+      </a:minorFont>
+    </a:fontScheme>
+    <a:fmtScheme name="Office">
+      <a:fillStyleLst>
+        <a:solidFill>
+          <a:schemeClr val="phClr"/>
+        </a:solidFill>
+        <a:gradFill rotWithShape="1">
+          <a:gsLst>
+            <a:gs pos="0">
+              <a:schemeClr val="phClr">
+                <a:lumMod val="110000"/>
+                <a:satMod val="105000"/>
+                <a:tint val="67000"/>
+              </a:schemeClr>
+            </a:gs>
+            <a:gs pos="50000">
+              <a:schemeClr val="phClr">
+                <a:lumMod val="105000"/>
+                <a:satMod val="103000"/>
+                <a:tint val="73000"/>
+              </a:schemeClr>
+            </a:gs>
+            <a:gs pos="100000">
+              <a:schemeClr val="phClr">
+                <a:lumMod val="105000"/>
+                <a:satMod val="109000"/>
+                <a:tint val="81000"/>
+              </a:schemeClr>
+            </a:gs>
+          </a:gsLst>
+          <a:lin ang="5400000" scaled="0"/>
+        </a:gradFill>
+        <a:gradFill rotWithShape="1">
+          <a:gsLst>
+            <a:gs pos="0">
+              <a:schemeClr val="phClr">
+                <a:satMod val="103000"/>
+                <a:lumMod val="102000"/>
+                <a:tint val="94000"/>
+              </a:schemeClr>
+            </a:gs>
+            <a:gs pos="50000">
+              <a:schemeClr val="phClr">
+                <a:satMod val="110000"/>
+                <a:lumMod val="100000"/>
+                <a:shade val="100000"/>
+              </a:schemeClr>
+            </a:gs>
+            <a:gs pos="100000">
+              <a:schemeClr val="phClr">
+                <a:lumMod val="99000"/>
+                <a:satMod val="120000"/>
+                <a:shade val="78000"/>
+              </a:schemeClr>
+            </a:gs>
+          </a:gsLst>
+          <a:lin ang="5400000" scaled="0"/>
+        </a:gradFill>
+      </a:fillStyleLst>
+      <a:lnStyleLst>
+        <a:ln w="12700" cap="flat" cmpd="sng" algn="ctr">
+          <a:solidFill>
+            <a:schemeClr val="phClr"/>
+          </a:solidFill>
+          <a:prstDash val="solid"/>
+          <a:miter lim="800000"/>
+        </a:ln>
+        <a:ln w="19050" cap="flat" cmpd="sng" algn="ctr">
+          <a:solidFill>
+            <a:schemeClr val="phClr"/>
+          </a:solidFill>
+          <a:prstDash val="solid"/>
+          <a:miter lim="800000"/>
+        </a:ln>
+        <a:ln w="25400" cap="flat" cmpd="sng" algn="ctr">
+          <a:solidFill>
+            <a:schemeClr val="phClr"/>
+          </a:solidFill>
+          <a:prstDash val="solid"/>
+          <a:miter lim="800000"/>
+        </a:ln>
+      </a:lnStyleLst>
+      <a:effectStyleLst>
+        <a:effectStyle>
+          <a:effectLst/>
+        </a:effectStyle>
+        <a:effectStyle>
+          <a:effectLst/>
+        </a:effectStyle>
+        <a:effectStyle>
+          <a:effectLst>
+            <a:outerShdw blurRad="57150" dist="19050" dir="5400000" algn="ctr" rotWithShape="0">
+              <a:srgbClr val="000000">
+                <a:alpha val="63000"/>
+              </a:srgbClr>
+            </a:outerShdw>
+          </a:effectLst>
+        </a:effectStyle>
+      </a:effectStyleLst>
+      <a:bgFillStyleLst>
+        <a:solidFill>
+          <a:schemeClr val="phClr"/>
+        </a:solidFill>
+        <a:solidFill>
+          <a:schemeClr val="phClr">
+            <a:tint val="95000"/>
+            <a:satMod val="170000"/>
+          </a:schemeClr>
+        </a:solidFill>
+        <a:gradFill rotWithShape="1">
+          <a:gsLst>
+            <a:gs pos="0">
+              <a:schemeClr val="phClr">
+                <a:tint val="93000"/>
+                <a:satMod val="150000"/>
+                <a:shade val="98000"/>
+                <a:lumMod val="102000"/>
+              </a:schemeClr>
+            </a:gs>
+            <a:gs pos="50000">
+              <a:schemeClr val="phClr">
+                <a:tint val="98000"/>
+                <a:satMod val="130000"/>
+                <a:shade val="90000"/>
+                <a:lumMod val="103000"/>
+              </a:schemeClr>
+            </a:gs>
+            <a:gs pos="100000">
+              <a:schemeClr val="phClr">
+                <a:shade val="63000"/>
+                <a:satMod val="120000"/>
+              </a:schemeClr>
+            </a:gs>
+          </a:gsLst>
+          <a:lin ang="5400000" scaled="0"/>
+        </a:gradFill>
+      </a:bgFillStyleLst>
+    </a:fmtScheme>
+  </a:themeElements>
+  <a:objectDefaults>
+    <a:lnDef>
+      <a:spPr/>
+      <a:bodyPr/>
+      <a:lstStyle/>
+      <a:style>
+        <a:lnRef idx="2">
+          <a:schemeClr val="accent1"/>
+        </a:lnRef>
+        <a:fillRef idx="0">
+          <a:schemeClr val="accent1"/>
+        </a:fillRef>
+        <a:effectRef idx="1">
+          <a:schemeClr val="accent1"/>
+        </a:effectRef>
+        <a:fontRef idx="minor">
+          <a:schemeClr val="tx1"/>
+        </a:fontRef>
+      </a:style>
+    </a:lnDef>
+  </a:objectDefaults>
+  <a:extraClrSchemeLst/>
+  <a:extLst>
+    <a:ext uri="{05A4C25C-085E-4340-85A3-A5531E510DB2}">
+      <thm15:themeFamily xmlns:thm15="http://schemas.microsoft.com/office/thememl/2012/main" name="Office Theme" id="{2E142A2C-CD16-42D6-873A-C26D2A0506FA}" vid="{1BDDFF52-6CD6-40A5-AB3C-68EB2F1E4D0A}"/>
+    </a:ext>
+  </a:extLst>
+</a:theme>
 </file>
--- a/Projeto_Final_Artefatos/InsurMinds_Projeto_Final.pptx
+++ b/Projeto_Final_Artefatos/InsurMinds_Projeto_Final.pptx
@@ -4,9 +4,6 @@
   <p:sldMasterIdLst>
     <p:sldMasterId id="2147483648" r:id="rId1"/>
   </p:sldMasterIdLst>
-  <p:notesMasterIdLst>
-    <p:notesMasterId r:id="rId16"/>
-  </p:notesMasterIdLst>
   <p:sldIdLst>
     <p:sldId id="256" r:id="rId2"/>
     <p:sldId id="257" r:id="rId3"/>
@@ -20,9 +17,11 @@
     <p:sldId id="265" r:id="rId11"/>
     <p:sldId id="266" r:id="rId12"/>
     <p:sldId id="267" r:id="rId13"/>
-    <p:sldId id="269" r:id="rId14"/>
-    <p:sldId id="268" r:id="rId15"/>
+    <p:sldId id="268" r:id="rId14"/>
   </p:sldIdLst>
+  <p:notesMasterIdLst>
+    <p:notesMasterId r:id="rId15"/>
+  </p:notesMasterIdLst>
   <p:sldSz cx="12192000" cy="6858000"/>
   <p:notesSz cx="6858000" cy="12192000"/>
   <p:defaultTextStyle>
@@ -117,20 +116,13 @@
       </a:defRPr>
     </a:lvl9pPr>
   </p:defaultTextStyle>
-  <p:extLst>
-    <p:ext uri="{EFAFB233-063F-42B5-8137-9DF3F51BA10A}">
-      <p15:sldGuideLst xmlns:p15="http://schemas.microsoft.com/office/powerpoint/2012/main"/>
-    </p:ext>
-  </p:extLst>
 </p:presentation>
 </file>
 
 <file path=ppt/charts/chart1.xml><?xml version="1.0" encoding="utf-8"?>
-<c:chartSpace xmlns:c="http://schemas.openxmlformats.org/drawingml/2006/chart" xmlns:a="http://schemas.openxmlformats.org/drawingml/2006/main" xmlns:r="http://schemas.openxmlformats.org/officeDocument/2006/relationships" xmlns:c16r2="http://schemas.microsoft.com/office/drawing/2015/06/chart">
+<c:chartSpace xmlns:c="http://schemas.openxmlformats.org/drawingml/2006/chart" xmlns:a="http://schemas.openxmlformats.org/drawingml/2006/main" xmlns:r="http://schemas.openxmlformats.org/officeDocument/2006/relationships">
   <c:date1904 val="0"/>
-  <c:lang val="en-US"/>
   <c:roundedCorners val="1"/>
-  <c:style val="2"/>
   <c:chart>
     <c:title>
       <c:tx>
@@ -147,17 +139,18 @@
               </a:defRPr>
             </a:pPr>
             <a:r>
-              <a:rPr lang="en-US" sz="1400" b="0" i="0" u="none" strike="noStrike">
+              <a:rPr sz="1400" b="0" i="0" u="none" strike="noStrike">
                 <a:solidFill>
                   <a:srgbClr val="14213D"/>
                 </a:solidFill>
                 <a:latin typeface="Arial"/>
               </a:rPr>
-              <a:t>EVAL-01 a EVAL-05 (1,00 = 100%)</a:t>
+              <a:t>Média de 3 runs LIVE (1,00 = 100%) · meta da comparação: 0,90</a:t>
             </a:r>
           </a:p>
         </c:rich>
       </c:tx>
+      <c:layout/>
       <c:overlay val="0"/>
     </c:title>
     <c:autoTitleDeleted val="0"/>
@@ -188,35 +181,62 @@
             <a:effectLst/>
           </c:spPr>
           <c:invertIfNegative val="0"/>
+          <c:dLbls>
+            <c:numFmt formatCode="0.00" sourceLinked="0"/>
+            <c:txPr>
+              <a:bodyPr/>
+              <a:lstStyle/>
+              <a:p>
+                <a:pPr>
+                  <a:defRPr b="0" i="0" strike="noStrike" sz="1200" u="none">
+                    <a:solidFill>
+                      <a:srgbClr val="1F2328"/>
+                    </a:solidFill>
+                    <a:latin typeface="Arial"/>
+                  </a:defRPr>
+                </a:pPr>
+              </a:p>
+            </c:txPr>
+            <c:showLegendKey val="0"/>
+            <c:showVal val="1"/>
+            <c:showCatName val="0"/>
+            <c:showSerName val="0"/>
+            <c:showPercent val="0"/>
+            <c:showBubbleSize val="0"/>
+            <c:showLeaderLines val="0"/>
+          </c:dLbls>
           <c:dPt>
             <c:idx val="0"/>
             <c:invertIfNegative val="0"/>
             <c:bubble3D val="0"/>
-            <c:extLst>
-              <c:ext xmlns:c16="http://schemas.microsoft.com/office/drawing/2014/chart" uri="{C3380CC4-5D6E-409C-BE32-E72D297353CC}">
-                <c16:uniqueId val="{00000001-592F-0447-8699-001AF5E371AC}"/>
-              </c:ext>
-            </c:extLst>
+            <c:spPr>
+              <a:solidFill>
+                <a:srgbClr val="14213D"/>
+              </a:solidFill>
+              <a:effectLst/>
+            </c:spPr>
           </c:dPt>
           <c:dPt>
             <c:idx val="1"/>
             <c:invertIfNegative val="0"/>
             <c:bubble3D val="0"/>
-            <c:extLst>
-              <c:ext xmlns:c16="http://schemas.microsoft.com/office/drawing/2014/chart" uri="{C3380CC4-5D6E-409C-BE32-E72D297353CC}">
-                <c16:uniqueId val="{00000003-592F-0447-8699-001AF5E371AC}"/>
-              </c:ext>
-            </c:extLst>
+            <c:spPr>
+              <a:solidFill>
+                <a:srgbClr val="14213D"/>
+              </a:solidFill>
+              <a:effectLst/>
+            </c:spPr>
           </c:dPt>
           <c:dPt>
             <c:idx val="2"/>
             <c:invertIfNegative val="0"/>
             <c:bubble3D val="0"/>
-            <c:extLst>
-              <c:ext xmlns:c16="http://schemas.microsoft.com/office/drawing/2014/chart" uri="{C3380CC4-5D6E-409C-BE32-E72D297353CC}">
-                <c16:uniqueId val="{00000005-592F-0447-8699-001AF5E371AC}"/>
-              </c:ext>
-            </c:extLst>
+            <c:spPr>
+              <a:solidFill>
+                <a:srgbClr val="14213D"/>
+              </a:solidFill>
+              <a:effectLst/>
+            </c:spPr>
           </c:dPt>
           <c:dPt>
             <c:idx val="3"/>
@@ -228,94 +248,56 @@
               </a:solidFill>
               <a:effectLst/>
             </c:spPr>
-            <c:extLst>
-              <c:ext xmlns:c16="http://schemas.microsoft.com/office/drawing/2014/chart" uri="{C3380CC4-5D6E-409C-BE32-E72D297353CC}">
-                <c16:uniqueId val="{00000007-592F-0447-8699-001AF5E371AC}"/>
-              </c:ext>
-            </c:extLst>
           </c:dPt>
           <c:dPt>
             <c:idx val="4"/>
             <c:invertIfNegative val="0"/>
             <c:bubble3D val="0"/>
-            <c:extLst>
-              <c:ext xmlns:c16="http://schemas.microsoft.com/office/drawing/2014/chart" uri="{C3380CC4-5D6E-409C-BE32-E72D297353CC}">
-                <c16:uniqueId val="{00000009-592F-0447-8699-001AF5E371AC}"/>
-              </c:ext>
-            </c:extLst>
+            <c:spPr>
+              <a:solidFill>
+                <a:srgbClr val="E09F3E"/>
+              </a:solidFill>
+              <a:effectLst/>
+            </c:spPr>
           </c:dPt>
           <c:dPt>
             <c:idx val="5"/>
             <c:invertIfNegative val="0"/>
             <c:bubble3D val="0"/>
-            <c:extLst>
-              <c:ext xmlns:c16="http://schemas.microsoft.com/office/drawing/2014/chart" uri="{C3380CC4-5D6E-409C-BE32-E72D297353CC}">
-                <c16:uniqueId val="{0000000B-592F-0447-8699-001AF5E371AC}"/>
-              </c:ext>
-            </c:extLst>
-          </c:dPt>
-          <c:dLbls>
-            <c:numFmt formatCode="0.00" sourceLinked="0"/>
             <c:spPr>
-              <a:noFill/>
-              <a:ln>
-                <a:noFill/>
-              </a:ln>
+              <a:solidFill>
+                <a:srgbClr val="14213D"/>
+              </a:solidFill>
               <a:effectLst/>
             </c:spPr>
-            <c:txPr>
-              <a:bodyPr/>
-              <a:lstStyle/>
-              <a:p>
-                <a:pPr>
-                  <a:defRPr sz="1200" b="0" i="0" u="none" strike="noStrike">
-                    <a:solidFill>
-                      <a:srgbClr val="1F2328"/>
-                    </a:solidFill>
-                    <a:latin typeface="Arial"/>
-                  </a:defRPr>
-                </a:pPr>
-                <a:endParaRPr lang="en-BR"/>
-              </a:p>
-            </c:txPr>
-            <c:showLegendKey val="0"/>
-            <c:showVal val="1"/>
-            <c:showCatName val="0"/>
-            <c:showSerName val="0"/>
-            <c:showPercent val="0"/>
-            <c:showBubbleSize val="0"/>
-            <c:showLeaderLines val="0"/>
-            <c:extLst>
-              <c:ext xmlns:c15="http://schemas.microsoft.com/office/drawing/2012/chart" uri="{CE6537A1-D6FC-4f65-9D91-7224C49458BB}">
-                <c15:showLeaderLines val="0"/>
-              </c:ext>
-            </c:extLst>
-          </c:dLbls>
+          </c:dPt>
           <c:cat>
-            <c:strRef>
+            <c:multiLvlStrRef>
               <c:f>Sheet1!$A$2:$A$7</c:f>
-              <c:strCache>
+              <c:multiLvlStrCache>
                 <c:ptCount val="6"/>
-                <c:pt idx="0">
-                  <c:v>Schema válido</c:v>
-                </c:pt>
-                <c:pt idx="1">
-                  <c:v>Campos corretos</c:v>
-                </c:pt>
-                <c:pt idx="2">
-                  <c:v>Evidência na página</c:v>
-                </c:pt>
-                <c:pt idx="3">
-                  <c:v>Comparação (gab. v1.0)</c:v>
-                </c:pt>
-                <c:pt idx="4">
-                  <c:v>Comparação (gab. v1.1)</c:v>
-                </c:pt>
-                <c:pt idx="5">
-                  <c:v>Proxy de alucinação</c:v>
-                </c:pt>
-              </c:strCache>
-            </c:strRef>
+                <c:lvl>
+                  <c:pt idx="0">
+                    <c:v>Schema válido</c:v>
+                  </c:pt>
+                  <c:pt idx="1">
+                    <c:v>Campos com valor anotado</c:v>
+                  </c:pt>
+                  <c:pt idx="2">
+                    <c:v>Trechos conferidos na página</c:v>
+                  </c:pt>
+                  <c:pt idx="3">
+                    <c:v>Comparação v1.0 — média</c:v>
+                  </c:pt>
+                  <c:pt idx="4">
+                    <c:v>Comparação v1.0 — pior caso</c:v>
+                  </c:pt>
+                  <c:pt idx="5">
+                    <c:v>Comparação v1.1 — média</c:v>
+                  </c:pt>
+                </c:lvl>
+              </c:multiLvlStrCache>
+            </c:multiLvlStrRef>
           </c:cat>
           <c:val>
             <c:numRef>
@@ -330,37 +312,50 @@
                   <c:v>1</c:v>
                 </c:pt>
                 <c:pt idx="2">
-                  <c:v>1</c:v>
+                  <c:v>0.99</c:v>
                 </c:pt>
                 <c:pt idx="3">
-                  <c:v>0.8</c:v>
+                  <c:v>0.77</c:v>
                 </c:pt>
                 <c:pt idx="4">
-                  <c:v>1</c:v>
+                  <c:v>0.7</c:v>
                 </c:pt>
                 <c:pt idx="5">
-                  <c:v>1</c:v>
+                  <c:v>0.97</c:v>
                 </c:pt>
               </c:numCache>
             </c:numRef>
           </c:val>
-          <c:extLst>
-            <c:ext xmlns:c16="http://schemas.microsoft.com/office/drawing/2014/chart" uri="{C3380CC4-5D6E-409C-BE32-E72D297353CC}">
-              <c16:uniqueId val="{0000000C-592F-0447-8699-001AF5E371AC}"/>
-            </c:ext>
-          </c:extLst>
         </c:ser>
         <c:dLbls>
+          <c:numFmt formatCode="0.00" sourceLinked="0"/>
+          <c:txPr>
+            <a:bodyPr/>
+            <a:lstStyle/>
+            <a:p>
+              <a:pPr>
+                <a:defRPr b="0" i="0" strike="noStrike" sz="1200" u="none">
+                  <a:solidFill>
+                    <a:srgbClr val="1F2328"/>
+                  </a:solidFill>
+                  <a:latin typeface="Arial"/>
+                </a:defRPr>
+              </a:pPr>
+            </a:p>
+          </c:txPr>
           <c:showLegendKey val="0"/>
           <c:showVal val="1"/>
           <c:showCatName val="0"/>
           <c:showSerName val="0"/>
           <c:showPercent val="0"/>
           <c:showBubbleSize val="0"/>
+          <c:showLeaderLines val="0"/>
         </c:dLbls>
         <c:gapWidth val="60"/>
+        <c:overlap val="0"/>
         <c:axId val="2094734554"/>
         <c:axId val="2094734552"/>
+        <c:axId val="2094734556"/>
       </c:barChart>
       <c:catAx>
         <c:axId val="2094734554"/>
@@ -401,22 +396,45 @@
         <c:crosses val="autoZero"/>
         <c:auto val="1"/>
         <c:lblAlgn val="ctr"/>
-        <c:lblOffset val="100"/>
         <c:noMultiLvlLbl val="1"/>
       </c:catAx>
       <c:valAx>
         <c:axId val="2094734552"/>
         <c:scaling>
           <c:orientation val="minMax"/>
-          <c:max val="1.1499999999999999"/>
+          <c:max val="1.15"/>
           <c:min val="0"/>
         </c:scaling>
         <c:delete val="1"/>
-        <c:axPos val="t"/>
+        <c:axPos val="b"/>
         <c:numFmt formatCode="General" sourceLinked="0"/>
         <c:majorTickMark val="out"/>
         <c:minorTickMark val="none"/>
         <c:tickLblPos val="low"/>
+        <c:spPr>
+          <a:ln w="12700" cap="flat">
+            <a:solidFill>
+              <a:srgbClr val="888888"/>
+            </a:solidFill>
+            <a:prstDash val="solid"/>
+            <a:round/>
+          </a:ln>
+        </c:spPr>
+        <c:txPr>
+          <a:bodyPr/>
+          <a:lstStyle/>
+          <a:p>
+            <a:pPr>
+              <a:defRPr sz="1200" b="0" i="0" u="none" strike="noStrike">
+                <a:solidFill>
+                  <a:srgbClr val="000000"/>
+                </a:solidFill>
+                <a:latin typeface="Arial"/>
+              </a:defRPr>
+            </a:pPr>
+            <a:endParaRPr lang="en-US"/>
+          </a:p>
+        </c:txPr>
         <c:crossAx val="2094734554"/>
         <c:crosses val="autoZero"/>
         <c:crossBetween val="between"/>
@@ -431,7 +449,6 @@
     </c:plotArea>
     <c:plotVisOnly val="1"/>
     <c:dispBlanksAs val="span"/>
-    <c:showDLblsOverMax val="1"/>
   </c:chart>
   <c:spPr>
     <a:noFill/>
@@ -468,10 +485,234 @@
           <a:chExt cx="0" cy="0"/>
         </a:xfrm>
       </p:grpSpPr>
+      <p:sp>
+        <p:nvSpPr>
+          <p:cNvPr id="2" name="Header Placeholder 1"/>
+          <p:cNvSpPr>
+            <a:spLocks noGrp="1"/>
+          </p:cNvSpPr>
+          <p:nvPr>
+            <p:ph type="hdr" sz="quarter"/>
+          </p:nvPr>
+        </p:nvSpPr>
+        <p:spPr>
+          <a:xfrm>
+            <a:off x="0" y="0"/>
+            <a:ext cx="2971800" cy="458788"/>
+          </a:xfrm>
+          <a:prstGeom prst="rect">
+            <a:avLst/>
+          </a:prstGeom>
+        </p:spPr>
+        <p:txBody>
+          <a:bodyPr vert="horz" lIns="91440" tIns="45720" rIns="91440" bIns="45720" rtlCol="0"/>
+          <a:lstStyle>
+            <a:lvl1pPr algn="l">
+              <a:defRPr sz="1200"/>
+            </a:lvl1pPr>
+          </a:lstStyle>
+          <a:p>
+            <a:endParaRPr lang="en-US"/>
+          </a:p>
+        </p:txBody>
+      </p:sp>
+      <p:sp>
+        <p:nvSpPr>
+          <p:cNvPr id="3" name="Date Placeholder 2"/>
+          <p:cNvSpPr>
+            <a:spLocks noGrp="1"/>
+          </p:cNvSpPr>
+          <p:nvPr>
+            <p:ph type="dt" idx="1"/>
+          </p:nvPr>
+        </p:nvSpPr>
+        <p:spPr>
+          <a:xfrm>
+            <a:off x="3884613" y="0"/>
+            <a:ext cx="2971800" cy="458788"/>
+          </a:xfrm>
+          <a:prstGeom prst="rect">
+            <a:avLst/>
+          </a:prstGeom>
+        </p:spPr>
+        <p:txBody>
+          <a:bodyPr vert="horz" lIns="91440" tIns="45720" rIns="91440" bIns="45720" rtlCol="0"/>
+          <a:lstStyle>
+            <a:lvl1pPr algn="r">
+              <a:defRPr sz="1200"/>
+            </a:lvl1pPr>
+          </a:lstStyle>
+          <a:p>
+            <a:fld id="{5282F153-3F37-0F45-9E97-73ACFA13230C}" type="datetimeFigureOut">
+              <a:rPr lang="en-US"/>
+              <a:t>7/23/19</a:t>
+            </a:fld>
+            <a:endParaRPr lang="en-US"/>
+          </a:p>
+        </p:txBody>
+      </p:sp>
+      <p:sp>
+        <p:nvSpPr>
+          <p:cNvPr id="4" name="Slide Image Placeholder 3"/>
+          <p:cNvSpPr>
+            <a:spLocks noGrp="1" noRot="1" noChangeAspect="1"/>
+          </p:cNvSpPr>
+          <p:nvPr>
+            <p:ph type="sldImg" idx="2"/>
+          </p:nvPr>
+        </p:nvSpPr>
+        <p:spPr>
+          <a:xfrm>
+            <a:off x="685800" y="1143000"/>
+            <a:ext cx="5486400" cy="3086100"/>
+          </a:xfrm>
+          <a:prstGeom prst="rect">
+            <a:avLst/>
+          </a:prstGeom>
+          <a:noFill/>
+          <a:ln w="12700">
+            <a:solidFill>
+              <a:prstClr val="black"/>
+            </a:solidFill>
+          </a:ln>
+        </p:spPr>
+        <p:txBody>
+          <a:bodyPr vert="horz" lIns="91440" tIns="45720" rIns="91440" bIns="45720" rtlCol="0" anchor="ctr"/>
+          <a:lstStyle/>
+          <a:p>
+            <a:endParaRPr lang="en-US"/>
+          </a:p>
+        </p:txBody>
+      </p:sp>
+      <p:sp>
+        <p:nvSpPr>
+          <p:cNvPr id="5" name="Notes Placeholder 4"/>
+          <p:cNvSpPr>
+            <a:spLocks noGrp="1"/>
+          </p:cNvSpPr>
+          <p:nvPr>
+            <p:ph type="body" sz="quarter" idx="3"/>
+          </p:nvPr>
+        </p:nvSpPr>
+        <p:spPr>
+          <a:xfrm>
+            <a:off x="685800" y="4400550"/>
+            <a:ext cx="5486400" cy="3600450"/>
+          </a:xfrm>
+          <a:prstGeom prst="rect">
+            <a:avLst/>
+          </a:prstGeom>
+        </p:spPr>
+        <p:txBody>
+          <a:bodyPr vert="horz" lIns="91440" tIns="45720" rIns="91440" bIns="45720" rtlCol="0"/>
+          <a:lstStyle/>
+          <a:p>
+            <a:pPr lvl="0"/>
+            <a:r>
+              <a:rPr lang="en-US"/>
+              <a:t>Click to edit Master text styles</a:t>
+            </a:r>
+          </a:p>
+          <a:p>
+            <a:pPr lvl="1"/>
+            <a:r>
+              <a:rPr lang="en-US"/>
+              <a:t>Second level</a:t>
+            </a:r>
+          </a:p>
+          <a:p>
+            <a:pPr lvl="2"/>
+            <a:r>
+              <a:rPr lang="en-US"/>
+              <a:t>Third level</a:t>
+            </a:r>
+          </a:p>
+          <a:p>
+            <a:pPr lvl="3"/>
+            <a:r>
+              <a:rPr lang="en-US"/>
+              <a:t>Fourth level</a:t>
+            </a:r>
+          </a:p>
+          <a:p>
+            <a:pPr lvl="4"/>
+            <a:r>
+              <a:rPr lang="en-US"/>
+              <a:t>Fifth level</a:t>
+            </a:r>
+          </a:p>
+        </p:txBody>
+      </p:sp>
+      <p:sp>
+        <p:nvSpPr>
+          <p:cNvPr id="6" name="Footer Placeholder 5"/>
+          <p:cNvSpPr>
+            <a:spLocks noGrp="1"/>
+          </p:cNvSpPr>
+          <p:nvPr>
+            <p:ph type="ftr" sz="quarter" idx="4"/>
+          </p:nvPr>
+        </p:nvSpPr>
+        <p:spPr>
+          <a:xfrm>
+            <a:off x="0" y="8685213"/>
+            <a:ext cx="2971800" cy="458787"/>
+          </a:xfrm>
+          <a:prstGeom prst="rect">
+            <a:avLst/>
+          </a:prstGeom>
+        </p:spPr>
+        <p:txBody>
+          <a:bodyPr vert="horz" lIns="91440" tIns="45720" rIns="91440" bIns="45720" rtlCol="0" anchor="b"/>
+          <a:lstStyle>
+            <a:lvl1pPr algn="l">
+              <a:defRPr sz="1200"/>
+            </a:lvl1pPr>
+          </a:lstStyle>
+          <a:p>
+            <a:endParaRPr lang="en-US"/>
+          </a:p>
+        </p:txBody>
+      </p:sp>
+      <p:sp>
+        <p:nvSpPr>
+          <p:cNvPr id="7" name="Slide Number Placeholder 6"/>
+          <p:cNvSpPr>
+            <a:spLocks noGrp="1"/>
+          </p:cNvSpPr>
+          <p:nvPr>
+            <p:ph type="sldNum" sz="quarter" idx="5"/>
+          </p:nvPr>
+        </p:nvSpPr>
+        <p:spPr>
+          <a:xfrm>
+            <a:off x="3884613" y="8685213"/>
+            <a:ext cx="2971800" cy="458787"/>
+          </a:xfrm>
+          <a:prstGeom prst="rect">
+            <a:avLst/>
+          </a:prstGeom>
+        </p:spPr>
+        <p:txBody>
+          <a:bodyPr vert="horz" lIns="91440" tIns="45720" rIns="91440" bIns="45720" rtlCol="0" anchor="b"/>
+          <a:lstStyle>
+            <a:lvl1pPr algn="r">
+              <a:defRPr sz="1200"/>
+            </a:lvl1pPr>
+          </a:lstStyle>
+          <a:p>
+            <a:fld id="{CE5E9CC1-C706-0F49-92D6-E571CC5EEA8F}" type="slidenum">
+              <a:rPr lang="en-US"/>
+              <a:t>‹#›</a:t>
+            </a:fld>
+            <a:endParaRPr lang="en-US"/>
+          </a:p>
+        </p:txBody>
+      </p:sp>
     </p:spTree>
     <p:extLst>
       <p:ext uri="{BB962C8B-B14F-4D97-AF65-F5344CB8AC3E}">
-        <p14:creationId xmlns:p14="http://schemas.microsoft.com/office/powerpoint/2010/main" val="2363341225"/>
+        <p14:creationId xmlns:p14="http://schemas.microsoft.com/office/powerpoint/2010/main" val="1024086991"/>
       </p:ext>
     </p:extLst>
   </p:cSld>
@@ -619,6 +860,7 @@
               <a:rPr lang="en-US" dirty="0"/>
               <a:t>Apresentação do InsurMinds_PROTETOR, plataforma que lê, compara e explica apólices D&amp;O com IA generativa. Mensagem central: o sistema automatiza a leitura e a comparação, mostra a página de cada evidência e deixa a decisão ao especialista.</a:t>
             </a:r>
+            <a:endParaRPr lang="en-US" dirty="0"/>
           </a:p>
         </p:txBody>
       </p:sp>
@@ -706,6 +948,7 @@
               <a:rPr lang="en-US" dirty="0"/>
               <a:t>Os testes de robustez usam documentos de outros ramos e uma apólice sintética com gabarito de valores, porque as condições gerais D&amp;O não têm limites em reais. O OCR foi testado gerando uma versão só imagem da mesma apólice: identificação, vigência, limites e franquias bateram com a versão nativa.</a:t>
             </a:r>
+            <a:endParaRPr lang="en-US" dirty="0"/>
           </a:p>
         </p:txBody>
       </p:sp>
@@ -793,6 +1036,7 @@
               <a:rPr lang="en-US" dirty="0"/>
               <a:t>Na PRODEMGE, o sistema leu um contrato de 2020 que era só imagem e identificou a troca de seguradora, o aumento do limite e a mudança de valor. Na Invepar, captou a troca Allianz → Berkley nas demonstrações e expôs uma divergência entre a tabela e a nota de rodapé da própria DFP 2024 — e também as limitações do schema com documentos que listam várias apólices.</a:t>
             </a:r>
+            <a:endParaRPr lang="en-US" dirty="0"/>
           </a:p>
         </p:txBody>
       </p:sp>
@@ -880,6 +1124,7 @@
               <a:rPr lang="en-US" dirty="0"/>
               <a:t>Transparência sobre limites é parte da proposta: cada limitação aparece em aviso na própria interface. Os próximos passos atacam diretamente essas limitações.</a:t>
             </a:r>
+            <a:endParaRPr lang="en-US" dirty="0"/>
           </a:p>
         </p:txBody>
       </p:sp>
@@ -967,6 +1212,7 @@
               <a:rPr lang="en-US" dirty="0"/>
               <a:t>Fechamento: reforçar a mensagem central e o link do repositório, que tem README, relatório técnico, testes e os datasets com fontes.</a:t>
             </a:r>
+            <a:endParaRPr lang="en-US" dirty="0"/>
           </a:p>
         </p:txBody>
       </p:sp>
@@ -987,7 +1233,7 @@
           <a:p>
             <a:fld id="{F7021451-1387-4CA6-816F-3879F97B5CBC}" type="slidenum">
               <a:rPr lang="en-US"/>
-              <a:t>14</a:t>
+              <a:t>13</a:t>
             </a:fld>
             <a:endParaRPr lang="en-US"/>
           </a:p>
@@ -1054,6 +1300,7 @@
               <a:rPr lang="en-US" dirty="0"/>
               <a:t>O desafio não é só ler: é alinhar conceitos entre seguradoras que usam nomes e estruturas diferentes, e manter cada conclusão rastreável. Os números vêm dos documentos usados no projeto: Chubb com 70 páginas, Sompo com 49 e Chubb PME com 254; no run de referência, o sistema extraiu 94 itens da Chubb e 66 da Sompo.</a:t>
             </a:r>
+            <a:endParaRPr lang="en-US" dirty="0"/>
           </a:p>
         </p:txBody>
       </p:sp>
@@ -1141,6 +1388,7 @@
               <a:rPr lang="en-US" dirty="0"/>
               <a:t>Três verbos resumem o produto. Ler: inclusive documentos digitalizados. Comparar: por conceito, não por nome. Explicar: síntese com evidência por página. O tempo de cerca de 3 minutos foi medido nos runs LIVE com Chubb × Sompo.</a:t>
             </a:r>
+            <a:endParaRPr lang="en-US" dirty="0"/>
           </a:p>
         </p:txBody>
       </p:sp>
@@ -1226,8 +1474,9 @@
           <a:p>
             <a:r>
               <a:rPr lang="en-US" dirty="0"/>
-              <a:t>O princípio central: o Harness controla estados, retries, escopo e persistência; os agentes só executam a sua função. Isso torna o sistema previsível e testável sem API: são 98 testes automatizados. Os blocos em lilás usam IA generativa.</a:t>
-            </a:r>
+              <a:t>O princípio central: o Harness controla estados, retries, escopo e persistência; os agentes só executam a sua função. Isso torna o sistema previsível e testável sem API: são 145 testes automatizados. Os blocos em lilás usam IA generativa.</a:t>
+            </a:r>
+            <a:endParaRPr lang="en-US" dirty="0"/>
           </a:p>
         </p:txBody>
       </p:sp>
@@ -1315,6 +1564,7 @@
               <a:rPr lang="en-US" dirty="0"/>
               <a:t>Cada agente tem entrada e saída tipadas. Quatro etapas do fluxo usam IA generativa (A2 no OCR, A3, A5 e A6), além da Consulta. Todas passam por contratos Pydantic e guardrails no código.</a:t>
             </a:r>
+            <a:endParaRPr lang="en-US" dirty="0"/>
           </a:p>
         </p:txBody>
       </p:sp>
@@ -1402,6 +1652,7 @@
               <a:rPr lang="en-US" dirty="0"/>
               <a:t>A confiança vem do código, não só do prompt. O exemplo à direita aconteceu num run LIVE com a Chubb PME: o ciclo de validação e nova tentativa corrigiu o valor sozinho.</a:t>
             </a:r>
+            <a:endParaRPr lang="en-US" dirty="0"/>
           </a:p>
         </p:txBody>
       </p:sp>
@@ -1489,6 +1740,7 @@
               <a:rPr lang="en-US" dirty="0"/>
               <a:t>Aqui entra a demonstração ao vivo ou o vídeo. Sugestão de roteiro: abrir o run Chubb × Sompo pelo modo apresentação, mostrar a síntese, abrir uma evidência e fazer uma pergunta na Consulta.</a:t>
             </a:r>
+            <a:endParaRPr lang="en-US" dirty="0"/>
           </a:p>
         </p:txBody>
       </p:sp>
@@ -1574,8 +1826,9 @@
           <a:p>
             <a:r>
               <a:rPr lang="en-US" dirty="0"/>
-              <a:t>Os campos que as condições gerais delegam à Especificação ficaram vazios, como no gabarito: o modelo não inventou valores. Na comparação, a v1.0 anotava exclusões pela presença do tema; o sistema apontou diferenças de alcance (ambiental e cibernética), que o grupo conferiu nas páginas 42, 51–55, 65 e 17. O gabarito v1.1 registra isso, e mostramos as duas versões.</a:t>
-            </a:r>
+              <a:t>Reportamos média e pior caso de três execuções, não a melhor. Metade dos campos e itens do gabarito espera 'não identificado' e mede o guardrail de não inventar; nos 5 itens de comparação que exigem julgamento, a média é 0,53 no gabarito original. A v1.1 do gabarito foi revisada depois de vermos a saída (ambiental e cibernética, conferidas nas páginas 42, 51–55, 65 e 17), por isso a v1.0 é a referência. Cada trecho de evidência agora é conferido no texto da página, e o guardrail anti-veredito passou a bloquear as 20 frases adversariais do teste.</a:t>
+            </a:r>
+            <a:endParaRPr lang="en-US" dirty="0"/>
           </a:p>
         </p:txBody>
       </p:sp>
@@ -1663,6 +1916,7 @@
               <a:rPr lang="en-US" dirty="0"/>
               <a:t>Cada decisão arquitetural foi motivada por um problema medido. O schema estrito eliminou os erros de formato; a taxonomia resolveu o fato de a Chubb vir em inglês e a Sompo em português; a síntese generativa, limitada aos itens do A5, ficou curta e verificável.</a:t>
             </a:r>
+            <a:endParaRPr lang="en-US" dirty="0"/>
           </a:p>
         </p:txBody>
       </p:sp>
@@ -1735,11 +1989,6 @@
 <file path=ppt/slideMasters/slideMaster1.xml><?xml version="1.0" encoding="utf-8"?>
 <p:sldMaster xmlns:a="http://schemas.openxmlformats.org/drawingml/2006/main" xmlns:r="http://schemas.openxmlformats.org/officeDocument/2006/relationships" xmlns:p="http://schemas.openxmlformats.org/presentationml/2006/main">
   <p:cSld>
-    <p:bg>
-      <p:bgRef idx="1001">
-        <a:schemeClr val="bg1"/>
-      </p:bgRef>
-    </p:bg>
     <p:spTree>
       <p:nvGrpSpPr>
         <p:cNvPr id="1" name=""/>
@@ -2022,7 +2271,6 @@
         <a:solidFill>
           <a:srgbClr val="14213D"/>
         </a:solidFill>
-        <a:effectLst/>
       </p:bgPr>
     </p:bg>
     <p:spTree>
@@ -2063,24 +2311,17 @@
             <a:prstDash val="solid"/>
           </a:ln>
         </p:spPr>
-        <p:txBody>
-          <a:bodyPr/>
-          <a:lstStyle/>
-          <a:p>
-            <a:endParaRPr lang="en-BR"/>
-          </a:p>
-        </p:txBody>
       </p:sp>
       <p:pic>
         <p:nvPicPr>
-          <p:cNvPr id="3" name="Image 0" descr="preencoded.png"/>
+          <p:cNvPr id="3" name="Image 0" descr="preencoded.png">    </p:cNvPr>
           <p:cNvPicPr>
             <a:picLocks noChangeAspect="1"/>
           </p:cNvPicPr>
           <p:nvPr/>
         </p:nvPicPr>
         <p:blipFill>
-          <a:blip r:embed="rId3"/>
+          <a:blip r:embed="rId1"/>
           <a:stretch>
             <a:fillRect/>
           </a:stretch>
@@ -2116,7 +2357,7 @@
           <a:bodyPr wrap="square" lIns="0" tIns="0" rIns="0" bIns="0" rtlCol="0" anchor="ctr"/>
           <a:lstStyle/>
           <a:p>
-            <a:pPr marL="0" indent="0">
+            <a:pPr indent="0" marL="0">
               <a:buNone/>
             </a:pPr>
             <a:r>
@@ -2155,7 +2396,7 @@
           <a:bodyPr wrap="square" lIns="0" tIns="0" rIns="0" bIns="0" rtlCol="0" anchor="ctr"/>
           <a:lstStyle/>
           <a:p>
-            <a:pPr marL="0" indent="0">
+            <a:pPr indent="0" marL="0">
               <a:buNone/>
             </a:pPr>
             <a:r>
@@ -2194,7 +2435,7 @@
           <a:bodyPr wrap="square" lIns="0" tIns="0" rIns="0" bIns="0" rtlCol="0" anchor="ctr"/>
           <a:lstStyle/>
           <a:p>
-            <a:pPr marL="0" indent="0">
+            <a:pPr indent="0" marL="0">
               <a:buNone/>
             </a:pPr>
             <a:r>
@@ -2233,7 +2474,7 @@
           <a:bodyPr wrap="square" lIns="0" tIns="0" rIns="0" bIns="0" rtlCol="0" anchor="ctr"/>
           <a:lstStyle/>
           <a:p>
-            <a:pPr marL="0" indent="0">
+            <a:pPr indent="0" marL="0">
               <a:spcAft>
                 <a:spcPts val="400"/>
               </a:spcAft>
@@ -2253,7 +2494,7 @@
             <a:endParaRPr lang="en-US" sz="1400" dirty="0"/>
           </a:p>
           <a:p>
-            <a:pPr marL="0" indent="0">
+            <a:pPr indent="0" marL="0">
               <a:spcAft>
                 <a:spcPts val="400"/>
               </a:spcAft>
@@ -2320,7 +2561,7 @@
           <a:bodyPr wrap="square" lIns="0" tIns="0" rIns="0" bIns="0" rtlCol="0" anchor="t"/>
           <a:lstStyle/>
           <a:p>
-            <a:pPr marL="0" indent="0">
+            <a:pPr indent="0" marL="0">
               <a:buNone/>
             </a:pPr>
             <a:r>
@@ -2354,34 +2595,16 @@
         </p:nvGraphicFramePr>
         <p:xfrm>
           <a:off x="548640" y="1417320"/>
-          <a:ext cx="11091672" cy="3401568"/>
+          <a:ext cx="11094415" cy="914400"/>
         </p:xfrm>
         <a:graphic>
           <a:graphicData uri="http://schemas.openxmlformats.org/drawingml/2006/table">
             <a:tbl>
               <a:tblPr/>
               <a:tblGrid>
-                <a:gridCol w="7635240">
-                  <a:extLst>
-                    <a:ext uri="{9D8B030D-6E8A-4147-A177-3AD203B41FA5}">
-                      <a16:colId xmlns:a16="http://schemas.microsoft.com/office/drawing/2014/main" val="20000"/>
-                    </a:ext>
-                  </a:extLst>
-                </a:gridCol>
-                <a:gridCol w="1737360">
-                  <a:extLst>
-                    <a:ext uri="{9D8B030D-6E8A-4147-A177-3AD203B41FA5}">
-                      <a16:colId xmlns:a16="http://schemas.microsoft.com/office/drawing/2014/main" val="20001"/>
-                    </a:ext>
-                  </a:extLst>
-                </a:gridCol>
-                <a:gridCol w="1719072">
-                  <a:extLst>
-                    <a:ext uri="{9D8B030D-6E8A-4147-A177-3AD203B41FA5}">
-                      <a16:colId xmlns:a16="http://schemas.microsoft.com/office/drawing/2014/main" val="20002"/>
-                    </a:ext>
-                  </a:extLst>
-                </a:gridCol>
+                <a:gridCol w="7635240"/>
+                <a:gridCol w="1737360"/>
+                <a:gridCol w="1719072"/>
               </a:tblGrid>
               <a:tr h="566928">
                 <a:tc>
@@ -2389,7 +2612,7 @@
                     <a:bodyPr/>
                     <a:lstStyle/>
                     <a:p>
-                      <a:pPr marL="0" indent="0">
+                      <a:pPr indent="0" marL="0">
                         <a:buNone/>
                       </a:pPr>
                       <a:r>
@@ -2410,7 +2633,7 @@
                       </a:endParaRPr>
                     </a:p>
                   </a:txBody>
-                  <a:tcPr marT="91440" marB="91440" anchor="ctr">
+                  <a:tcPr marL="91440" marR="91440" marT="91440" marB="91440" anchor="ctr">
                     <a:lnL w="9525" cap="flat" cmpd="sng" algn="ctr">
                       <a:solidFill>
                         <a:srgbClr val="D0D7DE"/>
@@ -2457,7 +2680,7 @@
                     <a:bodyPr/>
                     <a:lstStyle/>
                     <a:p>
-                      <a:pPr marL="0" indent="0">
+                      <a:pPr indent="0" marL="0">
                         <a:buNone/>
                       </a:pPr>
                       <a:r>
@@ -2478,7 +2701,7 @@
                       </a:endParaRPr>
                     </a:p>
                   </a:txBody>
-                  <a:tcPr marT="91440" marB="91440" anchor="ctr">
+                  <a:tcPr marL="91440" marR="91440" marT="91440" marB="91440" anchor="ctr">
                     <a:lnL w="9525" cap="flat" cmpd="sng" algn="ctr">
                       <a:solidFill>
                         <a:srgbClr val="D0D7DE"/>
@@ -2525,7 +2748,7 @@
                     <a:bodyPr/>
                     <a:lstStyle/>
                     <a:p>
-                      <a:pPr marL="0" indent="0">
+                      <a:pPr indent="0" marL="0">
                         <a:buNone/>
                       </a:pPr>
                       <a:r>
@@ -2546,7 +2769,7 @@
                       </a:endParaRPr>
                     </a:p>
                   </a:txBody>
-                  <a:tcPr marT="91440" marB="91440" anchor="ctr">
+                  <a:tcPr marL="91440" marR="91440" marT="91440" marB="91440" anchor="ctr">
                     <a:lnL w="9525" cap="flat" cmpd="sng" algn="ctr">
                       <a:solidFill>
                         <a:srgbClr val="D0D7DE"/>
@@ -2588,11 +2811,6 @@
                     </a:solidFill>
                   </a:tcPr>
                 </a:tc>
-                <a:extLst>
-                  <a:ext uri="{0D108BD9-81ED-4DB2-BD59-A6C34878D82A}">
-                    <a16:rowId xmlns:a16="http://schemas.microsoft.com/office/drawing/2014/main" val="10000"/>
-                  </a:ext>
-                </a:extLst>
               </a:tr>
               <a:tr h="566928">
                 <a:tc>
@@ -2600,7 +2818,7 @@
                     <a:bodyPr/>
                     <a:lstStyle/>
                     <a:p>
-                      <a:pPr marL="0" indent="0">
+                      <a:pPr indent="0" marL="0">
                         <a:buNone/>
                       </a:pPr>
                       <a:r>
@@ -2621,7 +2839,7 @@
                       </a:endParaRPr>
                     </a:p>
                   </a:txBody>
-                  <a:tcPr marT="91440" marB="91440" anchor="ctr">
+                  <a:tcPr marL="91440" marR="91440" marT="91440" marB="91440" anchor="ctr">
                     <a:lnL w="9525" cap="flat" cmpd="sng" algn="ctr">
                       <a:solidFill>
                         <a:srgbClr val="D0D7DE"/>
@@ -2668,7 +2886,7 @@
                     <a:bodyPr/>
                     <a:lstStyle/>
                     <a:p>
-                      <a:pPr marL="0" indent="0">
+                      <a:pPr indent="0" marL="0">
                         <a:buNone/>
                       </a:pPr>
                       <a:r>
@@ -2689,7 +2907,7 @@
                       </a:endParaRPr>
                     </a:p>
                   </a:txBody>
-                  <a:tcPr marT="91440" marB="91440" anchor="ctr">
+                  <a:tcPr marL="91440" marR="91440" marT="91440" marB="91440" anchor="ctr">
                     <a:lnL w="9525" cap="flat" cmpd="sng" algn="ctr">
                       <a:solidFill>
                         <a:srgbClr val="D0D7DE"/>
@@ -2736,7 +2954,7 @@
                     <a:bodyPr/>
                     <a:lstStyle/>
                     <a:p>
-                      <a:pPr marL="0" indent="0">
+                      <a:pPr indent="0" marL="0">
                         <a:buNone/>
                       </a:pPr>
                       <a:r>
@@ -2757,7 +2975,7 @@
                       </a:endParaRPr>
                     </a:p>
                   </a:txBody>
-                  <a:tcPr marT="91440" marB="91440" anchor="ctr">
+                  <a:tcPr marL="91440" marR="91440" marT="91440" marB="91440" anchor="ctr">
                     <a:lnL w="9525" cap="flat" cmpd="sng" algn="ctr">
                       <a:solidFill>
                         <a:srgbClr val="D0D7DE"/>
@@ -2799,11 +3017,6 @@
                     </a:solidFill>
                   </a:tcPr>
                 </a:tc>
-                <a:extLst>
-                  <a:ext uri="{0D108BD9-81ED-4DB2-BD59-A6C34878D82A}">
-                    <a16:rowId xmlns:a16="http://schemas.microsoft.com/office/drawing/2014/main" val="10001"/>
-                  </a:ext>
-                </a:extLst>
               </a:tr>
               <a:tr h="566928">
                 <a:tc>
@@ -2811,7 +3024,7 @@
                     <a:bodyPr/>
                     <a:lstStyle/>
                     <a:p>
-                      <a:pPr marL="0" indent="0">
+                      <a:pPr indent="0" marL="0">
                         <a:buNone/>
                       </a:pPr>
                       <a:r>
@@ -2832,7 +3045,7 @@
                       </a:endParaRPr>
                     </a:p>
                   </a:txBody>
-                  <a:tcPr marT="91440" marB="91440" anchor="ctr">
+                  <a:tcPr marL="91440" marR="91440" marT="91440" marB="91440" anchor="ctr">
                     <a:lnL w="9525" cap="flat" cmpd="sng" algn="ctr">
                       <a:solidFill>
                         <a:srgbClr val="D0D7DE"/>
@@ -2879,7 +3092,7 @@
                     <a:bodyPr/>
                     <a:lstStyle/>
                     <a:p>
-                      <a:pPr marL="0" indent="0">
+                      <a:pPr indent="0" marL="0">
                         <a:buNone/>
                       </a:pPr>
                       <a:r>
@@ -2900,7 +3113,7 @@
                       </a:endParaRPr>
                     </a:p>
                   </a:txBody>
-                  <a:tcPr marT="91440" marB="91440" anchor="ctr">
+                  <a:tcPr marL="91440" marR="91440" marT="91440" marB="91440" anchor="ctr">
                     <a:lnL w="9525" cap="flat" cmpd="sng" algn="ctr">
                       <a:solidFill>
                         <a:srgbClr val="D0D7DE"/>
@@ -2947,7 +3160,7 @@
                     <a:bodyPr/>
                     <a:lstStyle/>
                     <a:p>
-                      <a:pPr marL="0" indent="0">
+                      <a:pPr indent="0" marL="0">
                         <a:buNone/>
                       </a:pPr>
                       <a:r>
@@ -2968,7 +3181,7 @@
                       </a:endParaRPr>
                     </a:p>
                   </a:txBody>
-                  <a:tcPr marT="91440" marB="91440" anchor="ctr">
+                  <a:tcPr marL="91440" marR="91440" marT="91440" marB="91440" anchor="ctr">
                     <a:lnL w="9525" cap="flat" cmpd="sng" algn="ctr">
                       <a:solidFill>
                         <a:srgbClr val="D0D7DE"/>
@@ -3010,11 +3223,6 @@
                     </a:solidFill>
                   </a:tcPr>
                 </a:tc>
-                <a:extLst>
-                  <a:ext uri="{0D108BD9-81ED-4DB2-BD59-A6C34878D82A}">
-                    <a16:rowId xmlns:a16="http://schemas.microsoft.com/office/drawing/2014/main" val="10002"/>
-                  </a:ext>
-                </a:extLst>
               </a:tr>
               <a:tr h="566928">
                 <a:tc>
@@ -3022,7 +3230,7 @@
                     <a:bodyPr/>
                     <a:lstStyle/>
                     <a:p>
-                      <a:pPr marL="0" indent="0">
+                      <a:pPr indent="0" marL="0">
                         <a:buNone/>
                       </a:pPr>
                       <a:r>
@@ -3043,7 +3251,7 @@
                       </a:endParaRPr>
                     </a:p>
                   </a:txBody>
-                  <a:tcPr marT="91440" marB="91440" anchor="ctr">
+                  <a:tcPr marL="91440" marR="91440" marT="91440" marB="91440" anchor="ctr">
                     <a:lnL w="9525" cap="flat" cmpd="sng" algn="ctr">
                       <a:solidFill>
                         <a:srgbClr val="D0D7DE"/>
@@ -3090,7 +3298,7 @@
                     <a:bodyPr/>
                     <a:lstStyle/>
                     <a:p>
-                      <a:pPr marL="0" indent="0">
+                      <a:pPr indent="0" marL="0">
                         <a:buNone/>
                       </a:pPr>
                       <a:r>
@@ -3111,7 +3319,7 @@
                       </a:endParaRPr>
                     </a:p>
                   </a:txBody>
-                  <a:tcPr marT="91440" marB="91440" anchor="ctr">
+                  <a:tcPr marL="91440" marR="91440" marT="91440" marB="91440" anchor="ctr">
                     <a:lnL w="9525" cap="flat" cmpd="sng" algn="ctr">
                       <a:solidFill>
                         <a:srgbClr val="D0D7DE"/>
@@ -3158,7 +3366,7 @@
                     <a:bodyPr/>
                     <a:lstStyle/>
                     <a:p>
-                      <a:pPr marL="0" indent="0">
+                      <a:pPr indent="0" marL="0">
                         <a:buNone/>
                       </a:pPr>
                       <a:r>
@@ -3179,7 +3387,7 @@
                       </a:endParaRPr>
                     </a:p>
                   </a:txBody>
-                  <a:tcPr marT="91440" marB="91440" anchor="ctr">
+                  <a:tcPr marL="91440" marR="91440" marT="91440" marB="91440" anchor="ctr">
                     <a:lnL w="9525" cap="flat" cmpd="sng" algn="ctr">
                       <a:solidFill>
                         <a:srgbClr val="D0D7DE"/>
@@ -3221,11 +3429,6 @@
                     </a:solidFill>
                   </a:tcPr>
                 </a:tc>
-                <a:extLst>
-                  <a:ext uri="{0D108BD9-81ED-4DB2-BD59-A6C34878D82A}">
-                    <a16:rowId xmlns:a16="http://schemas.microsoft.com/office/drawing/2014/main" val="10003"/>
-                  </a:ext>
-                </a:extLst>
               </a:tr>
               <a:tr h="566928">
                 <a:tc>
@@ -3233,7 +3436,7 @@
                     <a:bodyPr/>
                     <a:lstStyle/>
                     <a:p>
-                      <a:pPr marL="0" indent="0">
+                      <a:pPr indent="0" marL="0">
                         <a:buNone/>
                       </a:pPr>
                       <a:r>
@@ -3254,7 +3457,7 @@
                       </a:endParaRPr>
                     </a:p>
                   </a:txBody>
-                  <a:tcPr marT="91440" marB="91440" anchor="ctr">
+                  <a:tcPr marL="91440" marR="91440" marT="91440" marB="91440" anchor="ctr">
                     <a:lnL w="9525" cap="flat" cmpd="sng" algn="ctr">
                       <a:solidFill>
                         <a:srgbClr val="D0D7DE"/>
@@ -3301,7 +3504,7 @@
                     <a:bodyPr/>
                     <a:lstStyle/>
                     <a:p>
-                      <a:pPr marL="0" indent="0">
+                      <a:pPr indent="0" marL="0">
                         <a:buNone/>
                       </a:pPr>
                       <a:r>
@@ -3322,7 +3525,7 @@
                       </a:endParaRPr>
                     </a:p>
                   </a:txBody>
-                  <a:tcPr marT="91440" marB="91440" anchor="ctr">
+                  <a:tcPr marL="91440" marR="91440" marT="91440" marB="91440" anchor="ctr">
                     <a:lnL w="9525" cap="flat" cmpd="sng" algn="ctr">
                       <a:solidFill>
                         <a:srgbClr val="D0D7DE"/>
@@ -3369,7 +3572,7 @@
                     <a:bodyPr/>
                     <a:lstStyle/>
                     <a:p>
-                      <a:pPr marL="0" indent="0">
+                      <a:pPr indent="0" marL="0">
                         <a:buNone/>
                       </a:pPr>
                       <a:r>
@@ -3390,7 +3593,7 @@
                       </a:endParaRPr>
                     </a:p>
                   </a:txBody>
-                  <a:tcPr marT="91440" marB="91440" anchor="ctr">
+                  <a:tcPr marL="91440" marR="91440" marT="91440" marB="91440" anchor="ctr">
                     <a:lnL w="9525" cap="flat" cmpd="sng" algn="ctr">
                       <a:solidFill>
                         <a:srgbClr val="D0D7DE"/>
@@ -3432,11 +3635,6 @@
                     </a:solidFill>
                   </a:tcPr>
                 </a:tc>
-                <a:extLst>
-                  <a:ext uri="{0D108BD9-81ED-4DB2-BD59-A6C34878D82A}">
-                    <a16:rowId xmlns:a16="http://schemas.microsoft.com/office/drawing/2014/main" val="10004"/>
-                  </a:ext>
-                </a:extLst>
               </a:tr>
               <a:tr h="566928">
                 <a:tc>
@@ -3444,7 +3642,7 @@
                     <a:bodyPr/>
                     <a:lstStyle/>
                     <a:p>
-                      <a:pPr marL="0" indent="0">
+                      <a:pPr indent="0" marL="0">
                         <a:buNone/>
                       </a:pPr>
                       <a:r>
@@ -3465,7 +3663,7 @@
                       </a:endParaRPr>
                     </a:p>
                   </a:txBody>
-                  <a:tcPr marT="91440" marB="91440" anchor="ctr">
+                  <a:tcPr marL="91440" marR="91440" marT="91440" marB="91440" anchor="ctr">
                     <a:lnL w="9525" cap="flat" cmpd="sng" algn="ctr">
                       <a:solidFill>
                         <a:srgbClr val="D0D7DE"/>
@@ -3512,7 +3710,7 @@
                     <a:bodyPr/>
                     <a:lstStyle/>
                     <a:p>
-                      <a:pPr marL="0" indent="0">
+                      <a:pPr indent="0" marL="0">
                         <a:buNone/>
                       </a:pPr>
                       <a:r>
@@ -3533,7 +3731,7 @@
                       </a:endParaRPr>
                     </a:p>
                   </a:txBody>
-                  <a:tcPr marT="91440" marB="91440" anchor="ctr">
+                  <a:tcPr marL="91440" marR="91440" marT="91440" marB="91440" anchor="ctr">
                     <a:lnL w="9525" cap="flat" cmpd="sng" algn="ctr">
                       <a:solidFill>
                         <a:srgbClr val="D0D7DE"/>
@@ -3580,7 +3778,7 @@
                     <a:bodyPr/>
                     <a:lstStyle/>
                     <a:p>
-                      <a:pPr marL="0" indent="0">
+                      <a:pPr indent="0" marL="0">
                         <a:buNone/>
                       </a:pPr>
                       <a:r>
@@ -3601,7 +3799,7 @@
                       </a:endParaRPr>
                     </a:p>
                   </a:txBody>
-                  <a:tcPr marT="91440" marB="91440" anchor="ctr">
+                  <a:tcPr marL="91440" marR="91440" marT="91440" marB="91440" anchor="ctr">
                     <a:lnL w="9525" cap="flat" cmpd="sng" algn="ctr">
                       <a:solidFill>
                         <a:srgbClr val="D0D7DE"/>
@@ -3643,11 +3841,6 @@
                     </a:solidFill>
                   </a:tcPr>
                 </a:tc>
-                <a:extLst>
-                  <a:ext uri="{0D108BD9-81ED-4DB2-BD59-A6C34878D82A}">
-                    <a16:rowId xmlns:a16="http://schemas.microsoft.com/office/drawing/2014/main" val="10005"/>
-                  </a:ext>
-                </a:extLst>
               </a:tr>
             </a:tbl>
           </a:graphicData>
@@ -3677,24 +3870,17 @@
             <a:prstDash val="solid"/>
           </a:ln>
         </p:spPr>
-        <p:txBody>
-          <a:bodyPr/>
-          <a:lstStyle/>
-          <a:p>
-            <a:endParaRPr lang="en-BR"/>
-          </a:p>
-        </p:txBody>
       </p:sp>
       <p:pic>
         <p:nvPicPr>
-          <p:cNvPr id="5" name="Image 0" descr="preencoded.png"/>
+          <p:cNvPr id="5" name="Image 0" descr="preencoded.png">    </p:cNvPr>
           <p:cNvPicPr>
             <a:picLocks noChangeAspect="1"/>
           </p:cNvPicPr>
           <p:nvPr/>
         </p:nvPicPr>
         <p:blipFill>
-          <a:blip r:embed="rId3"/>
+          <a:blip r:embed="rId1"/>
           <a:stretch>
             <a:fillRect/>
           </a:stretch>
@@ -3730,7 +3916,7 @@
           <a:bodyPr wrap="square" lIns="0" tIns="0" rIns="0" bIns="0" rtlCol="0" anchor="ctr"/>
           <a:lstStyle/>
           <a:p>
-            <a:pPr marL="0" indent="0">
+            <a:pPr indent="0" marL="0">
               <a:buNone/>
             </a:pPr>
             <a:r>
@@ -3769,7 +3955,7 @@
           <a:bodyPr wrap="square" lIns="0" tIns="0" rIns="0" bIns="0" rtlCol="0" anchor="ctr"/>
           <a:lstStyle/>
           <a:p>
-            <a:pPr marL="0" indent="0">
+            <a:pPr indent="0" marL="0">
               <a:buNone/>
             </a:pPr>
             <a:r>
@@ -3808,7 +3994,7 @@
           <a:bodyPr wrap="square" lIns="0" tIns="0" rIns="0" bIns="0" rtlCol="0" anchor="ctr"/>
           <a:lstStyle/>
           <a:p>
-            <a:pPr marL="0" indent="0" algn="r">
+            <a:pPr algn="r" indent="0" marL="0">
               <a:buNone/>
             </a:pPr>
             <a:r>
@@ -3872,7 +4058,7 @@
           <a:bodyPr wrap="square" lIns="0" tIns="0" rIns="0" bIns="0" rtlCol="0" anchor="t"/>
           <a:lstStyle/>
           <a:p>
-            <a:pPr marL="0" indent="0">
+            <a:pPr indent="0" marL="0">
               <a:buNone/>
             </a:pPr>
             <a:r>
@@ -3916,20 +4102,13 @@
             <a:prstDash val="solid"/>
           </a:ln>
           <a:effectLst>
-            <a:outerShdw blurRad="76200" dist="25400" dir="5400000" algn="bl" rotWithShape="0">
+            <a:outerShdw sx="100000" sy="100000" kx="0" ky="0" algn="bl" rotWithShape="0" blurRad="76200" dist="25400" dir="5400000">
               <a:srgbClr val="000000">
                 <a:alpha val="12000"/>
               </a:srgbClr>
             </a:outerShdw>
           </a:effectLst>
         </p:spPr>
-        <p:txBody>
-          <a:bodyPr/>
-          <a:lstStyle/>
-          <a:p>
-            <a:endParaRPr lang="en-BR"/>
-          </a:p>
-        </p:txBody>
       </p:sp>
       <p:sp>
         <p:nvSpPr>
@@ -3955,24 +4134,17 @@
             <a:prstDash val="solid"/>
           </a:ln>
         </p:spPr>
-        <p:txBody>
-          <a:bodyPr/>
-          <a:lstStyle/>
-          <a:p>
-            <a:endParaRPr lang="en-BR"/>
-          </a:p>
-        </p:txBody>
       </p:sp>
       <p:pic>
         <p:nvPicPr>
-          <p:cNvPr id="5" name="Image 0" descr="preencoded.png"/>
+          <p:cNvPr id="5" name="Image 0" descr="preencoded.png">    </p:cNvPr>
           <p:cNvPicPr>
             <a:picLocks noChangeAspect="1"/>
           </p:cNvPicPr>
           <p:nvPr/>
         </p:nvPicPr>
         <p:blipFill>
-          <a:blip r:embed="rId3"/>
+          <a:blip r:embed="rId1"/>
           <a:stretch>
             <a:fillRect/>
           </a:stretch>
@@ -4008,7 +4180,7 @@
           <a:bodyPr wrap="square" lIns="0" tIns="0" rIns="0" bIns="0" rtlCol="0" anchor="ctr"/>
           <a:lstStyle/>
           <a:p>
-            <a:pPr marL="0" indent="0">
+            <a:pPr indent="0" marL="0">
               <a:buNone/>
             </a:pPr>
             <a:r>
@@ -4025,7 +4197,7 @@
             <a:endParaRPr lang="en-US" sz="1800" dirty="0"/>
           </a:p>
           <a:p>
-            <a:pPr marL="0" indent="0">
+            <a:pPr indent="0" marL="0">
               <a:buNone/>
             </a:pPr>
             <a:r>
@@ -4064,7 +4236,7 @@
           <a:bodyPr wrap="square" lIns="0" tIns="0" rIns="0" bIns="0" rtlCol="0" anchor="ctr"/>
           <a:lstStyle/>
           <a:p>
-            <a:pPr marL="0" indent="0">
+            <a:pPr indent="0" marL="0">
               <a:buNone/>
             </a:pPr>
             <a:r>
@@ -4103,7 +4275,7 @@
           <a:bodyPr wrap="square" lIns="0" tIns="0" rIns="0" bIns="0" rtlCol="0" anchor="ctr"/>
           <a:lstStyle/>
           <a:p>
-            <a:pPr marL="0" indent="0">
+            <a:pPr indent="0" marL="0">
               <a:buNone/>
             </a:pPr>
             <a:r>
@@ -4142,7 +4314,7 @@
           <a:bodyPr wrap="square" lIns="0" tIns="0" rIns="0" bIns="0" rtlCol="0" anchor="ctr"/>
           <a:lstStyle/>
           <a:p>
-            <a:pPr marL="0" indent="0">
+            <a:pPr indent="0" marL="0">
               <a:buNone/>
             </a:pPr>
             <a:r>
@@ -4181,7 +4353,7 @@
           <a:bodyPr wrap="square" lIns="0" tIns="0" rIns="0" bIns="0" rtlCol="0" anchor="ctr"/>
           <a:lstStyle/>
           <a:p>
-            <a:pPr marL="0" indent="0">
+            <a:pPr indent="0" marL="0">
               <a:buNone/>
             </a:pPr>
             <a:r>
@@ -4220,7 +4392,7 @@
           <a:bodyPr wrap="square" lIns="0" tIns="0" rIns="0" bIns="0" rtlCol="0" anchor="ctr"/>
           <a:lstStyle/>
           <a:p>
-            <a:pPr marL="0" indent="0">
+            <a:pPr indent="0" marL="0">
               <a:buNone/>
             </a:pPr>
             <a:r>
@@ -4259,7 +4431,7 @@
           <a:bodyPr wrap="square" lIns="0" tIns="0" rIns="0" bIns="0" rtlCol="0" anchor="ctr"/>
           <a:lstStyle/>
           <a:p>
-            <a:pPr marL="0" indent="0">
+            <a:pPr indent="0" marL="0">
               <a:buNone/>
             </a:pPr>
             <a:r>
@@ -4298,7 +4470,7 @@
           <a:bodyPr wrap="square" lIns="0" tIns="0" rIns="0" bIns="0" rtlCol="0" anchor="ctr"/>
           <a:lstStyle/>
           <a:p>
-            <a:pPr marL="0" indent="0">
+            <a:pPr indent="0" marL="0">
               <a:buNone/>
             </a:pPr>
             <a:r>
@@ -4337,7 +4509,7 @@
           <a:bodyPr wrap="square" lIns="0" tIns="0" rIns="0" bIns="0" rtlCol="0" anchor="ctr"/>
           <a:lstStyle/>
           <a:p>
-            <a:pPr marL="0" indent="0">
+            <a:pPr indent="0" marL="0">
               <a:buNone/>
             </a:pPr>
             <a:r>
@@ -4376,7 +4548,7 @@
           <a:bodyPr wrap="square" lIns="0" tIns="0" rIns="0" bIns="0" rtlCol="0" anchor="ctr"/>
           <a:lstStyle/>
           <a:p>
-            <a:pPr marL="0" indent="0">
+            <a:pPr indent="0" marL="0">
               <a:buNone/>
             </a:pPr>
             <a:r>
@@ -4420,20 +4592,13 @@
             <a:prstDash val="solid"/>
           </a:ln>
           <a:effectLst>
-            <a:outerShdw blurRad="76200" dist="25400" dir="5400000" algn="bl" rotWithShape="0">
+            <a:outerShdw sx="100000" sy="100000" kx="0" ky="0" algn="bl" rotWithShape="0" blurRad="76200" dist="25400" dir="5400000">
               <a:srgbClr val="000000">
                 <a:alpha val="12000"/>
               </a:srgbClr>
             </a:outerShdw>
           </a:effectLst>
         </p:spPr>
-        <p:txBody>
-          <a:bodyPr/>
-          <a:lstStyle/>
-          <a:p>
-            <a:endParaRPr lang="en-BR"/>
-          </a:p>
-        </p:txBody>
       </p:sp>
       <p:sp>
         <p:nvSpPr>
@@ -4459,24 +4624,17 @@
             <a:prstDash val="solid"/>
           </a:ln>
         </p:spPr>
-        <p:txBody>
-          <a:bodyPr/>
-          <a:lstStyle/>
-          <a:p>
-            <a:endParaRPr lang="en-BR"/>
-          </a:p>
-        </p:txBody>
       </p:sp>
       <p:pic>
         <p:nvPicPr>
-          <p:cNvPr id="18" name="Image 1" descr="preencoded.png"/>
+          <p:cNvPr id="18" name="Image 1" descr="preencoded.png">    </p:cNvPr>
           <p:cNvPicPr>
             <a:picLocks noChangeAspect="1"/>
           </p:cNvPicPr>
           <p:nvPr/>
         </p:nvPicPr>
         <p:blipFill>
-          <a:blip r:embed="rId4"/>
+          <a:blip r:embed="rId2"/>
           <a:stretch>
             <a:fillRect/>
           </a:stretch>
@@ -4512,7 +4670,7 @@
           <a:bodyPr wrap="square" lIns="0" tIns="0" rIns="0" bIns="0" rtlCol="0" anchor="ctr"/>
           <a:lstStyle/>
           <a:p>
-            <a:pPr marL="0" indent="0">
+            <a:pPr indent="0" marL="0">
               <a:buNone/>
             </a:pPr>
             <a:r>
@@ -4529,7 +4687,7 @@
             <a:endParaRPr lang="en-US" sz="1800" dirty="0"/>
           </a:p>
           <a:p>
-            <a:pPr marL="0" indent="0">
+            <a:pPr indent="0" marL="0">
               <a:buNone/>
             </a:pPr>
             <a:r>
@@ -4568,7 +4726,7 @@
           <a:bodyPr wrap="square" lIns="0" tIns="0" rIns="0" bIns="0" rtlCol="0" anchor="ctr"/>
           <a:lstStyle/>
           <a:p>
-            <a:pPr marL="0" indent="0">
+            <a:pPr indent="0" marL="0">
               <a:buNone/>
             </a:pPr>
             <a:r>
@@ -4607,7 +4765,7 @@
           <a:bodyPr wrap="square" lIns="0" tIns="0" rIns="0" bIns="0" rtlCol="0" anchor="ctr"/>
           <a:lstStyle/>
           <a:p>
-            <a:pPr marL="0" indent="0">
+            <a:pPr indent="0" marL="0">
               <a:buNone/>
             </a:pPr>
             <a:r>
@@ -4646,7 +4804,7 @@
           <a:bodyPr wrap="square" lIns="0" tIns="0" rIns="0" bIns="0" rtlCol="0" anchor="ctr"/>
           <a:lstStyle/>
           <a:p>
-            <a:pPr marL="0" indent="0">
+            <a:pPr indent="0" marL="0">
               <a:buNone/>
             </a:pPr>
             <a:r>
@@ -4685,7 +4843,7 @@
           <a:bodyPr wrap="square" lIns="0" tIns="0" rIns="0" bIns="0" rtlCol="0" anchor="ctr"/>
           <a:lstStyle/>
           <a:p>
-            <a:pPr marL="0" indent="0">
+            <a:pPr indent="0" marL="0">
               <a:buNone/>
             </a:pPr>
             <a:r>
@@ -4724,7 +4882,7 @@
           <a:bodyPr wrap="square" lIns="0" tIns="0" rIns="0" bIns="0" rtlCol="0" anchor="ctr"/>
           <a:lstStyle/>
           <a:p>
-            <a:pPr marL="0" indent="0">
+            <a:pPr indent="0" marL="0">
               <a:buNone/>
             </a:pPr>
             <a:r>
@@ -4763,7 +4921,7 @@
           <a:bodyPr wrap="square" lIns="0" tIns="0" rIns="0" bIns="0" rtlCol="0" anchor="ctr"/>
           <a:lstStyle/>
           <a:p>
-            <a:pPr marL="0" indent="0">
+            <a:pPr indent="0" marL="0">
               <a:buNone/>
             </a:pPr>
             <a:r>
@@ -4802,7 +4960,7 @@
           <a:bodyPr wrap="square" lIns="0" tIns="0" rIns="0" bIns="0" rtlCol="0" anchor="ctr"/>
           <a:lstStyle/>
           <a:p>
-            <a:pPr marL="0" indent="0">
+            <a:pPr indent="0" marL="0">
               <a:buNone/>
             </a:pPr>
             <a:r>
@@ -4841,7 +4999,7 @@
           <a:bodyPr wrap="square" lIns="0" tIns="0" rIns="0" bIns="0" rtlCol="0" anchor="ctr"/>
           <a:lstStyle/>
           <a:p>
-            <a:pPr marL="0" indent="0">
+            <a:pPr indent="0" marL="0">
               <a:buNone/>
             </a:pPr>
             <a:r>
@@ -4880,7 +5038,7 @@
           <a:bodyPr wrap="square" lIns="0" tIns="0" rIns="0" bIns="0" rtlCol="0" anchor="ctr"/>
           <a:lstStyle/>
           <a:p>
-            <a:pPr marL="0" indent="0">
+            <a:pPr indent="0" marL="0">
               <a:buNone/>
             </a:pPr>
             <a:r>
@@ -4919,7 +5077,7 @@
           <a:bodyPr wrap="square" lIns="0" tIns="0" rIns="0" bIns="0" rtlCol="0" anchor="ctr"/>
           <a:lstStyle/>
           <a:p>
-            <a:pPr marL="0" indent="0">
+            <a:pPr indent="0" marL="0">
               <a:buNone/>
             </a:pPr>
             <a:r>
@@ -4958,7 +5116,7 @@
           <a:bodyPr wrap="square" lIns="0" tIns="0" rIns="0" bIns="0" rtlCol="0" anchor="ctr"/>
           <a:lstStyle/>
           <a:p>
-            <a:pPr marL="0" indent="0" algn="r">
+            <a:pPr algn="r" indent="0" marL="0">
               <a:buNone/>
             </a:pPr>
             <a:r>
@@ -5022,7 +5180,7 @@
           <a:bodyPr wrap="square" lIns="0" tIns="0" rIns="0" bIns="0" rtlCol="0" anchor="t"/>
           <a:lstStyle/>
           <a:p>
-            <a:pPr marL="0" indent="0">
+            <a:pPr indent="0" marL="0">
               <a:buNone/>
             </a:pPr>
             <a:r>
@@ -5066,20 +5224,13 @@
             <a:prstDash val="solid"/>
           </a:ln>
           <a:effectLst>
-            <a:outerShdw blurRad="76200" dist="25400" dir="5400000" algn="bl" rotWithShape="0">
+            <a:outerShdw sx="100000" sy="100000" kx="0" ky="0" algn="bl" rotWithShape="0" blurRad="76200" dist="25400" dir="5400000">
               <a:srgbClr val="000000">
                 <a:alpha val="12000"/>
               </a:srgbClr>
             </a:outerShdw>
           </a:effectLst>
         </p:spPr>
-        <p:txBody>
-          <a:bodyPr/>
-          <a:lstStyle/>
-          <a:p>
-            <a:endParaRPr lang="en-BR"/>
-          </a:p>
-        </p:txBody>
       </p:sp>
       <p:sp>
         <p:nvSpPr>
@@ -5105,24 +5256,17 @@
             <a:prstDash val="solid"/>
           </a:ln>
         </p:spPr>
-        <p:txBody>
-          <a:bodyPr/>
-          <a:lstStyle/>
-          <a:p>
-            <a:endParaRPr lang="en-BR"/>
-          </a:p>
-        </p:txBody>
       </p:sp>
       <p:pic>
         <p:nvPicPr>
-          <p:cNvPr id="5" name="Image 0" descr="preencoded.png"/>
+          <p:cNvPr id="5" name="Image 0" descr="preencoded.png">    </p:cNvPr>
           <p:cNvPicPr>
             <a:picLocks noChangeAspect="1"/>
           </p:cNvPicPr>
           <p:nvPr/>
         </p:nvPicPr>
         <p:blipFill>
-          <a:blip r:embed="rId3"/>
+          <a:blip r:embed="rId1"/>
           <a:stretch>
             <a:fillRect/>
           </a:stretch>
@@ -5158,7 +5302,7 @@
           <a:bodyPr wrap="square" lIns="0" tIns="0" rIns="0" bIns="0" rtlCol="0" anchor="ctr"/>
           <a:lstStyle/>
           <a:p>
-            <a:pPr marL="0" indent="0">
+            <a:pPr indent="0" marL="0">
               <a:buNone/>
             </a:pPr>
             <a:r>
@@ -5329,20 +5473,13 @@
             <a:prstDash val="solid"/>
           </a:ln>
           <a:effectLst>
-            <a:outerShdw blurRad="76200" dist="25400" dir="5400000" algn="bl" rotWithShape="0">
+            <a:outerShdw sx="100000" sy="100000" kx="0" ky="0" algn="bl" rotWithShape="0" blurRad="76200" dist="25400" dir="5400000">
               <a:srgbClr val="000000">
                 <a:alpha val="12000"/>
               </a:srgbClr>
             </a:outerShdw>
           </a:effectLst>
         </p:spPr>
-        <p:txBody>
-          <a:bodyPr/>
-          <a:lstStyle/>
-          <a:p>
-            <a:endParaRPr lang="en-BR"/>
-          </a:p>
-        </p:txBody>
       </p:sp>
       <p:sp>
         <p:nvSpPr>
@@ -5368,24 +5505,17 @@
             <a:prstDash val="solid"/>
           </a:ln>
         </p:spPr>
-        <p:txBody>
-          <a:bodyPr/>
-          <a:lstStyle/>
-          <a:p>
-            <a:endParaRPr lang="en-BR"/>
-          </a:p>
-        </p:txBody>
       </p:sp>
       <p:pic>
         <p:nvPicPr>
-          <p:cNvPr id="10" name="Image 1" descr="preencoded.png"/>
+          <p:cNvPr id="10" name="Image 1" descr="preencoded.png">    </p:cNvPr>
           <p:cNvPicPr>
             <a:picLocks noChangeAspect="1"/>
           </p:cNvPicPr>
           <p:nvPr/>
         </p:nvPicPr>
         <p:blipFill>
-          <a:blip r:embed="rId4"/>
+          <a:blip r:embed="rId2"/>
           <a:stretch>
             <a:fillRect/>
           </a:stretch>
@@ -5421,7 +5551,7 @@
           <a:bodyPr wrap="square" lIns="0" tIns="0" rIns="0" bIns="0" rtlCol="0" anchor="ctr"/>
           <a:lstStyle/>
           <a:p>
-            <a:pPr marL="0" indent="0">
+            <a:pPr indent="0" marL="0">
               <a:buNone/>
             </a:pPr>
             <a:r>
@@ -5587,7 +5717,7 @@
           <a:bodyPr wrap="square" lIns="0" tIns="0" rIns="0" bIns="0" rtlCol="0" anchor="ctr"/>
           <a:lstStyle/>
           <a:p>
-            <a:pPr marL="0" indent="0">
+            <a:pPr indent="0" marL="0">
               <a:buNone/>
             </a:pPr>
             <a:r>
@@ -5626,7 +5756,7 @@
           <a:bodyPr wrap="square" lIns="0" tIns="0" rIns="0" bIns="0" rtlCol="0" anchor="ctr"/>
           <a:lstStyle/>
           <a:p>
-            <a:pPr marL="0" indent="0" algn="r">
+            <a:pPr algn="r" indent="0" marL="0">
               <a:buNone/>
             </a:pPr>
             <a:r>
@@ -5654,13 +5784,12 @@
 
 <file path=ppt/slides/slide13.xml><?xml version="1.0" encoding="utf-8"?>
 <p:sld xmlns:a="http://schemas.openxmlformats.org/drawingml/2006/main" xmlns:r="http://schemas.openxmlformats.org/officeDocument/2006/relationships" xmlns:p="http://schemas.openxmlformats.org/presentationml/2006/main">
-  <p:cSld>
+  <p:cSld name="Slide 13">
     <p:bg>
       <p:bgPr>
         <a:solidFill>
-          <a:schemeClr val="bg1"/>
+          <a:srgbClr val="14213D"/>
         </a:solidFill>
-        <a:effectLst/>
       </p:bgPr>
     </p:bg>
     <p:spTree>
@@ -5679,653 +5808,6 @@
       </p:grpSpPr>
       <p:sp>
         <p:nvSpPr>
-          <p:cNvPr id="8" name="Rectangle 7">
-            <a:extLst>
-              <a:ext uri="{FF2B5EF4-FFF2-40B4-BE49-F238E27FC236}">
-                <a16:creationId xmlns:a16="http://schemas.microsoft.com/office/drawing/2014/main" id="{F3060C83-F051-4F0E-ABAD-AA0DFC48B218}"/>
-              </a:ext>
-              <a:ext uri="{C183D7F6-B498-43B3-948B-1728B52AA6E4}">
-                <adec:decorative xmlns:adec="http://schemas.microsoft.com/office/drawing/2017/decorative" val="1"/>
-              </a:ext>
-            </a:extLst>
-          </p:cNvPr>
-          <p:cNvSpPr>
-            <a:spLocks noGrp="1" noRot="1" noChangeAspect="1" noMove="1" noResize="1" noEditPoints="1" noAdjustHandles="1" noChangeArrowheads="1" noChangeShapeType="1" noTextEdit="1"/>
-          </p:cNvSpPr>
-          <p:nvPr>
-            <p:extLst>
-              <p:ext uri="{386F3935-93C4-4BCD-93E2-E3B085C9AB24}">
-                <p16:designElem xmlns:p16="http://schemas.microsoft.com/office/powerpoint/2015/main" val="1"/>
-              </p:ext>
-            </p:extLst>
-          </p:nvPr>
-        </p:nvSpPr>
-        <p:spPr>
-          <a:xfrm>
-            <a:off x="0" y="0"/>
-            <a:ext cx="12192000" cy="6858000"/>
-          </a:xfrm>
-          <a:prstGeom prst="rect">
-            <a:avLst/>
-          </a:prstGeom>
-          <a:solidFill>
-            <a:schemeClr val="bg1"/>
-          </a:solidFill>
-          <a:ln>
-            <a:noFill/>
-          </a:ln>
-        </p:spPr>
-        <p:style>
-          <a:lnRef idx="2">
-            <a:schemeClr val="accent1">
-              <a:shade val="50000"/>
-            </a:schemeClr>
-          </a:lnRef>
-          <a:fillRef idx="1">
-            <a:schemeClr val="accent1"/>
-          </a:fillRef>
-          <a:effectRef idx="0">
-            <a:schemeClr val="accent1"/>
-          </a:effectRef>
-          <a:fontRef idx="minor">
-            <a:schemeClr val="lt1"/>
-          </a:fontRef>
-        </p:style>
-        <p:txBody>
-          <a:bodyPr rtlCol="0" anchor="ctr"/>
-          <a:lstStyle/>
-          <a:p>
-            <a:pPr algn="ctr"/>
-            <a:endParaRPr lang="en-US" dirty="0"/>
-          </a:p>
-        </p:txBody>
-      </p:sp>
-      <p:sp>
-        <p:nvSpPr>
-          <p:cNvPr id="10" name="Freeform: Shape 9">
-            <a:extLst>
-              <a:ext uri="{FF2B5EF4-FFF2-40B4-BE49-F238E27FC236}">
-                <a16:creationId xmlns:a16="http://schemas.microsoft.com/office/drawing/2014/main" id="{83C98ABE-055B-441F-B07E-44F97F083C39}"/>
-              </a:ext>
-              <a:ext uri="{C183D7F6-B498-43B3-948B-1728B52AA6E4}">
-                <adec:decorative xmlns:adec="http://schemas.microsoft.com/office/drawing/2017/decorative" val="1"/>
-              </a:ext>
-            </a:extLst>
-          </p:cNvPr>
-          <p:cNvSpPr>
-            <a:spLocks noGrp="1" noRot="1" noChangeAspect="1" noMove="1" noResize="1" noEditPoints="1" noAdjustHandles="1" noChangeArrowheads="1" noChangeShapeType="1" noTextEdit="1"/>
-          </p:cNvSpPr>
-          <p:nvPr>
-            <p:extLst>
-              <p:ext uri="{386F3935-93C4-4BCD-93E2-E3B085C9AB24}">
-                <p16:designElem xmlns:p16="http://schemas.microsoft.com/office/powerpoint/2015/main" val="1"/>
-              </p:ext>
-            </p:extLst>
-          </p:nvPr>
-        </p:nvSpPr>
-        <p:spPr>
-          <a:xfrm rot="18900000" flipH="1">
-            <a:off x="-376156" y="-253670"/>
-            <a:ext cx="1827638" cy="1376989"/>
-          </a:xfrm>
-          <a:custGeom>
-            <a:avLst/>
-            <a:gdLst>
-              <a:gd name="connsiteX0" fmla="*/ 0 w 1827638"/>
-              <a:gd name="connsiteY0" fmla="*/ 987379 h 1376989"/>
-              <a:gd name="connsiteX1" fmla="*/ 987379 w 1827638"/>
-              <a:gd name="connsiteY1" fmla="*/ 0 h 1376989"/>
-              <a:gd name="connsiteX2" fmla="*/ 1827638 w 1827638"/>
-              <a:gd name="connsiteY2" fmla="*/ 840260 h 1376989"/>
-              <a:gd name="connsiteX3" fmla="*/ 1827638 w 1827638"/>
-              <a:gd name="connsiteY3" fmla="*/ 1376989 h 1376989"/>
-              <a:gd name="connsiteX4" fmla="*/ 0 w 1827638"/>
-              <a:gd name="connsiteY4" fmla="*/ 1376989 h 1376989"/>
-            </a:gdLst>
-            <a:ahLst/>
-            <a:cxnLst>
-              <a:cxn ang="0">
-                <a:pos x="connsiteX0" y="connsiteY0"/>
-              </a:cxn>
-              <a:cxn ang="0">
-                <a:pos x="connsiteX1" y="connsiteY1"/>
-              </a:cxn>
-              <a:cxn ang="0">
-                <a:pos x="connsiteX2" y="connsiteY2"/>
-              </a:cxn>
-              <a:cxn ang="0">
-                <a:pos x="connsiteX3" y="connsiteY3"/>
-              </a:cxn>
-              <a:cxn ang="0">
-                <a:pos x="connsiteX4" y="connsiteY4"/>
-              </a:cxn>
-            </a:cxnLst>
-            <a:rect l="l" t="t" r="r" b="b"/>
-            <a:pathLst>
-              <a:path w="1827638" h="1376989">
-                <a:moveTo>
-                  <a:pt x="0" y="987379"/>
-                </a:moveTo>
-                <a:lnTo>
-                  <a:pt x="987379" y="0"/>
-                </a:lnTo>
-                <a:lnTo>
-                  <a:pt x="1827638" y="840260"/>
-                </a:lnTo>
-                <a:lnTo>
-                  <a:pt x="1827638" y="1376989"/>
-                </a:lnTo>
-                <a:lnTo>
-                  <a:pt x="0" y="1376989"/>
-                </a:lnTo>
-                <a:close/>
-              </a:path>
-            </a:pathLst>
-          </a:custGeom>
-          <a:solidFill>
-            <a:schemeClr val="accent1">
-              <a:alpha val="30000"/>
-            </a:schemeClr>
-          </a:solidFill>
-          <a:ln>
-            <a:noFill/>
-          </a:ln>
-        </p:spPr>
-        <p:style>
-          <a:lnRef idx="2">
-            <a:schemeClr val="accent1">
-              <a:shade val="50000"/>
-            </a:schemeClr>
-          </a:lnRef>
-          <a:fillRef idx="1">
-            <a:schemeClr val="accent1"/>
-          </a:fillRef>
-          <a:effectRef idx="0">
-            <a:schemeClr val="accent1"/>
-          </a:effectRef>
-          <a:fontRef idx="minor">
-            <a:schemeClr val="lt1"/>
-          </a:fontRef>
-        </p:style>
-        <p:txBody>
-          <a:bodyPr rtlCol="0" anchor="ctr"/>
-          <a:lstStyle/>
-          <a:p>
-            <a:pPr algn="ctr"/>
-            <a:endParaRPr lang="en-US" dirty="0"/>
-          </a:p>
-        </p:txBody>
-      </p:sp>
-      <p:sp>
-        <p:nvSpPr>
-          <p:cNvPr id="12" name="Rectangle 11">
-            <a:extLst>
-              <a:ext uri="{FF2B5EF4-FFF2-40B4-BE49-F238E27FC236}">
-                <a16:creationId xmlns:a16="http://schemas.microsoft.com/office/drawing/2014/main" id="{29FDB030-9B49-4CED-8CCD-4D99382388AC}"/>
-              </a:ext>
-              <a:ext uri="{C183D7F6-B498-43B3-948B-1728B52AA6E4}">
-                <adec:decorative xmlns:adec="http://schemas.microsoft.com/office/drawing/2017/decorative" val="1"/>
-              </a:ext>
-            </a:extLst>
-          </p:cNvPr>
-          <p:cNvSpPr>
-            <a:spLocks noGrp="1" noRot="1" noChangeAspect="1" noMove="1" noResize="1" noEditPoints="1" noAdjustHandles="1" noChangeArrowheads="1" noChangeShapeType="1" noTextEdit="1"/>
-          </p:cNvSpPr>
-          <p:nvPr>
-            <p:extLst>
-              <p:ext uri="{386F3935-93C4-4BCD-93E2-E3B085C9AB24}">
-                <p16:designElem xmlns:p16="http://schemas.microsoft.com/office/powerpoint/2015/main" val="1"/>
-              </p:ext>
-            </p:extLst>
-          </p:nvPr>
-        </p:nvSpPr>
-        <p:spPr>
-          <a:xfrm rot="18900000" flipH="1">
-            <a:off x="891641" y="422146"/>
-            <a:ext cx="645368" cy="645368"/>
-          </a:xfrm>
-          <a:prstGeom prst="rect">
-            <a:avLst/>
-          </a:prstGeom>
-          <a:solidFill>
-            <a:schemeClr val="accent1">
-              <a:alpha val="30000"/>
-            </a:schemeClr>
-          </a:solidFill>
-          <a:ln>
-            <a:noFill/>
-          </a:ln>
-        </p:spPr>
-        <p:style>
-          <a:lnRef idx="2">
-            <a:schemeClr val="accent1">
-              <a:shade val="50000"/>
-            </a:schemeClr>
-          </a:lnRef>
-          <a:fillRef idx="1">
-            <a:schemeClr val="accent1"/>
-          </a:fillRef>
-          <a:effectRef idx="0">
-            <a:schemeClr val="accent1"/>
-          </a:effectRef>
-          <a:fontRef idx="minor">
-            <a:schemeClr val="lt1"/>
-          </a:fontRef>
-        </p:style>
-        <p:txBody>
-          <a:bodyPr rtlCol="0" anchor="ctr"/>
-          <a:lstStyle/>
-          <a:p>
-            <a:pPr algn="ctr"/>
-            <a:endParaRPr lang="en-US"/>
-          </a:p>
-        </p:txBody>
-      </p:sp>
-      <p:sp>
-        <p:nvSpPr>
-          <p:cNvPr id="14" name="Rectangle 13">
-            <a:extLst>
-              <a:ext uri="{FF2B5EF4-FFF2-40B4-BE49-F238E27FC236}">
-                <a16:creationId xmlns:a16="http://schemas.microsoft.com/office/drawing/2014/main" id="{3783CA14-24A1-485C-8B30-D6A5D87987AD}"/>
-              </a:ext>
-              <a:ext uri="{C183D7F6-B498-43B3-948B-1728B52AA6E4}">
-                <adec:decorative xmlns:adec="http://schemas.microsoft.com/office/drawing/2017/decorative" val="1"/>
-              </a:ext>
-            </a:extLst>
-          </p:cNvPr>
-          <p:cNvSpPr>
-            <a:spLocks noGrp="1" noRot="1" noChangeAspect="1" noMove="1" noResize="1" noEditPoints="1" noAdjustHandles="1" noChangeArrowheads="1" noChangeShapeType="1" noTextEdit="1"/>
-          </p:cNvSpPr>
-          <p:nvPr>
-            <p:extLst>
-              <p:ext uri="{386F3935-93C4-4BCD-93E2-E3B085C9AB24}">
-                <p16:designElem xmlns:p16="http://schemas.microsoft.com/office/powerpoint/2015/main" val="1"/>
-              </p:ext>
-            </p:extLst>
-          </p:nvPr>
-        </p:nvSpPr>
-        <p:spPr>
-          <a:xfrm rot="18900000" flipH="1">
-            <a:off x="10043482" y="655140"/>
-            <a:ext cx="687472" cy="687472"/>
-          </a:xfrm>
-          <a:prstGeom prst="rect">
-            <a:avLst/>
-          </a:prstGeom>
-          <a:solidFill>
-            <a:schemeClr val="accent4">
-              <a:alpha val="30000"/>
-            </a:schemeClr>
-          </a:solidFill>
-          <a:ln>
-            <a:noFill/>
-          </a:ln>
-        </p:spPr>
-        <p:style>
-          <a:lnRef idx="2">
-            <a:schemeClr val="accent1">
-              <a:shade val="50000"/>
-            </a:schemeClr>
-          </a:lnRef>
-          <a:fillRef idx="1">
-            <a:schemeClr val="accent1"/>
-          </a:fillRef>
-          <a:effectRef idx="0">
-            <a:schemeClr val="accent1"/>
-          </a:effectRef>
-          <a:fontRef idx="minor">
-            <a:schemeClr val="lt1"/>
-          </a:fontRef>
-        </p:style>
-        <p:txBody>
-          <a:bodyPr rtlCol="0" anchor="ctr"/>
-          <a:lstStyle/>
-          <a:p>
-            <a:pPr algn="ctr"/>
-            <a:endParaRPr lang="en-US"/>
-          </a:p>
-        </p:txBody>
-      </p:sp>
-      <p:sp>
-        <p:nvSpPr>
-          <p:cNvPr id="16" name="Freeform: Shape 15">
-            <a:extLst>
-              <a:ext uri="{FF2B5EF4-FFF2-40B4-BE49-F238E27FC236}">
-                <a16:creationId xmlns:a16="http://schemas.microsoft.com/office/drawing/2014/main" id="{9A97C86A-04D6-40F7-AE84-31AB43E6A846}"/>
-              </a:ext>
-              <a:ext uri="{C183D7F6-B498-43B3-948B-1728B52AA6E4}">
-                <adec:decorative xmlns:adec="http://schemas.microsoft.com/office/drawing/2017/decorative" val="1"/>
-              </a:ext>
-            </a:extLst>
-          </p:cNvPr>
-          <p:cNvSpPr>
-            <a:spLocks noGrp="1" noRot="1" noChangeAspect="1" noMove="1" noResize="1" noEditPoints="1" noAdjustHandles="1" noChangeArrowheads="1" noChangeShapeType="1" noTextEdit="1"/>
-          </p:cNvSpPr>
-          <p:nvPr>
-            <p:extLst>
-              <p:ext uri="{386F3935-93C4-4BCD-93E2-E3B085C9AB24}">
-                <p16:designElem xmlns:p16="http://schemas.microsoft.com/office/powerpoint/2015/main" val="1"/>
-              </p:ext>
-            </p:extLst>
-          </p:nvPr>
-        </p:nvSpPr>
-        <p:spPr>
-          <a:xfrm rot="10800000" flipH="1">
-            <a:off x="9356643" y="0"/>
-            <a:ext cx="2835357" cy="1480837"/>
-          </a:xfrm>
-          <a:custGeom>
-            <a:avLst/>
-            <a:gdLst>
-              <a:gd name="connsiteX0" fmla="*/ 2835357 w 2835357"/>
-              <a:gd name="connsiteY0" fmla="*/ 1480837 h 1480837"/>
-              <a:gd name="connsiteX1" fmla="*/ 0 w 2835357"/>
-              <a:gd name="connsiteY1" fmla="*/ 1480837 h 1480837"/>
-              <a:gd name="connsiteX2" fmla="*/ 1552727 w 2835357"/>
-              <a:gd name="connsiteY2" fmla="*/ 0 h 1480837"/>
-              <a:gd name="connsiteX3" fmla="*/ 2835357 w 2835357"/>
-              <a:gd name="connsiteY3" fmla="*/ 1223245 h 1480837"/>
-            </a:gdLst>
-            <a:ahLst/>
-            <a:cxnLst>
-              <a:cxn ang="0">
-                <a:pos x="connsiteX0" y="connsiteY0"/>
-              </a:cxn>
-              <a:cxn ang="0">
-                <a:pos x="connsiteX1" y="connsiteY1"/>
-              </a:cxn>
-              <a:cxn ang="0">
-                <a:pos x="connsiteX2" y="connsiteY2"/>
-              </a:cxn>
-              <a:cxn ang="0">
-                <a:pos x="connsiteX3" y="connsiteY3"/>
-              </a:cxn>
-            </a:cxnLst>
-            <a:rect l="l" t="t" r="r" b="b"/>
-            <a:pathLst>
-              <a:path w="2835357" h="1480837">
-                <a:moveTo>
-                  <a:pt x="2835357" y="1480837"/>
-                </a:moveTo>
-                <a:lnTo>
-                  <a:pt x="0" y="1480837"/>
-                </a:lnTo>
-                <a:lnTo>
-                  <a:pt x="1552727" y="0"/>
-                </a:lnTo>
-                <a:lnTo>
-                  <a:pt x="2835357" y="1223245"/>
-                </a:lnTo>
-                <a:close/>
-              </a:path>
-            </a:pathLst>
-          </a:custGeom>
-          <a:solidFill>
-            <a:schemeClr val="accent4">
-              <a:alpha val="30000"/>
-            </a:schemeClr>
-          </a:solidFill>
-          <a:ln>
-            <a:noFill/>
-          </a:ln>
-        </p:spPr>
-        <p:style>
-          <a:lnRef idx="2">
-            <a:schemeClr val="accent1">
-              <a:shade val="50000"/>
-            </a:schemeClr>
-          </a:lnRef>
-          <a:fillRef idx="1">
-            <a:schemeClr val="accent1"/>
-          </a:fillRef>
-          <a:effectRef idx="0">
-            <a:schemeClr val="accent1"/>
-          </a:effectRef>
-          <a:fontRef idx="minor">
-            <a:schemeClr val="lt1"/>
-          </a:fontRef>
-        </p:style>
-        <p:txBody>
-          <a:bodyPr wrap="square" rtlCol="0" anchor="ctr">
-            <a:noAutofit/>
-          </a:bodyPr>
-          <a:lstStyle/>
-          <a:p>
-            <a:pPr algn="ctr"/>
-            <a:endParaRPr lang="en-US" dirty="0"/>
-          </a:p>
-        </p:txBody>
-      </p:sp>
-      <p:sp>
-        <p:nvSpPr>
-          <p:cNvPr id="18" name="Isosceles Triangle 17">
-            <a:extLst>
-              <a:ext uri="{FF2B5EF4-FFF2-40B4-BE49-F238E27FC236}">
-                <a16:creationId xmlns:a16="http://schemas.microsoft.com/office/drawing/2014/main" id="{FF9F2414-84E8-453E-B1F3-389FDE8192D9}"/>
-              </a:ext>
-              <a:ext uri="{C183D7F6-B498-43B3-948B-1728B52AA6E4}">
-                <adec:decorative xmlns:adec="http://schemas.microsoft.com/office/drawing/2017/decorative" val="1"/>
-              </a:ext>
-            </a:extLst>
-          </p:cNvPr>
-          <p:cNvSpPr>
-            <a:spLocks noGrp="1" noRot="1" noChangeAspect="1" noMove="1" noResize="1" noEditPoints="1" noAdjustHandles="1" noChangeArrowheads="1" noChangeShapeType="1" noTextEdit="1"/>
-          </p:cNvSpPr>
-          <p:nvPr>
-            <p:extLst>
-              <p:ext uri="{386F3935-93C4-4BCD-93E2-E3B085C9AB24}">
-                <p16:designElem xmlns:p16="http://schemas.microsoft.com/office/powerpoint/2015/main" val="1"/>
-              </p:ext>
-            </p:extLst>
-          </p:nvPr>
-        </p:nvSpPr>
-        <p:spPr>
-          <a:xfrm flipH="1">
-            <a:off x="7976344" y="6115501"/>
-            <a:ext cx="1494513" cy="742499"/>
-          </a:xfrm>
-          <a:prstGeom prst="triangle">
-            <a:avLst/>
-          </a:prstGeom>
-          <a:solidFill>
-            <a:schemeClr val="accent1">
-              <a:alpha val="30000"/>
-            </a:schemeClr>
-          </a:solidFill>
-          <a:ln>
-            <a:noFill/>
-          </a:ln>
-        </p:spPr>
-        <p:style>
-          <a:lnRef idx="2">
-            <a:schemeClr val="accent1">
-              <a:shade val="50000"/>
-            </a:schemeClr>
-          </a:lnRef>
-          <a:fillRef idx="1">
-            <a:schemeClr val="accent1"/>
-          </a:fillRef>
-          <a:effectRef idx="0">
-            <a:schemeClr val="accent1"/>
-          </a:effectRef>
-          <a:fontRef idx="minor">
-            <a:schemeClr val="lt1"/>
-          </a:fontRef>
-        </p:style>
-        <p:txBody>
-          <a:bodyPr rtlCol="0" anchor="ctr"/>
-          <a:lstStyle/>
-          <a:p>
-            <a:pPr algn="ctr"/>
-            <a:endParaRPr lang="en-US"/>
-          </a:p>
-        </p:txBody>
-      </p:sp>
-      <p:pic>
-        <p:nvPicPr>
-          <p:cNvPr id="3" name="Picture 2">
-            <a:extLst>
-              <a:ext uri="{FF2B5EF4-FFF2-40B4-BE49-F238E27FC236}">
-                <a16:creationId xmlns:a16="http://schemas.microsoft.com/office/drawing/2014/main" id="{47535E0C-94AE-7600-ED31-C3D238643087}"/>
-              </a:ext>
-            </a:extLst>
-          </p:cNvPr>
-          <p:cNvPicPr>
-            <a:picLocks noChangeAspect="1"/>
-          </p:cNvPicPr>
-          <p:nvPr/>
-        </p:nvPicPr>
-        <p:blipFill>
-          <a:blip r:embed="rId2"/>
-          <a:stretch>
-            <a:fillRect/>
-          </a:stretch>
-        </p:blipFill>
-        <p:spPr>
-          <a:xfrm>
-            <a:off x="1760540" y="643467"/>
-            <a:ext cx="8670919" cy="5571065"/>
-          </a:xfrm>
-          <a:prstGeom prst="rect">
-            <a:avLst/>
-          </a:prstGeom>
-          <a:solidFill>
-            <a:srgbClr val="FFFFFF">
-              <a:shade val="85000"/>
-            </a:srgbClr>
-          </a:solidFill>
-          <a:ln w="88900" cap="sq">
-            <a:solidFill>
-              <a:srgbClr val="FFFFFF"/>
-            </a:solidFill>
-            <a:miter lim="800000"/>
-          </a:ln>
-          <a:effectLst>
-            <a:outerShdw blurRad="55000" dist="18000" dir="5400000" algn="tl" rotWithShape="0">
-              <a:srgbClr val="000000">
-                <a:alpha val="40000"/>
-              </a:srgbClr>
-            </a:outerShdw>
-          </a:effectLst>
-          <a:scene3d>
-            <a:camera prst="orthographicFront"/>
-            <a:lightRig rig="twoPt" dir="t">
-              <a:rot lat="0" lon="0" rev="7200000"/>
-            </a:lightRig>
-          </a:scene3d>
-          <a:sp3d>
-            <a:bevelT w="25400" h="19050"/>
-            <a:contourClr>
-              <a:srgbClr val="FFFFFF"/>
-            </a:contourClr>
-          </a:sp3d>
-        </p:spPr>
-      </p:pic>
-      <p:sp>
-        <p:nvSpPr>
-          <p:cNvPr id="20" name="Isosceles Triangle 19">
-            <a:extLst>
-              <a:ext uri="{FF2B5EF4-FFF2-40B4-BE49-F238E27FC236}">
-                <a16:creationId xmlns:a16="http://schemas.microsoft.com/office/drawing/2014/main" id="{3ECA69A1-7536-43AC-85EF-C7106179F5ED}"/>
-              </a:ext>
-              <a:ext uri="{C183D7F6-B498-43B3-948B-1728B52AA6E4}">
-                <adec:decorative xmlns:adec="http://schemas.microsoft.com/office/drawing/2017/decorative" val="1"/>
-              </a:ext>
-            </a:extLst>
-          </p:cNvPr>
-          <p:cNvSpPr>
-            <a:spLocks noGrp="1" noRot="1" noChangeAspect="1" noMove="1" noResize="1" noEditPoints="1" noAdjustHandles="1" noChangeArrowheads="1" noChangeShapeType="1" noTextEdit="1"/>
-          </p:cNvSpPr>
-          <p:nvPr>
-            <p:extLst>
-              <p:ext uri="{386F3935-93C4-4BCD-93E2-E3B085C9AB24}">
-                <p16:designElem xmlns:p16="http://schemas.microsoft.com/office/powerpoint/2015/main" val="1"/>
-              </p:ext>
-            </p:extLst>
-          </p:nvPr>
-        </p:nvSpPr>
-        <p:spPr>
-          <a:xfrm flipH="1">
-            <a:off x="7604080" y="6453143"/>
-            <a:ext cx="814903" cy="404857"/>
-          </a:xfrm>
-          <a:prstGeom prst="triangle">
-            <a:avLst/>
-          </a:prstGeom>
-          <a:solidFill>
-            <a:schemeClr val="accent1">
-              <a:alpha val="30000"/>
-            </a:schemeClr>
-          </a:solidFill>
-          <a:ln>
-            <a:noFill/>
-          </a:ln>
-        </p:spPr>
-        <p:style>
-          <a:lnRef idx="2">
-            <a:schemeClr val="accent1">
-              <a:shade val="50000"/>
-            </a:schemeClr>
-          </a:lnRef>
-          <a:fillRef idx="1">
-            <a:schemeClr val="accent1"/>
-          </a:fillRef>
-          <a:effectRef idx="0">
-            <a:schemeClr val="accent1"/>
-          </a:effectRef>
-          <a:fontRef idx="minor">
-            <a:schemeClr val="lt1"/>
-          </a:fontRef>
-        </p:style>
-        <p:txBody>
-          <a:bodyPr rtlCol="0" anchor="ctr"/>
-          <a:lstStyle/>
-          <a:p>
-            <a:pPr algn="ctr"/>
-            <a:endParaRPr lang="en-US"/>
-          </a:p>
-        </p:txBody>
-      </p:sp>
-    </p:spTree>
-    <p:extLst>
-      <p:ext uri="{BB962C8B-B14F-4D97-AF65-F5344CB8AC3E}">
-        <p14:creationId xmlns:p14="http://schemas.microsoft.com/office/powerpoint/2010/main" val="2079532090"/>
-      </p:ext>
-    </p:extLst>
-  </p:cSld>
-  <p:clrMapOvr>
-    <a:masterClrMapping/>
-  </p:clrMapOvr>
-</p:sld>
-</file>
-
-<file path=ppt/slides/slide14.xml><?xml version="1.0" encoding="utf-8"?>
-<p:sld xmlns:a="http://schemas.openxmlformats.org/drawingml/2006/main" xmlns:r="http://schemas.openxmlformats.org/officeDocument/2006/relationships" xmlns:p="http://schemas.openxmlformats.org/presentationml/2006/main">
-  <p:cSld name="Slide 13">
-    <p:bg>
-      <p:bgPr>
-        <a:solidFill>
-          <a:srgbClr val="14213D"/>
-        </a:solidFill>
-        <a:effectLst/>
-      </p:bgPr>
-    </p:bg>
-    <p:spTree>
-      <p:nvGrpSpPr>
-        <p:cNvPr id="1" name=""/>
-        <p:cNvGrpSpPr/>
-        <p:nvPr/>
-      </p:nvGrpSpPr>
-      <p:grpSpPr>
-        <a:xfrm>
-          <a:off x="0" y="0"/>
-          <a:ext cx="0" cy="0"/>
-          <a:chOff x="0" y="0"/>
-          <a:chExt cx="0" cy="0"/>
-        </a:xfrm>
-      </p:grpSpPr>
-      <p:sp>
-        <p:nvSpPr>
           <p:cNvPr id="2" name="Shape 0"/>
           <p:cNvSpPr/>
           <p:nvPr/>
@@ -6348,24 +5830,17 @@
             <a:prstDash val="solid"/>
           </a:ln>
         </p:spPr>
-        <p:txBody>
-          <a:bodyPr/>
-          <a:lstStyle/>
-          <a:p>
-            <a:endParaRPr lang="en-BR"/>
-          </a:p>
-        </p:txBody>
       </p:sp>
       <p:pic>
         <p:nvPicPr>
-          <p:cNvPr id="3" name="Image 0" descr="preencoded.png"/>
+          <p:cNvPr id="3" name="Image 0" descr="preencoded.png">    </p:cNvPr>
           <p:cNvPicPr>
             <a:picLocks noChangeAspect="1"/>
           </p:cNvPicPr>
           <p:nvPr/>
         </p:nvPicPr>
         <p:blipFill>
-          <a:blip r:embed="rId3"/>
+          <a:blip r:embed="rId1"/>
           <a:stretch>
             <a:fillRect/>
           </a:stretch>
@@ -6401,7 +5876,7 @@
           <a:bodyPr wrap="square" lIns="0" tIns="0" rIns="0" bIns="0" rtlCol="0" anchor="ctr"/>
           <a:lstStyle/>
           <a:p>
-            <a:pPr marL="0" indent="0">
+            <a:pPr indent="0" marL="0">
               <a:buNone/>
             </a:pPr>
             <a:r>
@@ -6440,7 +5915,7 @@
           <a:bodyPr wrap="square" lIns="0" tIns="0" rIns="0" bIns="0" rtlCol="0" anchor="ctr"/>
           <a:lstStyle/>
           <a:p>
-            <a:pPr marL="0" indent="0">
+            <a:pPr indent="0" marL="0">
               <a:buNone/>
             </a:pPr>
             <a:r>
@@ -6460,14 +5935,14 @@
       </p:sp>
       <p:pic>
         <p:nvPicPr>
-          <p:cNvPr id="6" name="Image 1" descr="preencoded.png"/>
+          <p:cNvPr id="6" name="Image 1" descr="preencoded.png">    </p:cNvPr>
           <p:cNvPicPr>
             <a:picLocks noChangeAspect="1"/>
           </p:cNvPicPr>
           <p:nvPr/>
         </p:nvPicPr>
         <p:blipFill>
-          <a:blip r:embed="rId4"/>
+          <a:blip r:embed="rId2"/>
           <a:stretch>
             <a:fillRect/>
           </a:stretch>
@@ -6485,7 +5960,7 @@
       <p:sp>
         <p:nvSpPr>
           <p:cNvPr id="7" name="Text 3">
-            <a:hlinkClick r:id="rId5"/>
+            <a:hlinkClick r:id="rId3" tooltip=""/>
           </p:cNvPr>
           <p:cNvSpPr txBox="1"/>
           <p:nvPr/>
@@ -6505,7 +5980,7 @@
           <a:bodyPr wrap="square" lIns="0" tIns="0" rIns="0" bIns="0" rtlCol="0" anchor="ctr"/>
           <a:lstStyle/>
           <a:p>
-            <a:pPr marL="0" indent="0">
+            <a:pPr indent="0" marL="0">
               <a:buNone/>
             </a:pPr>
             <a:r>
@@ -6516,7 +5991,7 @@
                 <a:latin typeface="Calibri" pitchFamily="34" charset="0"/>
                 <a:ea typeface="Calibri" pitchFamily="34" charset="-122"/>
                 <a:cs typeface="Calibri" pitchFamily="34" charset="-120"/>
-                <a:hlinkClick r:id="rId5">
+                <a:hlinkClick r:id="rId3" invalidUrl="" action="" tgtFrame="" tooltip="" history="1" highlightClick="0" endSnd="0">
                   <a:extLst>
                     <a:ext uri="{A12FA001-AC4F-418D-AE19-62706E023703}">
                       <ahyp:hlinkClr xmlns:ahyp="http://schemas.microsoft.com/office/drawing/2018/hyperlinkcolor" val="tx"/>
@@ -6551,7 +6026,7 @@
           <a:bodyPr wrap="square" lIns="0" tIns="0" rIns="0" bIns="0" rtlCol="0" anchor="ctr"/>
           <a:lstStyle/>
           <a:p>
-            <a:pPr marL="0" indent="0">
+            <a:pPr indent="0" marL="0">
               <a:buNone/>
             </a:pPr>
             <a:r>
@@ -6568,7 +6043,7 @@
             <a:endParaRPr lang="en-US" sz="1500" dirty="0"/>
           </a:p>
           <a:p>
-            <a:pPr marL="0" indent="0">
+            <a:pPr indent="0" marL="0">
               <a:buNone/>
             </a:pPr>
             <a:r>
@@ -6607,7 +6082,7 @@
           <a:bodyPr wrap="square" lIns="0" tIns="0" rIns="0" bIns="0" rtlCol="0" anchor="ctr"/>
           <a:lstStyle/>
           <a:p>
-            <a:pPr marL="0" indent="0" algn="r">
+            <a:pPr algn="r" indent="0" marL="0">
               <a:buNone/>
             </a:pPr>
             <a:r>
@@ -6671,7 +6146,7 @@
           <a:bodyPr wrap="square" lIns="0" tIns="0" rIns="0" bIns="0" rtlCol="0" anchor="t"/>
           <a:lstStyle/>
           <a:p>
-            <a:pPr marL="0" indent="0">
+            <a:pPr indent="0" marL="0">
               <a:buNone/>
             </a:pPr>
             <a:r>
@@ -6821,20 +6296,13 @@
             <a:prstDash val="solid"/>
           </a:ln>
           <a:effectLst>
-            <a:outerShdw blurRad="76200" dist="25400" dir="5400000" algn="bl" rotWithShape="0">
+            <a:outerShdw sx="100000" sy="100000" kx="0" ky="0" algn="bl" rotWithShape="0" blurRad="76200" dist="25400" dir="5400000">
               <a:srgbClr val="000000">
                 <a:alpha val="12000"/>
               </a:srgbClr>
             </a:outerShdw>
           </a:effectLst>
         </p:spPr>
-        <p:txBody>
-          <a:bodyPr/>
-          <a:lstStyle/>
-          <a:p>
-            <a:endParaRPr lang="en-BR"/>
-          </a:p>
-        </p:txBody>
       </p:sp>
       <p:sp>
         <p:nvSpPr>
@@ -6857,7 +6325,7 @@
           <a:bodyPr wrap="square" lIns="0" tIns="0" rIns="0" bIns="0" rtlCol="0" anchor="ctr"/>
           <a:lstStyle/>
           <a:p>
-            <a:pPr marL="0" indent="0">
+            <a:pPr indent="0" marL="0">
               <a:buNone/>
             </a:pPr>
             <a:r>
@@ -6896,7 +6364,7 @@
           <a:bodyPr wrap="square" lIns="0" tIns="0" rIns="0" bIns="0" rtlCol="0" anchor="ctr"/>
           <a:lstStyle/>
           <a:p>
-            <a:pPr marL="0" indent="0">
+            <a:pPr indent="0" marL="0">
               <a:buNone/>
             </a:pPr>
             <a:r>
@@ -6940,20 +6408,13 @@
             <a:prstDash val="solid"/>
           </a:ln>
           <a:effectLst>
-            <a:outerShdw blurRad="76200" dist="25400" dir="5400000" algn="bl" rotWithShape="0">
+            <a:outerShdw sx="100000" sy="100000" kx="0" ky="0" algn="bl" rotWithShape="0" blurRad="76200" dist="25400" dir="5400000">
               <a:srgbClr val="000000">
                 <a:alpha val="12000"/>
               </a:srgbClr>
             </a:outerShdw>
           </a:effectLst>
         </p:spPr>
-        <p:txBody>
-          <a:bodyPr/>
-          <a:lstStyle/>
-          <a:p>
-            <a:endParaRPr lang="en-BR"/>
-          </a:p>
-        </p:txBody>
       </p:sp>
       <p:sp>
         <p:nvSpPr>
@@ -6976,7 +6437,7 @@
           <a:bodyPr wrap="square" lIns="0" tIns="0" rIns="0" bIns="0" rtlCol="0" anchor="ctr"/>
           <a:lstStyle/>
           <a:p>
-            <a:pPr marL="0" indent="0">
+            <a:pPr indent="0" marL="0">
               <a:buNone/>
             </a:pPr>
             <a:r>
@@ -7015,7 +6476,7 @@
           <a:bodyPr wrap="square" lIns="0" tIns="0" rIns="0" bIns="0" rtlCol="0" anchor="ctr"/>
           <a:lstStyle/>
           <a:p>
-            <a:pPr marL="0" indent="0">
+            <a:pPr indent="0" marL="0">
               <a:buNone/>
             </a:pPr>
             <a:r>
@@ -7059,20 +6520,13 @@
             <a:prstDash val="solid"/>
           </a:ln>
           <a:effectLst>
-            <a:outerShdw blurRad="76200" dist="25400" dir="5400000" algn="bl" rotWithShape="0">
+            <a:outerShdw sx="100000" sy="100000" kx="0" ky="0" algn="bl" rotWithShape="0" blurRad="76200" dist="25400" dir="5400000">
               <a:srgbClr val="000000">
                 <a:alpha val="12000"/>
               </a:srgbClr>
             </a:outerShdw>
           </a:effectLst>
         </p:spPr>
-        <p:txBody>
-          <a:bodyPr/>
-          <a:lstStyle/>
-          <a:p>
-            <a:endParaRPr lang="en-BR"/>
-          </a:p>
-        </p:txBody>
       </p:sp>
       <p:sp>
         <p:nvSpPr>
@@ -7095,7 +6549,7 @@
           <a:bodyPr wrap="square" lIns="0" tIns="0" rIns="0" bIns="0" rtlCol="0" anchor="ctr"/>
           <a:lstStyle/>
           <a:p>
-            <a:pPr marL="0" indent="0">
+            <a:pPr indent="0" marL="0">
               <a:buNone/>
             </a:pPr>
             <a:r>
@@ -7134,7 +6588,7 @@
           <a:bodyPr wrap="square" lIns="0" tIns="0" rIns="0" bIns="0" rtlCol="0" anchor="ctr"/>
           <a:lstStyle/>
           <a:p>
-            <a:pPr marL="0" indent="0">
+            <a:pPr indent="0" marL="0">
               <a:buNone/>
             </a:pPr>
             <a:r>
@@ -7173,7 +6627,7 @@
           <a:bodyPr wrap="square" lIns="0" tIns="0" rIns="0" bIns="0" rtlCol="0" anchor="ctr"/>
           <a:lstStyle/>
           <a:p>
-            <a:pPr marL="0" indent="0">
+            <a:pPr indent="0" marL="0">
               <a:buNone/>
             </a:pPr>
             <a:r>
@@ -7212,7 +6666,7 @@
           <a:bodyPr wrap="square" lIns="0" tIns="0" rIns="0" bIns="0" rtlCol="0" anchor="ctr"/>
           <a:lstStyle/>
           <a:p>
-            <a:pPr marL="0" indent="0" algn="r">
+            <a:pPr algn="r" indent="0" marL="0">
               <a:buNone/>
             </a:pPr>
             <a:r>
@@ -7276,7 +6730,7 @@
           <a:bodyPr wrap="square" lIns="0" tIns="0" rIns="0" bIns="0" rtlCol="0" anchor="t"/>
           <a:lstStyle/>
           <a:p>
-            <a:pPr marL="0" indent="0">
+            <a:pPr indent="0" marL="0">
               <a:buNone/>
             </a:pPr>
             <a:r>
@@ -7320,20 +6774,13 @@
             <a:prstDash val="solid"/>
           </a:ln>
           <a:effectLst>
-            <a:outerShdw blurRad="76200" dist="25400" dir="5400000" algn="bl" rotWithShape="0">
+            <a:outerShdw sx="100000" sy="100000" kx="0" ky="0" algn="bl" rotWithShape="0" blurRad="76200" dist="25400" dir="5400000">
               <a:srgbClr val="000000">
                 <a:alpha val="12000"/>
               </a:srgbClr>
             </a:outerShdw>
           </a:effectLst>
         </p:spPr>
-        <p:txBody>
-          <a:bodyPr/>
-          <a:lstStyle/>
-          <a:p>
-            <a:endParaRPr lang="en-BR"/>
-          </a:p>
-        </p:txBody>
       </p:sp>
       <p:sp>
         <p:nvSpPr>
@@ -7359,24 +6806,17 @@
             <a:prstDash val="solid"/>
           </a:ln>
         </p:spPr>
-        <p:txBody>
-          <a:bodyPr/>
-          <a:lstStyle/>
-          <a:p>
-            <a:endParaRPr lang="en-BR"/>
-          </a:p>
-        </p:txBody>
       </p:sp>
       <p:pic>
         <p:nvPicPr>
-          <p:cNvPr id="5" name="Image 0" descr="preencoded.png"/>
+          <p:cNvPr id="5" name="Image 0" descr="preencoded.png">    </p:cNvPr>
           <p:cNvPicPr>
             <a:picLocks noChangeAspect="1"/>
           </p:cNvPicPr>
           <p:nvPr/>
         </p:nvPicPr>
         <p:blipFill>
-          <a:blip r:embed="rId3"/>
+          <a:blip r:embed="rId1"/>
           <a:stretch>
             <a:fillRect/>
           </a:stretch>
@@ -7412,7 +6852,7 @@
           <a:bodyPr wrap="square" lIns="0" tIns="0" rIns="0" bIns="0" rtlCol="0" anchor="ctr"/>
           <a:lstStyle/>
           <a:p>
-            <a:pPr marL="0" indent="0">
+            <a:pPr indent="0" marL="0">
               <a:buNone/>
             </a:pPr>
             <a:r>
@@ -7451,7 +6891,7 @@
           <a:bodyPr wrap="square" lIns="0" tIns="0" rIns="0" bIns="0" rtlCol="0" anchor="t"/>
           <a:lstStyle/>
           <a:p>
-            <a:pPr marL="0" indent="0">
+            <a:pPr indent="0" marL="0">
               <a:buNone/>
             </a:pPr>
             <a:r>
@@ -7495,20 +6935,13 @@
             <a:prstDash val="solid"/>
           </a:ln>
           <a:effectLst>
-            <a:outerShdw blurRad="76200" dist="25400" dir="5400000" algn="bl" rotWithShape="0">
+            <a:outerShdw sx="100000" sy="100000" kx="0" ky="0" algn="bl" rotWithShape="0" blurRad="76200" dist="25400" dir="5400000">
               <a:srgbClr val="000000">
                 <a:alpha val="12000"/>
               </a:srgbClr>
             </a:outerShdw>
           </a:effectLst>
         </p:spPr>
-        <p:txBody>
-          <a:bodyPr/>
-          <a:lstStyle/>
-          <a:p>
-            <a:endParaRPr lang="en-BR"/>
-          </a:p>
-        </p:txBody>
       </p:sp>
       <p:sp>
         <p:nvSpPr>
@@ -7534,24 +6967,17 @@
             <a:prstDash val="solid"/>
           </a:ln>
         </p:spPr>
-        <p:txBody>
-          <a:bodyPr/>
-          <a:lstStyle/>
-          <a:p>
-            <a:endParaRPr lang="en-BR"/>
-          </a:p>
-        </p:txBody>
       </p:sp>
       <p:pic>
         <p:nvPicPr>
-          <p:cNvPr id="10" name="Image 1" descr="preencoded.png"/>
+          <p:cNvPr id="10" name="Image 1" descr="preencoded.png">    </p:cNvPr>
           <p:cNvPicPr>
             <a:picLocks noChangeAspect="1"/>
           </p:cNvPicPr>
           <p:nvPr/>
         </p:nvPicPr>
         <p:blipFill>
-          <a:blip r:embed="rId4"/>
+          <a:blip r:embed="rId2"/>
           <a:stretch>
             <a:fillRect/>
           </a:stretch>
@@ -7587,7 +7013,7 @@
           <a:bodyPr wrap="square" lIns="0" tIns="0" rIns="0" bIns="0" rtlCol="0" anchor="ctr"/>
           <a:lstStyle/>
           <a:p>
-            <a:pPr marL="0" indent="0">
+            <a:pPr indent="0" marL="0">
               <a:buNone/>
             </a:pPr>
             <a:r>
@@ -7626,7 +7052,7 @@
           <a:bodyPr wrap="square" lIns="0" tIns="0" rIns="0" bIns="0" rtlCol="0" anchor="t"/>
           <a:lstStyle/>
           <a:p>
-            <a:pPr marL="0" indent="0">
+            <a:pPr indent="0" marL="0">
               <a:buNone/>
             </a:pPr>
             <a:r>
@@ -7670,20 +7096,13 @@
             <a:prstDash val="solid"/>
           </a:ln>
           <a:effectLst>
-            <a:outerShdw blurRad="76200" dist="25400" dir="5400000" algn="bl" rotWithShape="0">
+            <a:outerShdw sx="100000" sy="100000" kx="0" ky="0" algn="bl" rotWithShape="0" blurRad="76200" dist="25400" dir="5400000">
               <a:srgbClr val="000000">
                 <a:alpha val="12000"/>
               </a:srgbClr>
             </a:outerShdw>
           </a:effectLst>
         </p:spPr>
-        <p:txBody>
-          <a:bodyPr/>
-          <a:lstStyle/>
-          <a:p>
-            <a:endParaRPr lang="en-BR"/>
-          </a:p>
-        </p:txBody>
       </p:sp>
       <p:sp>
         <p:nvSpPr>
@@ -7709,24 +7128,17 @@
             <a:prstDash val="solid"/>
           </a:ln>
         </p:spPr>
-        <p:txBody>
-          <a:bodyPr/>
-          <a:lstStyle/>
-          <a:p>
-            <a:endParaRPr lang="en-BR"/>
-          </a:p>
-        </p:txBody>
       </p:sp>
       <p:pic>
         <p:nvPicPr>
-          <p:cNvPr id="15" name="Image 2" descr="preencoded.png"/>
+          <p:cNvPr id="15" name="Image 2" descr="preencoded.png">    </p:cNvPr>
           <p:cNvPicPr>
             <a:picLocks noChangeAspect="1"/>
           </p:cNvPicPr>
           <p:nvPr/>
         </p:nvPicPr>
         <p:blipFill>
-          <a:blip r:embed="rId5"/>
+          <a:blip r:embed="rId3"/>
           <a:stretch>
             <a:fillRect/>
           </a:stretch>
@@ -7762,7 +7174,7 @@
           <a:bodyPr wrap="square" lIns="0" tIns="0" rIns="0" bIns="0" rtlCol="0" anchor="ctr"/>
           <a:lstStyle/>
           <a:p>
-            <a:pPr marL="0" indent="0">
+            <a:pPr indent="0" marL="0">
               <a:buNone/>
             </a:pPr>
             <a:r>
@@ -7801,7 +7213,7 @@
           <a:bodyPr wrap="square" lIns="0" tIns="0" rIns="0" bIns="0" rtlCol="0" anchor="t"/>
           <a:lstStyle/>
           <a:p>
-            <a:pPr marL="0" indent="0">
+            <a:pPr indent="0" marL="0">
               <a:buNone/>
             </a:pPr>
             <a:r>
@@ -7845,20 +7257,13 @@
             <a:prstDash val="solid"/>
           </a:ln>
           <a:effectLst>
-            <a:outerShdw blurRad="76200" dist="25400" dir="5400000" algn="bl" rotWithShape="0">
+            <a:outerShdw sx="100000" sy="100000" kx="0" ky="0" algn="bl" rotWithShape="0" blurRad="76200" dist="25400" dir="5400000">
               <a:srgbClr val="000000">
                 <a:alpha val="12000"/>
               </a:srgbClr>
             </a:outerShdw>
           </a:effectLst>
         </p:spPr>
-        <p:txBody>
-          <a:bodyPr/>
-          <a:lstStyle/>
-          <a:p>
-            <a:endParaRPr lang="en-BR"/>
-          </a:p>
-        </p:txBody>
       </p:sp>
       <p:sp>
         <p:nvSpPr>
@@ -7881,7 +7286,7 @@
           <a:bodyPr wrap="square" lIns="0" tIns="0" rIns="0" bIns="0" rtlCol="0" anchor="ctr"/>
           <a:lstStyle/>
           <a:p>
-            <a:pPr marL="0" indent="0">
+            <a:pPr indent="0" marL="0">
               <a:buNone/>
             </a:pPr>
             <a:r>
@@ -7895,6 +7300,9 @@
               </a:rPr>
               <a:t>~3 min </a:t>
             </a:r>
+            <a:pPr indent="0" marL="0">
+              <a:buNone/>
+            </a:pPr>
             <a:r>
               <a:rPr lang="en-US" sz="1600" dirty="0">
                 <a:solidFill>
@@ -7931,7 +7339,7 @@
           <a:bodyPr wrap="square" lIns="0" tIns="0" rIns="0" bIns="0" rtlCol="0" anchor="ctr"/>
           <a:lstStyle/>
           <a:p>
-            <a:pPr marL="0" indent="0">
+            <a:pPr indent="0" marL="0">
               <a:buNone/>
             </a:pPr>
             <a:r>
@@ -7970,7 +7378,7 @@
           <a:bodyPr wrap="square" lIns="0" tIns="0" rIns="0" bIns="0" rtlCol="0" anchor="ctr"/>
           <a:lstStyle/>
           <a:p>
-            <a:pPr marL="0" indent="0" algn="r">
+            <a:pPr algn="r" indent="0" marL="0">
               <a:buNone/>
             </a:pPr>
             <a:r>
@@ -8034,7 +7442,7 @@
           <a:bodyPr wrap="square" lIns="0" tIns="0" rIns="0" bIns="0" rtlCol="0" anchor="t"/>
           <a:lstStyle/>
           <a:p>
-            <a:pPr marL="0" indent="0">
+            <a:pPr indent="0" marL="0">
               <a:buNone/>
             </a:pPr>
             <a:r>
@@ -8054,14 +7462,14 @@
       </p:sp>
       <p:pic>
         <p:nvPicPr>
-          <p:cNvPr id="3" name="Image 0" descr="Diagrama: upload, Harness com agentes A1 a A6, SQLite, OpenAI API e interface Streamlit"/>
+          <p:cNvPr id="3" name="Image 0" descr="Diagrama: upload, Harness com agentes A1 a A6, SQLite, OpenAI API e interface Streamlit">    </p:cNvPr>
           <p:cNvPicPr>
             <a:picLocks noChangeAspect="1"/>
           </p:cNvPicPr>
           <p:nvPr/>
         </p:nvPicPr>
         <p:blipFill>
-          <a:blip r:embed="rId3"/>
+          <a:blip r:embed="rId1"/>
           <a:stretch>
             <a:fillRect/>
           </a:stretch>
@@ -8097,7 +7505,7 @@
           <a:bodyPr wrap="square" lIns="0" tIns="0" rIns="0" bIns="0" rtlCol="0" anchor="t"/>
           <a:lstStyle/>
           <a:p>
-            <a:pPr marL="0" indent="0">
+            <a:pPr indent="0" marL="0">
               <a:buNone/>
             </a:pPr>
             <a:r>
@@ -8114,7 +7522,7 @@
             <a:endParaRPr lang="en-US" sz="1600" dirty="0"/>
           </a:p>
           <a:p>
-            <a:pPr marL="0" indent="0">
+            <a:pPr indent="0" marL="0">
               <a:buNone/>
             </a:pPr>
             <a:r>
@@ -8153,7 +7561,7 @@
           <a:bodyPr wrap="square" lIns="0" tIns="0" rIns="0" bIns="0" rtlCol="0" anchor="t"/>
           <a:lstStyle/>
           <a:p>
-            <a:pPr marL="0" indent="0">
+            <a:pPr indent="0" marL="0">
               <a:buNone/>
             </a:pPr>
             <a:r>
@@ -8170,7 +7578,7 @@
             <a:endParaRPr lang="en-US" sz="1600" dirty="0"/>
           </a:p>
           <a:p>
-            <a:pPr marL="0" indent="0">
+            <a:pPr indent="0" marL="0">
               <a:buNone/>
             </a:pPr>
             <a:r>
@@ -8209,7 +7617,7 @@
           <a:bodyPr wrap="square" lIns="0" tIns="0" rIns="0" bIns="0" rtlCol="0" anchor="t"/>
           <a:lstStyle/>
           <a:p>
-            <a:pPr marL="0" indent="0">
+            <a:pPr indent="0" marL="0">
               <a:buNone/>
             </a:pPr>
             <a:r>
@@ -8226,7 +7634,7 @@
             <a:endParaRPr lang="en-US" sz="1600" dirty="0"/>
           </a:p>
           <a:p>
-            <a:pPr marL="0" indent="0">
+            <a:pPr indent="0" marL="0">
               <a:buNone/>
             </a:pPr>
             <a:r>
@@ -8265,7 +7673,7 @@
           <a:bodyPr wrap="square" lIns="0" tIns="0" rIns="0" bIns="0" rtlCol="0" anchor="t"/>
           <a:lstStyle/>
           <a:p>
-            <a:pPr marL="0" indent="0">
+            <a:pPr indent="0" marL="0">
               <a:buNone/>
             </a:pPr>
             <a:r>
@@ -8282,7 +7690,7 @@
             <a:endParaRPr lang="en-US" sz="1600" dirty="0"/>
           </a:p>
           <a:p>
-            <a:pPr marL="0" indent="0">
+            <a:pPr indent="0" marL="0">
               <a:buNone/>
             </a:pPr>
             <a:r>
@@ -8321,7 +7729,7 @@
           <a:bodyPr wrap="square" lIns="0" tIns="0" rIns="0" bIns="0" rtlCol="0" anchor="ctr"/>
           <a:lstStyle/>
           <a:p>
-            <a:pPr marL="0" indent="0">
+            <a:pPr indent="0" marL="0">
               <a:buNone/>
             </a:pPr>
             <a:r>
@@ -8360,7 +7768,7 @@
           <a:bodyPr wrap="square" lIns="0" tIns="0" rIns="0" bIns="0" rtlCol="0" anchor="ctr"/>
           <a:lstStyle/>
           <a:p>
-            <a:pPr marL="0" indent="0" algn="r">
+            <a:pPr algn="r" indent="0" marL="0">
               <a:buNone/>
             </a:pPr>
             <a:r>
@@ -8424,7 +7832,7 @@
           <a:bodyPr wrap="square" lIns="0" tIns="0" rIns="0" bIns="0" rtlCol="0" anchor="t"/>
           <a:lstStyle/>
           <a:p>
-            <a:pPr marL="0" indent="0">
+            <a:pPr indent="0" marL="0">
               <a:buNone/>
             </a:pPr>
             <a:r>
@@ -8468,20 +7876,13 @@
             <a:prstDash val="solid"/>
           </a:ln>
           <a:effectLst>
-            <a:outerShdw blurRad="76200" dist="25400" dir="5400000" algn="bl" rotWithShape="0">
+            <a:outerShdw sx="100000" sy="100000" kx="0" ky="0" algn="bl" rotWithShape="0" blurRad="76200" dist="25400" dir="5400000">
               <a:srgbClr val="000000">
                 <a:alpha val="12000"/>
               </a:srgbClr>
             </a:outerShdw>
           </a:effectLst>
         </p:spPr>
-        <p:txBody>
-          <a:bodyPr/>
-          <a:lstStyle/>
-          <a:p>
-            <a:endParaRPr lang="en-BR"/>
-          </a:p>
-        </p:txBody>
       </p:sp>
       <p:sp>
         <p:nvSpPr>
@@ -8507,24 +7908,17 @@
             <a:prstDash val="solid"/>
           </a:ln>
         </p:spPr>
-        <p:txBody>
-          <a:bodyPr/>
-          <a:lstStyle/>
-          <a:p>
-            <a:endParaRPr lang="en-BR"/>
-          </a:p>
-        </p:txBody>
       </p:sp>
       <p:pic>
         <p:nvPicPr>
-          <p:cNvPr id="5" name="Image 0" descr="preencoded.png"/>
+          <p:cNvPr id="5" name="Image 0" descr="preencoded.png">    </p:cNvPr>
           <p:cNvPicPr>
             <a:picLocks noChangeAspect="1"/>
           </p:cNvPicPr>
           <p:nvPr/>
         </p:nvPicPr>
         <p:blipFill>
-          <a:blip r:embed="rId3"/>
+          <a:blip r:embed="rId1"/>
           <a:stretch>
             <a:fillRect/>
           </a:stretch>
@@ -8560,7 +7954,7 @@
           <a:bodyPr wrap="square" lIns="0" tIns="0" rIns="0" bIns="0" rtlCol="0" anchor="ctr"/>
           <a:lstStyle/>
           <a:p>
-            <a:pPr marL="0" indent="0">
+            <a:pPr indent="0" marL="0">
               <a:buNone/>
             </a:pPr>
             <a:r>
@@ -8599,7 +7993,7 @@
           <a:bodyPr wrap="square" lIns="0" tIns="0" rIns="0" bIns="0" rtlCol="0" anchor="t"/>
           <a:lstStyle/>
           <a:p>
-            <a:pPr marL="0" indent="0">
+            <a:pPr indent="0" marL="0">
               <a:buNone/>
             </a:pPr>
             <a:r>
@@ -8643,20 +8037,13 @@
             <a:prstDash val="solid"/>
           </a:ln>
           <a:effectLst>
-            <a:outerShdw blurRad="76200" dist="25400" dir="5400000" algn="bl" rotWithShape="0">
+            <a:outerShdw sx="100000" sy="100000" kx="0" ky="0" algn="bl" rotWithShape="0" blurRad="76200" dist="25400" dir="5400000">
               <a:srgbClr val="000000">
                 <a:alpha val="12000"/>
               </a:srgbClr>
             </a:outerShdw>
           </a:effectLst>
         </p:spPr>
-        <p:txBody>
-          <a:bodyPr/>
-          <a:lstStyle/>
-          <a:p>
-            <a:endParaRPr lang="en-BR"/>
-          </a:p>
-        </p:txBody>
       </p:sp>
       <p:sp>
         <p:nvSpPr>
@@ -8682,24 +8069,17 @@
             <a:prstDash val="solid"/>
           </a:ln>
         </p:spPr>
-        <p:txBody>
-          <a:bodyPr/>
-          <a:lstStyle/>
-          <a:p>
-            <a:endParaRPr lang="en-BR"/>
-          </a:p>
-        </p:txBody>
       </p:sp>
       <p:pic>
         <p:nvPicPr>
-          <p:cNvPr id="10" name="Image 1" descr="preencoded.png"/>
+          <p:cNvPr id="10" name="Image 1" descr="preencoded.png">    </p:cNvPr>
           <p:cNvPicPr>
             <a:picLocks noChangeAspect="1"/>
           </p:cNvPicPr>
           <p:nvPr/>
         </p:nvPicPr>
         <p:blipFill>
-          <a:blip r:embed="rId4"/>
+          <a:blip r:embed="rId2"/>
           <a:stretch>
             <a:fillRect/>
           </a:stretch>
@@ -8735,7 +8115,7 @@
           <a:bodyPr wrap="square" lIns="0" tIns="0" rIns="0" bIns="0" rtlCol="0" anchor="ctr"/>
           <a:lstStyle/>
           <a:p>
-            <a:pPr marL="0" indent="0">
+            <a:pPr indent="0" marL="0">
               <a:buNone/>
             </a:pPr>
             <a:r>
@@ -8774,7 +8154,7 @@
           <a:bodyPr wrap="square" lIns="0" tIns="0" rIns="0" bIns="0" rtlCol="0" anchor="ctr"/>
           <a:lstStyle/>
           <a:p>
-            <a:pPr marL="0" indent="0">
+            <a:pPr indent="0" marL="0">
               <a:buNone/>
             </a:pPr>
             <a:r>
@@ -8813,7 +8193,7 @@
           <a:bodyPr wrap="square" lIns="0" tIns="0" rIns="0" bIns="0" rtlCol="0" anchor="t"/>
           <a:lstStyle/>
           <a:p>
-            <a:pPr marL="0" indent="0">
+            <a:pPr indent="0" marL="0">
               <a:buNone/>
             </a:pPr>
             <a:r>
@@ -8857,20 +8237,13 @@
             <a:prstDash val="solid"/>
           </a:ln>
           <a:effectLst>
-            <a:outerShdw blurRad="76200" dist="25400" dir="5400000" algn="bl" rotWithShape="0">
+            <a:outerShdw sx="100000" sy="100000" kx="0" ky="0" algn="bl" rotWithShape="0" blurRad="76200" dist="25400" dir="5400000">
               <a:srgbClr val="000000">
                 <a:alpha val="12000"/>
               </a:srgbClr>
             </a:outerShdw>
           </a:effectLst>
         </p:spPr>
-        <p:txBody>
-          <a:bodyPr/>
-          <a:lstStyle/>
-          <a:p>
-            <a:endParaRPr lang="en-BR"/>
-          </a:p>
-        </p:txBody>
       </p:sp>
       <p:sp>
         <p:nvSpPr>
@@ -8896,24 +8269,17 @@
             <a:prstDash val="solid"/>
           </a:ln>
         </p:spPr>
-        <p:txBody>
-          <a:bodyPr/>
-          <a:lstStyle/>
-          <a:p>
-            <a:endParaRPr lang="en-BR"/>
-          </a:p>
-        </p:txBody>
       </p:sp>
       <p:pic>
         <p:nvPicPr>
-          <p:cNvPr id="16" name="Image 2" descr="preencoded.png"/>
+          <p:cNvPr id="16" name="Image 2" descr="preencoded.png">    </p:cNvPr>
           <p:cNvPicPr>
             <a:picLocks noChangeAspect="1"/>
           </p:cNvPicPr>
           <p:nvPr/>
         </p:nvPicPr>
         <p:blipFill>
-          <a:blip r:embed="rId5"/>
+          <a:blip r:embed="rId3"/>
           <a:stretch>
             <a:fillRect/>
           </a:stretch>
@@ -8949,7 +8315,7 @@
           <a:bodyPr wrap="square" lIns="0" tIns="0" rIns="0" bIns="0" rtlCol="0" anchor="ctr"/>
           <a:lstStyle/>
           <a:p>
-            <a:pPr marL="0" indent="0">
+            <a:pPr indent="0" marL="0">
               <a:buNone/>
             </a:pPr>
             <a:r>
@@ -8988,7 +8354,7 @@
           <a:bodyPr wrap="square" lIns="0" tIns="0" rIns="0" bIns="0" rtlCol="0" anchor="ctr"/>
           <a:lstStyle/>
           <a:p>
-            <a:pPr marL="0" indent="0">
+            <a:pPr indent="0" marL="0">
               <a:buNone/>
             </a:pPr>
             <a:r>
@@ -9027,7 +8393,7 @@
           <a:bodyPr wrap="square" lIns="0" tIns="0" rIns="0" bIns="0" rtlCol="0" anchor="t"/>
           <a:lstStyle/>
           <a:p>
-            <a:pPr marL="0" indent="0">
+            <a:pPr indent="0" marL="0">
               <a:buNone/>
             </a:pPr>
             <a:r>
@@ -9071,20 +8437,13 @@
             <a:prstDash val="solid"/>
           </a:ln>
           <a:effectLst>
-            <a:outerShdw blurRad="76200" dist="25400" dir="5400000" algn="bl" rotWithShape="0">
+            <a:outerShdw sx="100000" sy="100000" kx="0" ky="0" algn="bl" rotWithShape="0" blurRad="76200" dist="25400" dir="5400000">
               <a:srgbClr val="000000">
                 <a:alpha val="12000"/>
               </a:srgbClr>
             </a:outerShdw>
           </a:effectLst>
         </p:spPr>
-        <p:txBody>
-          <a:bodyPr/>
-          <a:lstStyle/>
-          <a:p>
-            <a:endParaRPr lang="en-BR"/>
-          </a:p>
-        </p:txBody>
       </p:sp>
       <p:sp>
         <p:nvSpPr>
@@ -9110,24 +8469,17 @@
             <a:prstDash val="solid"/>
           </a:ln>
         </p:spPr>
-        <p:txBody>
-          <a:bodyPr/>
-          <a:lstStyle/>
-          <a:p>
-            <a:endParaRPr lang="en-BR"/>
-          </a:p>
-        </p:txBody>
       </p:sp>
       <p:pic>
         <p:nvPicPr>
-          <p:cNvPr id="22" name="Image 3" descr="preencoded.png"/>
+          <p:cNvPr id="22" name="Image 3" descr="preencoded.png">    </p:cNvPr>
           <p:cNvPicPr>
             <a:picLocks noChangeAspect="1"/>
           </p:cNvPicPr>
           <p:nvPr/>
         </p:nvPicPr>
         <p:blipFill>
-          <a:blip r:embed="rId6"/>
+          <a:blip r:embed="rId4"/>
           <a:stretch>
             <a:fillRect/>
           </a:stretch>
@@ -9163,7 +8515,7 @@
           <a:bodyPr wrap="square" lIns="0" tIns="0" rIns="0" bIns="0" rtlCol="0" anchor="ctr"/>
           <a:lstStyle/>
           <a:p>
-            <a:pPr marL="0" indent="0">
+            <a:pPr indent="0" marL="0">
               <a:buNone/>
             </a:pPr>
             <a:r>
@@ -9202,7 +8554,7 @@
           <a:bodyPr wrap="square" lIns="0" tIns="0" rIns="0" bIns="0" rtlCol="0" anchor="t"/>
           <a:lstStyle/>
           <a:p>
-            <a:pPr marL="0" indent="0">
+            <a:pPr indent="0" marL="0">
               <a:buNone/>
             </a:pPr>
             <a:r>
@@ -9246,20 +8598,13 @@
             <a:prstDash val="solid"/>
           </a:ln>
           <a:effectLst>
-            <a:outerShdw blurRad="76200" dist="25400" dir="5400000" algn="bl" rotWithShape="0">
+            <a:outerShdw sx="100000" sy="100000" kx="0" ky="0" algn="bl" rotWithShape="0" blurRad="76200" dist="25400" dir="5400000">
               <a:srgbClr val="000000">
                 <a:alpha val="12000"/>
               </a:srgbClr>
             </a:outerShdw>
           </a:effectLst>
         </p:spPr>
-        <p:txBody>
-          <a:bodyPr/>
-          <a:lstStyle/>
-          <a:p>
-            <a:endParaRPr lang="en-BR"/>
-          </a:p>
-        </p:txBody>
       </p:sp>
       <p:sp>
         <p:nvSpPr>
@@ -9285,24 +8630,17 @@
             <a:prstDash val="solid"/>
           </a:ln>
         </p:spPr>
-        <p:txBody>
-          <a:bodyPr/>
-          <a:lstStyle/>
-          <a:p>
-            <a:endParaRPr lang="en-BR"/>
-          </a:p>
-        </p:txBody>
       </p:sp>
       <p:pic>
         <p:nvPicPr>
-          <p:cNvPr id="27" name="Image 4" descr="preencoded.png"/>
+          <p:cNvPr id="27" name="Image 4" descr="preencoded.png">    </p:cNvPr>
           <p:cNvPicPr>
             <a:picLocks noChangeAspect="1"/>
           </p:cNvPicPr>
           <p:nvPr/>
         </p:nvPicPr>
         <p:blipFill>
-          <a:blip r:embed="rId7"/>
+          <a:blip r:embed="rId5"/>
           <a:stretch>
             <a:fillRect/>
           </a:stretch>
@@ -9338,7 +8676,7 @@
           <a:bodyPr wrap="square" lIns="0" tIns="0" rIns="0" bIns="0" rtlCol="0" anchor="ctr"/>
           <a:lstStyle/>
           <a:p>
-            <a:pPr marL="0" indent="0">
+            <a:pPr indent="0" marL="0">
               <a:buNone/>
             </a:pPr>
             <a:r>
@@ -9377,7 +8715,7 @@
           <a:bodyPr wrap="square" lIns="0" tIns="0" rIns="0" bIns="0" rtlCol="0" anchor="ctr"/>
           <a:lstStyle/>
           <a:p>
-            <a:pPr marL="0" indent="0">
+            <a:pPr indent="0" marL="0">
               <a:buNone/>
             </a:pPr>
             <a:r>
@@ -9416,7 +8754,7 @@
           <a:bodyPr wrap="square" lIns="0" tIns="0" rIns="0" bIns="0" rtlCol="0" anchor="t"/>
           <a:lstStyle/>
           <a:p>
-            <a:pPr marL="0" indent="0">
+            <a:pPr indent="0" marL="0">
               <a:buNone/>
             </a:pPr>
             <a:r>
@@ -9460,20 +8798,13 @@
             <a:prstDash val="solid"/>
           </a:ln>
           <a:effectLst>
-            <a:outerShdw blurRad="76200" dist="25400" dir="5400000" algn="bl" rotWithShape="0">
+            <a:outerShdw sx="100000" sy="100000" kx="0" ky="0" algn="bl" rotWithShape="0" blurRad="76200" dist="25400" dir="5400000">
               <a:srgbClr val="000000">
                 <a:alpha val="12000"/>
               </a:srgbClr>
             </a:outerShdw>
           </a:effectLst>
         </p:spPr>
-        <p:txBody>
-          <a:bodyPr/>
-          <a:lstStyle/>
-          <a:p>
-            <a:endParaRPr lang="en-BR"/>
-          </a:p>
-        </p:txBody>
       </p:sp>
       <p:sp>
         <p:nvSpPr>
@@ -9499,24 +8830,17 @@
             <a:prstDash val="solid"/>
           </a:ln>
         </p:spPr>
-        <p:txBody>
-          <a:bodyPr/>
-          <a:lstStyle/>
-          <a:p>
-            <a:endParaRPr lang="en-BR"/>
-          </a:p>
-        </p:txBody>
       </p:sp>
       <p:pic>
         <p:nvPicPr>
-          <p:cNvPr id="33" name="Image 5" descr="preencoded.png"/>
+          <p:cNvPr id="33" name="Image 5" descr="preencoded.png">    </p:cNvPr>
           <p:cNvPicPr>
             <a:picLocks noChangeAspect="1"/>
           </p:cNvPicPr>
           <p:nvPr/>
         </p:nvPicPr>
         <p:blipFill>
-          <a:blip r:embed="rId8"/>
+          <a:blip r:embed="rId6"/>
           <a:stretch>
             <a:fillRect/>
           </a:stretch>
@@ -9552,7 +8876,7 @@
           <a:bodyPr wrap="square" lIns="0" tIns="0" rIns="0" bIns="0" rtlCol="0" anchor="ctr"/>
           <a:lstStyle/>
           <a:p>
-            <a:pPr marL="0" indent="0">
+            <a:pPr indent="0" marL="0">
               <a:buNone/>
             </a:pPr>
             <a:r>
@@ -9591,7 +8915,7 @@
           <a:bodyPr wrap="square" lIns="0" tIns="0" rIns="0" bIns="0" rtlCol="0" anchor="ctr"/>
           <a:lstStyle/>
           <a:p>
-            <a:pPr marL="0" indent="0">
+            <a:pPr indent="0" marL="0">
               <a:buNone/>
             </a:pPr>
             <a:r>
@@ -9630,7 +8954,7 @@
           <a:bodyPr wrap="square" lIns="0" tIns="0" rIns="0" bIns="0" rtlCol="0" anchor="t"/>
           <a:lstStyle/>
           <a:p>
-            <a:pPr marL="0" indent="0">
+            <a:pPr indent="0" marL="0">
               <a:buNone/>
             </a:pPr>
             <a:r>
@@ -9674,20 +8998,13 @@
             <a:prstDash val="solid"/>
           </a:ln>
           <a:effectLst>
-            <a:outerShdw blurRad="76200" dist="25400" dir="5400000" algn="bl" rotWithShape="0">
+            <a:outerShdw sx="100000" sy="100000" kx="0" ky="0" algn="bl" rotWithShape="0" blurRad="76200" dist="25400" dir="5400000">
               <a:srgbClr val="000000">
                 <a:alpha val="12000"/>
               </a:srgbClr>
             </a:outerShdw>
           </a:effectLst>
         </p:spPr>
-        <p:txBody>
-          <a:bodyPr/>
-          <a:lstStyle/>
-          <a:p>
-            <a:endParaRPr lang="en-BR"/>
-          </a:p>
-        </p:txBody>
       </p:sp>
       <p:sp>
         <p:nvSpPr>
@@ -9713,24 +9030,17 @@
             <a:prstDash val="solid"/>
           </a:ln>
         </p:spPr>
-        <p:txBody>
-          <a:bodyPr/>
-          <a:lstStyle/>
-          <a:p>
-            <a:endParaRPr lang="en-BR"/>
-          </a:p>
-        </p:txBody>
       </p:sp>
       <p:pic>
         <p:nvPicPr>
-          <p:cNvPr id="39" name="Image 6" descr="preencoded.png"/>
+          <p:cNvPr id="39" name="Image 6" descr="preencoded.png">    </p:cNvPr>
           <p:cNvPicPr>
             <a:picLocks noChangeAspect="1"/>
           </p:cNvPicPr>
           <p:nvPr/>
         </p:nvPicPr>
         <p:blipFill>
-          <a:blip r:embed="rId9"/>
+          <a:blip r:embed="rId7"/>
           <a:stretch>
             <a:fillRect/>
           </a:stretch>
@@ -9766,7 +9076,7 @@
           <a:bodyPr wrap="square" lIns="0" tIns="0" rIns="0" bIns="0" rtlCol="0" anchor="ctr"/>
           <a:lstStyle/>
           <a:p>
-            <a:pPr marL="0" indent="0">
+            <a:pPr indent="0" marL="0">
               <a:buNone/>
             </a:pPr>
             <a:r>
@@ -9805,7 +9115,7 @@
           <a:bodyPr wrap="square" lIns="0" tIns="0" rIns="0" bIns="0" rtlCol="0" anchor="ctr"/>
           <a:lstStyle/>
           <a:p>
-            <a:pPr marL="0" indent="0">
+            <a:pPr indent="0" marL="0">
               <a:buNone/>
             </a:pPr>
             <a:r>
@@ -9844,7 +9154,7 @@
           <a:bodyPr wrap="square" lIns="0" tIns="0" rIns="0" bIns="0" rtlCol="0" anchor="t"/>
           <a:lstStyle/>
           <a:p>
-            <a:pPr marL="0" indent="0">
+            <a:pPr indent="0" marL="0">
               <a:buNone/>
             </a:pPr>
             <a:r>
@@ -9888,20 +9198,13 @@
             <a:prstDash val="solid"/>
           </a:ln>
           <a:effectLst>
-            <a:outerShdw blurRad="76200" dist="25400" dir="5400000" algn="bl" rotWithShape="0">
+            <a:outerShdw sx="100000" sy="100000" kx="0" ky="0" algn="bl" rotWithShape="0" blurRad="76200" dist="25400" dir="5400000">
               <a:srgbClr val="000000">
                 <a:alpha val="12000"/>
               </a:srgbClr>
             </a:outerShdw>
           </a:effectLst>
         </p:spPr>
-        <p:txBody>
-          <a:bodyPr/>
-          <a:lstStyle/>
-          <a:p>
-            <a:endParaRPr lang="en-BR"/>
-          </a:p>
-        </p:txBody>
       </p:sp>
       <p:sp>
         <p:nvSpPr>
@@ -9927,24 +9230,17 @@
             <a:prstDash val="solid"/>
           </a:ln>
         </p:spPr>
-        <p:txBody>
-          <a:bodyPr/>
-          <a:lstStyle/>
-          <a:p>
-            <a:endParaRPr lang="en-BR"/>
-          </a:p>
-        </p:txBody>
       </p:sp>
       <p:pic>
         <p:nvPicPr>
-          <p:cNvPr id="45" name="Image 7" descr="preencoded.png"/>
+          <p:cNvPr id="45" name="Image 7" descr="preencoded.png">    </p:cNvPr>
           <p:cNvPicPr>
             <a:picLocks noChangeAspect="1"/>
           </p:cNvPicPr>
           <p:nvPr/>
         </p:nvPicPr>
         <p:blipFill>
-          <a:blip r:embed="rId10"/>
+          <a:blip r:embed="rId8"/>
           <a:stretch>
             <a:fillRect/>
           </a:stretch>
@@ -9980,7 +9276,7 @@
           <a:bodyPr wrap="square" lIns="0" tIns="0" rIns="0" bIns="0" rtlCol="0" anchor="ctr"/>
           <a:lstStyle/>
           <a:p>
-            <a:pPr marL="0" indent="0">
+            <a:pPr indent="0" marL="0">
               <a:buNone/>
             </a:pPr>
             <a:r>
@@ -10019,7 +9315,7 @@
           <a:bodyPr wrap="square" lIns="0" tIns="0" rIns="0" bIns="0" rtlCol="0" anchor="t"/>
           <a:lstStyle/>
           <a:p>
-            <a:pPr marL="0" indent="0">
+            <a:pPr indent="0" marL="0">
               <a:buNone/>
             </a:pPr>
             <a:r>
@@ -10058,7 +9354,7 @@
           <a:bodyPr wrap="square" lIns="0" tIns="0" rIns="0" bIns="0" rtlCol="0" anchor="ctr"/>
           <a:lstStyle/>
           <a:p>
-            <a:pPr marL="0" indent="0">
+            <a:pPr indent="0" marL="0">
               <a:buNone/>
             </a:pPr>
             <a:r>
@@ -10097,7 +9393,7 @@
           <a:bodyPr wrap="square" lIns="0" tIns="0" rIns="0" bIns="0" rtlCol="0" anchor="ctr"/>
           <a:lstStyle/>
           <a:p>
-            <a:pPr marL="0" indent="0" algn="r">
+            <a:pPr algn="r" indent="0" marL="0">
               <a:buNone/>
             </a:pPr>
             <a:r>
@@ -10161,7 +9457,7 @@
           <a:bodyPr wrap="square" lIns="0" tIns="0" rIns="0" bIns="0" rtlCol="0" anchor="t"/>
           <a:lstStyle/>
           <a:p>
-            <a:pPr marL="0" indent="0">
+            <a:pPr indent="0" marL="0">
               <a:buNone/>
             </a:pPr>
             <a:r>
@@ -10203,24 +9499,17 @@
             <a:prstDash val="solid"/>
           </a:ln>
         </p:spPr>
-        <p:txBody>
-          <a:bodyPr/>
-          <a:lstStyle/>
-          <a:p>
-            <a:endParaRPr lang="en-BR"/>
-          </a:p>
-        </p:txBody>
       </p:sp>
       <p:pic>
         <p:nvPicPr>
-          <p:cNvPr id="4" name="Image 0" descr="preencoded.png"/>
+          <p:cNvPr id="4" name="Image 0" descr="preencoded.png">    </p:cNvPr>
           <p:cNvPicPr>
             <a:picLocks noChangeAspect="1"/>
           </p:cNvPicPr>
           <p:nvPr/>
         </p:nvPicPr>
         <p:blipFill>
-          <a:blip r:embed="rId3"/>
+          <a:blip r:embed="rId1"/>
           <a:stretch>
             <a:fillRect/>
           </a:stretch>
@@ -10256,7 +9545,7 @@
           <a:bodyPr wrap="square" lIns="0" tIns="0" rIns="0" bIns="0" rtlCol="0" anchor="ctr"/>
           <a:lstStyle/>
           <a:p>
-            <a:pPr marL="0" indent="0">
+            <a:pPr indent="0" marL="0">
               <a:buNone/>
             </a:pPr>
             <a:r>
@@ -10273,7 +9562,7 @@
             <a:endParaRPr lang="en-US" sz="1700" dirty="0"/>
           </a:p>
           <a:p>
-            <a:pPr marL="0" indent="0">
+            <a:pPr indent="0" marL="0">
               <a:buNone/>
             </a:pPr>
             <a:r>
@@ -10315,24 +9604,17 @@
             <a:prstDash val="solid"/>
           </a:ln>
         </p:spPr>
-        <p:txBody>
-          <a:bodyPr/>
-          <a:lstStyle/>
-          <a:p>
-            <a:endParaRPr lang="en-BR"/>
-          </a:p>
-        </p:txBody>
       </p:sp>
       <p:pic>
         <p:nvPicPr>
-          <p:cNvPr id="7" name="Image 1" descr="preencoded.png"/>
+          <p:cNvPr id="7" name="Image 1" descr="preencoded.png">    </p:cNvPr>
           <p:cNvPicPr>
             <a:picLocks noChangeAspect="1"/>
           </p:cNvPicPr>
           <p:nvPr/>
         </p:nvPicPr>
         <p:blipFill>
-          <a:blip r:embed="rId4"/>
+          <a:blip r:embed="rId2"/>
           <a:stretch>
             <a:fillRect/>
           </a:stretch>
@@ -10368,7 +9650,7 @@
           <a:bodyPr wrap="square" lIns="0" tIns="0" rIns="0" bIns="0" rtlCol="0" anchor="ctr"/>
           <a:lstStyle/>
           <a:p>
-            <a:pPr marL="0" indent="0">
+            <a:pPr indent="0" marL="0">
               <a:buNone/>
             </a:pPr>
             <a:r>
@@ -10385,7 +9667,7 @@
             <a:endParaRPr lang="en-US" sz="1700" dirty="0"/>
           </a:p>
           <a:p>
-            <a:pPr marL="0" indent="0">
+            <a:pPr indent="0" marL="0">
               <a:buNone/>
             </a:pPr>
             <a:r>
@@ -10427,24 +9709,17 @@
             <a:prstDash val="solid"/>
           </a:ln>
         </p:spPr>
-        <p:txBody>
-          <a:bodyPr/>
-          <a:lstStyle/>
-          <a:p>
-            <a:endParaRPr lang="en-BR"/>
-          </a:p>
-        </p:txBody>
       </p:sp>
       <p:pic>
         <p:nvPicPr>
-          <p:cNvPr id="10" name="Image 2" descr="preencoded.png"/>
+          <p:cNvPr id="10" name="Image 2" descr="preencoded.png">    </p:cNvPr>
           <p:cNvPicPr>
             <a:picLocks noChangeAspect="1"/>
           </p:cNvPicPr>
           <p:nvPr/>
         </p:nvPicPr>
         <p:blipFill>
-          <a:blip r:embed="rId5"/>
+          <a:blip r:embed="rId3"/>
           <a:stretch>
             <a:fillRect/>
           </a:stretch>
@@ -10480,7 +9755,7 @@
           <a:bodyPr wrap="square" lIns="0" tIns="0" rIns="0" bIns="0" rtlCol="0" anchor="ctr"/>
           <a:lstStyle/>
           <a:p>
-            <a:pPr marL="0" indent="0">
+            <a:pPr indent="0" marL="0">
               <a:buNone/>
             </a:pPr>
             <a:r>
@@ -10497,7 +9772,7 @@
             <a:endParaRPr lang="en-US" sz="1700" dirty="0"/>
           </a:p>
           <a:p>
-            <a:pPr marL="0" indent="0">
+            <a:pPr indent="0" marL="0">
               <a:buNone/>
             </a:pPr>
             <a:r>
@@ -10539,24 +9814,17 @@
             <a:prstDash val="solid"/>
           </a:ln>
         </p:spPr>
-        <p:txBody>
-          <a:bodyPr/>
-          <a:lstStyle/>
-          <a:p>
-            <a:endParaRPr lang="en-BR"/>
-          </a:p>
-        </p:txBody>
       </p:sp>
       <p:pic>
         <p:nvPicPr>
-          <p:cNvPr id="13" name="Image 3" descr="preencoded.png"/>
+          <p:cNvPr id="13" name="Image 3" descr="preencoded.png">    </p:cNvPr>
           <p:cNvPicPr>
             <a:picLocks noChangeAspect="1"/>
           </p:cNvPicPr>
           <p:nvPr/>
         </p:nvPicPr>
         <p:blipFill>
-          <a:blip r:embed="rId6"/>
+          <a:blip r:embed="rId4"/>
           <a:stretch>
             <a:fillRect/>
           </a:stretch>
@@ -10592,7 +9860,7 @@
           <a:bodyPr wrap="square" lIns="0" tIns="0" rIns="0" bIns="0" rtlCol="0" anchor="ctr"/>
           <a:lstStyle/>
           <a:p>
-            <a:pPr marL="0" indent="0">
+            <a:pPr indent="0" marL="0">
               <a:buNone/>
             </a:pPr>
             <a:r>
@@ -10609,7 +9877,7 @@
             <a:endParaRPr lang="en-US" sz="1700" dirty="0"/>
           </a:p>
           <a:p>
-            <a:pPr marL="0" indent="0">
+            <a:pPr indent="0" marL="0">
               <a:buNone/>
             </a:pPr>
             <a:r>
@@ -10651,24 +9919,17 @@
             <a:prstDash val="solid"/>
           </a:ln>
         </p:spPr>
-        <p:txBody>
-          <a:bodyPr/>
-          <a:lstStyle/>
-          <a:p>
-            <a:endParaRPr lang="en-BR"/>
-          </a:p>
-        </p:txBody>
       </p:sp>
       <p:pic>
         <p:nvPicPr>
-          <p:cNvPr id="16" name="Image 4" descr="preencoded.png"/>
+          <p:cNvPr id="16" name="Image 4" descr="preencoded.png">    </p:cNvPr>
           <p:cNvPicPr>
             <a:picLocks noChangeAspect="1"/>
           </p:cNvPicPr>
           <p:nvPr/>
         </p:nvPicPr>
         <p:blipFill>
-          <a:blip r:embed="rId7"/>
+          <a:blip r:embed="rId5"/>
           <a:stretch>
             <a:fillRect/>
           </a:stretch>
@@ -10704,7 +9965,7 @@
           <a:bodyPr wrap="square" lIns="0" tIns="0" rIns="0" bIns="0" rtlCol="0" anchor="ctr"/>
           <a:lstStyle/>
           <a:p>
-            <a:pPr marL="0" indent="0">
+            <a:pPr indent="0" marL="0">
               <a:buNone/>
             </a:pPr>
             <a:r>
@@ -10721,7 +9982,7 @@
             <a:endParaRPr lang="en-US" sz="1700" dirty="0"/>
           </a:p>
           <a:p>
-            <a:pPr marL="0" indent="0">
+            <a:pPr indent="0" marL="0">
               <a:buNone/>
             </a:pPr>
             <a:r>
@@ -10765,20 +10026,13 @@
             <a:prstDash val="solid"/>
           </a:ln>
           <a:effectLst>
-            <a:outerShdw blurRad="76200" dist="25400" dir="5400000" algn="bl" rotWithShape="0">
+            <a:outerShdw sx="100000" sy="100000" kx="0" ky="0" algn="bl" rotWithShape="0" blurRad="76200" dist="25400" dir="5400000">
               <a:srgbClr val="000000">
                 <a:alpha val="12000"/>
               </a:srgbClr>
             </a:outerShdw>
           </a:effectLst>
         </p:spPr>
-        <p:txBody>
-          <a:bodyPr/>
-          <a:lstStyle/>
-          <a:p>
-            <a:endParaRPr lang="en-BR"/>
-          </a:p>
-        </p:txBody>
       </p:sp>
       <p:sp>
         <p:nvSpPr>
@@ -10801,7 +10055,7 @@
           <a:bodyPr wrap="square" lIns="0" tIns="0" rIns="0" bIns="0" rtlCol="0" anchor="t"/>
           <a:lstStyle/>
           <a:p>
-            <a:pPr marL="0" indent="0">
+            <a:pPr indent="0" marL="0">
               <a:buNone/>
             </a:pPr>
             <a:r>
@@ -10818,7 +10072,7 @@
             <a:endParaRPr lang="en-US" sz="1400" dirty="0"/>
           </a:p>
           <a:p>
-            <a:pPr marL="0" indent="0">
+            <a:pPr indent="0" marL="0">
               <a:buNone/>
             </a:pPr>
             <a:r>
@@ -10835,7 +10089,7 @@
             <a:endParaRPr lang="en-US" sz="1400" dirty="0"/>
           </a:p>
           <a:p>
-            <a:pPr marL="0" indent="0">
+            <a:pPr indent="0" marL="0">
               <a:buNone/>
             </a:pPr>
             <a:r>
@@ -10852,7 +10106,7 @@
             <a:endParaRPr lang="en-US" sz="1400" dirty="0"/>
           </a:p>
           <a:p>
-            <a:pPr marL="0" indent="0">
+            <a:pPr indent="0" marL="0">
               <a:buNone/>
             </a:pPr>
             <a:r>
@@ -10891,7 +10145,7 @@
           <a:bodyPr wrap="square" lIns="0" tIns="0" rIns="0" bIns="0" rtlCol="0" anchor="ctr"/>
           <a:lstStyle/>
           <a:p>
-            <a:pPr marL="0" indent="0">
+            <a:pPr indent="0" marL="0">
               <a:buNone/>
             </a:pPr>
             <a:r>
@@ -10930,7 +10184,7 @@
           <a:bodyPr wrap="square" lIns="0" tIns="0" rIns="0" bIns="0" rtlCol="0" anchor="ctr"/>
           <a:lstStyle/>
           <a:p>
-            <a:pPr marL="0" indent="0" algn="r">
+            <a:pPr algn="r" indent="0" marL="0">
               <a:buNone/>
             </a:pPr>
             <a:r>
@@ -10994,7 +10248,7 @@
           <a:bodyPr wrap="square" lIns="0" tIns="0" rIns="0" bIns="0" rtlCol="0" anchor="t"/>
           <a:lstStyle/>
           <a:p>
-            <a:pPr marL="0" indent="0">
+            <a:pPr indent="0" marL="0">
               <a:buNone/>
             </a:pPr>
             <a:r>
@@ -11036,13 +10290,6 @@
             <a:prstDash val="solid"/>
           </a:ln>
         </p:spPr>
-        <p:txBody>
-          <a:bodyPr/>
-          <a:lstStyle/>
-          <a:p>
-            <a:endParaRPr lang="en-BR"/>
-          </a:p>
-        </p:txBody>
       </p:sp>
       <p:sp>
         <p:nvSpPr>
@@ -11065,7 +10312,7 @@
           <a:bodyPr wrap="square" lIns="0" tIns="0" rIns="0" bIns="0" rtlCol="0" anchor="ctr"/>
           <a:lstStyle/>
           <a:p>
-            <a:pPr marL="0" indent="0" algn="ctr">
+            <a:pPr algn="ctr" indent="0" marL="0">
               <a:buNone/>
             </a:pPr>
             <a:r>
@@ -11106,13 +10353,6 @@
             <a:tailEnd type="triangle"/>
           </a:ln>
         </p:spPr>
-        <p:txBody>
-          <a:bodyPr/>
-          <a:lstStyle/>
-          <a:p>
-            <a:endParaRPr lang="en-BR"/>
-          </a:p>
-        </p:txBody>
       </p:sp>
       <p:sp>
         <p:nvSpPr>
@@ -11135,7 +10375,7 @@
           <a:bodyPr wrap="square" lIns="0" tIns="0" rIns="0" bIns="0" rtlCol="0" anchor="ctr"/>
           <a:lstStyle/>
           <a:p>
-            <a:pPr marL="0" indent="0" algn="ctr">
+            <a:pPr algn="ctr" indent="0" marL="0">
               <a:buNone/>
             </a:pPr>
             <a:r>
@@ -11174,7 +10414,7 @@
           <a:bodyPr wrap="square" lIns="0" tIns="0" rIns="0" bIns="0" rtlCol="0" anchor="t"/>
           <a:lstStyle/>
           <a:p>
-            <a:pPr marL="0" indent="0" algn="ctr">
+            <a:pPr algn="ctr" indent="0" marL="0">
               <a:buNone/>
             </a:pPr>
             <a:r>
@@ -11216,13 +10456,6 @@
             <a:prstDash val="solid"/>
           </a:ln>
         </p:spPr>
-        <p:txBody>
-          <a:bodyPr/>
-          <a:lstStyle/>
-          <a:p>
-            <a:endParaRPr lang="en-BR"/>
-          </a:p>
-        </p:txBody>
       </p:sp>
       <p:sp>
         <p:nvSpPr>
@@ -11245,7 +10478,7 @@
           <a:bodyPr wrap="square" lIns="0" tIns="0" rIns="0" bIns="0" rtlCol="0" anchor="ctr"/>
           <a:lstStyle/>
           <a:p>
-            <a:pPr marL="0" indent="0" algn="ctr">
+            <a:pPr algn="ctr" indent="0" marL="0">
               <a:buNone/>
             </a:pPr>
             <a:r>
@@ -11286,13 +10519,6 @@
             <a:tailEnd type="triangle"/>
           </a:ln>
         </p:spPr>
-        <p:txBody>
-          <a:bodyPr/>
-          <a:lstStyle/>
-          <a:p>
-            <a:endParaRPr lang="en-BR"/>
-          </a:p>
-        </p:txBody>
       </p:sp>
       <p:sp>
         <p:nvSpPr>
@@ -11315,7 +10541,7 @@
           <a:bodyPr wrap="square" lIns="0" tIns="0" rIns="0" bIns="0" rtlCol="0" anchor="ctr"/>
           <a:lstStyle/>
           <a:p>
-            <a:pPr marL="0" indent="0" algn="ctr">
+            <a:pPr algn="ctr" indent="0" marL="0">
               <a:buNone/>
             </a:pPr>
             <a:r>
@@ -11354,7 +10580,7 @@
           <a:bodyPr wrap="square" lIns="0" tIns="0" rIns="0" bIns="0" rtlCol="0" anchor="t"/>
           <a:lstStyle/>
           <a:p>
-            <a:pPr marL="0" indent="0" algn="ctr">
+            <a:pPr algn="ctr" indent="0" marL="0">
               <a:buNone/>
             </a:pPr>
             <a:r>
@@ -11396,13 +10622,6 @@
             <a:prstDash val="solid"/>
           </a:ln>
         </p:spPr>
-        <p:txBody>
-          <a:bodyPr/>
-          <a:lstStyle/>
-          <a:p>
-            <a:endParaRPr lang="en-BR"/>
-          </a:p>
-        </p:txBody>
       </p:sp>
       <p:sp>
         <p:nvSpPr>
@@ -11425,7 +10644,7 @@
           <a:bodyPr wrap="square" lIns="0" tIns="0" rIns="0" bIns="0" rtlCol="0" anchor="ctr"/>
           <a:lstStyle/>
           <a:p>
-            <a:pPr marL="0" indent="0" algn="ctr">
+            <a:pPr algn="ctr" indent="0" marL="0">
               <a:buNone/>
             </a:pPr>
             <a:r>
@@ -11466,13 +10685,6 @@
             <a:tailEnd type="triangle"/>
           </a:ln>
         </p:spPr>
-        <p:txBody>
-          <a:bodyPr/>
-          <a:lstStyle/>
-          <a:p>
-            <a:endParaRPr lang="en-BR"/>
-          </a:p>
-        </p:txBody>
       </p:sp>
       <p:sp>
         <p:nvSpPr>
@@ -11495,7 +10707,7 @@
           <a:bodyPr wrap="square" lIns="0" tIns="0" rIns="0" bIns="0" rtlCol="0" anchor="ctr"/>
           <a:lstStyle/>
           <a:p>
-            <a:pPr marL="0" indent="0" algn="ctr">
+            <a:pPr algn="ctr" indent="0" marL="0">
               <a:buNone/>
             </a:pPr>
             <a:r>
@@ -11534,7 +10746,7 @@
           <a:bodyPr wrap="square" lIns="0" tIns="0" rIns="0" bIns="0" rtlCol="0" anchor="t"/>
           <a:lstStyle/>
           <a:p>
-            <a:pPr marL="0" indent="0" algn="ctr">
+            <a:pPr algn="ctr" indent="0" marL="0">
               <a:buNone/>
             </a:pPr>
             <a:r>
@@ -11576,13 +10788,6 @@
             <a:prstDash val="solid"/>
           </a:ln>
         </p:spPr>
-        <p:txBody>
-          <a:bodyPr/>
-          <a:lstStyle/>
-          <a:p>
-            <a:endParaRPr lang="en-BR"/>
-          </a:p>
-        </p:txBody>
       </p:sp>
       <p:sp>
         <p:nvSpPr>
@@ -11605,7 +10810,7 @@
           <a:bodyPr wrap="square" lIns="0" tIns="0" rIns="0" bIns="0" rtlCol="0" anchor="ctr"/>
           <a:lstStyle/>
           <a:p>
-            <a:pPr marL="0" indent="0" algn="ctr">
+            <a:pPr algn="ctr" indent="0" marL="0">
               <a:buNone/>
             </a:pPr>
             <a:r>
@@ -11646,13 +10851,6 @@
             <a:tailEnd type="triangle"/>
           </a:ln>
         </p:spPr>
-        <p:txBody>
-          <a:bodyPr/>
-          <a:lstStyle/>
-          <a:p>
-            <a:endParaRPr lang="en-BR"/>
-          </a:p>
-        </p:txBody>
       </p:sp>
       <p:sp>
         <p:nvSpPr>
@@ -11675,7 +10873,7 @@
           <a:bodyPr wrap="square" lIns="0" tIns="0" rIns="0" bIns="0" rtlCol="0" anchor="ctr"/>
           <a:lstStyle/>
           <a:p>
-            <a:pPr marL="0" indent="0" algn="ctr">
+            <a:pPr algn="ctr" indent="0" marL="0">
               <a:buNone/>
             </a:pPr>
             <a:r>
@@ -11714,7 +10912,7 @@
           <a:bodyPr wrap="square" lIns="0" tIns="0" rIns="0" bIns="0" rtlCol="0" anchor="t"/>
           <a:lstStyle/>
           <a:p>
-            <a:pPr marL="0" indent="0" algn="ctr">
+            <a:pPr algn="ctr" indent="0" marL="0">
               <a:buNone/>
             </a:pPr>
             <a:r>
@@ -11756,13 +10954,6 @@
             <a:prstDash val="solid"/>
           </a:ln>
         </p:spPr>
-        <p:txBody>
-          <a:bodyPr/>
-          <a:lstStyle/>
-          <a:p>
-            <a:endParaRPr lang="en-BR"/>
-          </a:p>
-        </p:txBody>
       </p:sp>
       <p:sp>
         <p:nvSpPr>
@@ -11785,7 +10976,7 @@
           <a:bodyPr wrap="square" lIns="0" tIns="0" rIns="0" bIns="0" rtlCol="0" anchor="ctr"/>
           <a:lstStyle/>
           <a:p>
-            <a:pPr marL="0" indent="0" algn="ctr">
+            <a:pPr algn="ctr" indent="0" marL="0">
               <a:buNone/>
             </a:pPr>
             <a:r>
@@ -11824,7 +11015,7 @@
           <a:bodyPr wrap="square" lIns="0" tIns="0" rIns="0" bIns="0" rtlCol="0" anchor="ctr"/>
           <a:lstStyle/>
           <a:p>
-            <a:pPr marL="0" indent="0" algn="ctr">
+            <a:pPr algn="ctr" indent="0" marL="0">
               <a:buNone/>
             </a:pPr>
             <a:r>
@@ -11863,7 +11054,7 @@
           <a:bodyPr wrap="square" lIns="0" tIns="0" rIns="0" bIns="0" rtlCol="0" anchor="t"/>
           <a:lstStyle/>
           <a:p>
-            <a:pPr marL="0" indent="0" algn="ctr">
+            <a:pPr algn="ctr" indent="0" marL="0">
               <a:buNone/>
             </a:pPr>
             <a:r>
@@ -11907,20 +11098,13 @@
             <a:prstDash val="solid"/>
           </a:ln>
           <a:effectLst>
-            <a:outerShdw blurRad="76200" dist="25400" dir="5400000" algn="bl" rotWithShape="0">
+            <a:outerShdw sx="100000" sy="100000" kx="0" ky="0" algn="bl" rotWithShape="0" blurRad="76200" dist="25400" dir="5400000">
               <a:srgbClr val="000000">
                 <a:alpha val="12000"/>
               </a:srgbClr>
             </a:outerShdw>
           </a:effectLst>
         </p:spPr>
-        <p:txBody>
-          <a:bodyPr/>
-          <a:lstStyle/>
-          <a:p>
-            <a:endParaRPr lang="en-BR"/>
-          </a:p>
-        </p:txBody>
       </p:sp>
       <p:sp>
         <p:nvSpPr>
@@ -11946,24 +11130,17 @@
             <a:prstDash val="solid"/>
           </a:ln>
         </p:spPr>
-        <p:txBody>
-          <a:bodyPr/>
-          <a:lstStyle/>
-          <a:p>
-            <a:endParaRPr lang="en-BR"/>
-          </a:p>
-        </p:txBody>
       </p:sp>
       <p:pic>
         <p:nvPicPr>
-          <p:cNvPr id="29" name="Image 0" descr="preencoded.png"/>
+          <p:cNvPr id="29" name="Image 0" descr="preencoded.png">    </p:cNvPr>
           <p:cNvPicPr>
             <a:picLocks noChangeAspect="1"/>
           </p:cNvPicPr>
           <p:nvPr/>
         </p:nvPicPr>
         <p:blipFill>
-          <a:blip r:embed="rId3"/>
+          <a:blip r:embed="rId1"/>
           <a:stretch>
             <a:fillRect/>
           </a:stretch>
@@ -11999,7 +11176,7 @@
           <a:bodyPr wrap="square" lIns="0" tIns="0" rIns="0" bIns="0" rtlCol="0" anchor="ctr"/>
           <a:lstStyle/>
           <a:p>
-            <a:pPr marL="0" indent="0">
+            <a:pPr indent="0" marL="0">
               <a:buNone/>
             </a:pPr>
             <a:r>
@@ -12013,6 +11190,9 @@
               </a:rPr>
               <a:t>Modo apresentação: </a:t>
             </a:r>
+            <a:pPr indent="0" marL="0">
+              <a:buNone/>
+            </a:pPr>
             <a:r>
               <a:rPr lang="en-US" sz="1500" dirty="0">
                 <a:solidFill>
@@ -12049,7 +11229,7 @@
           <a:bodyPr wrap="square" lIns="0" tIns="0" rIns="0" bIns="0" rtlCol="0" anchor="ctr"/>
           <a:lstStyle/>
           <a:p>
-            <a:pPr marL="0" indent="0">
+            <a:pPr indent="0" marL="0">
               <a:buNone/>
             </a:pPr>
             <a:r>
@@ -12088,7 +11268,7 @@
           <a:bodyPr wrap="square" lIns="0" tIns="0" rIns="0" bIns="0" rtlCol="0" anchor="ctr"/>
           <a:lstStyle/>
           <a:p>
-            <a:pPr marL="0" indent="0" algn="r">
+            <a:pPr algn="r" indent="0" marL="0">
               <a:buNone/>
             </a:pPr>
             <a:r>
@@ -12152,7 +11332,7 @@
           <a:bodyPr wrap="square" lIns="0" tIns="0" rIns="0" bIns="0" rtlCol="0" anchor="t"/>
           <a:lstStyle/>
           <a:p>
-            <a:pPr marL="0" indent="0">
+            <a:pPr indent="0" marL="0">
               <a:buNone/>
             </a:pPr>
             <a:r>
@@ -12172,7 +11352,7 @@
       </p:sp>
       <p:graphicFrame>
         <p:nvGraphicFramePr>
-          <p:cNvPr id="3" name="Chart 0"/>
+          <p:cNvPr id="3" name="Chart 0" descr=""/>
           <p:cNvGraphicFramePr/>
           <p:nvPr/>
         </p:nvGraphicFramePr>
@@ -12180,9 +11360,9 @@
           <a:off x="548640" y="1325880"/>
           <a:ext cx="6949440" cy="4663440"/>
         </p:xfrm>
-        <a:graphic>
+        <a:graphic xmlns:a="http://schemas.openxmlformats.org/drawingml/2006/main">
           <a:graphicData uri="http://schemas.openxmlformats.org/drawingml/2006/chart">
-            <c:chart xmlns:c="http://schemas.openxmlformats.org/drawingml/2006/chart" xmlns:r="http://schemas.openxmlformats.org/officeDocument/2006/relationships" r:id="rId3"/>
+            <c:chart xmlns:c="http://schemas.openxmlformats.org/drawingml/2006/chart" r:id="rId1"/>
           </a:graphicData>
         </a:graphic>
       </p:graphicFrame>
@@ -12212,20 +11392,13 @@
             <a:prstDash val="solid"/>
           </a:ln>
           <a:effectLst>
-            <a:outerShdw blurRad="76200" dist="25400" dir="5400000" algn="bl" rotWithShape="0">
+            <a:outerShdw sx="100000" sy="100000" kx="0" ky="0" algn="bl" rotWithShape="0" blurRad="76200" dist="25400" dir="5400000">
               <a:srgbClr val="000000">
                 <a:alpha val="12000"/>
               </a:srgbClr>
             </a:outerShdw>
           </a:effectLst>
         </p:spPr>
-        <p:txBody>
-          <a:bodyPr/>
-          <a:lstStyle/>
-          <a:p>
-            <a:endParaRPr lang="en-BR"/>
-          </a:p>
-        </p:txBody>
       </p:sp>
       <p:sp>
         <p:nvSpPr>
@@ -12248,7 +11421,7 @@
           <a:bodyPr wrap="square" lIns="0" tIns="0" rIns="0" bIns="0" rtlCol="0" anchor="ctr"/>
           <a:lstStyle/>
           <a:p>
-            <a:pPr marL="0" indent="0">
+            <a:pPr indent="0" marL="0">
               <a:buNone/>
             </a:pPr>
             <a:r>
@@ -12260,12 +11433,12 @@
                 <a:ea typeface="Cambria" pitchFamily="34" charset="-122"/>
                 <a:cs typeface="Cambria" pitchFamily="34" charset="-120"/>
               </a:rPr>
-              <a:t>12/12 · 11/11</a:t>
+              <a:t>0,77 · pior 0,70</a:t>
             </a:r>
             <a:endParaRPr lang="en-US" sz="2600" dirty="0"/>
           </a:p>
           <a:p>
-            <a:pPr marL="0" indent="0">
+            <a:pPr indent="0" marL="0">
               <a:buNone/>
             </a:pPr>
             <a:r>
@@ -12277,7 +11450,7 @@
                 <a:ea typeface="Calibri" pitchFamily="34" charset="-122"/>
                 <a:cs typeface="Calibri" pitchFamily="34" charset="-120"/>
               </a:rPr>
-              <a:t>campos anotados extraídos corretamente (Chubb · Sompo)</a:t>
+              <a:t>comparação no gabarito original v1.0 (meta 0,90 ainda não atingida)</a:t>
             </a:r>
             <a:endParaRPr lang="en-US" sz="2600" dirty="0"/>
           </a:p>
@@ -12309,20 +11482,13 @@
             <a:prstDash val="solid"/>
           </a:ln>
           <a:effectLst>
-            <a:outerShdw blurRad="76200" dist="25400" dir="5400000" algn="bl" rotWithShape="0">
+            <a:outerShdw sx="100000" sy="100000" kx="0" ky="0" algn="bl" rotWithShape="0" blurRad="76200" dist="25400" dir="5400000">
               <a:srgbClr val="000000">
                 <a:alpha val="12000"/>
               </a:srgbClr>
             </a:outerShdw>
           </a:effectLst>
         </p:spPr>
-        <p:txBody>
-          <a:bodyPr/>
-          <a:lstStyle/>
-          <a:p>
-            <a:endParaRPr lang="en-BR"/>
-          </a:p>
-        </p:txBody>
       </p:sp>
       <p:sp>
         <p:nvSpPr>
@@ -12345,7 +11511,7 @@
           <a:bodyPr wrap="square" lIns="0" tIns="0" rIns="0" bIns="0" rtlCol="0" anchor="ctr"/>
           <a:lstStyle/>
           <a:p>
-            <a:pPr marL="0" indent="0">
+            <a:pPr indent="0" marL="0">
               <a:buNone/>
             </a:pPr>
             <a:r>
@@ -12357,12 +11523,12 @@
                 <a:ea typeface="Cambria" pitchFamily="34" charset="-122"/>
                 <a:cs typeface="Cambria" pitchFamily="34" charset="-120"/>
               </a:rPr>
-              <a:t>6/6 · 5/5</a:t>
+              <a:t>98–100%</a:t>
             </a:r>
             <a:endParaRPr lang="en-US" sz="2600" dirty="0"/>
           </a:p>
           <a:p>
-            <a:pPr marL="0" indent="0">
+            <a:pPr indent="0" marL="0">
               <a:buNone/>
             </a:pPr>
             <a:r>
@@ -12374,7 +11540,7 @@
                 <a:ea typeface="Calibri" pitchFamily="34" charset="-122"/>
                 <a:cs typeface="Calibri" pitchFamily="34" charset="-120"/>
               </a:rPr>
-              <a:t>evidências citando a página anotada pelo especialista</a:t>
+              <a:t>trechos de evidência conferidos no texto da página citada</a:t>
             </a:r>
             <a:endParaRPr lang="en-US" sz="2600" dirty="0"/>
           </a:p>
@@ -12406,20 +11572,13 @@
             <a:prstDash val="solid"/>
           </a:ln>
           <a:effectLst>
-            <a:outerShdw blurRad="76200" dist="25400" dir="5400000" algn="bl" rotWithShape="0">
+            <a:outerShdw sx="100000" sy="100000" kx="0" ky="0" algn="bl" rotWithShape="0" blurRad="76200" dist="25400" dir="5400000">
               <a:srgbClr val="000000">
                 <a:alpha val="12000"/>
               </a:srgbClr>
             </a:outerShdw>
           </a:effectLst>
         </p:spPr>
-        <p:txBody>
-          <a:bodyPr/>
-          <a:lstStyle/>
-          <a:p>
-            <a:endParaRPr lang="en-BR"/>
-          </a:p>
-        </p:txBody>
       </p:sp>
       <p:sp>
         <p:nvSpPr>
@@ -12442,7 +11601,7 @@
           <a:bodyPr wrap="square" lIns="0" tIns="0" rIns="0" bIns="0" rtlCol="0" anchor="ctr"/>
           <a:lstStyle/>
           <a:p>
-            <a:pPr marL="0" indent="0">
+            <a:pPr indent="0" marL="0">
               <a:buNone/>
             </a:pPr>
             <a:r>
@@ -12454,12 +11613,12 @@
                 <a:ea typeface="Cambria" pitchFamily="34" charset="-122"/>
                 <a:cs typeface="Cambria" pitchFamily="34" charset="-120"/>
               </a:rPr>
-              <a:t>0,80 → 1,00</a:t>
+              <a:t>0 de 20</a:t>
             </a:r>
             <a:endParaRPr lang="en-US" sz="2600" dirty="0"/>
           </a:p>
           <a:p>
-            <a:pPr marL="0" indent="0">
+            <a:pPr indent="0" marL="0">
               <a:buNone/>
             </a:pPr>
             <a:r>
@@ -12471,7 +11630,7 @@
                 <a:ea typeface="Calibri" pitchFamily="34" charset="-122"/>
                 <a:cs typeface="Calibri" pitchFamily="34" charset="-120"/>
               </a:rPr>
-              <a:t>comparação: divergências da v1.0 confirmadas no texto e revisadas na v1.1</a:t>
+              <a:t>frases de veredito que passam pelo guardrail (eram 20 de 20)</a:t>
             </a:r>
             <a:endParaRPr lang="en-US" sz="2600" dirty="0"/>
           </a:p>
@@ -12498,7 +11657,7 @@
           <a:bodyPr wrap="square" lIns="0" tIns="0" rIns="0" bIns="0" rtlCol="0" anchor="ctr"/>
           <a:lstStyle/>
           <a:p>
-            <a:pPr marL="0" indent="0">
+            <a:pPr indent="0" marL="0">
               <a:buNone/>
             </a:pPr>
             <a:r>
@@ -12510,7 +11669,7 @@
                 <a:ea typeface="Calibri" pitchFamily="34" charset="-122"/>
                 <a:cs typeface="Calibri" pitchFamily="34" charset="-120"/>
               </a:rPr>
-              <a:t>Amostra pequena (2 documentos, 10 itens de comparação); as duas versões do gabarito são reportadas.</a:t>
+              <a:t>Amostra pequena (2 documentos, 10 itens, 5 discriminantes). Média e pior caso de 3 runs, não o melhor run. v1.1 revisada após ver a saída.</a:t>
             </a:r>
             <a:endParaRPr lang="en-US" sz="1100" dirty="0"/>
           </a:p>
@@ -12537,7 +11696,7 @@
           <a:bodyPr wrap="square" lIns="0" tIns="0" rIns="0" bIns="0" rtlCol="0" anchor="ctr"/>
           <a:lstStyle/>
           <a:p>
-            <a:pPr marL="0" indent="0">
+            <a:pPr indent="0" marL="0">
               <a:buNone/>
             </a:pPr>
             <a:r>
@@ -12576,7 +11735,7 @@
           <a:bodyPr wrap="square" lIns="0" tIns="0" rIns="0" bIns="0" rtlCol="0" anchor="ctr"/>
           <a:lstStyle/>
           <a:p>
-            <a:pPr marL="0" indent="0" algn="r">
+            <a:pPr algn="r" indent="0" marL="0">
               <a:buNone/>
             </a:pPr>
             <a:r>
@@ -12640,7 +11799,7 @@
           <a:bodyPr wrap="square" lIns="0" tIns="0" rIns="0" bIns="0" rtlCol="0" anchor="t"/>
           <a:lstStyle/>
           <a:p>
-            <a:pPr marL="0" indent="0">
+            <a:pPr indent="0" marL="0">
               <a:buNone/>
             </a:pPr>
             <a:r>
@@ -12679,7 +11838,7 @@
           <a:bodyPr wrap="square" lIns="0" tIns="0" rIns="0" bIns="0" rtlCol="0" anchor="ctr"/>
           <a:lstStyle/>
           <a:p>
-            <a:pPr marL="0" indent="0">
+            <a:pPr indent="0" marL="0">
               <a:buNone/>
             </a:pPr>
             <a:r>
@@ -12723,20 +11882,13 @@
             <a:prstDash val="solid"/>
           </a:ln>
           <a:effectLst>
-            <a:outerShdw blurRad="76200" dist="25400" dir="5400000" algn="bl" rotWithShape="0">
+            <a:outerShdw sx="100000" sy="100000" kx="0" ky="0" algn="bl" rotWithShape="0" blurRad="76200" dist="25400" dir="5400000">
               <a:srgbClr val="000000">
                 <a:alpha val="12000"/>
               </a:srgbClr>
             </a:outerShdw>
           </a:effectLst>
         </p:spPr>
-        <p:txBody>
-          <a:bodyPr/>
-          <a:lstStyle/>
-          <a:p>
-            <a:endParaRPr lang="en-BR"/>
-          </a:p>
-        </p:txBody>
       </p:sp>
       <p:sp>
         <p:nvSpPr>
@@ -12759,7 +11911,7 @@
           <a:bodyPr wrap="square" lIns="0" tIns="0" rIns="0" bIns="0" rtlCol="0" anchor="ctr"/>
           <a:lstStyle/>
           <a:p>
-            <a:pPr marL="0" indent="0">
+            <a:pPr indent="0" marL="0">
               <a:buNone/>
             </a:pPr>
             <a:r>
@@ -12776,7 +11928,7 @@
             <a:endParaRPr lang="en-US" sz="3000" dirty="0"/>
           </a:p>
           <a:p>
-            <a:pPr marL="0" indent="0">
+            <a:pPr indent="0" marL="0">
               <a:buNone/>
             </a:pPr>
             <a:r>
@@ -12796,14 +11948,14 @@
       </p:sp>
       <p:pic>
         <p:nvPicPr>
-          <p:cNvPr id="6" name="Image 0" descr="preencoded.png"/>
+          <p:cNvPr id="6" name="Image 0" descr="preencoded.png">    </p:cNvPr>
           <p:cNvPicPr>
             <a:picLocks noChangeAspect="1"/>
           </p:cNvPicPr>
           <p:nvPr/>
         </p:nvPicPr>
         <p:blipFill>
-          <a:blip r:embed="rId3"/>
+          <a:blip r:embed="rId1"/>
           <a:stretch>
             <a:fillRect/>
           </a:stretch>
@@ -12844,20 +11996,13 @@
             <a:prstDash val="solid"/>
           </a:ln>
           <a:effectLst>
-            <a:outerShdw blurRad="76200" dist="25400" dir="5400000" algn="bl" rotWithShape="0">
+            <a:outerShdw sx="100000" sy="100000" kx="0" ky="0" algn="bl" rotWithShape="0" blurRad="76200" dist="25400" dir="5400000">
               <a:srgbClr val="000000">
                 <a:alpha val="12000"/>
               </a:srgbClr>
             </a:outerShdw>
           </a:effectLst>
         </p:spPr>
-        <p:txBody>
-          <a:bodyPr/>
-          <a:lstStyle/>
-          <a:p>
-            <a:endParaRPr lang="en-BR"/>
-          </a:p>
-        </p:txBody>
       </p:sp>
       <p:sp>
         <p:nvSpPr>
@@ -12880,7 +12025,7 @@
           <a:bodyPr wrap="square" lIns="0" tIns="0" rIns="0" bIns="0" rtlCol="0" anchor="ctr"/>
           <a:lstStyle/>
           <a:p>
-            <a:pPr marL="0" indent="0">
+            <a:pPr indent="0" marL="0">
               <a:buNone/>
             </a:pPr>
             <a:r>
@@ -12897,7 +12042,7 @@
             <a:endParaRPr lang="en-US" sz="3000" dirty="0"/>
           </a:p>
           <a:p>
-            <a:pPr marL="0" indent="0">
+            <a:pPr indent="0" marL="0">
               <a:buNone/>
             </a:pPr>
             <a:r>
@@ -12936,7 +12081,7 @@
           <a:bodyPr wrap="square" lIns="0" tIns="0" rIns="0" bIns="0" rtlCol="0" anchor="ctr"/>
           <a:lstStyle/>
           <a:p>
-            <a:pPr marL="0" indent="0">
+            <a:pPr indent="0" marL="0">
               <a:buNone/>
             </a:pPr>
             <a:r>
@@ -12980,20 +12125,13 @@
             <a:prstDash val="solid"/>
           </a:ln>
           <a:effectLst>
-            <a:outerShdw blurRad="76200" dist="25400" dir="5400000" algn="bl" rotWithShape="0">
+            <a:outerShdw sx="100000" sy="100000" kx="0" ky="0" algn="bl" rotWithShape="0" blurRad="76200" dist="25400" dir="5400000">
               <a:srgbClr val="000000">
                 <a:alpha val="12000"/>
               </a:srgbClr>
             </a:outerShdw>
           </a:effectLst>
         </p:spPr>
-        <p:txBody>
-          <a:bodyPr/>
-          <a:lstStyle/>
-          <a:p>
-            <a:endParaRPr lang="en-BR"/>
-          </a:p>
-        </p:txBody>
       </p:sp>
       <p:sp>
         <p:nvSpPr>
@@ -13016,7 +12154,7 @@
           <a:bodyPr wrap="square" lIns="0" tIns="0" rIns="0" bIns="0" rtlCol="0" anchor="ctr"/>
           <a:lstStyle/>
           <a:p>
-            <a:pPr marL="0" indent="0">
+            <a:pPr indent="0" marL="0">
               <a:buNone/>
             </a:pPr>
             <a:r>
@@ -13033,7 +12171,7 @@
             <a:endParaRPr lang="en-US" sz="3000" dirty="0"/>
           </a:p>
           <a:p>
-            <a:pPr marL="0" indent="0">
+            <a:pPr indent="0" marL="0">
               <a:buNone/>
             </a:pPr>
             <a:r>
@@ -13053,14 +12191,14 @@
       </p:sp>
       <p:pic>
         <p:nvPicPr>
-          <p:cNvPr id="12" name="Image 1" descr="preencoded.png"/>
+          <p:cNvPr id="12" name="Image 1" descr="preencoded.png">    </p:cNvPr>
           <p:cNvPicPr>
             <a:picLocks noChangeAspect="1"/>
           </p:cNvPicPr>
           <p:nvPr/>
         </p:nvPicPr>
         <p:blipFill>
-          <a:blip r:embed="rId3"/>
+          <a:blip r:embed="rId2"/>
           <a:stretch>
             <a:fillRect/>
           </a:stretch>
@@ -13101,20 +12239,13 @@
             <a:prstDash val="solid"/>
           </a:ln>
           <a:effectLst>
-            <a:outerShdw blurRad="76200" dist="25400" dir="5400000" algn="bl" rotWithShape="0">
+            <a:outerShdw sx="100000" sy="100000" kx="0" ky="0" algn="bl" rotWithShape="0" blurRad="76200" dist="25400" dir="5400000">
               <a:srgbClr val="000000">
                 <a:alpha val="12000"/>
               </a:srgbClr>
             </a:outerShdw>
           </a:effectLst>
         </p:spPr>
-        <p:txBody>
-          <a:bodyPr/>
-          <a:lstStyle/>
-          <a:p>
-            <a:endParaRPr lang="en-BR"/>
-          </a:p>
-        </p:txBody>
       </p:sp>
       <p:sp>
         <p:nvSpPr>
@@ -13137,7 +12268,7 @@
           <a:bodyPr wrap="square" lIns="0" tIns="0" rIns="0" bIns="0" rtlCol="0" anchor="ctr"/>
           <a:lstStyle/>
           <a:p>
-            <a:pPr marL="0" indent="0">
+            <a:pPr indent="0" marL="0">
               <a:buNone/>
             </a:pPr>
             <a:r>
@@ -13149,12 +12280,12 @@
                 <a:ea typeface="Cambria" pitchFamily="34" charset="-122"/>
                 <a:cs typeface="Cambria" pitchFamily="34" charset="-120"/>
               </a:rPr>
-              <a:t>0,80</a:t>
+              <a:t>0,77</a:t>
             </a:r>
             <a:endParaRPr lang="en-US" sz="3000" dirty="0"/>
           </a:p>
           <a:p>
-            <a:pPr marL="0" indent="0">
+            <a:pPr indent="0" marL="0">
               <a:buNone/>
             </a:pPr>
             <a:r>
@@ -13166,7 +12297,7 @@
                 <a:ea typeface="Calibri" pitchFamily="34" charset="-122"/>
                 <a:cs typeface="Calibri" pitchFamily="34" charset="-120"/>
               </a:rPr>
-              <a:t>com taxonomia D&amp;O + juiz semântico</a:t>
+              <a:t>média de 3 runs (pior 0,70), taxonomia + juiz</a:t>
             </a:r>
             <a:endParaRPr lang="en-US" sz="3000" dirty="0"/>
           </a:p>
@@ -13193,7 +12324,7 @@
           <a:bodyPr wrap="square" lIns="0" tIns="0" rIns="0" bIns="0" rtlCol="0" anchor="ctr"/>
           <a:lstStyle/>
           <a:p>
-            <a:pPr marL="0" indent="0">
+            <a:pPr indent="0" marL="0">
               <a:buNone/>
             </a:pPr>
             <a:r>
@@ -13237,20 +12368,13 @@
             <a:prstDash val="solid"/>
           </a:ln>
           <a:effectLst>
-            <a:outerShdw blurRad="76200" dist="25400" dir="5400000" algn="bl" rotWithShape="0">
+            <a:outerShdw sx="100000" sy="100000" kx="0" ky="0" algn="bl" rotWithShape="0" blurRad="76200" dist="25400" dir="5400000">
               <a:srgbClr val="000000">
                 <a:alpha val="12000"/>
               </a:srgbClr>
             </a:outerShdw>
           </a:effectLst>
         </p:spPr>
-        <p:txBody>
-          <a:bodyPr/>
-          <a:lstStyle/>
-          <a:p>
-            <a:endParaRPr lang="en-BR"/>
-          </a:p>
-        </p:txBody>
       </p:sp>
       <p:sp>
         <p:nvSpPr>
@@ -13273,7 +12397,7 @@
           <a:bodyPr wrap="square" lIns="0" tIns="0" rIns="0" bIns="0" rtlCol="0" anchor="ctr"/>
           <a:lstStyle/>
           <a:p>
-            <a:pPr marL="0" indent="0">
+            <a:pPr indent="0" marL="0">
               <a:buNone/>
             </a:pPr>
             <a:r>
@@ -13290,7 +12414,7 @@
             <a:endParaRPr lang="en-US" sz="3000" dirty="0"/>
           </a:p>
           <a:p>
-            <a:pPr marL="0" indent="0">
+            <a:pPr indent="0" marL="0">
               <a:buNone/>
             </a:pPr>
             <a:r>
@@ -13310,7 +12434,7 @@
       </p:sp>
       <p:pic>
         <p:nvPicPr>
-          <p:cNvPr id="18" name="Image 2" descr="preencoded.png"/>
+          <p:cNvPr id="18" name="Image 2" descr="preencoded.png">    </p:cNvPr>
           <p:cNvPicPr>
             <a:picLocks noChangeAspect="1"/>
           </p:cNvPicPr>
@@ -13358,20 +12482,13 @@
             <a:prstDash val="solid"/>
           </a:ln>
           <a:effectLst>
-            <a:outerShdw blurRad="76200" dist="25400" dir="5400000" algn="bl" rotWithShape="0">
+            <a:outerShdw sx="100000" sy="100000" kx="0" ky="0" algn="bl" rotWithShape="0" blurRad="76200" dist="25400" dir="5400000">
               <a:srgbClr val="000000">
                 <a:alpha val="12000"/>
               </a:srgbClr>
             </a:outerShdw>
           </a:effectLst>
         </p:spPr>
-        <p:txBody>
-          <a:bodyPr/>
-          <a:lstStyle/>
-          <a:p>
-            <a:endParaRPr lang="en-BR"/>
-          </a:p>
-        </p:txBody>
       </p:sp>
       <p:sp>
         <p:nvSpPr>
@@ -13394,7 +12511,7 @@
           <a:bodyPr wrap="square" lIns="0" tIns="0" rIns="0" bIns="0" rtlCol="0" anchor="ctr"/>
           <a:lstStyle/>
           <a:p>
-            <a:pPr marL="0" indent="0">
+            <a:pPr indent="0" marL="0">
               <a:buNone/>
             </a:pPr>
             <a:r>
@@ -13411,7 +12528,7 @@
             <a:endParaRPr lang="en-US" sz="3000" dirty="0"/>
           </a:p>
           <a:p>
-            <a:pPr marL="0" indent="0">
+            <a:pPr indent="0" marL="0">
               <a:buNone/>
             </a:pPr>
             <a:r>
@@ -13450,7 +12567,7 @@
           <a:bodyPr wrap="square" lIns="0" tIns="0" rIns="0" bIns="0" rtlCol="0" anchor="ctr"/>
           <a:lstStyle/>
           <a:p>
-            <a:pPr marL="0" indent="0">
+            <a:pPr indent="0" marL="0">
               <a:buNone/>
             </a:pPr>
             <a:r>
@@ -13489,7 +12606,7 @@
           <a:bodyPr wrap="square" lIns="0" tIns="0" rIns="0" bIns="0" rtlCol="0" anchor="ctr"/>
           <a:lstStyle/>
           <a:p>
-            <a:pPr marL="0" indent="0" algn="r">
+            <a:pPr algn="r" indent="0" marL="0">
               <a:buNone/>
             </a:pPr>
             <a:r>
@@ -13808,319 +12925,4 @@
     </a:ext>
   </a:extLst>
 </a:theme>
-</file>
-
-<file path=ppt/theme/theme2.xml><?xml version="1.0" encoding="utf-8"?>
-<a:theme xmlns:a="http://schemas.openxmlformats.org/drawingml/2006/main" name="Office Theme">
-  <a:themeElements>
-    <a:clrScheme name="Office">
-      <a:dk1>
-        <a:sysClr val="windowText" lastClr="000000"/>
-      </a:dk1>
-      <a:lt1>
-        <a:sysClr val="window" lastClr="FFFFFF"/>
-      </a:lt1>
-      <a:dk2>
-        <a:srgbClr val="0E2841"/>
-      </a:dk2>
-      <a:lt2>
-        <a:srgbClr val="E8E8E8"/>
-      </a:lt2>
-      <a:accent1>
-        <a:srgbClr val="156082"/>
-      </a:accent1>
-      <a:accent2>
-        <a:srgbClr val="E97132"/>
-      </a:accent2>
-      <a:accent3>
-        <a:srgbClr val="196B24"/>
-      </a:accent3>
-      <a:accent4>
-        <a:srgbClr val="0F9ED5"/>
-      </a:accent4>
-      <a:accent5>
-        <a:srgbClr val="A02B93"/>
-      </a:accent5>
-      <a:accent6>
-        <a:srgbClr val="4EA72E"/>
-      </a:accent6>
-      <a:hlink>
-        <a:srgbClr val="467886"/>
-      </a:hlink>
-      <a:folHlink>
-        <a:srgbClr val="96607D"/>
-      </a:folHlink>
-    </a:clrScheme>
-    <a:fontScheme name="Office">
-      <a:majorFont>
-        <a:latin typeface="Aptos Display" panose="02110004020202020204"/>
-        <a:ea typeface=""/>
-        <a:cs typeface=""/>
-        <a:font script="Jpan" typeface="游ゴシック Light"/>
-        <a:font script="Hang" typeface="맑은 고딕"/>
-        <a:font script="Hans" typeface="等线 Light"/>
-        <a:font script="Hant" typeface="新細明體"/>
-        <a:font script="Arab" typeface="Times New Roman"/>
-        <a:font script="Hebr" typeface="Times New Roman"/>
-        <a:font script="Thai" typeface="Angsana New"/>
-        <a:font script="Ethi" typeface="Nyala"/>
-        <a:font script="Beng" typeface="Vrinda"/>
-        <a:font script="Gujr" typeface="Shruti"/>
-        <a:font script="Khmr" typeface="MoolBoran"/>
-        <a:font script="Knda" typeface="Tunga"/>
-        <a:font script="Guru" typeface="Raavi"/>
-        <a:font script="Cans" typeface="Euphemia"/>
-        <a:font script="Cher" typeface="Plantagenet Cherokee"/>
-        <a:font script="Yiii" typeface="Microsoft Yi Baiti"/>
-        <a:font script="Tibt" typeface="Microsoft Himalaya"/>
-        <a:font script="Thaa" typeface="MV Boli"/>
-        <a:font script="Deva" typeface="Mangal"/>
-        <a:font script="Telu" typeface="Gautami"/>
-        <a:font script="Taml" typeface="Latha"/>
-        <a:font script="Syrc" typeface="Estrangelo Edessa"/>
-        <a:font script="Orya" typeface="Kalinga"/>
-        <a:font script="Mlym" typeface="Kartika"/>
-        <a:font script="Laoo" typeface="DokChampa"/>
-        <a:font script="Sinh" typeface="Iskoola Pota"/>
-        <a:font script="Mong" typeface="Mongolian Baiti"/>
-        <a:font script="Viet" typeface="Times New Roman"/>
-        <a:font script="Uigh" typeface="Microsoft Uighur"/>
-        <a:font script="Geor" typeface="Sylfaen"/>
-        <a:font script="Armn" typeface="Arial"/>
-        <a:font script="Bugi" typeface="Leelawadee UI"/>
-        <a:font script="Bopo" typeface="Microsoft JhengHei"/>
-        <a:font script="Java" typeface="Javanese Text"/>
-        <a:font script="Lisu" typeface="Segoe UI"/>
-        <a:font script="Mymr" typeface="Myanmar Text"/>
-        <a:font script="Nkoo" typeface="Ebrima"/>
-        <a:font script="Olck" typeface="Nirmala UI"/>
-        <a:font script="Osma" typeface="Ebrima"/>
-        <a:font script="Phag" typeface="Phagspa"/>
-        <a:font script="Syrn" typeface="Estrangelo Edessa"/>
-        <a:font script="Syrj" typeface="Estrangelo Edessa"/>
-        <a:font script="Syre" typeface="Estrangelo Edessa"/>
-        <a:font script="Sora" typeface="Nirmala UI"/>
-        <a:font script="Tale" typeface="Microsoft Tai Le"/>
-        <a:font script="Talu" typeface="Microsoft New Tai Lue"/>
-        <a:font script="Tfng" typeface="Ebrima"/>
-      </a:majorFont>
-      <a:minorFont>
-        <a:latin typeface="Aptos" panose="02110004020202020204"/>
-        <a:ea typeface=""/>
-        <a:cs typeface=""/>
-        <a:font script="Jpan" typeface="游ゴシック"/>
-        <a:font script="Hang" typeface="맑은 고딕"/>
-        <a:font script="Hans" typeface="等线"/>
-        <a:font script="Hant" typeface="新細明體"/>
-        <a:font script="Arab" typeface="Arial"/>
-        <a:font script="Hebr" typeface="Arial"/>
-        <a:font script="Thai" typeface="Cordia New"/>
-        <a:font script="Ethi" typeface="Nyala"/>
-        <a:font script="Beng" typeface="Vrinda"/>
-        <a:font script="Gujr" typeface="Shruti"/>
-        <a:font script="Khmr" typeface="DaunPenh"/>
-        <a:font script="Knda" typeface="Tunga"/>
-        <a:font script="Guru" typeface="Raavi"/>
-        <a:font script="Cans" typeface="Euphemia"/>
-        <a:font script="Cher" typeface="Plantagenet Cherokee"/>
-        <a:font script="Yiii" typeface="Microsoft Yi Baiti"/>
-        <a:font script="Tibt" typeface="Microsoft Himalaya"/>
-        <a:font script="Thaa" typeface="MV Boli"/>
-        <a:font script="Deva" typeface="Mangal"/>
-        <a:font script="Telu" typeface="Gautami"/>
-        <a:font script="Taml" typeface="Latha"/>
-        <a:font script="Syrc" typeface="Estrangelo Edessa"/>
-        <a:font script="Orya" typeface="Kalinga"/>
-        <a:font script="Mlym" typeface="Kartika"/>
-        <a:font script="Laoo" typeface="DokChampa"/>
-        <a:font script="Sinh" typeface="Iskoola Pota"/>
-        <a:font script="Mong" typeface="Mongolian Baiti"/>
-        <a:font script="Viet" typeface="Arial"/>
-        <a:font script="Uigh" typeface="Microsoft Uighur"/>
-        <a:font script="Geor" typeface="Sylfaen"/>
-        <a:font script="Armn" typeface="Arial"/>
-        <a:font script="Bugi" typeface="Leelawadee UI"/>
-        <a:font script="Bopo" typeface="Microsoft JhengHei"/>
-        <a:font script="Java" typeface="Javanese Text"/>
-        <a:font script="Lisu" typeface="Segoe UI"/>
-        <a:font script="Mymr" typeface="Myanmar Text"/>
-        <a:font script="Nkoo" typeface="Ebrima"/>
-        <a:font script="Olck" typeface="Nirmala UI"/>
-        <a:font script="Osma" typeface="Ebrima"/>
-        <a:font script="Phag" typeface="Phagspa"/>
-        <a:font script="Syrn" typeface="Estrangelo Edessa"/>
-        <a:font script="Syrj" typeface="Estrangelo Edessa"/>
-        <a:font script="Syre" typeface="Estrangelo Edessa"/>
-        <a:font script="Sora" typeface="Nirmala UI"/>
-        <a:font script="Tale" typeface="Microsoft Tai Le"/>
-        <a:font script="Talu" typeface="Microsoft New Tai Lue"/>
-        <a:font script="Tfng" typeface="Ebrima"/>
-      </a:minorFont>
-    </a:fontScheme>
-    <a:fmtScheme name="Office">
-      <a:fillStyleLst>
-        <a:solidFill>
-          <a:schemeClr val="phClr"/>
-        </a:solidFill>
-        <a:gradFill rotWithShape="1">
-          <a:gsLst>
-            <a:gs pos="0">
-              <a:schemeClr val="phClr">
-                <a:lumMod val="110000"/>
-                <a:satMod val="105000"/>
-                <a:tint val="67000"/>
-              </a:schemeClr>
-            </a:gs>
-            <a:gs pos="50000">
-              <a:schemeClr val="phClr">
-                <a:lumMod val="105000"/>
-                <a:satMod val="103000"/>
-                <a:tint val="73000"/>
-              </a:schemeClr>
-            </a:gs>
-            <a:gs pos="100000">
-              <a:schemeClr val="phClr">
-                <a:lumMod val="105000"/>
-                <a:satMod val="109000"/>
-                <a:tint val="81000"/>
-              </a:schemeClr>
-            </a:gs>
-          </a:gsLst>
-          <a:lin ang="5400000" scaled="0"/>
-        </a:gradFill>
-        <a:gradFill rotWithShape="1">
-          <a:gsLst>
-            <a:gs pos="0">
-              <a:schemeClr val="phClr">
-                <a:satMod val="103000"/>
-                <a:lumMod val="102000"/>
-                <a:tint val="94000"/>
-              </a:schemeClr>
-            </a:gs>
-            <a:gs pos="50000">
-              <a:schemeClr val="phClr">
-                <a:satMod val="110000"/>
-                <a:lumMod val="100000"/>
-                <a:shade val="100000"/>
-              </a:schemeClr>
-            </a:gs>
-            <a:gs pos="100000">
-              <a:schemeClr val="phClr">
-                <a:lumMod val="99000"/>
-                <a:satMod val="120000"/>
-                <a:shade val="78000"/>
-              </a:schemeClr>
-            </a:gs>
-          </a:gsLst>
-          <a:lin ang="5400000" scaled="0"/>
-        </a:gradFill>
-      </a:fillStyleLst>
-      <a:lnStyleLst>
-        <a:ln w="12700" cap="flat" cmpd="sng" algn="ctr">
-          <a:solidFill>
-            <a:schemeClr val="phClr"/>
-          </a:solidFill>
-          <a:prstDash val="solid"/>
-          <a:miter lim="800000"/>
-        </a:ln>
-        <a:ln w="19050" cap="flat" cmpd="sng" algn="ctr">
-          <a:solidFill>
-            <a:schemeClr val="phClr"/>
-          </a:solidFill>
-          <a:prstDash val="solid"/>
-          <a:miter lim="800000"/>
-        </a:ln>
-        <a:ln w="25400" cap="flat" cmpd="sng" algn="ctr">
-          <a:solidFill>
-            <a:schemeClr val="phClr"/>
-          </a:solidFill>
-          <a:prstDash val="solid"/>
-          <a:miter lim="800000"/>
-        </a:ln>
-      </a:lnStyleLst>
-      <a:effectStyleLst>
-        <a:effectStyle>
-          <a:effectLst/>
-        </a:effectStyle>
-        <a:effectStyle>
-          <a:effectLst/>
-        </a:effectStyle>
-        <a:effectStyle>
-          <a:effectLst>
-            <a:outerShdw blurRad="57150" dist="19050" dir="5400000" algn="ctr" rotWithShape="0">
-              <a:srgbClr val="000000">
-                <a:alpha val="63000"/>
-              </a:srgbClr>
-            </a:outerShdw>
-          </a:effectLst>
-        </a:effectStyle>
-      </a:effectStyleLst>
-      <a:bgFillStyleLst>
-        <a:solidFill>
-          <a:schemeClr val="phClr"/>
-        </a:solidFill>
-        <a:solidFill>
-          <a:schemeClr val="phClr">
-            <a:tint val="95000"/>
-            <a:satMod val="170000"/>
-          </a:schemeClr>
-        </a:solidFill>
-        <a:gradFill rotWithShape="1">
-          <a:gsLst>
-            <a:gs pos="0">
-              <a:schemeClr val="phClr">
-                <a:tint val="93000"/>
-                <a:satMod val="150000"/>
-                <a:shade val="98000"/>
-                <a:lumMod val="102000"/>
-              </a:schemeClr>
-            </a:gs>
-            <a:gs pos="50000">
-              <a:schemeClr val="phClr">
-                <a:tint val="98000"/>
-                <a:satMod val="130000"/>
-                <a:shade val="90000"/>
-                <a:lumMod val="103000"/>
-              </a:schemeClr>
-            </a:gs>
-            <a:gs pos="100000">
-              <a:schemeClr val="phClr">
-                <a:shade val="63000"/>
-                <a:satMod val="120000"/>
-              </a:schemeClr>
-            </a:gs>
-          </a:gsLst>
-          <a:lin ang="5400000" scaled="0"/>
-        </a:gradFill>
-      </a:bgFillStyleLst>
-    </a:fmtScheme>
-  </a:themeElements>
-  <a:objectDefaults>
-    <a:lnDef>
-      <a:spPr/>
-      <a:bodyPr/>
-      <a:lstStyle/>
-      <a:style>
-        <a:lnRef idx="2">
-          <a:schemeClr val="accent1"/>
-        </a:lnRef>
-        <a:fillRef idx="0">
-          <a:schemeClr val="accent1"/>
-        </a:fillRef>
-        <a:effectRef idx="1">
-          <a:schemeClr val="accent1"/>
-        </a:effectRef>
-        <a:fontRef idx="minor">
-          <a:schemeClr val="tx1"/>
-        </a:fontRef>
-      </a:style>
-    </a:lnDef>
-  </a:objectDefaults>
-  <a:extraClrSchemeLst/>
-  <a:extLst>
-    <a:ext uri="{05A4C25C-085E-4340-85A3-A5531E510DB2}">
-      <thm15:themeFamily xmlns:thm15="http://schemas.microsoft.com/office/thememl/2012/main" name="Office Theme" id="{2E142A2C-CD16-42D6-873A-C26D2A0506FA}" vid="{1BDDFF52-6CD6-40A5-AB3C-68EB2F1E4D0A}"/>
-    </a:ext>
-  </a:extLst>
-</a:theme>
 </file>